--- a/doc/memoria_proyecto/Memoria_Proyecto.pptx
+++ b/doc/memoria_proyecto/Memoria_Proyecto.pptx
@@ -219,7 +219,7 @@
           <a:p>
             <a:fld id="{44C7761D-94E6-4E59-97F6-B29C25850D68}" type="datetimeFigureOut">
               <a:rPr lang="es-ES" smtClean="0"/>
-              <a:t>11/07/2026</a:t>
+              <a:t>12/07/2026</a:t>
             </a:fld>
             <a:endParaRPr lang="es-ES"/>
           </a:p>
@@ -1049,7 +1049,7 @@
           <a:p>
             <a:fld id="{5BCAD085-E8A6-8845-BD4E-CB4CCA059FC4}" type="datetimeFigureOut">
               <a:rPr lang="en-US" smtClean="0"/>
-              <a:t>7/11/2026</a:t>
+              <a:t>7/12/2026</a:t>
             </a:fld>
             <a:endParaRPr lang="en-US"/>
           </a:p>
@@ -1217,7 +1217,7 @@
           <a:p>
             <a:fld id="{5BCAD085-E8A6-8845-BD4E-CB4CCA059FC4}" type="datetimeFigureOut">
               <a:rPr lang="en-US" smtClean="0"/>
-              <a:t>7/11/2026</a:t>
+              <a:t>7/12/2026</a:t>
             </a:fld>
             <a:endParaRPr lang="en-US"/>
           </a:p>
@@ -1395,7 +1395,7 @@
           <a:p>
             <a:fld id="{5BCAD085-E8A6-8845-BD4E-CB4CCA059FC4}" type="datetimeFigureOut">
               <a:rPr lang="en-US" smtClean="0"/>
-              <a:t>7/11/2026</a:t>
+              <a:t>7/12/2026</a:t>
             </a:fld>
             <a:endParaRPr lang="en-US"/>
           </a:p>
@@ -1563,7 +1563,7 @@
           <a:p>
             <a:fld id="{5BCAD085-E8A6-8845-BD4E-CB4CCA059FC4}" type="datetimeFigureOut">
               <a:rPr lang="en-US" smtClean="0"/>
-              <a:t>7/11/2026</a:t>
+              <a:t>7/12/2026</a:t>
             </a:fld>
             <a:endParaRPr lang="en-US"/>
           </a:p>
@@ -1808,7 +1808,7 @@
           <a:p>
             <a:fld id="{5BCAD085-E8A6-8845-BD4E-CB4CCA059FC4}" type="datetimeFigureOut">
               <a:rPr lang="en-US" smtClean="0"/>
-              <a:t>7/11/2026</a:t>
+              <a:t>7/12/2026</a:t>
             </a:fld>
             <a:endParaRPr lang="en-US"/>
           </a:p>
@@ -2093,7 +2093,7 @@
           <a:p>
             <a:fld id="{5BCAD085-E8A6-8845-BD4E-CB4CCA059FC4}" type="datetimeFigureOut">
               <a:rPr lang="en-US" smtClean="0"/>
-              <a:t>7/11/2026</a:t>
+              <a:t>7/12/2026</a:t>
             </a:fld>
             <a:endParaRPr lang="en-US"/>
           </a:p>
@@ -2512,7 +2512,7 @@
           <a:p>
             <a:fld id="{5BCAD085-E8A6-8845-BD4E-CB4CCA059FC4}" type="datetimeFigureOut">
               <a:rPr lang="en-US" smtClean="0"/>
-              <a:t>7/11/2026</a:t>
+              <a:t>7/12/2026</a:t>
             </a:fld>
             <a:endParaRPr lang="en-US"/>
           </a:p>
@@ -2629,7 +2629,7 @@
           <a:p>
             <a:fld id="{5BCAD085-E8A6-8845-BD4E-CB4CCA059FC4}" type="datetimeFigureOut">
               <a:rPr lang="en-US" smtClean="0"/>
-              <a:t>7/11/2026</a:t>
+              <a:t>7/12/2026</a:t>
             </a:fld>
             <a:endParaRPr lang="en-US"/>
           </a:p>
@@ -2724,7 +2724,7 @@
           <a:p>
             <a:fld id="{5BCAD085-E8A6-8845-BD4E-CB4CCA059FC4}" type="datetimeFigureOut">
               <a:rPr lang="en-US" smtClean="0"/>
-              <a:t>7/11/2026</a:t>
+              <a:t>7/12/2026</a:t>
             </a:fld>
             <a:endParaRPr lang="en-US"/>
           </a:p>
@@ -2999,7 +2999,7 @@
           <a:p>
             <a:fld id="{5BCAD085-E8A6-8845-BD4E-CB4CCA059FC4}" type="datetimeFigureOut">
               <a:rPr lang="en-US" smtClean="0"/>
-              <a:t>7/11/2026</a:t>
+              <a:t>7/12/2026</a:t>
             </a:fld>
             <a:endParaRPr lang="en-US"/>
           </a:p>
@@ -3251,7 +3251,7 @@
           <a:p>
             <a:fld id="{5BCAD085-E8A6-8845-BD4E-CB4CCA059FC4}" type="datetimeFigureOut">
               <a:rPr lang="en-US" smtClean="0"/>
-              <a:t>7/11/2026</a:t>
+              <a:t>7/12/2026</a:t>
             </a:fld>
             <a:endParaRPr lang="en-US"/>
           </a:p>
@@ -3462,7 +3462,7 @@
           <a:p>
             <a:fld id="{5BCAD085-E8A6-8845-BD4E-CB4CCA059FC4}" type="datetimeFigureOut">
               <a:rPr lang="en-US" smtClean="0"/>
-              <a:t>7/11/2026</a:t>
+              <a:t>7/12/2026</a:t>
             </a:fld>
             <a:endParaRPr lang="en-US"/>
           </a:p>
@@ -19045,13 +19045,13 @@
           <p:nvPr>
             <p:extLst>
               <p:ext uri="{D42A27DB-BD31-4B8C-83A1-F6EECF244321}">
-                <p14:modId xmlns:p14="http://schemas.microsoft.com/office/powerpoint/2010/main" val="3874749225"/>
+                <p14:modId xmlns:p14="http://schemas.microsoft.com/office/powerpoint/2010/main" val="3921054368"/>
               </p:ext>
             </p:extLst>
           </p:nvPr>
         </p:nvGraphicFramePr>
         <p:xfrm>
-          <a:off x="457200" y="1234440"/>
+          <a:off x="457200" y="1170428"/>
           <a:ext cx="5577840" cy="1097280"/>
         </p:xfrm>
         <a:graphic>
@@ -19539,8 +19539,8 @@
         </p:nvSpPr>
         <p:spPr>
           <a:xfrm>
-            <a:off x="6400800" y="1234440"/>
-            <a:ext cx="5303520" cy="1828800"/>
+            <a:off x="6400800" y="1147424"/>
+            <a:ext cx="5303520" cy="2442497"/>
           </a:xfrm>
           <a:prstGeom prst="rect">
             <a:avLst/>
@@ -19578,75 +19578,12 @@
           <a:lstStyle/>
           <a:p>
             <a:pPr algn="ctr"/>
-            <a:r>
-              <a:rPr sz="1200">
-                <a:solidFill>
-                  <a:srgbClr val="D6E2F0"/>
-                </a:solidFill>
-                <a:latin typeface="Consolas"/>
-              </a:rPr>
-              <a:t>        Internet</a:t>
-            </a:r>
-          </a:p>
-          <a:p>
-            <a:pPr algn="ctr"/>
-            <a:r>
-              <a:rPr sz="1200">
-                <a:solidFill>
-                  <a:srgbClr val="D6E2F0"/>
-                </a:solidFill>
-                <a:latin typeface="Consolas"/>
-              </a:rPr>
-              <a:t>           |</a:t>
-            </a:r>
-          </a:p>
-          <a:p>
-            <a:pPr algn="ctr"/>
-            <a:r>
-              <a:rPr sz="1200">
-                <a:solidFill>
-                  <a:srgbClr val="D6E2F0"/>
-                </a:solidFill>
-                <a:latin typeface="Consolas"/>
-              </a:rPr>
-              <a:t>   nginx (reverse proxy) + UI</a:t>
-            </a:r>
-          </a:p>
-          <a:p>
-            <a:pPr algn="ctr"/>
-            <a:r>
-              <a:rPr sz="1200">
-                <a:solidFill>
-                  <a:srgbClr val="D6E2F0"/>
-                </a:solidFill>
-                <a:latin typeface="Consolas"/>
-              </a:rPr>
-              <a:t>           |  enruta hacia</a:t>
-            </a:r>
-          </a:p>
-          <a:p>
-            <a:pPr algn="ctr"/>
-            <a:r>
-              <a:rPr sz="1200">
-                <a:solidFill>
-                  <a:srgbClr val="D6E2F0"/>
-                </a:solidFill>
-                <a:latin typeface="Consolas"/>
-              </a:rPr>
-              <a:t>  +----+----+----+----+----+</a:t>
-            </a:r>
-          </a:p>
-          <a:p>
-            <a:pPr algn="ctr"/>
-            <a:r>
-              <a:rPr sz="1200">
-                <a:solidFill>
-                  <a:srgbClr val="D6E2F0"/>
-                </a:solidFill>
-                <a:latin typeface="Consolas"/>
-              </a:rPr>
-              <a:t> BFF Keycloak Postgres S3 Worker</a:t>
-            </a:r>
+            <a:endParaRPr sz="1200" dirty="0">
+              <a:solidFill>
+                <a:srgbClr val="D6E2F0"/>
+              </a:solidFill>
+              <a:latin typeface="Consolas"/>
+            </a:endParaRPr>
           </a:p>
         </p:txBody>
       </p:sp>
@@ -19658,8 +19595,8 @@
         </p:nvSpPr>
         <p:spPr>
           <a:xfrm>
-            <a:off x="457200" y="3246121"/>
-            <a:ext cx="11247120" cy="3509521"/>
+            <a:off x="457200" y="3698467"/>
+            <a:ext cx="11247120" cy="3056295"/>
           </a:xfrm>
           <a:prstGeom prst="roundRect">
             <a:avLst/>
@@ -19863,7 +19800,25 @@
                 </a:solidFill>
                 <a:latin typeface="Aptos Light" panose="020B0004020202020204" pitchFamily="34" charset="0"/>
               </a:rPr>
-              <a:t> un </a:t>
+              <a:t> un nginx</a:t>
+            </a:r>
+            <a:r>
+              <a:rPr lang="es-ES" sz="1600" dirty="0">
+                <a:solidFill>
+                  <a:srgbClr val="444A54"/>
+                </a:solidFill>
+                <a:latin typeface="Aptos Light" panose="020B0004020202020204" pitchFamily="34" charset="0"/>
+              </a:rPr>
+              <a:t> y una red privada</a:t>
+            </a:r>
+            <a:r>
+              <a:rPr sz="1600" dirty="0">
+                <a:solidFill>
+                  <a:srgbClr val="444A54"/>
+                </a:solidFill>
+                <a:latin typeface="Aptos Light" panose="020B0004020202020204" pitchFamily="34" charset="0"/>
+              </a:rPr>
+              <a:t>, </a:t>
             </a:r>
             <a:r>
               <a:rPr sz="1600" dirty="0" err="1">
@@ -19872,7 +19827,7 @@
                 </a:solidFill>
                 <a:latin typeface="Aptos Light" panose="020B0004020202020204" pitchFamily="34" charset="0"/>
               </a:rPr>
-              <a:t>mismo</a:t>
+              <a:t>en</a:t>
             </a:r>
             <a:r>
               <a:rPr sz="1600" dirty="0">
@@ -19881,7 +19836,16 @@
                 </a:solidFill>
                 <a:latin typeface="Aptos Light" panose="020B0004020202020204" pitchFamily="34" charset="0"/>
               </a:rPr>
-              <a:t> nginx, </a:t>
+              <a:t> </a:t>
+            </a:r>
+            <a:r>
+              <a:rPr lang="es-ES" sz="1600" dirty="0">
+                <a:solidFill>
+                  <a:srgbClr val="444A54"/>
+                </a:solidFill>
+                <a:latin typeface="Aptos Light" panose="020B0004020202020204" pitchFamily="34" charset="0"/>
+              </a:rPr>
+              <a:t>DOS </a:t>
             </a:r>
             <a:r>
               <a:rPr sz="1600" dirty="0" err="1">
@@ -19890,25 +19854,16 @@
                 </a:solidFill>
                 <a:latin typeface="Aptos Light" panose="020B0004020202020204" pitchFamily="34" charset="0"/>
               </a:rPr>
-              <a:t>en</a:t>
-            </a:r>
-            <a:r>
-              <a:rPr sz="1600" dirty="0">
-                <a:solidFill>
-                  <a:srgbClr val="444A54"/>
-                </a:solidFill>
-                <a:latin typeface="Aptos Light" panose="020B0004020202020204" pitchFamily="34" charset="0"/>
-              </a:rPr>
-              <a:t> UN </a:t>
-            </a:r>
-            <a:r>
-              <a:rPr sz="1600" dirty="0" err="1">
-                <a:solidFill>
-                  <a:srgbClr val="444A54"/>
-                </a:solidFill>
-                <a:latin typeface="Aptos Light" panose="020B0004020202020204" pitchFamily="34" charset="0"/>
-              </a:rPr>
               <a:t>nodo</a:t>
+            </a:r>
+            <a:r>
+              <a:rPr lang="es-ES" sz="1600" dirty="0">
+                <a:solidFill>
+                  <a:srgbClr val="444A54"/>
+                </a:solidFill>
+                <a:latin typeface="Aptos Light" panose="020B0004020202020204" pitchFamily="34" charset="0"/>
+              </a:rPr>
+              <a:t>s</a:t>
             </a:r>
             <a:r>
               <a:rPr sz="1600" dirty="0">
@@ -20393,7 +20348,43 @@
                 </a:solidFill>
                 <a:latin typeface="Aptos Light" panose="020B0004020202020204" pitchFamily="34" charset="0"/>
               </a:rPr>
-              <a:t>l nginx es hoy un </a:t>
+              <a:t>l nginx</a:t>
+            </a:r>
+            <a:r>
+              <a:rPr lang="es-ES" sz="1600" dirty="0">
+                <a:solidFill>
+                  <a:srgbClr val="444A54"/>
+                </a:solidFill>
+                <a:latin typeface="Aptos Light" panose="020B0004020202020204" pitchFamily="34" charset="0"/>
+              </a:rPr>
+              <a:t> y el host son</a:t>
+            </a:r>
+            <a:r>
+              <a:rPr sz="1600" dirty="0">
+                <a:solidFill>
+                  <a:srgbClr val="444A54"/>
+                </a:solidFill>
+                <a:latin typeface="Aptos Light" panose="020B0004020202020204" pitchFamily="34" charset="0"/>
+              </a:rPr>
+              <a:t> </a:t>
+            </a:r>
+            <a:r>
+              <a:rPr lang="es-ES" sz="1600" dirty="0">
+                <a:solidFill>
+                  <a:srgbClr val="444A54"/>
+                </a:solidFill>
+                <a:latin typeface="Aptos Light" panose="020B0004020202020204" pitchFamily="34" charset="0"/>
+              </a:rPr>
+              <a:t>h</a:t>
+            </a:r>
+            <a:r>
+              <a:rPr sz="1600" dirty="0">
+                <a:solidFill>
+                  <a:srgbClr val="444A54"/>
+                </a:solidFill>
+                <a:latin typeface="Aptos Light" panose="020B0004020202020204" pitchFamily="34" charset="0"/>
+              </a:rPr>
+              <a:t>oy </a:t>
             </a:r>
             <a:r>
               <a:rPr lang="es-ES" sz="1600" b="1" dirty="0">
@@ -20404,7 +20395,7 @@
                 </a:solidFill>
                 <a:latin typeface="Aptos Light" panose="020B0004020202020204" pitchFamily="34" charset="0"/>
               </a:rPr>
-              <a:t>único punto de fallo</a:t>
+              <a:t>únicos puntos de fallo</a:t>
             </a:r>
             <a:r>
               <a:rPr sz="1600" dirty="0">
@@ -20413,7 +20404,16 @@
                 </a:solidFill>
                 <a:latin typeface="Aptos Light" panose="020B0004020202020204" pitchFamily="34" charset="0"/>
               </a:rPr>
-              <a:t>. Pasar de un </a:t>
+              <a:t>. Pasar de </a:t>
+            </a:r>
+            <a:r>
+              <a:rPr lang="es-ES" sz="1600" dirty="0">
+                <a:solidFill>
+                  <a:srgbClr val="444A54"/>
+                </a:solidFill>
+                <a:latin typeface="Aptos Light" panose="020B0004020202020204" pitchFamily="34" charset="0"/>
+              </a:rPr>
+              <a:t>de </a:t>
             </a:r>
             <a:r>
               <a:rPr sz="1600" dirty="0" err="1">
@@ -20423,6 +20423,15 @@
                 <a:latin typeface="Aptos Light" panose="020B0004020202020204" pitchFamily="34" charset="0"/>
               </a:rPr>
               <a:t>nodo</a:t>
+            </a:r>
+            <a:r>
+              <a:rPr lang="es-ES" sz="1600" dirty="0">
+                <a:solidFill>
+                  <a:srgbClr val="444A54"/>
+                </a:solidFill>
+                <a:latin typeface="Aptos Light" panose="020B0004020202020204" pitchFamily="34" charset="0"/>
+              </a:rPr>
+              <a:t>s</a:t>
             </a:r>
             <a:r>
               <a:rPr sz="1600" dirty="0">
@@ -20508,6 +20517,36 @@
           </a:p>
         </p:txBody>
       </p:sp>
+      <p:pic>
+        <p:nvPicPr>
+          <p:cNvPr id="9" name="Imagen 8">
+            <a:extLst>
+              <a:ext uri="{FF2B5EF4-FFF2-40B4-BE49-F238E27FC236}">
+                <a16:creationId xmlns:a16="http://schemas.microsoft.com/office/drawing/2014/main" id="{765D2E68-75C2-ECDB-806B-AD3FBACB6656}"/>
+              </a:ext>
+            </a:extLst>
+          </p:cNvPr>
+          <p:cNvPicPr>
+            <a:picLocks noChangeAspect="1"/>
+          </p:cNvPicPr>
+          <p:nvPr/>
+        </p:nvPicPr>
+        <p:blipFill>
+          <a:blip r:embed="rId3"/>
+          <a:stretch>
+            <a:fillRect/>
+          </a:stretch>
+        </p:blipFill>
+        <p:spPr>
+          <a:xfrm>
+            <a:off x="7848139" y="1234440"/>
+            <a:ext cx="2744153" cy="2259617"/>
+          </a:xfrm>
+          <a:prstGeom prst="rect">
+            <a:avLst/>
+          </a:prstGeom>
+        </p:spPr>
+      </p:pic>
     </p:spTree>
   </p:cSld>
   <p:clrMapOvr>

--- a/doc/memoria_proyecto/Memoria_Proyecto.pptx
+++ b/doc/memoria_proyecto/Memoria_Proyecto.pptx
@@ -5,7 +5,7 @@
     <p:sldMasterId id="2147483648" r:id="rId1"/>
   </p:sldMasterIdLst>
   <p:notesMasterIdLst>
-    <p:notesMasterId r:id="rId14"/>
+    <p:notesMasterId r:id="rId16"/>
   </p:notesMasterIdLst>
   <p:sldIdLst>
     <p:sldId id="256" r:id="rId2"/>
@@ -18,8 +18,10 @@
     <p:sldId id="261" r:id="rId9"/>
     <p:sldId id="262" r:id="rId10"/>
     <p:sldId id="263" r:id="rId11"/>
-    <p:sldId id="264" r:id="rId12"/>
-    <p:sldId id="265" r:id="rId13"/>
+    <p:sldId id="268" r:id="rId12"/>
+    <p:sldId id="264" r:id="rId13"/>
+    <p:sldId id="265" r:id="rId14"/>
+    <p:sldId id="269" r:id="rId15"/>
   </p:sldIdLst>
   <p:sldSz cx="12192000" cy="6858000"/>
   <p:notesSz cx="6858000" cy="9144000"/>
@@ -219,7 +221,7 @@
           <a:p>
             <a:fld id="{44C7761D-94E6-4E59-97F6-B29C25850D68}" type="datetimeFigureOut">
               <a:rPr lang="es-ES" smtClean="0"/>
-              <a:t>12/07/2026</a:t>
+              <a:t>16/07/2026</a:t>
             </a:fld>
             <a:endParaRPr lang="es-ES"/>
           </a:p>
@@ -1049,7 +1051,7 @@
           <a:p>
             <a:fld id="{5BCAD085-E8A6-8845-BD4E-CB4CCA059FC4}" type="datetimeFigureOut">
               <a:rPr lang="en-US" smtClean="0"/>
-              <a:t>7/12/2026</a:t>
+              <a:t>7/16/2026</a:t>
             </a:fld>
             <a:endParaRPr lang="en-US"/>
           </a:p>
@@ -1217,7 +1219,7 @@
           <a:p>
             <a:fld id="{5BCAD085-E8A6-8845-BD4E-CB4CCA059FC4}" type="datetimeFigureOut">
               <a:rPr lang="en-US" smtClean="0"/>
-              <a:t>7/12/2026</a:t>
+              <a:t>7/16/2026</a:t>
             </a:fld>
             <a:endParaRPr lang="en-US"/>
           </a:p>
@@ -1395,7 +1397,7 @@
           <a:p>
             <a:fld id="{5BCAD085-E8A6-8845-BD4E-CB4CCA059FC4}" type="datetimeFigureOut">
               <a:rPr lang="en-US" smtClean="0"/>
-              <a:t>7/12/2026</a:t>
+              <a:t>7/16/2026</a:t>
             </a:fld>
             <a:endParaRPr lang="en-US"/>
           </a:p>
@@ -1563,7 +1565,7 @@
           <a:p>
             <a:fld id="{5BCAD085-E8A6-8845-BD4E-CB4CCA059FC4}" type="datetimeFigureOut">
               <a:rPr lang="en-US" smtClean="0"/>
-              <a:t>7/12/2026</a:t>
+              <a:t>7/16/2026</a:t>
             </a:fld>
             <a:endParaRPr lang="en-US"/>
           </a:p>
@@ -1808,7 +1810,7 @@
           <a:p>
             <a:fld id="{5BCAD085-E8A6-8845-BD4E-CB4CCA059FC4}" type="datetimeFigureOut">
               <a:rPr lang="en-US" smtClean="0"/>
-              <a:t>7/12/2026</a:t>
+              <a:t>7/16/2026</a:t>
             </a:fld>
             <a:endParaRPr lang="en-US"/>
           </a:p>
@@ -2093,7 +2095,7 @@
           <a:p>
             <a:fld id="{5BCAD085-E8A6-8845-BD4E-CB4CCA059FC4}" type="datetimeFigureOut">
               <a:rPr lang="en-US" smtClean="0"/>
-              <a:t>7/12/2026</a:t>
+              <a:t>7/16/2026</a:t>
             </a:fld>
             <a:endParaRPr lang="en-US"/>
           </a:p>
@@ -2512,7 +2514,7 @@
           <a:p>
             <a:fld id="{5BCAD085-E8A6-8845-BD4E-CB4CCA059FC4}" type="datetimeFigureOut">
               <a:rPr lang="en-US" smtClean="0"/>
-              <a:t>7/12/2026</a:t>
+              <a:t>7/16/2026</a:t>
             </a:fld>
             <a:endParaRPr lang="en-US"/>
           </a:p>
@@ -2629,7 +2631,7 @@
           <a:p>
             <a:fld id="{5BCAD085-E8A6-8845-BD4E-CB4CCA059FC4}" type="datetimeFigureOut">
               <a:rPr lang="en-US" smtClean="0"/>
-              <a:t>7/12/2026</a:t>
+              <a:t>7/16/2026</a:t>
             </a:fld>
             <a:endParaRPr lang="en-US"/>
           </a:p>
@@ -2724,7 +2726,7 @@
           <a:p>
             <a:fld id="{5BCAD085-E8A6-8845-BD4E-CB4CCA059FC4}" type="datetimeFigureOut">
               <a:rPr lang="en-US" smtClean="0"/>
-              <a:t>7/12/2026</a:t>
+              <a:t>7/16/2026</a:t>
             </a:fld>
             <a:endParaRPr lang="en-US"/>
           </a:p>
@@ -2999,7 +3001,7 @@
           <a:p>
             <a:fld id="{5BCAD085-E8A6-8845-BD4E-CB4CCA059FC4}" type="datetimeFigureOut">
               <a:rPr lang="en-US" smtClean="0"/>
-              <a:t>7/12/2026</a:t>
+              <a:t>7/16/2026</a:t>
             </a:fld>
             <a:endParaRPr lang="en-US"/>
           </a:p>
@@ -3251,7 +3253,7 @@
           <a:p>
             <a:fld id="{5BCAD085-E8A6-8845-BD4E-CB4CCA059FC4}" type="datetimeFigureOut">
               <a:rPr lang="en-US" smtClean="0"/>
-              <a:t>7/12/2026</a:t>
+              <a:t>7/16/2026</a:t>
             </a:fld>
             <a:endParaRPr lang="en-US"/>
           </a:p>
@@ -3462,7 +3464,7 @@
           <a:p>
             <a:fld id="{5BCAD085-E8A6-8845-BD4E-CB4CCA059FC4}" type="datetimeFigureOut">
               <a:rPr lang="en-US" smtClean="0"/>
-              <a:t>7/12/2026</a:t>
+              <a:t>7/16/2026</a:t>
             </a:fld>
             <a:endParaRPr lang="en-US"/>
           </a:p>
@@ -4483,7 +4485,7 @@
         <p:spPr>
           <a:xfrm>
             <a:off x="640080" y="1664090"/>
-            <a:ext cx="10972800" cy="895117"/>
+            <a:ext cx="10972800" cy="1205458"/>
           </a:xfrm>
           <a:prstGeom prst="rect">
             <a:avLst/>
@@ -4869,6 +4871,36 @@
               </a:rPr>
               <a:t>.</a:t>
             </a:r>
+            <a:endParaRPr lang="es-ES" sz="1600" dirty="0">
+              <a:solidFill>
+                <a:srgbClr val="444A54"/>
+              </a:solidFill>
+              <a:latin typeface="Aptos Light"/>
+            </a:endParaRPr>
+          </a:p>
+          <a:p>
+            <a:pPr marL="285750" indent="-285750" algn="just">
+              <a:spcAft>
+                <a:spcPts val="500"/>
+              </a:spcAft>
+              <a:buFont typeface="Arial" panose="020B0604020202020204" pitchFamily="34" charset="0"/>
+              <a:buChar char="•"/>
+            </a:pPr>
+            <a:r>
+              <a:rPr lang="es-ES" sz="1600" dirty="0">
+                <a:solidFill>
+                  <a:srgbClr val="444A54"/>
+                </a:solidFill>
+                <a:latin typeface="Aptos Light"/>
+              </a:rPr>
+              <a:t>Auditoria: se han realizado 2 auditorias de código cubriendo OWASP-10 y aspectos de arquitectura</a:t>
+            </a:r>
+            <a:endParaRPr sz="1600" dirty="0">
+              <a:solidFill>
+                <a:srgbClr val="444A54"/>
+              </a:solidFill>
+              <a:latin typeface="Aptos Light"/>
+            </a:endParaRPr>
           </a:p>
         </p:txBody>
       </p:sp>
@@ -4881,14 +4913,14 @@
           <p:nvPr>
             <p:extLst>
               <p:ext uri="{D42A27DB-BD31-4B8C-83A1-F6EECF244321}">
-                <p14:modId xmlns:p14="http://schemas.microsoft.com/office/powerpoint/2010/main" val="305091232"/>
+                <p14:modId xmlns:p14="http://schemas.microsoft.com/office/powerpoint/2010/main" val="2722376543"/>
               </p:ext>
             </p:extLst>
           </p:nvPr>
         </p:nvGraphicFramePr>
         <p:xfrm>
           <a:off x="502920" y="2999350"/>
-          <a:ext cx="11247120" cy="2194560"/>
+          <a:ext cx="11247120" cy="2560320"/>
         </p:xfrm>
         <a:graphic>
           <a:graphicData uri="http://schemas.openxmlformats.org/drawingml/2006/table">
@@ -5291,15 +5323,26 @@
                     <a:p>
                       <a:pPr marL="0" algn="ctr" defTabSz="457200" rtl="0" eaLnBrk="1" latinLnBrk="0" hangingPunct="1"/>
                       <a:r>
-                        <a:rPr sz="1600" b="0" kern="1200">
-                          <a:solidFill>
-                            <a:schemeClr val="tx1"/>
-                          </a:solidFill>
-                          <a:latin typeface="Aptos Light" panose="020B0004020202020204" pitchFamily="34" charset="0"/>
-                          <a:ea typeface="+mn-ea"/>
-                          <a:cs typeface="+mn-cs"/>
-                        </a:rPr>
-                        <a:t>openspec/</a:t>
+                        <a:rPr sz="1600" b="0" kern="1200" dirty="0" err="1">
+                          <a:solidFill>
+                            <a:schemeClr val="tx1"/>
+                          </a:solidFill>
+                          <a:latin typeface="Aptos Light" panose="020B0004020202020204" pitchFamily="34" charset="0"/>
+                          <a:ea typeface="+mn-ea"/>
+                          <a:cs typeface="+mn-cs"/>
+                        </a:rPr>
+                        <a:t>openspec</a:t>
+                      </a:r>
+                      <a:r>
+                        <a:rPr sz="1600" b="0" kern="1200" dirty="0">
+                          <a:solidFill>
+                            <a:schemeClr val="tx1"/>
+                          </a:solidFill>
+                          <a:latin typeface="Aptos Light" panose="020B0004020202020204" pitchFamily="34" charset="0"/>
+                          <a:ea typeface="+mn-ea"/>
+                          <a:cs typeface="+mn-cs"/>
+                        </a:rPr>
+                        <a:t>/</a:t>
                       </a:r>
                     </a:p>
                   </a:txBody>
@@ -5572,15 +5615,48 @@
                     <a:p>
                       <a:pPr marL="0" algn="ctr" defTabSz="457200" rtl="0" eaLnBrk="1" latinLnBrk="0" hangingPunct="1"/>
                       <a:r>
-                        <a:rPr sz="1600" b="0" kern="1200">
-                          <a:solidFill>
-                            <a:schemeClr val="tx1"/>
-                          </a:solidFill>
-                          <a:latin typeface="Aptos Light" panose="020B0004020202020204" pitchFamily="34" charset="0"/>
-                          <a:ea typeface="+mn-ea"/>
-                          <a:cs typeface="+mn-cs"/>
-                        </a:rPr>
-                        <a:t>UI (v0) · Skills IA (GPT + Claude)</a:t>
+                        <a:rPr sz="1600" b="0" kern="1200" dirty="0">
+                          <a:solidFill>
+                            <a:schemeClr val="tx1"/>
+                          </a:solidFill>
+                          <a:latin typeface="Aptos Light" panose="020B0004020202020204" pitchFamily="34" charset="0"/>
+                          <a:ea typeface="+mn-ea"/>
+                          <a:cs typeface="+mn-cs"/>
+                        </a:rPr>
+                        <a:t>UI (v0) · Skills IA </a:t>
+                      </a:r>
+                      <a:r>
+                        <a:rPr lang="es-ES" sz="1600" b="0" kern="1200" dirty="0" err="1">
+                          <a:solidFill>
+                            <a:schemeClr val="tx1"/>
+                          </a:solidFill>
+                          <a:latin typeface="Aptos Light" panose="020B0004020202020204" pitchFamily="34" charset="0"/>
+                          <a:ea typeface="+mn-ea"/>
+                          <a:cs typeface="+mn-cs"/>
+                        </a:rPr>
+                        <a:t>GentlemanProgramming</a:t>
+                      </a:r>
+                      <a:r>
+                        <a:rPr lang="es-ES" sz="1600" b="0" kern="1200" dirty="0">
+                          <a:solidFill>
+                            <a:schemeClr val="tx1"/>
+                          </a:solidFill>
+                          <a:latin typeface="Aptos Light" panose="020B0004020202020204" pitchFamily="34" charset="0"/>
+                          <a:ea typeface="+mn-ea"/>
+                          <a:cs typeface="+mn-cs"/>
+                        </a:rPr>
+                        <a:t> </a:t>
+                      </a:r>
+                      <a:r>
+                        <a:rPr sz="1600" b="0" kern="1200" dirty="0">
+                          <a:solidFill>
+                            <a:schemeClr val="tx1"/>
+                          </a:solidFill>
+                          <a:latin typeface="Aptos Light" panose="020B0004020202020204" pitchFamily="34" charset="0"/>
+                          <a:ea typeface="+mn-ea"/>
+                          <a:cs typeface="+mn-cs"/>
+                        </a:rPr>
+                        <a:t>(GPT + Claude)</a:t>
                       </a:r>
                     </a:p>
                   </a:txBody>
@@ -5603,6 +5679,15 @@
                       <a:headEnd type="none" w="med" len="med"/>
                       <a:tailEnd type="none" w="med" len="med"/>
                     </a:lnT>
+                    <a:lnB w="12700" cap="flat" cmpd="sng" algn="ctr">
+                      <a:solidFill>
+                        <a:schemeClr val="tx1"/>
+                      </a:solidFill>
+                      <a:prstDash val="solid"/>
+                      <a:round/>
+                      <a:headEnd type="none" w="med" len="med"/>
+                      <a:tailEnd type="none" w="med" len="med"/>
+                    </a:lnB>
                     <a:solidFill>
                       <a:schemeClr val="bg1"/>
                     </a:solidFill>
@@ -5613,17 +5698,44 @@
                     <a:bodyPr/>
                     <a:lstStyle/>
                     <a:p>
-                      <a:pPr marL="0" algn="ctr" defTabSz="457200" rtl="0" eaLnBrk="1" latinLnBrk="0" hangingPunct="1"/>
-                      <a:r>
-                        <a:rPr sz="1600" b="0" kern="1200" dirty="0" err="1">
-                          <a:solidFill>
-                            <a:schemeClr val="tx1"/>
-                          </a:solidFill>
-                          <a:latin typeface="Aptos Light" panose="020B0004020202020204" pitchFamily="34" charset="0"/>
-                          <a:ea typeface="+mn-ea"/>
-                          <a:cs typeface="+mn-cs"/>
-                        </a:rPr>
-                        <a:t>GentlemanProgramming</a:t>
+                      <a:pPr marL="0" marR="0" lvl="0" indent="0" algn="ctr" defTabSz="457200" rtl="0" eaLnBrk="1" fontAlgn="auto" latinLnBrk="0" hangingPunct="1">
+                        <a:lnSpc>
+                          <a:spcPct val="100000"/>
+                        </a:lnSpc>
+                        <a:spcBef>
+                          <a:spcPts val="0"/>
+                        </a:spcBef>
+                        <a:spcAft>
+                          <a:spcPts val="0"/>
+                        </a:spcAft>
+                        <a:buClrTx/>
+                        <a:buSzTx/>
+                        <a:buFontTx/>
+                        <a:buNone/>
+                        <a:tabLst/>
+                        <a:defRPr/>
+                      </a:pPr>
+                      <a:r>
+                        <a:rPr lang="es-ES" sz="1600" b="0" kern="1200" dirty="0" err="1">
+                          <a:solidFill>
+                            <a:schemeClr val="tx1"/>
+                          </a:solidFill>
+                          <a:latin typeface="Aptos Light" panose="020B0004020202020204" pitchFamily="34" charset="0"/>
+                          <a:ea typeface="+mn-ea"/>
+                          <a:cs typeface="+mn-cs"/>
+                        </a:rPr>
+                        <a:t>openspec</a:t>
+                      </a:r>
+                      <a:r>
+                        <a:rPr lang="es-ES" sz="1600" b="0" kern="1200" dirty="0">
+                          <a:solidFill>
+                            <a:schemeClr val="tx1"/>
+                          </a:solidFill>
+                          <a:latin typeface="Aptos Light" panose="020B0004020202020204" pitchFamily="34" charset="0"/>
+                          <a:ea typeface="+mn-ea"/>
+                          <a:cs typeface="+mn-cs"/>
+                        </a:rPr>
+                        <a:t>/</a:t>
                       </a:r>
                       <a:endParaRPr sz="1600" b="0" kern="1200" dirty="0">
                         <a:solidFill>
@@ -5654,6 +5766,15 @@
                       <a:headEnd type="none" w="med" len="med"/>
                       <a:tailEnd type="none" w="med" len="med"/>
                     </a:lnT>
+                    <a:lnB w="12700" cap="flat" cmpd="sng" algn="ctr">
+                      <a:solidFill>
+                        <a:schemeClr val="tx1"/>
+                      </a:solidFill>
+                      <a:prstDash val="solid"/>
+                      <a:round/>
+                      <a:headEnd type="none" w="med" len="med"/>
+                      <a:tailEnd type="none" w="med" len="med"/>
+                    </a:lnB>
                     <a:solidFill>
                       <a:schemeClr val="bg1"/>
                     </a:solidFill>
@@ -5662,6 +5783,153 @@
                 <a:extLst>
                   <a:ext uri="{0D108BD9-81ED-4DB2-BD59-A6C34878D82A}">
                     <a16:rowId xmlns:a16="http://schemas.microsoft.com/office/drawing/2014/main" val="10005"/>
+                  </a:ext>
+                </a:extLst>
+              </a:tr>
+              <a:tr h="365760">
+                <a:tc>
+                  <a:txBody>
+                    <a:bodyPr/>
+                    <a:lstStyle/>
+                    <a:p>
+                      <a:pPr marL="0" algn="ctr" defTabSz="457200" rtl="0" eaLnBrk="1" latinLnBrk="0" hangingPunct="1"/>
+                      <a:r>
+                        <a:rPr lang="es-ES" sz="1600" b="0" kern="1200" dirty="0">
+                          <a:solidFill>
+                            <a:schemeClr val="tx1"/>
+                          </a:solidFill>
+                          <a:latin typeface="Aptos Light" panose="020B0004020202020204" pitchFamily="34" charset="0"/>
+                          <a:ea typeface="+mn-ea"/>
+                          <a:cs typeface="+mn-cs"/>
+                        </a:rPr>
+                        <a:t>Auditoria de seguridad y código (GTP y Claude)</a:t>
+                      </a:r>
+                      <a:endParaRPr sz="1600" b="0" kern="1200" dirty="0">
+                        <a:solidFill>
+                          <a:schemeClr val="tx1"/>
+                        </a:solidFill>
+                        <a:latin typeface="Aptos Light" panose="020B0004020202020204" pitchFamily="34" charset="0"/>
+                        <a:ea typeface="+mn-ea"/>
+                        <a:cs typeface="+mn-cs"/>
+                      </a:endParaRPr>
+                    </a:p>
+                  </a:txBody>
+                  <a:tcPr>
+                    <a:lnR w="12700" cap="flat" cmpd="sng" algn="ctr">
+                      <a:solidFill>
+                        <a:schemeClr val="tx1"/>
+                      </a:solidFill>
+                      <a:prstDash val="solid"/>
+                      <a:round/>
+                      <a:headEnd type="none" w="med" len="med"/>
+                      <a:tailEnd type="none" w="med" len="med"/>
+                    </a:lnR>
+                    <a:lnT w="12700" cap="flat" cmpd="sng" algn="ctr">
+                      <a:solidFill>
+                        <a:schemeClr val="tx1"/>
+                      </a:solidFill>
+                      <a:prstDash val="solid"/>
+                      <a:round/>
+                      <a:headEnd type="none" w="med" len="med"/>
+                      <a:tailEnd type="none" w="med" len="med"/>
+                    </a:lnT>
+                    <a:solidFill>
+                      <a:schemeClr val="bg1"/>
+                    </a:solidFill>
+                  </a:tcPr>
+                </a:tc>
+                <a:tc>
+                  <a:txBody>
+                    <a:bodyPr/>
+                    <a:lstStyle/>
+                    <a:p>
+                      <a:pPr marL="0" marR="0" lvl="0" indent="0" algn="ctr" defTabSz="457200" rtl="0" eaLnBrk="1" fontAlgn="auto" latinLnBrk="0" hangingPunct="1">
+                        <a:lnSpc>
+                          <a:spcPct val="100000"/>
+                        </a:lnSpc>
+                        <a:spcBef>
+                          <a:spcPts val="0"/>
+                        </a:spcBef>
+                        <a:spcAft>
+                          <a:spcPts val="0"/>
+                        </a:spcAft>
+                        <a:buClrTx/>
+                        <a:buSzTx/>
+                        <a:buFontTx/>
+                        <a:buNone/>
+                        <a:tabLst/>
+                        <a:defRPr/>
+                      </a:pPr>
+                      <a:r>
+                        <a:rPr lang="es-ES" sz="1600" b="0" kern="1200" dirty="0" err="1">
+                          <a:solidFill>
+                            <a:schemeClr val="tx1"/>
+                          </a:solidFill>
+                          <a:latin typeface="Aptos Light" panose="020B0004020202020204" pitchFamily="34" charset="0"/>
+                          <a:ea typeface="+mn-ea"/>
+                          <a:cs typeface="+mn-cs"/>
+                        </a:rPr>
+                        <a:t>doc</a:t>
+                      </a:r>
+                      <a:r>
+                        <a:rPr lang="es-ES" sz="1600" b="0" kern="1200" dirty="0">
+                          <a:solidFill>
+                            <a:schemeClr val="tx1"/>
+                          </a:solidFill>
+                          <a:latin typeface="Aptos Light" panose="020B0004020202020204" pitchFamily="34" charset="0"/>
+                          <a:ea typeface="+mn-ea"/>
+                          <a:cs typeface="+mn-cs"/>
+                        </a:rPr>
+                        <a:t>/</a:t>
+                      </a:r>
+                      <a:r>
+                        <a:rPr lang="es-ES" sz="1600" b="0" kern="1200" dirty="0" err="1">
+                          <a:solidFill>
+                            <a:schemeClr val="tx1"/>
+                          </a:solidFill>
+                          <a:latin typeface="Aptos Light" panose="020B0004020202020204" pitchFamily="34" charset="0"/>
+                          <a:ea typeface="+mn-ea"/>
+                          <a:cs typeface="+mn-cs"/>
+                        </a:rPr>
+                        <a:t>audit</a:t>
+                      </a:r>
+                      <a:endParaRPr sz="1600" b="0" kern="1200" dirty="0">
+                        <a:solidFill>
+                          <a:schemeClr val="tx1"/>
+                        </a:solidFill>
+                        <a:latin typeface="Aptos Light" panose="020B0004020202020204" pitchFamily="34" charset="0"/>
+                        <a:ea typeface="+mn-ea"/>
+                        <a:cs typeface="+mn-cs"/>
+                      </a:endParaRPr>
+                    </a:p>
+                  </a:txBody>
+                  <a:tcPr>
+                    <a:lnL w="12700" cap="flat" cmpd="sng" algn="ctr">
+                      <a:solidFill>
+                        <a:schemeClr val="tx1"/>
+                      </a:solidFill>
+                      <a:prstDash val="solid"/>
+                      <a:round/>
+                      <a:headEnd type="none" w="med" len="med"/>
+                      <a:tailEnd type="none" w="med" len="med"/>
+                    </a:lnL>
+                    <a:lnT w="12700" cap="flat" cmpd="sng" algn="ctr">
+                      <a:solidFill>
+                        <a:schemeClr val="tx1"/>
+                      </a:solidFill>
+                      <a:prstDash val="solid"/>
+                      <a:round/>
+                      <a:headEnd type="none" w="med" len="med"/>
+                      <a:tailEnd type="none" w="med" len="med"/>
+                    </a:lnT>
+                    <a:solidFill>
+                      <a:schemeClr val="bg1"/>
+                    </a:solidFill>
+                  </a:tcPr>
+                </a:tc>
+                <a:extLst>
+                  <a:ext uri="{0D108BD9-81ED-4DB2-BD59-A6C34878D82A}">
+                    <a16:rowId xmlns:a16="http://schemas.microsoft.com/office/drawing/2014/main" val="1609631634"/>
                   </a:ext>
                 </a:extLst>
               </a:tr>
@@ -5680,17 +5948,15 @@
 <file path=ppt/slides/slide11.xml><?xml version="1.0" encoding="utf-8"?>
 <p:sld xmlns:a="http://schemas.openxmlformats.org/drawingml/2006/main" xmlns:r="http://schemas.openxmlformats.org/officeDocument/2006/relationships" xmlns:p="http://schemas.openxmlformats.org/presentationml/2006/main">
   <p:cSld>
-    <p:bg>
-      <p:bgPr>
-        <a:solidFill>
-          <a:srgbClr val="FFFFFF"/>
-        </a:solidFill>
-        <a:effectLst/>
-      </p:bgPr>
-    </p:bg>
     <p:spTree>
       <p:nvGrpSpPr>
-        <p:cNvPr id="1" name=""/>
+        <p:cNvPr id="1" name="">
+          <a:extLst>
+            <a:ext uri="{FF2B5EF4-FFF2-40B4-BE49-F238E27FC236}">
+              <a16:creationId xmlns:a16="http://schemas.microsoft.com/office/drawing/2014/main" id="{6025786A-33BB-0A16-4D5B-637B7F833C8A}"/>
+            </a:ext>
+          </a:extLst>
+        </p:cNvPr>
         <p:cNvGrpSpPr/>
         <p:nvPr/>
       </p:nvGrpSpPr>
@@ -5704,7 +5970,13 @@
       </p:grpSpPr>
       <p:sp>
         <p:nvSpPr>
-          <p:cNvPr id="2" name="Rectangle 1"/>
+          <p:cNvPr id="2" name="Rectangle 1">
+            <a:extLst>
+              <a:ext uri="{FF2B5EF4-FFF2-40B4-BE49-F238E27FC236}">
+                <a16:creationId xmlns:a16="http://schemas.microsoft.com/office/drawing/2014/main" id="{08BC45EE-DC32-CD92-2934-D4C598CE2CA1}"/>
+              </a:ext>
+            </a:extLst>
+          </p:cNvPr>
           <p:cNvSpPr/>
           <p:nvPr/>
         </p:nvSpPr>
@@ -5749,7 +6021,13 @@
       </p:sp>
       <p:sp>
         <p:nvSpPr>
-          <p:cNvPr id="3" name="Rectangle 2"/>
+          <p:cNvPr id="3" name="Rectangle 2">
+            <a:extLst>
+              <a:ext uri="{FF2B5EF4-FFF2-40B4-BE49-F238E27FC236}">
+                <a16:creationId xmlns:a16="http://schemas.microsoft.com/office/drawing/2014/main" id="{3FB923D2-F2A0-CBE2-9F25-201C79A89BFE}"/>
+              </a:ext>
+            </a:extLst>
+          </p:cNvPr>
           <p:cNvSpPr/>
           <p:nvPr/>
         </p:nvSpPr>
@@ -5795,14 +6073,20 @@
                 </a:solidFill>
                 <a:latin typeface="Calibri"/>
               </a:rPr>
-              <a:t>7</a:t>
+              <a:t>6</a:t>
             </a:r>
           </a:p>
         </p:txBody>
       </p:sp>
       <p:sp>
         <p:nvSpPr>
-          <p:cNvPr id="4" name="TextBox 3"/>
+          <p:cNvPr id="4" name="TextBox 3">
+            <a:extLst>
+              <a:ext uri="{FF2B5EF4-FFF2-40B4-BE49-F238E27FC236}">
+                <a16:creationId xmlns:a16="http://schemas.microsoft.com/office/drawing/2014/main" id="{F771DFE0-D203-945A-0525-B9F6DC5F0793}"/>
+              </a:ext>
+            </a:extLst>
+          </p:cNvPr>
           <p:cNvSpPr txBox="1"/>
           <p:nvPr/>
         </p:nvSpPr>
@@ -5828,69 +6112,33 @@
               </a:spcAft>
             </a:pPr>
             <a:r>
-              <a:rPr sz="2800" b="1" dirty="0" err="1">
+              <a:rPr lang="es-ES" sz="2800" b="1" dirty="0">
                 <a:solidFill>
                   <a:srgbClr val="FFFFFF"/>
                 </a:solidFill>
                 <a:latin typeface="Aptos Light" panose="020B0004020202020204" pitchFamily="34" charset="0"/>
               </a:rPr>
-              <a:t>Extensiones</a:t>
-            </a:r>
-            <a:r>
-              <a:rPr sz="2800" b="1" dirty="0">
-                <a:solidFill>
-                  <a:srgbClr val="FFFFFF"/>
-                </a:solidFill>
-                <a:latin typeface="Aptos Light" panose="020B0004020202020204" pitchFamily="34" charset="0"/>
-              </a:rPr>
-              <a:t> del </a:t>
-            </a:r>
-            <a:r>
-              <a:rPr sz="2800" b="1" dirty="0" err="1">
-                <a:solidFill>
-                  <a:srgbClr val="FFFFFF"/>
-                </a:solidFill>
-                <a:latin typeface="Aptos Light" panose="020B0004020202020204" pitchFamily="34" charset="0"/>
-              </a:rPr>
-              <a:t>caso</a:t>
-            </a:r>
-            <a:r>
-              <a:rPr sz="2800" b="1" dirty="0">
-                <a:solidFill>
-                  <a:srgbClr val="FFFFFF"/>
-                </a:solidFill>
-                <a:latin typeface="Aptos Light" panose="020B0004020202020204" pitchFamily="34" charset="0"/>
-              </a:rPr>
-              <a:t> de </a:t>
-            </a:r>
-            <a:r>
-              <a:rPr sz="2800" b="1" dirty="0" err="1">
-                <a:solidFill>
-                  <a:srgbClr val="FFFFFF"/>
-                </a:solidFill>
-                <a:latin typeface="Aptos Light" panose="020B0004020202020204" pitchFamily="34" charset="0"/>
-              </a:rPr>
-              <a:t>uso</a:t>
-            </a:r>
-            <a:endParaRPr sz="2800" b="1" dirty="0">
-              <a:solidFill>
-                <a:srgbClr val="FFFFFF"/>
-              </a:solidFill>
-              <a:latin typeface="Aptos Light" panose="020B0004020202020204" pitchFamily="34" charset="0"/>
-            </a:endParaRPr>
+              <a:t>Verificación de seguridad (OWASP Top 10)</a:t>
+            </a:r>
           </a:p>
         </p:txBody>
       </p:sp>
       <p:sp>
         <p:nvSpPr>
-          <p:cNvPr id="5" name="TextBox 4"/>
+          <p:cNvPr id="5" name="TextBox 4">
+            <a:extLst>
+              <a:ext uri="{FF2B5EF4-FFF2-40B4-BE49-F238E27FC236}">
+                <a16:creationId xmlns:a16="http://schemas.microsoft.com/office/drawing/2014/main" id="{AD8E9602-E339-AD24-19A5-B3F67316CB74}"/>
+              </a:ext>
+            </a:extLst>
+          </p:cNvPr>
           <p:cNvSpPr txBox="1"/>
           <p:nvPr/>
         </p:nvSpPr>
         <p:spPr>
           <a:xfrm>
-            <a:off x="548640" y="1325880"/>
-            <a:ext cx="11064240" cy="661720"/>
+            <a:off x="457200" y="1169126"/>
+            <a:ext cx="11247120" cy="907941"/>
           </a:xfrm>
           <a:prstGeom prst="rect">
             <a:avLst/>
@@ -5909,272 +6157,32 @@
               </a:spcAft>
             </a:pPr>
             <a:r>
-              <a:rPr sz="1600" dirty="0">
-                <a:solidFill>
-                  <a:srgbClr val="444A54"/>
-                </a:solidFill>
-                <a:latin typeface="Aptos Light"/>
-              </a:rPr>
-              <a:t>El </a:t>
-            </a:r>
-            <a:r>
-              <a:rPr sz="1600" dirty="0" err="1">
-                <a:solidFill>
-                  <a:srgbClr val="444A54"/>
-                </a:solidFill>
-                <a:latin typeface="Aptos Light"/>
-              </a:rPr>
-              <a:t>mismo</a:t>
-            </a:r>
-            <a:r>
-              <a:rPr sz="1600" dirty="0">
-                <a:solidFill>
-                  <a:srgbClr val="444A54"/>
-                </a:solidFill>
-                <a:latin typeface="Aptos Light"/>
-              </a:rPr>
-              <a:t> </a:t>
-            </a:r>
-            <a:r>
-              <a:rPr sz="1600" dirty="0" err="1">
-                <a:solidFill>
-                  <a:srgbClr val="444A54"/>
-                </a:solidFill>
-                <a:latin typeface="Aptos Light"/>
-              </a:rPr>
-              <a:t>patrón</a:t>
-            </a:r>
-            <a:r>
-              <a:rPr sz="1600" dirty="0">
-                <a:solidFill>
-                  <a:srgbClr val="444A54"/>
-                </a:solidFill>
-                <a:latin typeface="Aptos Light"/>
-              </a:rPr>
-              <a:t> </a:t>
-            </a:r>
-            <a:r>
-              <a:rPr sz="1600" dirty="0" err="1">
-                <a:solidFill>
-                  <a:srgbClr val="444A54"/>
-                </a:solidFill>
-                <a:latin typeface="Aptos Light"/>
-              </a:rPr>
-              <a:t>sirve</a:t>
-            </a:r>
-            <a:r>
-              <a:rPr sz="1600" dirty="0">
-                <a:solidFill>
-                  <a:srgbClr val="444A54"/>
-                </a:solidFill>
-                <a:latin typeface="Aptos Light"/>
-              </a:rPr>
-              <a:t> para </a:t>
-            </a:r>
-            <a:r>
-              <a:rPr sz="1600" dirty="0" err="1">
-                <a:solidFill>
-                  <a:srgbClr val="444A54"/>
-                </a:solidFill>
-                <a:latin typeface="Aptos Light"/>
-              </a:rPr>
-              <a:t>cualquier</a:t>
-            </a:r>
-            <a:r>
-              <a:rPr sz="1600" dirty="0">
-                <a:solidFill>
-                  <a:srgbClr val="444A54"/>
-                </a:solidFill>
-                <a:latin typeface="Aptos Light"/>
-              </a:rPr>
-              <a:t> </a:t>
-            </a:r>
-            <a:r>
-              <a:rPr sz="1600" dirty="0" err="1">
-                <a:solidFill>
-                  <a:srgbClr val="444A54"/>
-                </a:solidFill>
-                <a:latin typeface="Aptos Light"/>
-              </a:rPr>
-              <a:t>ámbito</a:t>
-            </a:r>
-            <a:r>
-              <a:rPr sz="1600" dirty="0">
-                <a:solidFill>
-                  <a:srgbClr val="444A54"/>
-                </a:solidFill>
-                <a:latin typeface="Aptos Light"/>
-              </a:rPr>
-              <a:t> </a:t>
-            </a:r>
-            <a:r>
-              <a:rPr sz="1600" dirty="0" err="1">
-                <a:solidFill>
-                  <a:srgbClr val="444A54"/>
-                </a:solidFill>
-                <a:latin typeface="Aptos Light"/>
-              </a:rPr>
-              <a:t>donde</a:t>
-            </a:r>
-            <a:r>
-              <a:rPr sz="1600" dirty="0">
-                <a:solidFill>
-                  <a:srgbClr val="444A54"/>
-                </a:solidFill>
-                <a:latin typeface="Aptos Light"/>
-              </a:rPr>
-              <a:t> </a:t>
-            </a:r>
-            <a:r>
-              <a:rPr sz="1600" dirty="0" err="1">
-                <a:solidFill>
-                  <a:srgbClr val="444A54"/>
-                </a:solidFill>
-                <a:latin typeface="Aptos Light"/>
-              </a:rPr>
-              <a:t>haya</a:t>
-            </a:r>
-            <a:r>
-              <a:rPr sz="1600" dirty="0">
-                <a:solidFill>
-                  <a:srgbClr val="444A54"/>
-                </a:solidFill>
-                <a:latin typeface="Aptos Light"/>
-              </a:rPr>
-              <a:t> </a:t>
-            </a:r>
-            <a:r>
-              <a:rPr sz="1600" dirty="0" err="1">
-                <a:solidFill>
-                  <a:srgbClr val="444A54"/>
-                </a:solidFill>
-                <a:latin typeface="Aptos Light"/>
-              </a:rPr>
-              <a:t>que</a:t>
-            </a:r>
-            <a:r>
-              <a:rPr sz="1600" dirty="0">
-                <a:solidFill>
-                  <a:srgbClr val="444A54"/>
-                </a:solidFill>
-                <a:latin typeface="Aptos Light"/>
-              </a:rPr>
-              <a:t> </a:t>
-            </a:r>
-            <a:r>
-              <a:rPr sz="1600" dirty="0" err="1">
-                <a:solidFill>
-                  <a:srgbClr val="444A54"/>
-                </a:solidFill>
-                <a:latin typeface="Aptos Light"/>
-              </a:rPr>
-              <a:t>analizar</a:t>
-            </a:r>
-            <a:r>
-              <a:rPr sz="1600" dirty="0">
-                <a:solidFill>
-                  <a:srgbClr val="444A54"/>
-                </a:solidFill>
-                <a:latin typeface="Aptos Light"/>
-              </a:rPr>
-              <a:t> audio o </a:t>
-            </a:r>
-            <a:r>
-              <a:rPr sz="1600" dirty="0" err="1">
-                <a:solidFill>
-                  <a:srgbClr val="444A54"/>
-                </a:solidFill>
-                <a:latin typeface="Aptos Light"/>
-              </a:rPr>
-              <a:t>vídeo</a:t>
-            </a:r>
-            <a:r>
-              <a:rPr sz="1600" dirty="0">
-                <a:solidFill>
-                  <a:srgbClr val="444A54"/>
-                </a:solidFill>
-                <a:latin typeface="Aptos Light"/>
-              </a:rPr>
-              <a:t> y </a:t>
-            </a:r>
-            <a:r>
-              <a:rPr sz="1600" dirty="0" err="1">
-                <a:solidFill>
-                  <a:srgbClr val="444A54"/>
-                </a:solidFill>
-                <a:latin typeface="Aptos Light"/>
-              </a:rPr>
-              <a:t>seguir</a:t>
-            </a:r>
-            <a:r>
-              <a:rPr sz="1600" dirty="0">
-                <a:solidFill>
-                  <a:srgbClr val="444A54"/>
-                </a:solidFill>
-                <a:latin typeface="Aptos Light"/>
-              </a:rPr>
-              <a:t> un </a:t>
-            </a:r>
-            <a:r>
-              <a:rPr sz="1600" dirty="0" err="1">
-                <a:solidFill>
-                  <a:srgbClr val="444A54"/>
-                </a:solidFill>
-                <a:latin typeface="Aptos Light"/>
-              </a:rPr>
-              <a:t>progreso</a:t>
-            </a:r>
-            <a:r>
-              <a:rPr sz="1600" dirty="0">
-                <a:solidFill>
-                  <a:srgbClr val="444A54"/>
-                </a:solidFill>
-                <a:latin typeface="Aptos Light"/>
-              </a:rPr>
-              <a:t> </a:t>
-            </a:r>
-            <a:r>
-              <a:rPr sz="1600" dirty="0" err="1">
-                <a:solidFill>
-                  <a:srgbClr val="444A54"/>
-                </a:solidFill>
-                <a:latin typeface="Aptos Light"/>
-              </a:rPr>
-              <a:t>en</a:t>
-            </a:r>
-            <a:r>
-              <a:rPr sz="1600" dirty="0">
-                <a:solidFill>
-                  <a:srgbClr val="444A54"/>
-                </a:solidFill>
-                <a:latin typeface="Aptos Light"/>
-              </a:rPr>
-              <a:t> el </a:t>
-            </a:r>
-            <a:r>
-              <a:rPr sz="1600" dirty="0" err="1">
-                <a:solidFill>
-                  <a:srgbClr val="444A54"/>
-                </a:solidFill>
-                <a:latin typeface="Aptos Light"/>
-              </a:rPr>
-              <a:t>tiempo</a:t>
-            </a:r>
-            <a:r>
-              <a:rPr sz="1600" dirty="0">
-                <a:solidFill>
-                  <a:srgbClr val="444A54"/>
-                </a:solidFill>
-                <a:latin typeface="Aptos Light"/>
-              </a:rPr>
-              <a:t>.</a:t>
-            </a:r>
-            <a:endParaRPr lang="es-ES" sz="1600" dirty="0">
-              <a:solidFill>
-                <a:srgbClr val="444A54"/>
-              </a:solidFill>
-              <a:latin typeface="Aptos Light"/>
-            </a:endParaRPr>
+              <a:rPr lang="es-ES" sz="1600" dirty="0">
+                <a:solidFill>
+                  <a:srgbClr val="444A54"/>
+                </a:solidFill>
+                <a:latin typeface="Aptos Light"/>
+              </a:rPr>
+              <a:t>El sistema se auditó 2 veces: primera auditoria OWASP, Arquitectura y RGPD y segunda OWASP Top 10 en web, API, </a:t>
+            </a:r>
+            <a:r>
+              <a:rPr lang="es-ES" sz="1600" dirty="0" err="1">
+                <a:solidFill>
+                  <a:srgbClr val="444A54"/>
+                </a:solidFill>
+                <a:latin typeface="Aptos Light"/>
+              </a:rPr>
+              <a:t>Terraform</a:t>
+            </a:r>
+            <a:r>
+              <a:rPr lang="es-ES" sz="1600" dirty="0">
+                <a:solidFill>
+                  <a:srgbClr val="444A54"/>
+                </a:solidFill>
+                <a:latin typeface="Aptos Light"/>
+              </a:rPr>
+              <a:t> y despliegue. Ejemplos de hallazgos:</a:t>
+            </a:r>
           </a:p>
           <a:p>
             <a:pPr algn="just">
@@ -6182,70 +6190,7 @@
                 <a:spcPts val="600"/>
               </a:spcAft>
             </a:pPr>
-            <a:r>
-              <a:rPr sz="1600" dirty="0">
-                <a:solidFill>
-                  <a:srgbClr val="444A54"/>
-                </a:solidFill>
-                <a:latin typeface="Aptos Light"/>
-              </a:rPr>
-              <a:t> </a:t>
-            </a:r>
-            <a:r>
-              <a:rPr sz="1600" dirty="0" err="1">
-                <a:solidFill>
-                  <a:srgbClr val="444A54"/>
-                </a:solidFill>
-                <a:latin typeface="Aptos Light"/>
-              </a:rPr>
-              <a:t>Aplica</a:t>
-            </a:r>
-            <a:r>
-              <a:rPr sz="1600" dirty="0">
-                <a:solidFill>
-                  <a:srgbClr val="444A54"/>
-                </a:solidFill>
-                <a:latin typeface="Aptos Light"/>
-              </a:rPr>
-              <a:t> a fines </a:t>
-            </a:r>
-            <a:r>
-              <a:rPr sz="1600" dirty="0" err="1">
-                <a:solidFill>
-                  <a:srgbClr val="444A54"/>
-                </a:solidFill>
-                <a:latin typeface="Aptos Light"/>
-              </a:rPr>
-              <a:t>pedagógicos</a:t>
-            </a:r>
-            <a:r>
-              <a:rPr sz="1600" dirty="0">
-                <a:solidFill>
-                  <a:srgbClr val="444A54"/>
-                </a:solidFill>
-                <a:latin typeface="Aptos Light"/>
-              </a:rPr>
-              <a:t> o de </a:t>
-            </a:r>
-            <a:r>
-              <a:rPr sz="1600" dirty="0" err="1">
-                <a:solidFill>
-                  <a:srgbClr val="444A54"/>
-                </a:solidFill>
-                <a:latin typeface="Aptos Light"/>
-              </a:rPr>
-              <a:t>estudio</a:t>
-            </a:r>
-            <a:r>
-              <a:rPr lang="es-ES" sz="1600" dirty="0">
-                <a:solidFill>
-                  <a:srgbClr val="444A54"/>
-                </a:solidFill>
-                <a:latin typeface="Aptos Light"/>
-              </a:rPr>
-              <a:t>.</a:t>
-            </a:r>
-            <a:endParaRPr sz="1600" dirty="0">
+            <a:endParaRPr lang="es-ES" sz="1600" dirty="0">
               <a:solidFill>
                 <a:srgbClr val="444A54"/>
               </a:solidFill>
@@ -6256,21 +6201,27 @@
       </p:sp>
       <p:graphicFrame>
         <p:nvGraphicFramePr>
-          <p:cNvPr id="6" name="Table 5"/>
+          <p:cNvPr id="7" name="Table 6">
+            <a:extLst>
+              <a:ext uri="{FF2B5EF4-FFF2-40B4-BE49-F238E27FC236}">
+                <a16:creationId xmlns:a16="http://schemas.microsoft.com/office/drawing/2014/main" id="{5299D866-23CC-D2CF-A76B-44555BFD80C5}"/>
+              </a:ext>
+            </a:extLst>
+          </p:cNvPr>
           <p:cNvGraphicFramePr>
             <a:graphicFrameLocks noGrp="1"/>
           </p:cNvGraphicFramePr>
           <p:nvPr>
             <p:extLst>
               <p:ext uri="{D42A27DB-BD31-4B8C-83A1-F6EECF244321}">
-                <p14:modId xmlns:p14="http://schemas.microsoft.com/office/powerpoint/2010/main" val="4178896021"/>
+                <p14:modId xmlns:p14="http://schemas.microsoft.com/office/powerpoint/2010/main" val="484402620"/>
               </p:ext>
             </p:extLst>
           </p:nvPr>
         </p:nvGraphicFramePr>
         <p:xfrm>
-          <a:off x="640080" y="2261920"/>
-          <a:ext cx="11064240" cy="2255520"/>
+          <a:off x="502920" y="1796143"/>
+          <a:ext cx="11247120" cy="4328160"/>
         </p:xfrm>
         <a:graphic>
           <a:graphicData uri="http://schemas.openxmlformats.org/drawingml/2006/table">
@@ -6279,17 +6230,24 @@
                 <a:tableStyleId>{5C22544A-7EE6-4342-B048-85BDC9FD1C3A}</a:tableStyleId>
               </a:tblPr>
               <a:tblGrid>
-                <a:gridCol w="4206240">
+                <a:gridCol w="2176008">
                   <a:extLst>
                     <a:ext uri="{9D8B030D-6E8A-4147-A177-3AD203B41FA5}">
                       <a16:colId xmlns:a16="http://schemas.microsoft.com/office/drawing/2014/main" val="20000"/>
                     </a:ext>
                   </a:extLst>
                 </a:gridCol>
-                <a:gridCol w="6858000">
+                <a:gridCol w="4535556">
                   <a:extLst>
                     <a:ext uri="{9D8B030D-6E8A-4147-A177-3AD203B41FA5}">
                       <a16:colId xmlns:a16="http://schemas.microsoft.com/office/drawing/2014/main" val="20001"/>
+                    </a:ext>
+                  </a:extLst>
+                </a:gridCol>
+                <a:gridCol w="4535556">
+                  <a:extLst>
+                    <a:ext uri="{9D8B030D-6E8A-4147-A177-3AD203B41FA5}">
+                      <a16:colId xmlns:a16="http://schemas.microsoft.com/office/drawing/2014/main" val="1344364247"/>
                     </a:ext>
                   </a:extLst>
                 </a:gridCol>
@@ -6302,7 +6260,7 @@
                     <a:p>
                       <a:pPr marL="0" algn="ctr" defTabSz="457200" rtl="0" eaLnBrk="1" latinLnBrk="0" hangingPunct="1"/>
                       <a:r>
-                        <a:rPr sz="1600" b="1" kern="1200" dirty="0">
+                        <a:rPr lang="es-ES" sz="1600" b="1" kern="1200" dirty="0">
                           <a:solidFill>
                             <a:srgbClr val="FFFFFF"/>
                           </a:solidFill>
@@ -6310,40 +6268,7 @@
                           <a:ea typeface="+mn-ea"/>
                           <a:cs typeface="+mn-cs"/>
                         </a:rPr>
-                        <a:t>Dominio </a:t>
-                      </a:r>
-                      <a:r>
-                        <a:rPr sz="1600" b="1" kern="1200" dirty="0" err="1">
-                          <a:solidFill>
-                            <a:srgbClr val="FFFFFF"/>
-                          </a:solidFill>
-                          <a:latin typeface="Aptos Light" panose="020B0004020202020204" pitchFamily="34" charset="0"/>
-                          <a:ea typeface="+mn-ea"/>
-                          <a:cs typeface="+mn-cs"/>
-                        </a:rPr>
-                        <a:t>pedagógico</a:t>
-                      </a:r>
-                      <a:r>
-                        <a:rPr sz="1600" b="1" kern="1200" dirty="0">
-                          <a:solidFill>
-                            <a:srgbClr val="FFFFFF"/>
-                          </a:solidFill>
-                          <a:latin typeface="Aptos Light" panose="020B0004020202020204" pitchFamily="34" charset="0"/>
-                          <a:ea typeface="+mn-ea"/>
-                          <a:cs typeface="+mn-cs"/>
-                        </a:rPr>
-                        <a:t> / </a:t>
-                      </a:r>
-                      <a:r>
-                        <a:rPr sz="1600" b="1" kern="1200" dirty="0" err="1">
-                          <a:solidFill>
-                            <a:srgbClr val="FFFFFF"/>
-                          </a:solidFill>
-                          <a:latin typeface="Aptos Light" panose="020B0004020202020204" pitchFamily="34" charset="0"/>
-                          <a:ea typeface="+mn-ea"/>
-                          <a:cs typeface="+mn-cs"/>
-                        </a:rPr>
-                        <a:t>estudio</a:t>
+                        <a:t>Hallazgo (OWASP)</a:t>
                       </a:r>
                       <a:endParaRPr sz="1600" b="1" kern="1200" dirty="0">
                         <a:solidFill>
@@ -6394,51 +6319,7 @@
                           <a:ea typeface="+mn-ea"/>
                           <a:cs typeface="+mn-cs"/>
                         </a:rPr>
-                        <a:t>¿</a:t>
-                      </a:r>
-                      <a:r>
-                        <a:rPr sz="1600" b="1" kern="1200" dirty="0" err="1">
-                          <a:solidFill>
-                            <a:srgbClr val="FFFFFF"/>
-                          </a:solidFill>
-                          <a:latin typeface="Aptos Light" panose="020B0004020202020204" pitchFamily="34" charset="0"/>
-                          <a:ea typeface="+mn-ea"/>
-                          <a:cs typeface="+mn-cs"/>
-                        </a:rPr>
-                        <a:t>Qué</a:t>
-                      </a:r>
-                      <a:r>
-                        <a:rPr sz="1600" b="1" kern="1200" dirty="0">
-                          <a:solidFill>
-                            <a:srgbClr val="FFFFFF"/>
-                          </a:solidFill>
-                          <a:latin typeface="Aptos Light" panose="020B0004020202020204" pitchFamily="34" charset="0"/>
-                          <a:ea typeface="+mn-ea"/>
-                          <a:cs typeface="+mn-cs"/>
-                        </a:rPr>
-                        <a:t> se </a:t>
-                      </a:r>
-                      <a:r>
-                        <a:rPr sz="1600" b="1" kern="1200" dirty="0" err="1">
-                          <a:solidFill>
-                            <a:srgbClr val="FFFFFF"/>
-                          </a:solidFill>
-                          <a:latin typeface="Aptos Light" panose="020B0004020202020204" pitchFamily="34" charset="0"/>
-                          <a:ea typeface="+mn-ea"/>
-                          <a:cs typeface="+mn-cs"/>
-                        </a:rPr>
-                        <a:t>sigue</a:t>
-                      </a:r>
-                      <a:r>
-                        <a:rPr lang="es-ES" sz="1600" b="1" kern="1200" dirty="0">
-                          <a:solidFill>
-                            <a:srgbClr val="FFFFFF"/>
-                          </a:solidFill>
-                          <a:latin typeface="Aptos Light" panose="020B0004020202020204" pitchFamily="34" charset="0"/>
-                          <a:ea typeface="+mn-ea"/>
-                          <a:cs typeface="+mn-cs"/>
-                        </a:rPr>
-                        <a:t>?</a:t>
+                        <a:t>Detectado</a:t>
                       </a:r>
                       <a:endParaRPr sz="1600" b="1" kern="1200" dirty="0">
                         <a:solidFill>
@@ -6460,6 +6341,66 @@
                       <a:headEnd type="none" w="med" len="med"/>
                       <a:tailEnd type="none" w="med" len="med"/>
                     </a:lnL>
+                    <a:lnR w="12700" cap="flat" cmpd="sng" algn="ctr">
+                      <a:solidFill>
+                        <a:schemeClr val="tx1"/>
+                      </a:solidFill>
+                      <a:prstDash val="solid"/>
+                      <a:round/>
+                      <a:headEnd type="none" w="med" len="med"/>
+                      <a:tailEnd type="none" w="med" len="med"/>
+                    </a:lnR>
+                    <a:lnB w="12700" cap="flat" cmpd="sng" algn="ctr">
+                      <a:solidFill>
+                        <a:schemeClr val="tx1"/>
+                      </a:solidFill>
+                      <a:prstDash val="solid"/>
+                      <a:round/>
+                      <a:headEnd type="none" w="med" len="med"/>
+                      <a:tailEnd type="none" w="med" len="med"/>
+                    </a:lnB>
+                    <a:solidFill>
+                      <a:schemeClr val="tx2"/>
+                    </a:solidFill>
+                  </a:tcPr>
+                </a:tc>
+                <a:tc>
+                  <a:txBody>
+                    <a:bodyPr/>
+                    <a:lstStyle/>
+                    <a:p>
+                      <a:pPr marL="0" algn="ctr" defTabSz="457200" rtl="0" eaLnBrk="1" latinLnBrk="0" hangingPunct="1"/>
+                      <a:r>
+                        <a:rPr lang="es-ES" sz="1600" b="1" kern="1200" dirty="0">
+                          <a:solidFill>
+                            <a:srgbClr val="FFFFFF"/>
+                          </a:solidFill>
+                          <a:latin typeface="Aptos Light" panose="020B0004020202020204" pitchFamily="34" charset="0"/>
+                          <a:ea typeface="+mn-ea"/>
+                          <a:cs typeface="+mn-cs"/>
+                        </a:rPr>
+                        <a:t>Cerrado</a:t>
+                      </a:r>
+                      <a:endParaRPr sz="1600" b="1" kern="1200" dirty="0">
+                        <a:solidFill>
+                          <a:srgbClr val="FFFFFF"/>
+                        </a:solidFill>
+                        <a:latin typeface="Aptos Light" panose="020B0004020202020204" pitchFamily="34" charset="0"/>
+                        <a:ea typeface="+mn-ea"/>
+                        <a:cs typeface="+mn-cs"/>
+                      </a:endParaRPr>
+                    </a:p>
+                  </a:txBody>
+                  <a:tcPr>
+                    <a:lnL w="12700" cap="flat" cmpd="sng" algn="ctr">
+                      <a:solidFill>
+                        <a:schemeClr val="tx1"/>
+                      </a:solidFill>
+                      <a:prstDash val="solid"/>
+                      <a:round/>
+                      <a:headEnd type="none" w="med" len="med"/>
+                      <a:tailEnd type="none" w="med" len="med"/>
+                    </a:lnL>
                     <a:lnB w="12700" cap="flat" cmpd="sng" algn="ctr">
                       <a:solidFill>
                         <a:schemeClr val="tx1"/>
@@ -6480,24 +6421,43 @@
                   </a:ext>
                 </a:extLst>
               </a:tr>
-              <a:tr h="365760">
+              <a:tr h="457745">
                 <a:tc>
                   <a:txBody>
                     <a:bodyPr/>
                     <a:lstStyle/>
                     <a:p>
-                      <a:pPr algn="ctr"/>
-                      <a:r>
-                        <a:rPr sz="1600" b="0" kern="1200">
-                          <a:solidFill>
-                            <a:schemeClr val="tx1"/>
-                          </a:solidFill>
-                          <a:latin typeface="Aptos Light" panose="020B0004020202020204" pitchFamily="34" charset="0"/>
-                          <a:ea typeface="+mn-ea"/>
-                          <a:cs typeface="+mn-cs"/>
-                        </a:rPr>
-                        <a:t>Lectura</a:t>
-                      </a:r>
+                      <a:pPr marL="0" algn="l" defTabSz="457200" rtl="0" eaLnBrk="1" latinLnBrk="0" hangingPunct="1"/>
+                      <a:r>
+                        <a:rPr lang="es-ES" sz="1600" b="1" kern="1200" dirty="0">
+                          <a:solidFill>
+                            <a:schemeClr val="tx1"/>
+                          </a:solidFill>
+                          <a:latin typeface="Aptos Light" panose="020B0004020202020204" pitchFamily="34" charset="0"/>
+                          <a:ea typeface="+mn-ea"/>
+                          <a:cs typeface="+mn-cs"/>
+                        </a:rPr>
+                        <a:t>A01</a:t>
+                      </a:r>
+                      <a:r>
+                        <a:rPr lang="es-ES" sz="1600" b="0" kern="1200" dirty="0">
+                          <a:solidFill>
+                            <a:schemeClr val="tx1"/>
+                          </a:solidFill>
+                          <a:latin typeface="Aptos Light" panose="020B0004020202020204" pitchFamily="34" charset="0"/>
+                          <a:ea typeface="+mn-ea"/>
+                          <a:cs typeface="+mn-cs"/>
+                        </a:rPr>
+                        <a:t> Control de acceso</a:t>
+                      </a:r>
+                      <a:endParaRPr sz="1600" b="0" kern="1200" dirty="0">
+                        <a:solidFill>
+                          <a:schemeClr val="tx1"/>
+                        </a:solidFill>
+                        <a:latin typeface="Aptos Light" panose="020B0004020202020204" pitchFamily="34" charset="0"/>
+                        <a:ea typeface="+mn-ea"/>
+                        <a:cs typeface="+mn-cs"/>
+                      </a:endParaRPr>
                     </a:p>
                   </a:txBody>
                   <a:tcPr>
@@ -6538,17 +6498,39 @@
                     <a:bodyPr/>
                     <a:lstStyle/>
                     <a:p>
-                      <a:pPr algn="ctr"/>
-                      <a:r>
-                        <a:rPr sz="1600" b="0" kern="1200" dirty="0">
-                          <a:solidFill>
-                            <a:schemeClr val="tx1"/>
-                          </a:solidFill>
-                          <a:latin typeface="Aptos Light" panose="020B0004020202020204" pitchFamily="34" charset="0"/>
-                          <a:ea typeface="+mn-ea"/>
-                          <a:cs typeface="+mn-cs"/>
-                        </a:rPr>
-                        <a:t>Progreso </a:t>
+                      <a:pPr marL="0" algn="just" defTabSz="457200" rtl="0" eaLnBrk="1" latinLnBrk="0" hangingPunct="1"/>
+                      <a:r>
+                        <a:rPr lang="es-ES" sz="1600" b="1" kern="1200" dirty="0">
+                          <a:solidFill>
+                            <a:schemeClr val="tx1"/>
+                          </a:solidFill>
+                          <a:latin typeface="Aptos Light" panose="020B0004020202020204" pitchFamily="34" charset="0"/>
+                          <a:ea typeface="+mn-ea"/>
+                          <a:cs typeface="+mn-cs"/>
+                        </a:rPr>
+                        <a:t>BOLA explotado en </a:t>
+                      </a:r>
+                      <a:r>
+                        <a:rPr lang="es-ES" sz="1600" b="1" kern="1200" dirty="0" err="1">
+                          <a:solidFill>
+                            <a:schemeClr val="tx1"/>
+                          </a:solidFill>
+                          <a:latin typeface="Aptos Light" panose="020B0004020202020204" pitchFamily="34" charset="0"/>
+                          <a:ea typeface="+mn-ea"/>
+                          <a:cs typeface="+mn-cs"/>
+                        </a:rPr>
+                        <a:t>Postgres</a:t>
+                      </a:r>
+                      <a:r>
+                        <a:rPr lang="es-ES" sz="1600" b="1" kern="1200" dirty="0">
+                          <a:solidFill>
+                            <a:schemeClr val="tx1"/>
+                          </a:solidFill>
+                          <a:latin typeface="Aptos Light" panose="020B0004020202020204" pitchFamily="34" charset="0"/>
+                          <a:ea typeface="+mn-ea"/>
+                          <a:cs typeface="+mn-cs"/>
+                        </a:rPr>
+                        <a:t> real</a:t>
                       </a:r>
                       <a:r>
                         <a:rPr lang="es-ES" sz="1600" b="0" kern="1200" dirty="0">
@@ -6559,85 +6541,107 @@
                           <a:ea typeface="+mn-ea"/>
                           <a:cs typeface="+mn-cs"/>
                         </a:rPr>
-                        <a:t>técnicas </a:t>
-                      </a:r>
-                      <a:r>
-                        <a:rPr sz="1600" b="0" kern="1200" dirty="0">
-                          <a:solidFill>
-                            <a:schemeClr val="tx1"/>
-                          </a:solidFill>
-                          <a:latin typeface="Aptos Light" panose="020B0004020202020204" pitchFamily="34" charset="0"/>
-                          <a:ea typeface="+mn-ea"/>
-                          <a:cs typeface="+mn-cs"/>
-                        </a:rPr>
-                        <a:t>de </a:t>
-                      </a:r>
-                      <a:r>
-                        <a:rPr sz="1600" b="0" kern="1200" dirty="0" err="1">
-                          <a:solidFill>
-                            <a:schemeClr val="tx1"/>
-                          </a:solidFill>
-                          <a:latin typeface="Aptos Light" panose="020B0004020202020204" pitchFamily="34" charset="0"/>
-                          <a:ea typeface="+mn-ea"/>
-                          <a:cs typeface="+mn-cs"/>
-                        </a:rPr>
-                        <a:t>lectura</a:t>
-                      </a:r>
-                      <a:r>
-                        <a:rPr sz="1600" b="0" kern="1200" dirty="0">
-                          <a:solidFill>
-                            <a:schemeClr val="tx1"/>
-                          </a:solidFill>
-                          <a:latin typeface="Aptos Light" panose="020B0004020202020204" pitchFamily="34" charset="0"/>
-                          <a:ea typeface="+mn-ea"/>
-                          <a:cs typeface="+mn-cs"/>
-                        </a:rPr>
-                        <a:t> </a:t>
-                      </a:r>
-                      <a:r>
-                        <a:rPr sz="1600" b="0" kern="1200" dirty="0" err="1">
-                          <a:solidFill>
-                            <a:schemeClr val="tx1"/>
-                          </a:solidFill>
-                          <a:latin typeface="Aptos Light" panose="020B0004020202020204" pitchFamily="34" charset="0"/>
-                          <a:ea typeface="+mn-ea"/>
-                          <a:cs typeface="+mn-cs"/>
-                        </a:rPr>
-                        <a:t>en</a:t>
-                      </a:r>
-                      <a:r>
-                        <a:rPr sz="1600" b="0" kern="1200" dirty="0">
-                          <a:solidFill>
-                            <a:schemeClr val="tx1"/>
-                          </a:solidFill>
-                          <a:latin typeface="Aptos Light" panose="020B0004020202020204" pitchFamily="34" charset="0"/>
-                          <a:ea typeface="+mn-ea"/>
-                          <a:cs typeface="+mn-cs"/>
-                        </a:rPr>
-                        <a:t> el </a:t>
-                      </a:r>
-                      <a:r>
-                        <a:rPr sz="1600" b="0" kern="1200" dirty="0" err="1">
-                          <a:solidFill>
-                            <a:schemeClr val="tx1"/>
-                          </a:solidFill>
-                          <a:latin typeface="Aptos Light" panose="020B0004020202020204" pitchFamily="34" charset="0"/>
-                          <a:ea typeface="+mn-ea"/>
-                          <a:cs typeface="+mn-cs"/>
-                        </a:rPr>
-                        <a:t>tiempo</a:t>
-                      </a:r>
-                      <a:r>
-                        <a:rPr sz="1600" b="0" kern="1200" dirty="0">
-                          <a:solidFill>
-                            <a:schemeClr val="tx1"/>
-                          </a:solidFill>
-                          <a:latin typeface="Aptos Light" panose="020B0004020202020204" pitchFamily="34" charset="0"/>
-                          <a:ea typeface="+mn-ea"/>
-                          <a:cs typeface="+mn-cs"/>
-                        </a:rPr>
-                        <a:t>.</a:t>
-                      </a:r>
+                        <a:t>: un médico ajeno leyó (200) y modificó (204) informes y grabaciones de voz de pacientes de otro médico.</a:t>
+                      </a:r>
+                      <a:endParaRPr sz="1600" b="0" kern="1200" dirty="0">
+                        <a:solidFill>
+                          <a:schemeClr val="tx1"/>
+                        </a:solidFill>
+                        <a:latin typeface="Aptos Light" panose="020B0004020202020204" pitchFamily="34" charset="0"/>
+                        <a:ea typeface="+mn-ea"/>
+                        <a:cs typeface="+mn-cs"/>
+                      </a:endParaRPr>
+                    </a:p>
+                  </a:txBody>
+                  <a:tcPr>
+                    <a:lnL w="12700" cap="flat" cmpd="sng" algn="ctr">
+                      <a:solidFill>
+                        <a:schemeClr val="tx1"/>
+                      </a:solidFill>
+                      <a:prstDash val="solid"/>
+                      <a:round/>
+                      <a:headEnd type="none" w="med" len="med"/>
+                      <a:tailEnd type="none" w="med" len="med"/>
+                    </a:lnL>
+                    <a:lnR w="12700" cap="flat" cmpd="sng" algn="ctr">
+                      <a:solidFill>
+                        <a:schemeClr val="tx1"/>
+                      </a:solidFill>
+                      <a:prstDash val="solid"/>
+                      <a:round/>
+                      <a:headEnd type="none" w="med" len="med"/>
+                      <a:tailEnd type="none" w="med" len="med"/>
+                    </a:lnR>
+                    <a:lnT w="12700" cap="flat" cmpd="sng" algn="ctr">
+                      <a:solidFill>
+                        <a:schemeClr val="tx1"/>
+                      </a:solidFill>
+                      <a:prstDash val="solid"/>
+                      <a:round/>
+                      <a:headEnd type="none" w="med" len="med"/>
+                      <a:tailEnd type="none" w="med" len="med"/>
+                    </a:lnT>
+                    <a:lnB w="12700" cap="flat" cmpd="sng" algn="ctr">
+                      <a:solidFill>
+                        <a:schemeClr val="tx1"/>
+                      </a:solidFill>
+                      <a:prstDash val="solid"/>
+                      <a:round/>
+                      <a:headEnd type="none" w="med" len="med"/>
+                      <a:tailEnd type="none" w="med" len="med"/>
+                    </a:lnB>
+                    <a:solidFill>
+                      <a:schemeClr val="bg1"/>
+                    </a:solidFill>
+                  </a:tcPr>
+                </a:tc>
+                <a:tc>
+                  <a:txBody>
+                    <a:bodyPr/>
+                    <a:lstStyle/>
+                    <a:p>
+                      <a:pPr marL="0" algn="just" defTabSz="457200" rtl="0" eaLnBrk="1" latinLnBrk="0" hangingPunct="1"/>
+                      <a:r>
+                        <a:rPr lang="es-ES" sz="1600" b="0" kern="1200" dirty="0">
+                          <a:solidFill>
+                            <a:schemeClr val="tx1"/>
+                          </a:solidFill>
+                          <a:latin typeface="Aptos Light" panose="020B0004020202020204" pitchFamily="34" charset="0"/>
+                          <a:ea typeface="+mn-ea"/>
+                          <a:cs typeface="+mn-cs"/>
+                        </a:rPr>
+                        <a:t>Verificación de propiedad por objeto </a:t>
+                      </a:r>
+                      <a:r>
+                        <a:rPr lang="es-ES" sz="1600" b="1" kern="1200" dirty="0">
+                          <a:solidFill>
+                            <a:schemeClr val="tx1"/>
+                          </a:solidFill>
+                          <a:latin typeface="Aptos Light" panose="020B0004020202020204" pitchFamily="34" charset="0"/>
+                          <a:ea typeface="+mn-ea"/>
+                          <a:cs typeface="+mn-cs"/>
+                        </a:rPr>
+                        <a:t>+ 224 líneas de test de aislamiento.</a:t>
+                      </a:r>
+                      <a:r>
+                        <a:rPr lang="es-ES" sz="1600" b="0" kern="1200" dirty="0">
+                          <a:solidFill>
+                            <a:schemeClr val="tx1"/>
+                          </a:solidFill>
+                          <a:latin typeface="Aptos Light" panose="020B0004020202020204" pitchFamily="34" charset="0"/>
+                          <a:ea typeface="+mn-ea"/>
+                          <a:cs typeface="+mn-cs"/>
+                        </a:rPr>
+                        <a:t> Hallado en segunda auditoria (revisión)</a:t>
+                      </a:r>
+                      <a:endParaRPr sz="1600" b="1" kern="1200" dirty="0">
+                        <a:solidFill>
+                          <a:schemeClr val="tx1"/>
+                        </a:solidFill>
+                        <a:latin typeface="Aptos Light" panose="020B0004020202020204" pitchFamily="34" charset="0"/>
+                        <a:ea typeface="+mn-ea"/>
+                        <a:cs typeface="+mn-cs"/>
+                      </a:endParaRPr>
                     </a:p>
                   </a:txBody>
                   <a:tcPr>
@@ -6685,18 +6689,37 @@
                     <a:bodyPr/>
                     <a:lstStyle/>
                     <a:p>
-                      <a:pPr algn="ctr"/>
-                      <a:r>
-                        <a:rPr sz="1600" b="0" kern="1200">
-                          <a:solidFill>
-                            <a:schemeClr val="tx1"/>
-                          </a:solidFill>
-                          <a:latin typeface="Aptos Light" panose="020B0004020202020204" pitchFamily="34" charset="0"/>
-                          <a:ea typeface="+mn-ea"/>
-                          <a:cs typeface="+mn-cs"/>
-                        </a:rPr>
-                        <a:t>Escritura</a:t>
-                      </a:r>
+                      <a:pPr marL="0" algn="l" defTabSz="457200" rtl="0" eaLnBrk="1" latinLnBrk="0" hangingPunct="1"/>
+                      <a:r>
+                        <a:rPr lang="es-ES" sz="1600" b="1" kern="1200" dirty="0">
+                          <a:solidFill>
+                            <a:schemeClr val="tx1"/>
+                          </a:solidFill>
+                          <a:latin typeface="Aptos Light" panose="020B0004020202020204" pitchFamily="34" charset="0"/>
+                          <a:ea typeface="+mn-ea"/>
+                          <a:cs typeface="+mn-cs"/>
+                        </a:rPr>
+                        <a:t>A03</a:t>
+                      </a:r>
+                      <a:r>
+                        <a:rPr lang="es-ES" sz="1600" b="0" kern="1200" dirty="0">
+                          <a:solidFill>
+                            <a:schemeClr val="tx1"/>
+                          </a:solidFill>
+                          <a:latin typeface="Aptos Light" panose="020B0004020202020204" pitchFamily="34" charset="0"/>
+                          <a:ea typeface="+mn-ea"/>
+                          <a:cs typeface="+mn-cs"/>
+                        </a:rPr>
+                        <a:t> Dependencias</a:t>
+                      </a:r>
+                      <a:endParaRPr sz="1600" b="0" kern="1200" dirty="0">
+                        <a:solidFill>
+                          <a:schemeClr val="tx1"/>
+                        </a:solidFill>
+                        <a:latin typeface="Aptos Light" panose="020B0004020202020204" pitchFamily="34" charset="0"/>
+                        <a:ea typeface="+mn-ea"/>
+                        <a:cs typeface="+mn-cs"/>
+                      </a:endParaRPr>
                     </a:p>
                   </a:txBody>
                   <a:tcPr>
@@ -6737,18 +6760,7 @@
                     <a:bodyPr/>
                     <a:lstStyle/>
                     <a:p>
-                      <a:pPr algn="ctr"/>
-                      <a:r>
-                        <a:rPr sz="1600" b="0" kern="1200" dirty="0">
-                          <a:solidFill>
-                            <a:schemeClr val="tx1"/>
-                          </a:solidFill>
-                          <a:latin typeface="Aptos Light" panose="020B0004020202020204" pitchFamily="34" charset="0"/>
-                          <a:ea typeface="+mn-ea"/>
-                          <a:cs typeface="+mn-cs"/>
-                        </a:rPr>
-                        <a:t>Progreso </a:t>
-                      </a:r>
+                      <a:pPr marL="0" algn="just" defTabSz="457200" rtl="0" eaLnBrk="1" latinLnBrk="0" hangingPunct="1"/>
                       <a:r>
                         <a:rPr lang="es-ES" sz="1600" b="0" kern="1200" dirty="0">
                           <a:solidFill>
@@ -6758,30 +6770,66 @@
                           <a:ea typeface="+mn-ea"/>
                           <a:cs typeface="+mn-cs"/>
                         </a:rPr>
-                        <a:t>en técnicas </a:t>
-                      </a:r>
-                      <a:r>
-                        <a:rPr sz="1600" b="0" kern="1200" dirty="0">
-                          <a:solidFill>
-                            <a:schemeClr val="tx1"/>
-                          </a:solidFill>
-                          <a:latin typeface="Aptos Light" panose="020B0004020202020204" pitchFamily="34" charset="0"/>
-                          <a:ea typeface="+mn-ea"/>
-                          <a:cs typeface="+mn-cs"/>
-                        </a:rPr>
-                        <a:t>de </a:t>
-                      </a:r>
-                      <a:r>
-                        <a:rPr sz="1600" b="0" kern="1200" dirty="0" err="1">
-                          <a:solidFill>
-                            <a:schemeClr val="tx1"/>
-                          </a:solidFill>
-                          <a:latin typeface="Aptos Light" panose="020B0004020202020204" pitchFamily="34" charset="0"/>
-                          <a:ea typeface="+mn-ea"/>
-                          <a:cs typeface="+mn-cs"/>
-                        </a:rPr>
-                        <a:t>escritura</a:t>
-                      </a:r>
+                        <a:t>Sin escaneo de vulnerabilidades; dependencias sin fijar.</a:t>
+                      </a:r>
+                      <a:endParaRPr sz="1600" b="0" kern="1200" dirty="0">
+                        <a:solidFill>
+                          <a:schemeClr val="tx1"/>
+                        </a:solidFill>
+                        <a:latin typeface="Aptos Light" panose="020B0004020202020204" pitchFamily="34" charset="0"/>
+                        <a:ea typeface="+mn-ea"/>
+                        <a:cs typeface="+mn-cs"/>
+                      </a:endParaRPr>
+                    </a:p>
+                  </a:txBody>
+                  <a:tcPr>
+                    <a:lnL w="12700" cap="flat" cmpd="sng" algn="ctr">
+                      <a:solidFill>
+                        <a:schemeClr val="tx1"/>
+                      </a:solidFill>
+                      <a:prstDash val="solid"/>
+                      <a:round/>
+                      <a:headEnd type="none" w="med" len="med"/>
+                      <a:tailEnd type="none" w="med" len="med"/>
+                    </a:lnL>
+                    <a:lnR w="12700" cap="flat" cmpd="sng" algn="ctr">
+                      <a:solidFill>
+                        <a:schemeClr val="tx1"/>
+                      </a:solidFill>
+                      <a:prstDash val="solid"/>
+                      <a:round/>
+                      <a:headEnd type="none" w="med" len="med"/>
+                      <a:tailEnd type="none" w="med" len="med"/>
+                    </a:lnR>
+                    <a:lnT w="12700" cap="flat" cmpd="sng" algn="ctr">
+                      <a:solidFill>
+                        <a:schemeClr val="tx1"/>
+                      </a:solidFill>
+                      <a:prstDash val="solid"/>
+                      <a:round/>
+                      <a:headEnd type="none" w="med" len="med"/>
+                      <a:tailEnd type="none" w="med" len="med"/>
+                    </a:lnT>
+                    <a:lnB w="12700" cap="flat" cmpd="sng" algn="ctr">
+                      <a:solidFill>
+                        <a:schemeClr val="tx1"/>
+                      </a:solidFill>
+                      <a:prstDash val="solid"/>
+                      <a:round/>
+                      <a:headEnd type="none" w="med" len="med"/>
+                      <a:tailEnd type="none" w="med" len="med"/>
+                    </a:lnB>
+                    <a:solidFill>
+                      <a:schemeClr val="bg1"/>
+                    </a:solidFill>
+                  </a:tcPr>
+                </a:tc>
+                <a:tc>
+                  <a:txBody>
+                    <a:bodyPr/>
+                    <a:lstStyle/>
+                    <a:p>
+                      <a:pPr marL="0" algn="just" defTabSz="457200" rtl="0" eaLnBrk="1" latinLnBrk="0" hangingPunct="1"/>
                       <a:r>
                         <a:rPr lang="es-ES" sz="1600" b="0" kern="1200" dirty="0">
                           <a:solidFill>
@@ -6791,7 +6839,51 @@
                           <a:ea typeface="+mn-ea"/>
                           <a:cs typeface="+mn-cs"/>
                         </a:rPr>
-                        <a:t> y </a:t>
+                        <a:t>SCA en CI → </a:t>
+                      </a:r>
+                      <a:r>
+                        <a:rPr lang="es-ES" sz="1600" b="1" kern="1200" dirty="0">
+                          <a:solidFill>
+                            <a:schemeClr val="tx1"/>
+                          </a:solidFill>
+                          <a:latin typeface="Aptos Light" panose="020B0004020202020204" pitchFamily="34" charset="0"/>
+                          <a:ea typeface="+mn-ea"/>
+                          <a:cs typeface="+mn-cs"/>
+                        </a:rPr>
+                        <a:t>4 </a:t>
+                      </a:r>
+                      <a:r>
+                        <a:rPr lang="es-ES" sz="1600" b="1" kern="1200" dirty="0" err="1">
+                          <a:solidFill>
+                            <a:schemeClr val="tx1"/>
+                          </a:solidFill>
+                          <a:latin typeface="Aptos Light" panose="020B0004020202020204" pitchFamily="34" charset="0"/>
+                          <a:ea typeface="+mn-ea"/>
+                          <a:cs typeface="+mn-cs"/>
+                        </a:rPr>
+                        <a:t>CVEs</a:t>
+                      </a:r>
+                      <a:r>
+                        <a:rPr lang="es-ES" sz="1600" b="1" kern="1200" dirty="0">
+                          <a:solidFill>
+                            <a:schemeClr val="tx1"/>
+                          </a:solidFill>
+                          <a:latin typeface="Aptos Light" panose="020B0004020202020204" pitchFamily="34" charset="0"/>
+                          <a:ea typeface="+mn-ea"/>
+                          <a:cs typeface="+mn-cs"/>
+                        </a:rPr>
+                        <a:t> reales</a:t>
+                      </a:r>
+                      <a:r>
+                        <a:rPr lang="es-ES" sz="1600" b="0" kern="1200" dirty="0">
+                          <a:solidFill>
+                            <a:schemeClr val="tx1"/>
+                          </a:solidFill>
+                          <a:latin typeface="Aptos Light" panose="020B0004020202020204" pitchFamily="34" charset="0"/>
+                          <a:ea typeface="+mn-ea"/>
+                          <a:cs typeface="+mn-cs"/>
+                        </a:rPr>
+                        <a:t>: 2 cerrados, 1 actualizado, 1 sin </a:t>
                       </a:r>
                       <a:r>
                         <a:rPr lang="es-ES" sz="1600" b="0" kern="1200" dirty="0" err="1">
@@ -6802,19 +6894,311 @@
                           <a:ea typeface="+mn-ea"/>
                           <a:cs typeface="+mn-cs"/>
                         </a:rPr>
-                        <a:t>expresion</a:t>
-                      </a:r>
-                      <a:r>
-                        <a:rPr sz="1600" b="0" kern="1200" dirty="0">
-                          <a:solidFill>
-                            <a:schemeClr val="tx1"/>
-                          </a:solidFill>
-                          <a:latin typeface="Aptos Light" panose="020B0004020202020204" pitchFamily="34" charset="0"/>
-                          <a:ea typeface="+mn-ea"/>
-                          <a:cs typeface="+mn-cs"/>
-                        </a:rPr>
-                        <a:t>.</a:t>
-                      </a:r>
+                        <a:t>fix</a:t>
+                      </a:r>
+                      <a:r>
+                        <a:rPr lang="es-ES" sz="1600" b="0" kern="1200" dirty="0">
+                          <a:solidFill>
+                            <a:schemeClr val="tx1"/>
+                          </a:solidFill>
+                          <a:latin typeface="Aptos Light" panose="020B0004020202020204" pitchFamily="34" charset="0"/>
+                          <a:ea typeface="+mn-ea"/>
+                          <a:cs typeface="+mn-cs"/>
+                        </a:rPr>
+                        <a:t> documentado y aceptado.</a:t>
+                      </a:r>
+                      <a:endParaRPr sz="1600" b="0" kern="1200" dirty="0">
+                        <a:solidFill>
+                          <a:schemeClr val="tx1"/>
+                        </a:solidFill>
+                        <a:latin typeface="Aptos Light" panose="020B0004020202020204" pitchFamily="34" charset="0"/>
+                        <a:ea typeface="+mn-ea"/>
+                        <a:cs typeface="+mn-cs"/>
+                      </a:endParaRPr>
+                    </a:p>
+                  </a:txBody>
+                  <a:tcPr>
+                    <a:lnL w="12700" cap="flat" cmpd="sng" algn="ctr">
+                      <a:solidFill>
+                        <a:schemeClr val="tx1"/>
+                      </a:solidFill>
+                      <a:prstDash val="solid"/>
+                      <a:round/>
+                      <a:headEnd type="none" w="med" len="med"/>
+                      <a:tailEnd type="none" w="med" len="med"/>
+                    </a:lnL>
+                    <a:lnT w="12700" cap="flat" cmpd="sng" algn="ctr">
+                      <a:solidFill>
+                        <a:schemeClr val="tx1"/>
+                      </a:solidFill>
+                      <a:prstDash val="solid"/>
+                      <a:round/>
+                      <a:headEnd type="none" w="med" len="med"/>
+                      <a:tailEnd type="none" w="med" len="med"/>
+                    </a:lnT>
+                    <a:lnB w="12700" cap="flat" cmpd="sng" algn="ctr">
+                      <a:solidFill>
+                        <a:schemeClr val="tx1"/>
+                      </a:solidFill>
+                      <a:prstDash val="solid"/>
+                      <a:round/>
+                      <a:headEnd type="none" w="med" len="med"/>
+                      <a:tailEnd type="none" w="med" len="med"/>
+                    </a:lnB>
+                    <a:solidFill>
+                      <a:schemeClr val="bg1"/>
+                    </a:solidFill>
+                  </a:tcPr>
+                </a:tc>
+                <a:extLst>
+                  <a:ext uri="{0D108BD9-81ED-4DB2-BD59-A6C34878D82A}">
+                    <a16:rowId xmlns:a16="http://schemas.microsoft.com/office/drawing/2014/main" val="2872972931"/>
+                  </a:ext>
+                </a:extLst>
+              </a:tr>
+              <a:tr h="365760">
+                <a:tc>
+                  <a:txBody>
+                    <a:bodyPr/>
+                    <a:lstStyle/>
+                    <a:p>
+                      <a:pPr marL="0" algn="l" defTabSz="457200" rtl="0" eaLnBrk="1" latinLnBrk="0" hangingPunct="1"/>
+                      <a:r>
+                        <a:rPr lang="es-ES" sz="1600" b="1" kern="1200" dirty="0">
+                          <a:solidFill>
+                            <a:schemeClr val="tx1"/>
+                          </a:solidFill>
+                          <a:latin typeface="Aptos Light" panose="020B0004020202020204" pitchFamily="34" charset="0"/>
+                          <a:ea typeface="+mn-ea"/>
+                          <a:cs typeface="+mn-cs"/>
+                        </a:rPr>
+                        <a:t>A04</a:t>
+                      </a:r>
+                      <a:r>
+                        <a:rPr lang="es-ES" sz="1600" b="0" kern="1200" dirty="0">
+                          <a:solidFill>
+                            <a:schemeClr val="tx1"/>
+                          </a:solidFill>
+                          <a:latin typeface="Aptos Light" panose="020B0004020202020204" pitchFamily="34" charset="0"/>
+                          <a:ea typeface="+mn-ea"/>
+                          <a:cs typeface="+mn-cs"/>
+                        </a:rPr>
+                        <a:t> Frontera IA</a:t>
+                      </a:r>
+                      <a:endParaRPr sz="1600" b="0" kern="1200" dirty="0">
+                        <a:solidFill>
+                          <a:schemeClr val="tx1"/>
+                        </a:solidFill>
+                        <a:latin typeface="Aptos Light" panose="020B0004020202020204" pitchFamily="34" charset="0"/>
+                        <a:ea typeface="+mn-ea"/>
+                        <a:cs typeface="+mn-cs"/>
+                      </a:endParaRPr>
+                    </a:p>
+                  </a:txBody>
+                  <a:tcPr>
+                    <a:lnR w="12700" cap="flat" cmpd="sng" algn="ctr">
+                      <a:solidFill>
+                        <a:schemeClr val="tx1"/>
+                      </a:solidFill>
+                      <a:prstDash val="solid"/>
+                      <a:round/>
+                      <a:headEnd type="none" w="med" len="med"/>
+                      <a:tailEnd type="none" w="med" len="med"/>
+                    </a:lnR>
+                    <a:lnT w="12700" cap="flat" cmpd="sng" algn="ctr">
+                      <a:solidFill>
+                        <a:schemeClr val="tx1"/>
+                      </a:solidFill>
+                      <a:prstDash val="solid"/>
+                      <a:round/>
+                      <a:headEnd type="none" w="med" len="med"/>
+                      <a:tailEnd type="none" w="med" len="med"/>
+                    </a:lnT>
+                    <a:lnB w="12700" cap="flat" cmpd="sng" algn="ctr">
+                      <a:solidFill>
+                        <a:schemeClr val="tx1"/>
+                      </a:solidFill>
+                      <a:prstDash val="solid"/>
+                      <a:round/>
+                      <a:headEnd type="none" w="med" len="med"/>
+                      <a:tailEnd type="none" w="med" len="med"/>
+                    </a:lnB>
+                    <a:solidFill>
+                      <a:schemeClr val="bg1"/>
+                    </a:solidFill>
+                  </a:tcPr>
+                </a:tc>
+                <a:tc>
+                  <a:txBody>
+                    <a:bodyPr/>
+                    <a:lstStyle/>
+                    <a:p>
+                      <a:pPr marL="0" algn="just" defTabSz="457200" rtl="0" eaLnBrk="1" latinLnBrk="0" hangingPunct="1"/>
+                      <a:r>
+                        <a:rPr lang="es-ES" sz="1600" b="0" kern="1200" dirty="0">
+                          <a:solidFill>
+                            <a:schemeClr val="tx1"/>
+                          </a:solidFill>
+                          <a:latin typeface="Aptos Light" panose="020B0004020202020204" pitchFamily="34" charset="0"/>
+                          <a:ea typeface="+mn-ea"/>
+                          <a:cs typeface="+mn-cs"/>
+                        </a:rPr>
+                        <a:t>El aislamiento </a:t>
+                      </a:r>
+                      <a:r>
+                        <a:rPr lang="es-ES" sz="1600" b="0" kern="1200" dirty="0" err="1">
+                          <a:solidFill>
+                            <a:schemeClr val="tx1"/>
+                          </a:solidFill>
+                          <a:latin typeface="Aptos Light" panose="020B0004020202020204" pitchFamily="34" charset="0"/>
+                          <a:ea typeface="+mn-ea"/>
+                          <a:cs typeface="+mn-cs"/>
+                        </a:rPr>
+                        <a:t>identidad↔métricas</a:t>
+                      </a:r>
+                      <a:r>
+                        <a:rPr lang="es-ES" sz="1600" b="0" kern="1200" dirty="0">
+                          <a:solidFill>
+                            <a:schemeClr val="tx1"/>
+                          </a:solidFill>
+                          <a:latin typeface="Aptos Light" panose="020B0004020202020204" pitchFamily="34" charset="0"/>
+                          <a:ea typeface="+mn-ea"/>
+                          <a:cs typeface="+mn-cs"/>
+                        </a:rPr>
+                        <a:t> dependía de la disciplina del código.</a:t>
+                      </a:r>
+                      <a:endParaRPr sz="1600" b="0" kern="1200" dirty="0">
+                        <a:solidFill>
+                          <a:schemeClr val="tx1"/>
+                        </a:solidFill>
+                        <a:latin typeface="Aptos Light" panose="020B0004020202020204" pitchFamily="34" charset="0"/>
+                        <a:ea typeface="+mn-ea"/>
+                        <a:cs typeface="+mn-cs"/>
+                      </a:endParaRPr>
+                    </a:p>
+                  </a:txBody>
+                  <a:tcPr>
+                    <a:lnL w="12700" cap="flat" cmpd="sng" algn="ctr">
+                      <a:solidFill>
+                        <a:schemeClr val="tx1"/>
+                      </a:solidFill>
+                      <a:prstDash val="solid"/>
+                      <a:round/>
+                      <a:headEnd type="none" w="med" len="med"/>
+                      <a:tailEnd type="none" w="med" len="med"/>
+                    </a:lnL>
+                    <a:lnR w="12700" cap="flat" cmpd="sng" algn="ctr">
+                      <a:solidFill>
+                        <a:schemeClr val="tx1"/>
+                      </a:solidFill>
+                      <a:prstDash val="solid"/>
+                      <a:round/>
+                      <a:headEnd type="none" w="med" len="med"/>
+                      <a:tailEnd type="none" w="med" len="med"/>
+                    </a:lnR>
+                    <a:lnT w="12700" cap="flat" cmpd="sng" algn="ctr">
+                      <a:solidFill>
+                        <a:schemeClr val="tx1"/>
+                      </a:solidFill>
+                      <a:prstDash val="solid"/>
+                      <a:round/>
+                      <a:headEnd type="none" w="med" len="med"/>
+                      <a:tailEnd type="none" w="med" len="med"/>
+                    </a:lnT>
+                    <a:lnB w="12700" cap="flat" cmpd="sng" algn="ctr">
+                      <a:solidFill>
+                        <a:schemeClr val="tx1"/>
+                      </a:solidFill>
+                      <a:prstDash val="solid"/>
+                      <a:round/>
+                      <a:headEnd type="none" w="med" len="med"/>
+                      <a:tailEnd type="none" w="med" len="med"/>
+                    </a:lnB>
+                    <a:solidFill>
+                      <a:schemeClr val="bg1"/>
+                    </a:solidFill>
+                  </a:tcPr>
+                </a:tc>
+                <a:tc>
+                  <a:txBody>
+                    <a:bodyPr/>
+                    <a:lstStyle/>
+                    <a:p>
+                      <a:pPr marL="0" algn="just" defTabSz="457200" rtl="0" eaLnBrk="1" latinLnBrk="0" hangingPunct="1"/>
+                      <a:r>
+                        <a:rPr lang="es-ES" sz="1600" b="0" kern="1200" dirty="0">
+                          <a:solidFill>
+                            <a:schemeClr val="tx1"/>
+                          </a:solidFill>
+                          <a:latin typeface="Aptos Light" panose="020B0004020202020204" pitchFamily="34" charset="0"/>
+                          <a:ea typeface="+mn-ea"/>
+                          <a:cs typeface="+mn-cs"/>
+                        </a:rPr>
+                        <a:t>Rol </a:t>
+                      </a:r>
+                      <a:r>
+                        <a:rPr lang="es-ES" sz="1600" b="0" kern="1200" dirty="0" err="1">
+                          <a:solidFill>
+                            <a:schemeClr val="tx1"/>
+                          </a:solidFill>
+                          <a:latin typeface="Aptos Light" panose="020B0004020202020204" pitchFamily="34" charset="0"/>
+                          <a:ea typeface="+mn-ea"/>
+                          <a:cs typeface="+mn-cs"/>
+                        </a:rPr>
+                        <a:t>ftm_ai</a:t>
+                      </a:r>
+                      <a:r>
+                        <a:rPr lang="es-ES" sz="1600" b="0" kern="1200" dirty="0">
+                          <a:solidFill>
+                            <a:schemeClr val="tx1"/>
+                          </a:solidFill>
+                          <a:latin typeface="Aptos Light" panose="020B0004020202020204" pitchFamily="34" charset="0"/>
+                          <a:ea typeface="+mn-ea"/>
+                          <a:cs typeface="+mn-cs"/>
+                        </a:rPr>
+                        <a:t> con RLS: sólo ve métricas </a:t>
+                      </a:r>
+                      <a:r>
+                        <a:rPr lang="es-ES" sz="1600" b="0" kern="1200" dirty="0" err="1">
+                          <a:solidFill>
+                            <a:schemeClr val="tx1"/>
+                          </a:solidFill>
+                          <a:latin typeface="Aptos Light" panose="020B0004020202020204" pitchFamily="34" charset="0"/>
+                          <a:ea typeface="+mn-ea"/>
+                          <a:cs typeface="+mn-cs"/>
+                        </a:rPr>
+                        <a:t>seudonimizadas</a:t>
+                      </a:r>
+                      <a:r>
+                        <a:rPr lang="es-ES" sz="1600" b="0" kern="1200" dirty="0">
+                          <a:solidFill>
+                            <a:schemeClr val="tx1"/>
+                          </a:solidFill>
+                          <a:latin typeface="Aptos Light" panose="020B0004020202020204" pitchFamily="34" charset="0"/>
+                          <a:ea typeface="+mn-ea"/>
+                          <a:cs typeface="+mn-cs"/>
+                        </a:rPr>
+                        <a:t>. </a:t>
+                      </a:r>
+                      <a:r>
+                        <a:rPr lang="es-ES" sz="1600" b="1" kern="1200" dirty="0">
+                          <a:solidFill>
+                            <a:schemeClr val="tx1"/>
+                          </a:solidFill>
+                          <a:latin typeface="Aptos Light" panose="020B0004020202020204" pitchFamily="34" charset="0"/>
+                          <a:ea typeface="+mn-ea"/>
+                          <a:cs typeface="+mn-cs"/>
+                        </a:rPr>
+                        <a:t>La BD lo impide, no el código.</a:t>
+                      </a:r>
+                      <a:endParaRPr sz="1600" b="1" kern="1200" dirty="0">
+                        <a:solidFill>
+                          <a:schemeClr val="tx1"/>
+                        </a:solidFill>
+                        <a:latin typeface="Aptos Light" panose="020B0004020202020204" pitchFamily="34" charset="0"/>
+                        <a:ea typeface="+mn-ea"/>
+                        <a:cs typeface="+mn-cs"/>
+                      </a:endParaRPr>
                     </a:p>
                   </a:txBody>
                   <a:tcPr>
@@ -6862,18 +7246,37 @@
                     <a:bodyPr/>
                     <a:lstStyle/>
                     <a:p>
-                      <a:pPr algn="ctr"/>
-                      <a:r>
-                        <a:rPr sz="1600" b="0" kern="1200">
-                          <a:solidFill>
-                            <a:schemeClr val="tx1"/>
-                          </a:solidFill>
-                          <a:latin typeface="Aptos Light" panose="020B0004020202020204" pitchFamily="34" charset="0"/>
-                          <a:ea typeface="+mn-ea"/>
-                          <a:cs typeface="+mn-cs"/>
-                        </a:rPr>
-                        <a:t>Exposición oral</a:t>
-                      </a:r>
+                      <a:pPr marL="0" algn="l" defTabSz="457200" rtl="0" eaLnBrk="1" latinLnBrk="0" hangingPunct="1"/>
+                      <a:r>
+                        <a:rPr lang="es-ES" sz="1600" b="1" kern="1200" dirty="0">
+                          <a:solidFill>
+                            <a:schemeClr val="tx1"/>
+                          </a:solidFill>
+                          <a:latin typeface="Aptos Light" panose="020B0004020202020204" pitchFamily="34" charset="0"/>
+                          <a:ea typeface="+mn-ea"/>
+                          <a:cs typeface="+mn-cs"/>
+                        </a:rPr>
+                        <a:t>A09</a:t>
+                      </a:r>
+                      <a:r>
+                        <a:rPr lang="es-ES" sz="1600" b="0" kern="1200" dirty="0">
+                          <a:solidFill>
+                            <a:schemeClr val="tx1"/>
+                          </a:solidFill>
+                          <a:latin typeface="Aptos Light" panose="020B0004020202020204" pitchFamily="34" charset="0"/>
+                          <a:ea typeface="+mn-ea"/>
+                          <a:cs typeface="+mn-cs"/>
+                        </a:rPr>
+                        <a:t> Auditoría</a:t>
+                      </a:r>
+                      <a:endParaRPr sz="1600" b="0" kern="1200" dirty="0">
+                        <a:solidFill>
+                          <a:schemeClr val="tx1"/>
+                        </a:solidFill>
+                        <a:latin typeface="Aptos Light" panose="020B0004020202020204" pitchFamily="34" charset="0"/>
+                        <a:ea typeface="+mn-ea"/>
+                        <a:cs typeface="+mn-cs"/>
+                      </a:endParaRPr>
                     </a:p>
                   </a:txBody>
                   <a:tcPr>
@@ -6914,40 +7317,7 @@
                     <a:bodyPr/>
                     <a:lstStyle/>
                     <a:p>
-                      <a:pPr algn="ctr"/>
-                      <a:r>
-                        <a:rPr sz="1600" b="0" kern="1200" dirty="0" err="1">
-                          <a:solidFill>
-                            <a:schemeClr val="tx1"/>
-                          </a:solidFill>
-                          <a:latin typeface="Aptos Light" panose="020B0004020202020204" pitchFamily="34" charset="0"/>
-                          <a:ea typeface="+mn-ea"/>
-                          <a:cs typeface="+mn-cs"/>
-                        </a:rPr>
-                        <a:t>Evaluación</a:t>
-                      </a:r>
-                      <a:r>
-                        <a:rPr sz="1600" b="0" kern="1200" dirty="0">
-                          <a:solidFill>
-                            <a:schemeClr val="tx1"/>
-                          </a:solidFill>
-                          <a:latin typeface="Aptos Light" panose="020B0004020202020204" pitchFamily="34" charset="0"/>
-                          <a:ea typeface="+mn-ea"/>
-                          <a:cs typeface="+mn-cs"/>
-                        </a:rPr>
-                        <a:t> de </a:t>
-                      </a:r>
-                      <a:r>
-                        <a:rPr sz="1600" b="0" kern="1200" dirty="0" err="1">
-                          <a:solidFill>
-                            <a:schemeClr val="tx1"/>
-                          </a:solidFill>
-                          <a:latin typeface="Aptos Light" panose="020B0004020202020204" pitchFamily="34" charset="0"/>
-                          <a:ea typeface="+mn-ea"/>
-                          <a:cs typeface="+mn-cs"/>
-                        </a:rPr>
-                        <a:t>exposiciones</a:t>
-                      </a:r>
+                      <a:pPr marL="0" algn="just" defTabSz="457200" rtl="0" eaLnBrk="1" latinLnBrk="0" hangingPunct="1"/>
                       <a:r>
                         <a:rPr lang="es-ES" sz="1600" b="0" kern="1200" dirty="0">
                           <a:solidFill>
@@ -6957,11 +7327,66 @@
                           <a:ea typeface="+mn-ea"/>
                           <a:cs typeface="+mn-cs"/>
                         </a:rPr>
-                        <a:t> </a:t>
-                      </a:r>
+                        <a:t>Sólo se registraban escrituras: una lectura indebida no dejaba rastro.</a:t>
+                      </a:r>
+                      <a:endParaRPr sz="1600" b="0" kern="1200" dirty="0">
+                        <a:solidFill>
+                          <a:schemeClr val="tx1"/>
+                        </a:solidFill>
+                        <a:latin typeface="Aptos Light" panose="020B0004020202020204" pitchFamily="34" charset="0"/>
+                        <a:ea typeface="+mn-ea"/>
+                        <a:cs typeface="+mn-cs"/>
+                      </a:endParaRPr>
                     </a:p>
+                  </a:txBody>
+                  <a:tcPr>
+                    <a:lnL w="12700" cap="flat" cmpd="sng" algn="ctr">
+                      <a:solidFill>
+                        <a:schemeClr val="tx1"/>
+                      </a:solidFill>
+                      <a:prstDash val="solid"/>
+                      <a:round/>
+                      <a:headEnd type="none" w="med" len="med"/>
+                      <a:tailEnd type="none" w="med" len="med"/>
+                    </a:lnL>
+                    <a:lnR w="12700" cap="flat" cmpd="sng" algn="ctr">
+                      <a:solidFill>
+                        <a:schemeClr val="tx1"/>
+                      </a:solidFill>
+                      <a:prstDash val="solid"/>
+                      <a:round/>
+                      <a:headEnd type="none" w="med" len="med"/>
+                      <a:tailEnd type="none" w="med" len="med"/>
+                    </a:lnR>
+                    <a:lnT w="12700" cap="flat" cmpd="sng" algn="ctr">
+                      <a:solidFill>
+                        <a:schemeClr val="tx1"/>
+                      </a:solidFill>
+                      <a:prstDash val="solid"/>
+                      <a:round/>
+                      <a:headEnd type="none" w="med" len="med"/>
+                      <a:tailEnd type="none" w="med" len="med"/>
+                    </a:lnT>
+                    <a:lnB w="12700" cap="flat" cmpd="sng" algn="ctr">
+                      <a:solidFill>
+                        <a:schemeClr val="tx1"/>
+                      </a:solidFill>
+                      <a:prstDash val="solid"/>
+                      <a:round/>
+                      <a:headEnd type="none" w="med" len="med"/>
+                      <a:tailEnd type="none" w="med" len="med"/>
+                    </a:lnB>
+                    <a:solidFill>
+                      <a:schemeClr val="bg1"/>
+                    </a:solidFill>
+                  </a:tcPr>
+                </a:tc>
+                <a:tc>
+                  <a:txBody>
+                    <a:bodyPr/>
+                    <a:lstStyle/>
                     <a:p>
-                      <a:pPr algn="ctr"/>
+                      <a:pPr marL="0" algn="just" defTabSz="457200" rtl="0" eaLnBrk="1" latinLnBrk="0" hangingPunct="1"/>
                       <a:r>
                         <a:rPr lang="es-ES" sz="1600" b="0" kern="1200" dirty="0">
                           <a:solidFill>
@@ -6971,7 +7396,29 @@
                           <a:ea typeface="+mn-ea"/>
                           <a:cs typeface="+mn-cs"/>
                         </a:rPr>
-                        <a:t>(lenguaje corporal, no verbal…)</a:t>
+                        <a:t>Auditoría de lecturas + accesos </a:t>
+                      </a:r>
+                      <a:r>
+                        <a:rPr lang="es-ES" sz="1600" b="1" kern="1200" dirty="0">
+                          <a:solidFill>
+                            <a:schemeClr val="tx1"/>
+                          </a:solidFill>
+                          <a:latin typeface="Aptos Light" panose="020B0004020202020204" pitchFamily="34" charset="0"/>
+                          <a:ea typeface="+mn-ea"/>
+                          <a:cs typeface="+mn-cs"/>
+                        </a:rPr>
+                        <a:t>denegados</a:t>
+                      </a:r>
+                      <a:r>
+                        <a:rPr lang="es-ES" sz="1600" b="0" kern="1200" dirty="0">
+                          <a:solidFill>
+                            <a:schemeClr val="tx1"/>
+                          </a:solidFill>
+                          <a:latin typeface="Aptos Light" panose="020B0004020202020204" pitchFamily="34" charset="0"/>
+                          <a:ea typeface="+mn-ea"/>
+                          <a:cs typeface="+mn-cs"/>
+                        </a:rPr>
+                        <a:t> (detecta sondeo).</a:t>
                       </a:r>
                       <a:endParaRPr sz="1600" b="0" kern="1200" dirty="0">
                         <a:solidFill>
@@ -7028,29 +7475,37 @@
                     <a:bodyPr/>
                     <a:lstStyle/>
                     <a:p>
-                      <a:pPr algn="ctr"/>
-                      <a:r>
-                        <a:rPr sz="1600" b="0" kern="1200" dirty="0" err="1">
-                          <a:solidFill>
-                            <a:schemeClr val="tx1"/>
-                          </a:solidFill>
-                          <a:latin typeface="Aptos Light" panose="020B0004020202020204" pitchFamily="34" charset="0"/>
-                          <a:ea typeface="+mn-ea"/>
-                          <a:cs typeface="+mn-cs"/>
-                        </a:rPr>
-                        <a:t>Interpretación</a:t>
-                      </a:r>
-                      <a:r>
-                        <a:rPr sz="1600" b="0" kern="1200" dirty="0">
-                          <a:solidFill>
-                            <a:schemeClr val="tx1"/>
-                          </a:solidFill>
-                          <a:latin typeface="Aptos Light" panose="020B0004020202020204" pitchFamily="34" charset="0"/>
-                          <a:ea typeface="+mn-ea"/>
-                          <a:cs typeface="+mn-cs"/>
-                        </a:rPr>
-                        <a:t> musical</a:t>
-                      </a:r>
+                      <a:pPr marL="0" algn="l" defTabSz="457200" rtl="0" eaLnBrk="1" latinLnBrk="0" hangingPunct="1"/>
+                      <a:r>
+                        <a:rPr lang="es-ES" sz="1600" b="1" kern="1200" dirty="0">
+                          <a:solidFill>
+                            <a:schemeClr val="tx1"/>
+                          </a:solidFill>
+                          <a:latin typeface="Aptos Light" panose="020B0004020202020204" pitchFamily="34" charset="0"/>
+                          <a:ea typeface="+mn-ea"/>
+                          <a:cs typeface="+mn-cs"/>
+                        </a:rPr>
+                        <a:t>A05</a:t>
+                      </a:r>
+                      <a:r>
+                        <a:rPr lang="es-ES" sz="1600" b="0" kern="1200" dirty="0">
+                          <a:solidFill>
+                            <a:schemeClr val="tx1"/>
+                          </a:solidFill>
+                          <a:latin typeface="Aptos Light" panose="020B0004020202020204" pitchFamily="34" charset="0"/>
+                          <a:ea typeface="+mn-ea"/>
+                          <a:cs typeface="+mn-cs"/>
+                        </a:rPr>
+                        <a:t> Configuración</a:t>
+                      </a:r>
+                      <a:endParaRPr sz="1600" b="0" kern="1200" dirty="0">
+                        <a:solidFill>
+                          <a:schemeClr val="tx1"/>
+                        </a:solidFill>
+                        <a:latin typeface="Aptos Light" panose="020B0004020202020204" pitchFamily="34" charset="0"/>
+                        <a:ea typeface="+mn-ea"/>
+                        <a:cs typeface="+mn-cs"/>
+                      </a:endParaRPr>
                     </a:p>
                   </a:txBody>
                   <a:tcPr>
@@ -7072,6 +7527,15 @@
                       <a:headEnd type="none" w="med" len="med"/>
                       <a:tailEnd type="none" w="med" len="med"/>
                     </a:lnT>
+                    <a:lnB w="12700" cap="flat" cmpd="sng" algn="ctr">
+                      <a:solidFill>
+                        <a:schemeClr val="tx1"/>
+                      </a:solidFill>
+                      <a:prstDash val="solid"/>
+                      <a:round/>
+                      <a:headEnd type="none" w="med" len="med"/>
+                      <a:tailEnd type="none" w="med" len="med"/>
+                    </a:lnB>
                     <a:solidFill>
                       <a:schemeClr val="bg1"/>
                     </a:solidFill>
@@ -7082,7 +7546,18 @@
                     <a:bodyPr/>
                     <a:lstStyle/>
                     <a:p>
-                      <a:pPr algn="ctr"/>
+                      <a:pPr marL="0" algn="just" defTabSz="457200" rtl="0" eaLnBrk="1" latinLnBrk="0" hangingPunct="1"/>
+                      <a:r>
+                        <a:rPr lang="es-ES" sz="1600" b="0" kern="1200" dirty="0">
+                          <a:solidFill>
+                            <a:schemeClr val="tx1"/>
+                          </a:solidFill>
+                          <a:latin typeface="Aptos Light" panose="020B0004020202020204" pitchFamily="34" charset="0"/>
+                          <a:ea typeface="+mn-ea"/>
+                          <a:cs typeface="+mn-cs"/>
+                        </a:rPr>
+                        <a:t>/</a:t>
+                      </a:r>
                       <a:r>
                         <a:rPr lang="es-ES" sz="1600" b="0" kern="1200" dirty="0" err="1">
                           <a:solidFill>
@@ -7092,7 +7567,7 @@
                           <a:ea typeface="+mn-ea"/>
                           <a:cs typeface="+mn-cs"/>
                         </a:rPr>
-                        <a:t>Evaluacion</a:t>
+                        <a:t>docs</a:t>
                       </a:r>
                       <a:r>
                         <a:rPr lang="es-ES" sz="1600" b="0" kern="1200" dirty="0">
@@ -7103,11 +7578,19 @@
                           <a:ea typeface="+mn-ea"/>
                           <a:cs typeface="+mn-cs"/>
                         </a:rPr>
-                        <a:t> de técnicas de interpretación. </a:t>
-                      </a:r>
-                    </a:p>
-                    <a:p>
-                      <a:pPr algn="ctr"/>
+                        <a:t> y /</a:t>
+                      </a:r>
+                      <a:r>
+                        <a:rPr lang="es-ES" sz="1600" b="0" kern="1200" dirty="0" err="1">
+                          <a:solidFill>
+                            <a:schemeClr val="tx1"/>
+                          </a:solidFill>
+                          <a:latin typeface="Aptos Light" panose="020B0004020202020204" pitchFamily="34" charset="0"/>
+                          <a:ea typeface="+mn-ea"/>
+                          <a:cs typeface="+mn-cs"/>
+                        </a:rPr>
+                        <a:t>openapi.json</a:t>
+                      </a:r>
                       <a:r>
                         <a:rPr lang="es-ES" sz="1600" b="0" kern="1200" dirty="0">
                           <a:solidFill>
@@ -7117,7 +7600,7 @@
                           <a:ea typeface="+mn-ea"/>
                           <a:cs typeface="+mn-cs"/>
                         </a:rPr>
-                        <a:t>Corrección de ritmo, </a:t>
+                        <a:t> abiertos en producción. Consola de </a:t>
                       </a:r>
                       <a:r>
                         <a:rPr lang="es-ES" sz="1600" b="0" kern="1200" dirty="0" err="1">
@@ -7128,7 +7611,7 @@
                           <a:ea typeface="+mn-ea"/>
                           <a:cs typeface="+mn-cs"/>
                         </a:rPr>
-                        <a:t>entoncacion</a:t>
+                        <a:t>Keycloak</a:t>
                       </a:r>
                       <a:r>
                         <a:rPr lang="es-ES" sz="1600" b="0" kern="1200" dirty="0">
@@ -7139,7 +7622,7 @@
                           <a:ea typeface="+mn-ea"/>
                           <a:cs typeface="+mn-cs"/>
                         </a:rPr>
-                        <a:t>…</a:t>
+                        <a:t> accesible desde internet.</a:t>
                       </a:r>
                       <a:endParaRPr sz="1600" b="0" kern="1200" dirty="0">
                         <a:solidFill>
@@ -7161,6 +7644,15 @@
                       <a:headEnd type="none" w="med" len="med"/>
                       <a:tailEnd type="none" w="med" len="med"/>
                     </a:lnL>
+                    <a:lnR w="12700" cap="flat" cmpd="sng" algn="ctr">
+                      <a:solidFill>
+                        <a:schemeClr val="tx1"/>
+                      </a:solidFill>
+                      <a:prstDash val="solid"/>
+                      <a:round/>
+                      <a:headEnd type="none" w="med" len="med"/>
+                      <a:tailEnd type="none" w="med" len="med"/>
+                    </a:lnR>
                     <a:lnT w="12700" cap="flat" cmpd="sng" algn="ctr">
                       <a:solidFill>
                         <a:schemeClr val="tx1"/>
@@ -7170,6 +7662,119 @@
                       <a:headEnd type="none" w="med" len="med"/>
                       <a:tailEnd type="none" w="med" len="med"/>
                     </a:lnT>
+                    <a:lnB w="12700" cap="flat" cmpd="sng" algn="ctr">
+                      <a:solidFill>
+                        <a:schemeClr val="tx1"/>
+                      </a:solidFill>
+                      <a:prstDash val="solid"/>
+                      <a:round/>
+                      <a:headEnd type="none" w="med" len="med"/>
+                      <a:tailEnd type="none" w="med" len="med"/>
+                    </a:lnB>
+                    <a:solidFill>
+                      <a:schemeClr val="bg1"/>
+                    </a:solidFill>
+                  </a:tcPr>
+                </a:tc>
+                <a:tc>
+                  <a:txBody>
+                    <a:bodyPr/>
+                    <a:lstStyle/>
+                    <a:p>
+                      <a:pPr marL="0" algn="just" defTabSz="457200" rtl="0" eaLnBrk="1" latinLnBrk="0" hangingPunct="1"/>
+                      <a:r>
+                        <a:rPr lang="es-ES" sz="1600" b="0" kern="1200" dirty="0">
+                          <a:solidFill>
+                            <a:schemeClr val="tx1"/>
+                          </a:solidFill>
+                          <a:latin typeface="Aptos Light" panose="020B0004020202020204" pitchFamily="34" charset="0"/>
+                          <a:ea typeface="+mn-ea"/>
+                          <a:cs typeface="+mn-cs"/>
+                        </a:rPr>
+                        <a:t>Desactivados en </a:t>
+                      </a:r>
+                      <a:r>
+                        <a:rPr lang="es-ES" sz="1600" b="0" kern="1200" dirty="0" err="1">
+                          <a:solidFill>
+                            <a:schemeClr val="tx1"/>
+                          </a:solidFill>
+                          <a:latin typeface="Aptos Light" panose="020B0004020202020204" pitchFamily="34" charset="0"/>
+                          <a:ea typeface="+mn-ea"/>
+                          <a:cs typeface="+mn-cs"/>
+                        </a:rPr>
+                        <a:t>prod</a:t>
+                      </a:r>
+                      <a:r>
+                        <a:rPr lang="es-ES" sz="1600" b="0" kern="1200" dirty="0">
+                          <a:solidFill>
+                            <a:schemeClr val="tx1"/>
+                          </a:solidFill>
+                          <a:latin typeface="Aptos Light" panose="020B0004020202020204" pitchFamily="34" charset="0"/>
+                          <a:ea typeface="+mn-ea"/>
+                          <a:cs typeface="+mn-cs"/>
+                        </a:rPr>
+                        <a:t>. Consola retirada del proxy público; </a:t>
+                      </a:r>
+                      <a:r>
+                        <a:rPr lang="es-ES" sz="1600" b="0" kern="1200" dirty="0" err="1">
+                          <a:solidFill>
+                            <a:schemeClr val="tx1"/>
+                          </a:solidFill>
+                          <a:latin typeface="Aptos Light" panose="020B0004020202020204" pitchFamily="34" charset="0"/>
+                          <a:ea typeface="+mn-ea"/>
+                          <a:cs typeface="+mn-cs"/>
+                        </a:rPr>
+                        <a:t>admin</a:t>
+                      </a:r>
+                      <a:r>
+                        <a:rPr lang="es-ES" sz="1600" b="0" kern="1200" dirty="0">
+                          <a:solidFill>
+                            <a:schemeClr val="tx1"/>
+                          </a:solidFill>
+                          <a:latin typeface="Aptos Light" panose="020B0004020202020204" pitchFamily="34" charset="0"/>
+                          <a:ea typeface="+mn-ea"/>
+                          <a:cs typeface="+mn-cs"/>
+                        </a:rPr>
+                        <a:t> sólo por red privada.</a:t>
+                      </a:r>
+                      <a:endParaRPr sz="1600" b="0" kern="1200" dirty="0">
+                        <a:solidFill>
+                          <a:schemeClr val="tx1"/>
+                        </a:solidFill>
+                        <a:latin typeface="Aptos Light" panose="020B0004020202020204" pitchFamily="34" charset="0"/>
+                        <a:ea typeface="+mn-ea"/>
+                        <a:cs typeface="+mn-cs"/>
+                      </a:endParaRPr>
+                    </a:p>
+                  </a:txBody>
+                  <a:tcPr>
+                    <a:lnL w="12700" cap="flat" cmpd="sng" algn="ctr">
+                      <a:solidFill>
+                        <a:schemeClr val="tx1"/>
+                      </a:solidFill>
+                      <a:prstDash val="solid"/>
+                      <a:round/>
+                      <a:headEnd type="none" w="med" len="med"/>
+                      <a:tailEnd type="none" w="med" len="med"/>
+                    </a:lnL>
+                    <a:lnT w="12700" cap="flat" cmpd="sng" algn="ctr">
+                      <a:solidFill>
+                        <a:schemeClr val="tx1"/>
+                      </a:solidFill>
+                      <a:prstDash val="solid"/>
+                      <a:round/>
+                      <a:headEnd type="none" w="med" len="med"/>
+                      <a:tailEnd type="none" w="med" len="med"/>
+                    </a:lnT>
+                    <a:lnB w="12700" cap="flat" cmpd="sng" algn="ctr">
+                      <a:solidFill>
+                        <a:schemeClr val="tx1"/>
+                      </a:solidFill>
+                      <a:prstDash val="solid"/>
+                      <a:round/>
+                      <a:headEnd type="none" w="med" len="med"/>
+                      <a:tailEnd type="none" w="med" len="med"/>
+                    </a:lnB>
                     <a:solidFill>
                       <a:schemeClr val="bg1"/>
                     </a:solidFill>
@@ -7181,369 +7786,406 @@
                   </a:ext>
                 </a:extLst>
               </a:tr>
+              <a:tr h="365760">
+                <a:tc>
+                  <a:txBody>
+                    <a:bodyPr/>
+                    <a:lstStyle/>
+                    <a:p>
+                      <a:pPr marL="0" algn="l" defTabSz="457200" rtl="0" eaLnBrk="1" latinLnBrk="0" hangingPunct="1"/>
+                      <a:r>
+                        <a:rPr lang="es-ES" sz="1600" b="1" kern="1200" dirty="0">
+                          <a:solidFill>
+                            <a:schemeClr val="tx1"/>
+                          </a:solidFill>
+                          <a:latin typeface="Aptos Light" panose="020B0004020202020204" pitchFamily="34" charset="0"/>
+                          <a:ea typeface="+mn-ea"/>
+                          <a:cs typeface="+mn-cs"/>
+                        </a:rPr>
+                        <a:t>A07</a:t>
+                      </a:r>
+                      <a:r>
+                        <a:rPr lang="es-ES" sz="1600" b="0" kern="1200" dirty="0">
+                          <a:solidFill>
+                            <a:schemeClr val="tx1"/>
+                          </a:solidFill>
+                          <a:latin typeface="Aptos Light" panose="020B0004020202020204" pitchFamily="34" charset="0"/>
+                          <a:ea typeface="+mn-ea"/>
+                          <a:cs typeface="+mn-cs"/>
+                        </a:rPr>
+                        <a:t> Autenticación</a:t>
+                      </a:r>
+                      <a:endParaRPr sz="1600" b="0" kern="1200" dirty="0">
+                        <a:solidFill>
+                          <a:schemeClr val="tx1"/>
+                        </a:solidFill>
+                        <a:latin typeface="Aptos Light" panose="020B0004020202020204" pitchFamily="34" charset="0"/>
+                        <a:ea typeface="+mn-ea"/>
+                        <a:cs typeface="+mn-cs"/>
+                      </a:endParaRPr>
+                    </a:p>
+                  </a:txBody>
+                  <a:tcPr>
+                    <a:lnR w="12700" cap="flat" cmpd="sng" algn="ctr">
+                      <a:solidFill>
+                        <a:schemeClr val="tx1"/>
+                      </a:solidFill>
+                      <a:prstDash val="solid"/>
+                      <a:round/>
+                      <a:headEnd type="none" w="med" len="med"/>
+                      <a:tailEnd type="none" w="med" len="med"/>
+                    </a:lnR>
+                    <a:lnT w="12700" cap="flat" cmpd="sng" algn="ctr">
+                      <a:solidFill>
+                        <a:schemeClr val="tx1"/>
+                      </a:solidFill>
+                      <a:prstDash val="solid"/>
+                      <a:round/>
+                      <a:headEnd type="none" w="med" len="med"/>
+                      <a:tailEnd type="none" w="med" len="med"/>
+                    </a:lnT>
+                    <a:lnB w="12700" cap="flat" cmpd="sng" algn="ctr">
+                      <a:solidFill>
+                        <a:schemeClr val="tx1"/>
+                      </a:solidFill>
+                      <a:prstDash val="solid"/>
+                      <a:round/>
+                      <a:headEnd type="none" w="med" len="med"/>
+                      <a:tailEnd type="none" w="med" len="med"/>
+                    </a:lnB>
+                    <a:solidFill>
+                      <a:schemeClr val="bg1"/>
+                    </a:solidFill>
+                  </a:tcPr>
+                </a:tc>
+                <a:tc>
+                  <a:txBody>
+                    <a:bodyPr/>
+                    <a:lstStyle/>
+                    <a:p>
+                      <a:pPr marL="0" algn="just" defTabSz="457200" rtl="0" eaLnBrk="1" latinLnBrk="0" hangingPunct="1"/>
+                      <a:r>
+                        <a:rPr lang="es-ES" sz="1600" b="0" kern="1200" dirty="0">
+                          <a:solidFill>
+                            <a:schemeClr val="tx1"/>
+                          </a:solidFill>
+                          <a:latin typeface="Aptos Light" panose="020B0004020202020204" pitchFamily="34" charset="0"/>
+                          <a:ea typeface="+mn-ea"/>
+                          <a:cs typeface="+mn-cs"/>
+                        </a:rPr>
+                        <a:t>El </a:t>
+                      </a:r>
+                      <a:r>
+                        <a:rPr lang="es-ES" sz="1600" b="0" kern="1200" dirty="0" err="1">
+                          <a:solidFill>
+                            <a:schemeClr val="tx1"/>
+                          </a:solidFill>
+                          <a:latin typeface="Aptos Light" panose="020B0004020202020204" pitchFamily="34" charset="0"/>
+                          <a:ea typeface="+mn-ea"/>
+                          <a:cs typeface="+mn-cs"/>
+                        </a:rPr>
+                        <a:t>aud</a:t>
+                      </a:r>
+                      <a:r>
+                        <a:rPr lang="es-ES" sz="1600" b="0" kern="1200" dirty="0">
+                          <a:solidFill>
+                            <a:schemeClr val="tx1"/>
+                          </a:solidFill>
+                          <a:latin typeface="Aptos Light" panose="020B0004020202020204" pitchFamily="34" charset="0"/>
+                          <a:ea typeface="+mn-ea"/>
+                          <a:cs typeface="+mn-cs"/>
+                        </a:rPr>
+                        <a:t> del token no se validaba: cualquier token del </a:t>
+                      </a:r>
+                      <a:r>
+                        <a:rPr lang="es-ES" sz="1600" b="0" kern="1200" dirty="0" err="1">
+                          <a:solidFill>
+                            <a:schemeClr val="tx1"/>
+                          </a:solidFill>
+                          <a:latin typeface="Aptos Light" panose="020B0004020202020204" pitchFamily="34" charset="0"/>
+                          <a:ea typeface="+mn-ea"/>
+                          <a:cs typeface="+mn-cs"/>
+                        </a:rPr>
+                        <a:t>realm</a:t>
+                      </a:r>
+                      <a:r>
+                        <a:rPr lang="es-ES" sz="1600" b="0" kern="1200" dirty="0">
+                          <a:solidFill>
+                            <a:schemeClr val="tx1"/>
+                          </a:solidFill>
+                          <a:latin typeface="Aptos Light" panose="020B0004020202020204" pitchFamily="34" charset="0"/>
+                          <a:ea typeface="+mn-ea"/>
+                          <a:cs typeface="+mn-cs"/>
+                        </a:rPr>
+                        <a:t> entraba a la API clínica. Algoritmo tomado del propio token.</a:t>
+                      </a:r>
+                      <a:endParaRPr sz="1600" b="0" kern="1200" dirty="0">
+                        <a:solidFill>
+                          <a:schemeClr val="tx1"/>
+                        </a:solidFill>
+                        <a:latin typeface="Aptos Light" panose="020B0004020202020204" pitchFamily="34" charset="0"/>
+                        <a:ea typeface="+mn-ea"/>
+                        <a:cs typeface="+mn-cs"/>
+                      </a:endParaRPr>
+                    </a:p>
+                  </a:txBody>
+                  <a:tcPr>
+                    <a:lnL w="12700" cap="flat" cmpd="sng" algn="ctr">
+                      <a:solidFill>
+                        <a:schemeClr val="tx1"/>
+                      </a:solidFill>
+                      <a:prstDash val="solid"/>
+                      <a:round/>
+                      <a:headEnd type="none" w="med" len="med"/>
+                      <a:tailEnd type="none" w="med" len="med"/>
+                    </a:lnL>
+                    <a:lnR w="12700" cap="flat" cmpd="sng" algn="ctr">
+                      <a:solidFill>
+                        <a:schemeClr val="tx1"/>
+                      </a:solidFill>
+                      <a:prstDash val="solid"/>
+                      <a:round/>
+                      <a:headEnd type="none" w="med" len="med"/>
+                      <a:tailEnd type="none" w="med" len="med"/>
+                    </a:lnR>
+                    <a:lnT w="12700" cap="flat" cmpd="sng" algn="ctr">
+                      <a:solidFill>
+                        <a:schemeClr val="tx1"/>
+                      </a:solidFill>
+                      <a:prstDash val="solid"/>
+                      <a:round/>
+                      <a:headEnd type="none" w="med" len="med"/>
+                      <a:tailEnd type="none" w="med" len="med"/>
+                    </a:lnT>
+                    <a:lnB w="12700" cap="flat" cmpd="sng" algn="ctr">
+                      <a:solidFill>
+                        <a:schemeClr val="tx1"/>
+                      </a:solidFill>
+                      <a:prstDash val="solid"/>
+                      <a:round/>
+                      <a:headEnd type="none" w="med" len="med"/>
+                      <a:tailEnd type="none" w="med" len="med"/>
+                    </a:lnB>
+                    <a:solidFill>
+                      <a:schemeClr val="bg1"/>
+                    </a:solidFill>
+                  </a:tcPr>
+                </a:tc>
+                <a:tc>
+                  <a:txBody>
+                    <a:bodyPr/>
+                    <a:lstStyle/>
+                    <a:p>
+                      <a:pPr marL="0" algn="just" defTabSz="457200" rtl="0" eaLnBrk="1" latinLnBrk="0" hangingPunct="1"/>
+                      <a:r>
+                        <a:rPr lang="es-ES" sz="1600" b="0" kern="1200" dirty="0" err="1">
+                          <a:solidFill>
+                            <a:schemeClr val="tx1"/>
+                          </a:solidFill>
+                          <a:latin typeface="Aptos Light" panose="020B0004020202020204" pitchFamily="34" charset="0"/>
+                          <a:ea typeface="+mn-ea"/>
+                          <a:cs typeface="+mn-cs"/>
+                        </a:rPr>
+                        <a:t>Audience</a:t>
+                      </a:r>
+                      <a:r>
+                        <a:rPr lang="es-ES" sz="1600" b="0" kern="1200" dirty="0">
+                          <a:solidFill>
+                            <a:schemeClr val="tx1"/>
+                          </a:solidFill>
+                          <a:latin typeface="Aptos Light" panose="020B0004020202020204" pitchFamily="34" charset="0"/>
+                          <a:ea typeface="+mn-ea"/>
+                          <a:cs typeface="+mn-cs"/>
+                        </a:rPr>
+                        <a:t> </a:t>
+                      </a:r>
+                      <a:r>
+                        <a:rPr lang="es-ES" sz="1600" b="0" kern="1200" dirty="0" err="1">
+                          <a:solidFill>
+                            <a:schemeClr val="tx1"/>
+                          </a:solidFill>
+                          <a:latin typeface="Aptos Light" panose="020B0004020202020204" pitchFamily="34" charset="0"/>
+                          <a:ea typeface="+mn-ea"/>
+                          <a:cs typeface="+mn-cs"/>
+                        </a:rPr>
+                        <a:t>mapper</a:t>
+                      </a:r>
+                      <a:r>
+                        <a:rPr lang="es-ES" sz="1600" b="0" kern="1200" dirty="0">
+                          <a:solidFill>
+                            <a:schemeClr val="tx1"/>
+                          </a:solidFill>
+                          <a:latin typeface="Aptos Light" panose="020B0004020202020204" pitchFamily="34" charset="0"/>
+                          <a:ea typeface="+mn-ea"/>
+                          <a:cs typeface="+mn-cs"/>
+                        </a:rPr>
+                        <a:t> en </a:t>
+                      </a:r>
+                      <a:r>
+                        <a:rPr lang="es-ES" sz="1600" b="0" kern="1200" dirty="0" err="1">
+                          <a:solidFill>
+                            <a:schemeClr val="tx1"/>
+                          </a:solidFill>
+                          <a:latin typeface="Aptos Light" panose="020B0004020202020204" pitchFamily="34" charset="0"/>
+                          <a:ea typeface="+mn-ea"/>
+                          <a:cs typeface="+mn-cs"/>
+                        </a:rPr>
+                        <a:t>Keycloak</a:t>
+                      </a:r>
+                      <a:r>
+                        <a:rPr lang="es-ES" sz="1600" b="0" kern="1200" dirty="0">
+                          <a:solidFill>
+                            <a:schemeClr val="tx1"/>
+                          </a:solidFill>
+                          <a:latin typeface="Aptos Light" panose="020B0004020202020204" pitchFamily="34" charset="0"/>
+                          <a:ea typeface="+mn-ea"/>
+                          <a:cs typeface="+mn-cs"/>
+                        </a:rPr>
+                        <a:t> + </a:t>
+                      </a:r>
+                      <a:r>
+                        <a:rPr lang="es-ES" sz="1600" b="0" kern="1200" dirty="0" err="1">
+                          <a:solidFill>
+                            <a:schemeClr val="tx1"/>
+                          </a:solidFill>
+                          <a:latin typeface="Aptos Light" panose="020B0004020202020204" pitchFamily="34" charset="0"/>
+                          <a:ea typeface="+mn-ea"/>
+                          <a:cs typeface="+mn-cs"/>
+                        </a:rPr>
+                        <a:t>verify_aud</a:t>
+                      </a:r>
+                      <a:r>
+                        <a:rPr lang="es-ES" sz="1600" b="0" kern="1200" dirty="0">
+                          <a:solidFill>
+                            <a:schemeClr val="tx1"/>
+                          </a:solidFill>
+                          <a:latin typeface="Aptos Light" panose="020B0004020202020204" pitchFamily="34" charset="0"/>
+                          <a:ea typeface="+mn-ea"/>
+                          <a:cs typeface="+mn-cs"/>
+                        </a:rPr>
+                        <a:t>. RS256 fijo. </a:t>
+                      </a:r>
+                      <a:r>
+                        <a:rPr lang="es-ES" sz="1600" b="0" kern="1200" dirty="0" err="1">
+                          <a:solidFill>
+                            <a:schemeClr val="tx1"/>
+                          </a:solidFill>
+                          <a:latin typeface="Aptos Light" panose="020B0004020202020204" pitchFamily="34" charset="0"/>
+                          <a:ea typeface="+mn-ea"/>
+                          <a:cs typeface="+mn-cs"/>
+                        </a:rPr>
+                        <a:t>Re-verificado</a:t>
+                      </a:r>
+                      <a:r>
+                        <a:rPr lang="es-ES" sz="1600" b="0" kern="1200" dirty="0">
+                          <a:solidFill>
+                            <a:schemeClr val="tx1"/>
+                          </a:solidFill>
+                          <a:latin typeface="Aptos Light" panose="020B0004020202020204" pitchFamily="34" charset="0"/>
+                          <a:ea typeface="+mn-ea"/>
+                          <a:cs typeface="+mn-cs"/>
+                        </a:rPr>
+                        <a:t> con token real.</a:t>
+                      </a:r>
+                      <a:endParaRPr sz="1600" b="0" kern="1200" dirty="0">
+                        <a:solidFill>
+                          <a:schemeClr val="tx1"/>
+                        </a:solidFill>
+                        <a:latin typeface="Aptos Light" panose="020B0004020202020204" pitchFamily="34" charset="0"/>
+                        <a:ea typeface="+mn-ea"/>
+                        <a:cs typeface="+mn-cs"/>
+                      </a:endParaRPr>
+                    </a:p>
+                  </a:txBody>
+                  <a:tcPr>
+                    <a:lnL w="12700" cap="flat" cmpd="sng" algn="ctr">
+                      <a:solidFill>
+                        <a:schemeClr val="tx1"/>
+                      </a:solidFill>
+                      <a:prstDash val="solid"/>
+                      <a:round/>
+                      <a:headEnd type="none" w="med" len="med"/>
+                      <a:tailEnd type="none" w="med" len="med"/>
+                    </a:lnL>
+                    <a:lnT w="12700" cap="flat" cmpd="sng" algn="ctr">
+                      <a:solidFill>
+                        <a:schemeClr val="tx1"/>
+                      </a:solidFill>
+                      <a:prstDash val="solid"/>
+                      <a:round/>
+                      <a:headEnd type="none" w="med" len="med"/>
+                      <a:tailEnd type="none" w="med" len="med"/>
+                    </a:lnT>
+                    <a:lnB w="12700" cap="flat" cmpd="sng" algn="ctr">
+                      <a:solidFill>
+                        <a:schemeClr val="tx1"/>
+                      </a:solidFill>
+                      <a:prstDash val="solid"/>
+                      <a:round/>
+                      <a:headEnd type="none" w="med" len="med"/>
+                      <a:tailEnd type="none" w="med" len="med"/>
+                    </a:lnB>
+                    <a:solidFill>
+                      <a:schemeClr val="bg1"/>
+                    </a:solidFill>
+                  </a:tcPr>
+                </a:tc>
+                <a:extLst>
+                  <a:ext uri="{0D108BD9-81ED-4DB2-BD59-A6C34878D82A}">
+                    <a16:rowId xmlns:a16="http://schemas.microsoft.com/office/drawing/2014/main" val="230024428"/>
+                  </a:ext>
+                </a:extLst>
+              </a:tr>
             </a:tbl>
           </a:graphicData>
         </a:graphic>
       </p:graphicFrame>
       <p:sp>
         <p:nvSpPr>
-          <p:cNvPr id="7" name="Rounded Rectangle 6"/>
-          <p:cNvSpPr/>
+          <p:cNvPr id="11" name="CuadroTexto 10">
+            <a:extLst>
+              <a:ext uri="{FF2B5EF4-FFF2-40B4-BE49-F238E27FC236}">
+                <a16:creationId xmlns:a16="http://schemas.microsoft.com/office/drawing/2014/main" id="{88F3F46B-0C3E-71B7-AA82-646E35C1B908}"/>
+              </a:ext>
+            </a:extLst>
+          </p:cNvPr>
+          <p:cNvSpPr txBox="1"/>
           <p:nvPr/>
         </p:nvSpPr>
         <p:spPr>
           <a:xfrm>
-            <a:off x="640080" y="4714738"/>
-            <a:ext cx="11064240" cy="1828800"/>
+            <a:off x="875619" y="6206704"/>
+            <a:ext cx="11403466" cy="584775"/>
           </a:xfrm>
-          <a:prstGeom prst="roundRect">
+          <a:prstGeom prst="rect">
             <a:avLst/>
           </a:prstGeom>
-          <a:solidFill>
-            <a:srgbClr val="FFF6E0"/>
-          </a:solidFill>
-          <a:ln w="15875">
-            <a:solidFill>
-              <a:srgbClr val="B57A00"/>
-            </a:solidFill>
-          </a:ln>
-          <a:effectLst/>
+          <a:noFill/>
         </p:spPr>
-        <p:style>
-          <a:lnRef idx="1">
-            <a:schemeClr val="accent1"/>
-          </a:lnRef>
-          <a:fillRef idx="3">
-            <a:schemeClr val="accent1"/>
-          </a:fillRef>
-          <a:effectRef idx="2">
-            <a:schemeClr val="accent1"/>
-          </a:effectRef>
-          <a:fontRef idx="minor">
-            <a:schemeClr val="lt1"/>
-          </a:fontRef>
-        </p:style>
         <p:txBody>
-          <a:bodyPr wrap="square" lIns="182880" tIns="109728" rtlCol="0" anchor="ctr"/>
+          <a:bodyPr wrap="square">
+            <a:spAutoFit/>
+          </a:bodyPr>
           <a:lstStyle/>
           <a:p>
-            <a:pPr algn="ctr"/>
-            <a:endParaRPr lang="es-ES" sz="2400" b="1" dirty="0">
-              <a:solidFill>
-                <a:srgbClr val="B57A00"/>
-              </a:solidFill>
-              <a:latin typeface="Aptos"/>
-            </a:endParaRPr>
-          </a:p>
-          <a:p>
-            <a:pPr algn="ctr"/>
-            <a:r>
-              <a:rPr sz="2400" b="1" dirty="0">
-                <a:solidFill>
-                  <a:srgbClr val="B57A00"/>
-                </a:solidFill>
-                <a:latin typeface="Aptos"/>
-              </a:rPr>
-              <a:t>El </a:t>
-            </a:r>
-            <a:r>
-              <a:rPr lang="es-ES" sz="2400" b="1" dirty="0">
-                <a:solidFill>
-                  <a:srgbClr val="B57A00"/>
-                </a:solidFill>
-                <a:latin typeface="Aptos"/>
-              </a:rPr>
-              <a:t>patrón</a:t>
-            </a:r>
-            <a:r>
-              <a:rPr sz="2400" b="1" dirty="0">
-                <a:solidFill>
-                  <a:srgbClr val="B57A00"/>
-                </a:solidFill>
-                <a:latin typeface="Aptos"/>
-              </a:rPr>
-              <a:t> se </a:t>
-            </a:r>
-            <a:r>
-              <a:rPr sz="2400" b="1" dirty="0" err="1">
-                <a:solidFill>
-                  <a:srgbClr val="B57A00"/>
-                </a:solidFill>
-                <a:latin typeface="Aptos"/>
-              </a:rPr>
-              <a:t>repite</a:t>
-            </a:r>
-            <a:endParaRPr lang="es-ES" sz="2400" b="1" dirty="0">
-              <a:solidFill>
-                <a:srgbClr val="B57A00"/>
-              </a:solidFill>
-              <a:latin typeface="Aptos"/>
-            </a:endParaRPr>
-          </a:p>
-          <a:p>
-            <a:pPr algn="ctr"/>
-            <a:endParaRPr sz="2400" b="1" dirty="0">
-              <a:solidFill>
-                <a:srgbClr val="B57A00"/>
-              </a:solidFill>
-              <a:latin typeface="Aptos"/>
-            </a:endParaRPr>
-          </a:p>
-          <a:p>
-            <a:pPr algn="ctr"/>
-            <a:r>
-              <a:rPr lang="es-ES" dirty="0">
-                <a:solidFill>
-                  <a:srgbClr val="444A54"/>
-                </a:solidFill>
-                <a:latin typeface="Aptos Light" panose="020B0004020202020204" pitchFamily="34" charset="0"/>
-              </a:rPr>
-              <a:t>G</a:t>
-            </a:r>
-            <a:r>
-              <a:rPr dirty="0" err="1">
-                <a:solidFill>
-                  <a:srgbClr val="444A54"/>
-                </a:solidFill>
-                <a:latin typeface="Aptos Light" panose="020B0004020202020204" pitchFamily="34" charset="0"/>
-              </a:rPr>
-              <a:t>rabar</a:t>
-            </a:r>
-            <a:r>
-              <a:rPr dirty="0">
-                <a:solidFill>
-                  <a:srgbClr val="444A54"/>
-                </a:solidFill>
-                <a:latin typeface="Aptos Light" panose="020B0004020202020204" pitchFamily="34" charset="0"/>
-              </a:rPr>
-              <a:t> → </a:t>
-            </a:r>
-            <a:r>
-              <a:rPr lang="es-ES" dirty="0">
-                <a:solidFill>
-                  <a:srgbClr val="444A54"/>
-                </a:solidFill>
-                <a:latin typeface="Aptos Light" panose="020B0004020202020204" pitchFamily="34" charset="0"/>
-              </a:rPr>
-              <a:t>Extraer</a:t>
-            </a:r>
-            <a:r>
-              <a:rPr dirty="0">
-                <a:solidFill>
-                  <a:srgbClr val="444A54"/>
-                </a:solidFill>
-                <a:latin typeface="Aptos Light" panose="020B0004020202020204" pitchFamily="34" charset="0"/>
-              </a:rPr>
-              <a:t> </a:t>
-            </a:r>
-            <a:r>
-              <a:rPr dirty="0" err="1">
-                <a:solidFill>
-                  <a:srgbClr val="444A54"/>
-                </a:solidFill>
-                <a:latin typeface="Aptos Light" panose="020B0004020202020204" pitchFamily="34" charset="0"/>
-              </a:rPr>
-              <a:t>métricas</a:t>
-            </a:r>
-            <a:r>
-              <a:rPr dirty="0">
-                <a:solidFill>
-                  <a:srgbClr val="444A54"/>
-                </a:solidFill>
-                <a:latin typeface="Aptos Light" panose="020B0004020202020204" pitchFamily="34" charset="0"/>
-              </a:rPr>
-              <a:t> → </a:t>
-            </a:r>
-            <a:r>
-              <a:rPr lang="es-ES" dirty="0">
-                <a:solidFill>
-                  <a:srgbClr val="444A54"/>
-                </a:solidFill>
-                <a:latin typeface="Aptos Light" panose="020B0004020202020204" pitchFamily="34" charset="0"/>
-              </a:rPr>
-              <a:t>C</a:t>
-            </a:r>
-            <a:r>
-              <a:rPr dirty="0" err="1">
-                <a:solidFill>
-                  <a:srgbClr val="444A54"/>
-                </a:solidFill>
-                <a:latin typeface="Aptos Light" panose="020B0004020202020204" pitchFamily="34" charset="0"/>
-              </a:rPr>
-              <a:t>omparar</a:t>
-            </a:r>
-            <a:r>
-              <a:rPr dirty="0">
-                <a:solidFill>
-                  <a:srgbClr val="444A54"/>
-                </a:solidFill>
-                <a:latin typeface="Aptos Light" panose="020B0004020202020204" pitchFamily="34" charset="0"/>
-              </a:rPr>
-              <a:t> con </a:t>
-            </a:r>
-            <a:r>
-              <a:rPr dirty="0" err="1">
-                <a:solidFill>
-                  <a:srgbClr val="444A54"/>
-                </a:solidFill>
-                <a:latin typeface="Aptos Light" panose="020B0004020202020204" pitchFamily="34" charset="0"/>
-              </a:rPr>
-              <a:t>una</a:t>
-            </a:r>
-            <a:r>
-              <a:rPr dirty="0">
-                <a:solidFill>
-                  <a:srgbClr val="444A54"/>
-                </a:solidFill>
-                <a:latin typeface="Aptos Light" panose="020B0004020202020204" pitchFamily="34" charset="0"/>
-              </a:rPr>
-              <a:t> </a:t>
-            </a:r>
-            <a:r>
-              <a:rPr lang="es-ES" dirty="0">
-                <a:solidFill>
-                  <a:srgbClr val="444A54"/>
-                </a:solidFill>
-                <a:latin typeface="Aptos Light" panose="020B0004020202020204" pitchFamily="34" charset="0"/>
-              </a:rPr>
-              <a:t>pauta</a:t>
-            </a:r>
-            <a:r>
-              <a:rPr dirty="0">
-                <a:solidFill>
-                  <a:srgbClr val="444A54"/>
-                </a:solidFill>
-                <a:latin typeface="Aptos Light" panose="020B0004020202020204" pitchFamily="34" charset="0"/>
-              </a:rPr>
-              <a:t> → </a:t>
-            </a:r>
-            <a:r>
-              <a:rPr lang="es-ES" dirty="0">
-                <a:solidFill>
-                  <a:srgbClr val="444A54"/>
-                </a:solidFill>
-                <a:latin typeface="Aptos Light" panose="020B0004020202020204" pitchFamily="34" charset="0"/>
-              </a:rPr>
-              <a:t>V</a:t>
-            </a:r>
-            <a:r>
-              <a:rPr dirty="0" err="1">
-                <a:solidFill>
-                  <a:srgbClr val="444A54"/>
-                </a:solidFill>
-                <a:latin typeface="Aptos Light" panose="020B0004020202020204" pitchFamily="34" charset="0"/>
-              </a:rPr>
-              <a:t>isualizar</a:t>
-            </a:r>
-            <a:r>
-              <a:rPr dirty="0">
-                <a:solidFill>
-                  <a:srgbClr val="444A54"/>
-                </a:solidFill>
-                <a:latin typeface="Aptos Light" panose="020B0004020202020204" pitchFamily="34" charset="0"/>
-              </a:rPr>
-              <a:t> el </a:t>
-            </a:r>
-            <a:r>
-              <a:rPr dirty="0" err="1">
-                <a:solidFill>
-                  <a:srgbClr val="444A54"/>
-                </a:solidFill>
-                <a:latin typeface="Aptos Light" panose="020B0004020202020204" pitchFamily="34" charset="0"/>
-              </a:rPr>
-              <a:t>progreso</a:t>
-            </a:r>
-            <a:r>
-              <a:rPr dirty="0">
-                <a:solidFill>
-                  <a:srgbClr val="444A54"/>
-                </a:solidFill>
-                <a:latin typeface="Aptos Light" panose="020B0004020202020204" pitchFamily="34" charset="0"/>
-              </a:rPr>
-              <a:t>.</a:t>
-            </a:r>
-            <a:endParaRPr lang="es-ES" dirty="0">
-              <a:solidFill>
-                <a:srgbClr val="444A54"/>
-              </a:solidFill>
-              <a:latin typeface="Aptos Light" panose="020B0004020202020204" pitchFamily="34" charset="0"/>
-            </a:endParaRPr>
-          </a:p>
-          <a:p>
-            <a:pPr algn="ctr"/>
-            <a:endParaRPr lang="es-ES" dirty="0">
-              <a:solidFill>
-                <a:srgbClr val="444A54"/>
-              </a:solidFill>
-              <a:latin typeface="Aptos Light" panose="020B0004020202020204" pitchFamily="34" charset="0"/>
-            </a:endParaRPr>
-          </a:p>
-          <a:p>
-            <a:pPr algn="ctr"/>
-            <a:r>
-              <a:rPr dirty="0">
-                <a:solidFill>
-                  <a:srgbClr val="444A54"/>
-                </a:solidFill>
-                <a:latin typeface="Aptos Light" panose="020B0004020202020204" pitchFamily="34" charset="0"/>
-              </a:rPr>
-              <a:t>Cambia el </a:t>
-            </a:r>
-            <a:r>
-              <a:rPr dirty="0" err="1">
-                <a:solidFill>
-                  <a:srgbClr val="444A54"/>
-                </a:solidFill>
-                <a:latin typeface="Aptos Light" panose="020B0004020202020204" pitchFamily="34" charset="0"/>
-              </a:rPr>
-              <a:t>dominio</a:t>
-            </a:r>
-            <a:r>
-              <a:rPr dirty="0">
-                <a:solidFill>
-                  <a:srgbClr val="444A54"/>
-                </a:solidFill>
-                <a:latin typeface="Aptos Light" panose="020B0004020202020204" pitchFamily="34" charset="0"/>
-              </a:rPr>
-              <a:t>, no la </a:t>
-            </a:r>
-            <a:r>
-              <a:rPr dirty="0" err="1">
-                <a:solidFill>
-                  <a:srgbClr val="444A54"/>
-                </a:solidFill>
-                <a:latin typeface="Aptos Light" panose="020B0004020202020204" pitchFamily="34" charset="0"/>
-              </a:rPr>
-              <a:t>arquitectura</a:t>
-            </a:r>
-            <a:r>
-              <a:rPr dirty="0">
-                <a:solidFill>
-                  <a:srgbClr val="444A54"/>
-                </a:solidFill>
-                <a:latin typeface="Aptos Light" panose="020B0004020202020204" pitchFamily="34" charset="0"/>
-              </a:rPr>
-              <a:t>.</a:t>
-            </a:r>
-            <a:endParaRPr lang="es-ES" dirty="0">
-              <a:solidFill>
-                <a:srgbClr val="444A54"/>
-              </a:solidFill>
-              <a:latin typeface="Aptos Light" panose="020B0004020202020204" pitchFamily="34" charset="0"/>
-            </a:endParaRPr>
-          </a:p>
-          <a:p>
-            <a:pPr algn="ctr"/>
-            <a:endParaRPr sz="1600" dirty="0">
-              <a:solidFill>
-                <a:srgbClr val="444A54"/>
-              </a:solidFill>
-              <a:latin typeface="Aptos Light" panose="020B0004020202020204" pitchFamily="34" charset="0"/>
-            </a:endParaRPr>
+            <a:r>
+              <a:rPr lang="es-ES" sz="1600" dirty="0">
+                <a:solidFill>
+                  <a:srgbClr val="444A54"/>
+                </a:solidFill>
+                <a:latin typeface="Aptos Light"/>
+              </a:rPr>
+              <a:t>Idea clave: un control que no se puede eludir aunque el código falle (RLS, roles de BD) es más fuerte que uno que depende de recordar aplicarlo. La frontera pasó del papel al motor de base de datos.</a:t>
+            </a:r>
           </a:p>
         </p:txBody>
       </p:sp>
     </p:spTree>
+    <p:extLst>
+      <p:ext uri="{BB962C8B-B14F-4D97-AF65-F5344CB8AC3E}">
+        <p14:creationId xmlns:p14="http://schemas.microsoft.com/office/powerpoint/2010/main" val="3438505203"/>
+      </p:ext>
+    </p:extLst>
   </p:cSld>
   <p:clrMapOvr>
     <a:masterClrMapping/>
@@ -7669,7 +8311,7 @@
                 </a:solidFill>
                 <a:latin typeface="Calibri"/>
               </a:rPr>
-              <a:t>A</a:t>
+              <a:t>7</a:t>
             </a:r>
           </a:p>
         </p:txBody>
@@ -7702,6 +8344,1880 @@
               </a:spcAft>
             </a:pPr>
             <a:r>
+              <a:rPr sz="2800" b="1" dirty="0" err="1">
+                <a:solidFill>
+                  <a:srgbClr val="FFFFFF"/>
+                </a:solidFill>
+                <a:latin typeface="Aptos Light" panose="020B0004020202020204" pitchFamily="34" charset="0"/>
+              </a:rPr>
+              <a:t>Extensiones</a:t>
+            </a:r>
+            <a:r>
+              <a:rPr sz="2800" b="1" dirty="0">
+                <a:solidFill>
+                  <a:srgbClr val="FFFFFF"/>
+                </a:solidFill>
+                <a:latin typeface="Aptos Light" panose="020B0004020202020204" pitchFamily="34" charset="0"/>
+              </a:rPr>
+              <a:t> del </a:t>
+            </a:r>
+            <a:r>
+              <a:rPr sz="2800" b="1" dirty="0" err="1">
+                <a:solidFill>
+                  <a:srgbClr val="FFFFFF"/>
+                </a:solidFill>
+                <a:latin typeface="Aptos Light" panose="020B0004020202020204" pitchFamily="34" charset="0"/>
+              </a:rPr>
+              <a:t>caso</a:t>
+            </a:r>
+            <a:r>
+              <a:rPr sz="2800" b="1" dirty="0">
+                <a:solidFill>
+                  <a:srgbClr val="FFFFFF"/>
+                </a:solidFill>
+                <a:latin typeface="Aptos Light" panose="020B0004020202020204" pitchFamily="34" charset="0"/>
+              </a:rPr>
+              <a:t> de </a:t>
+            </a:r>
+            <a:r>
+              <a:rPr sz="2800" b="1" dirty="0" err="1">
+                <a:solidFill>
+                  <a:srgbClr val="FFFFFF"/>
+                </a:solidFill>
+                <a:latin typeface="Aptos Light" panose="020B0004020202020204" pitchFamily="34" charset="0"/>
+              </a:rPr>
+              <a:t>uso</a:t>
+            </a:r>
+            <a:endParaRPr sz="2800" b="1" dirty="0">
+              <a:solidFill>
+                <a:srgbClr val="FFFFFF"/>
+              </a:solidFill>
+              <a:latin typeface="Aptos Light" panose="020B0004020202020204" pitchFamily="34" charset="0"/>
+            </a:endParaRPr>
+          </a:p>
+        </p:txBody>
+      </p:sp>
+      <p:sp>
+        <p:nvSpPr>
+          <p:cNvPr id="5" name="TextBox 4"/>
+          <p:cNvSpPr txBox="1"/>
+          <p:nvPr/>
+        </p:nvSpPr>
+        <p:spPr>
+          <a:xfrm>
+            <a:off x="548640" y="1325880"/>
+            <a:ext cx="11064240" cy="661720"/>
+          </a:xfrm>
+          <a:prstGeom prst="rect">
+            <a:avLst/>
+          </a:prstGeom>
+          <a:noFill/>
+        </p:spPr>
+        <p:txBody>
+          <a:bodyPr wrap="square" anchor="t">
+            <a:spAutoFit/>
+          </a:bodyPr>
+          <a:lstStyle/>
+          <a:p>
+            <a:pPr algn="just">
+              <a:spcAft>
+                <a:spcPts val="600"/>
+              </a:spcAft>
+            </a:pPr>
+            <a:r>
+              <a:rPr sz="1600" dirty="0">
+                <a:solidFill>
+                  <a:srgbClr val="444A54"/>
+                </a:solidFill>
+                <a:latin typeface="Aptos Light"/>
+              </a:rPr>
+              <a:t>El </a:t>
+            </a:r>
+            <a:r>
+              <a:rPr sz="1600" dirty="0" err="1">
+                <a:solidFill>
+                  <a:srgbClr val="444A54"/>
+                </a:solidFill>
+                <a:latin typeface="Aptos Light"/>
+              </a:rPr>
+              <a:t>mismo</a:t>
+            </a:r>
+            <a:r>
+              <a:rPr sz="1600" dirty="0">
+                <a:solidFill>
+                  <a:srgbClr val="444A54"/>
+                </a:solidFill>
+                <a:latin typeface="Aptos Light"/>
+              </a:rPr>
+              <a:t> </a:t>
+            </a:r>
+            <a:r>
+              <a:rPr sz="1600" dirty="0" err="1">
+                <a:solidFill>
+                  <a:srgbClr val="444A54"/>
+                </a:solidFill>
+                <a:latin typeface="Aptos Light"/>
+              </a:rPr>
+              <a:t>patrón</a:t>
+            </a:r>
+            <a:r>
+              <a:rPr sz="1600" dirty="0">
+                <a:solidFill>
+                  <a:srgbClr val="444A54"/>
+                </a:solidFill>
+                <a:latin typeface="Aptos Light"/>
+              </a:rPr>
+              <a:t> </a:t>
+            </a:r>
+            <a:r>
+              <a:rPr sz="1600" dirty="0" err="1">
+                <a:solidFill>
+                  <a:srgbClr val="444A54"/>
+                </a:solidFill>
+                <a:latin typeface="Aptos Light"/>
+              </a:rPr>
+              <a:t>sirve</a:t>
+            </a:r>
+            <a:r>
+              <a:rPr sz="1600" dirty="0">
+                <a:solidFill>
+                  <a:srgbClr val="444A54"/>
+                </a:solidFill>
+                <a:latin typeface="Aptos Light"/>
+              </a:rPr>
+              <a:t> para </a:t>
+            </a:r>
+            <a:r>
+              <a:rPr sz="1600" dirty="0" err="1">
+                <a:solidFill>
+                  <a:srgbClr val="444A54"/>
+                </a:solidFill>
+                <a:latin typeface="Aptos Light"/>
+              </a:rPr>
+              <a:t>cualquier</a:t>
+            </a:r>
+            <a:r>
+              <a:rPr sz="1600" dirty="0">
+                <a:solidFill>
+                  <a:srgbClr val="444A54"/>
+                </a:solidFill>
+                <a:latin typeface="Aptos Light"/>
+              </a:rPr>
+              <a:t> </a:t>
+            </a:r>
+            <a:r>
+              <a:rPr sz="1600" dirty="0" err="1">
+                <a:solidFill>
+                  <a:srgbClr val="444A54"/>
+                </a:solidFill>
+                <a:latin typeface="Aptos Light"/>
+              </a:rPr>
+              <a:t>ámbito</a:t>
+            </a:r>
+            <a:r>
+              <a:rPr sz="1600" dirty="0">
+                <a:solidFill>
+                  <a:srgbClr val="444A54"/>
+                </a:solidFill>
+                <a:latin typeface="Aptos Light"/>
+              </a:rPr>
+              <a:t> </a:t>
+            </a:r>
+            <a:r>
+              <a:rPr sz="1600" dirty="0" err="1">
+                <a:solidFill>
+                  <a:srgbClr val="444A54"/>
+                </a:solidFill>
+                <a:latin typeface="Aptos Light"/>
+              </a:rPr>
+              <a:t>donde</a:t>
+            </a:r>
+            <a:r>
+              <a:rPr sz="1600" dirty="0">
+                <a:solidFill>
+                  <a:srgbClr val="444A54"/>
+                </a:solidFill>
+                <a:latin typeface="Aptos Light"/>
+              </a:rPr>
+              <a:t> </a:t>
+            </a:r>
+            <a:r>
+              <a:rPr sz="1600" dirty="0" err="1">
+                <a:solidFill>
+                  <a:srgbClr val="444A54"/>
+                </a:solidFill>
+                <a:latin typeface="Aptos Light"/>
+              </a:rPr>
+              <a:t>haya</a:t>
+            </a:r>
+            <a:r>
+              <a:rPr sz="1600" dirty="0">
+                <a:solidFill>
+                  <a:srgbClr val="444A54"/>
+                </a:solidFill>
+                <a:latin typeface="Aptos Light"/>
+              </a:rPr>
+              <a:t> </a:t>
+            </a:r>
+            <a:r>
+              <a:rPr sz="1600" dirty="0" err="1">
+                <a:solidFill>
+                  <a:srgbClr val="444A54"/>
+                </a:solidFill>
+                <a:latin typeface="Aptos Light"/>
+              </a:rPr>
+              <a:t>que</a:t>
+            </a:r>
+            <a:r>
+              <a:rPr sz="1600" dirty="0">
+                <a:solidFill>
+                  <a:srgbClr val="444A54"/>
+                </a:solidFill>
+                <a:latin typeface="Aptos Light"/>
+              </a:rPr>
+              <a:t> </a:t>
+            </a:r>
+            <a:r>
+              <a:rPr sz="1600" dirty="0" err="1">
+                <a:solidFill>
+                  <a:srgbClr val="444A54"/>
+                </a:solidFill>
+                <a:latin typeface="Aptos Light"/>
+              </a:rPr>
+              <a:t>analizar</a:t>
+            </a:r>
+            <a:r>
+              <a:rPr sz="1600" dirty="0">
+                <a:solidFill>
+                  <a:srgbClr val="444A54"/>
+                </a:solidFill>
+                <a:latin typeface="Aptos Light"/>
+              </a:rPr>
+              <a:t> audio o </a:t>
+            </a:r>
+            <a:r>
+              <a:rPr sz="1600" dirty="0" err="1">
+                <a:solidFill>
+                  <a:srgbClr val="444A54"/>
+                </a:solidFill>
+                <a:latin typeface="Aptos Light"/>
+              </a:rPr>
+              <a:t>vídeo</a:t>
+            </a:r>
+            <a:r>
+              <a:rPr sz="1600" dirty="0">
+                <a:solidFill>
+                  <a:srgbClr val="444A54"/>
+                </a:solidFill>
+                <a:latin typeface="Aptos Light"/>
+              </a:rPr>
+              <a:t> y </a:t>
+            </a:r>
+            <a:r>
+              <a:rPr sz="1600" dirty="0" err="1">
+                <a:solidFill>
+                  <a:srgbClr val="444A54"/>
+                </a:solidFill>
+                <a:latin typeface="Aptos Light"/>
+              </a:rPr>
+              <a:t>seguir</a:t>
+            </a:r>
+            <a:r>
+              <a:rPr sz="1600" dirty="0">
+                <a:solidFill>
+                  <a:srgbClr val="444A54"/>
+                </a:solidFill>
+                <a:latin typeface="Aptos Light"/>
+              </a:rPr>
+              <a:t> un </a:t>
+            </a:r>
+            <a:r>
+              <a:rPr sz="1600" dirty="0" err="1">
+                <a:solidFill>
+                  <a:srgbClr val="444A54"/>
+                </a:solidFill>
+                <a:latin typeface="Aptos Light"/>
+              </a:rPr>
+              <a:t>progreso</a:t>
+            </a:r>
+            <a:r>
+              <a:rPr sz="1600" dirty="0">
+                <a:solidFill>
+                  <a:srgbClr val="444A54"/>
+                </a:solidFill>
+                <a:latin typeface="Aptos Light"/>
+              </a:rPr>
+              <a:t> </a:t>
+            </a:r>
+            <a:r>
+              <a:rPr sz="1600" dirty="0" err="1">
+                <a:solidFill>
+                  <a:srgbClr val="444A54"/>
+                </a:solidFill>
+                <a:latin typeface="Aptos Light"/>
+              </a:rPr>
+              <a:t>en</a:t>
+            </a:r>
+            <a:r>
+              <a:rPr sz="1600" dirty="0">
+                <a:solidFill>
+                  <a:srgbClr val="444A54"/>
+                </a:solidFill>
+                <a:latin typeface="Aptos Light"/>
+              </a:rPr>
+              <a:t> el </a:t>
+            </a:r>
+            <a:r>
+              <a:rPr sz="1600" dirty="0" err="1">
+                <a:solidFill>
+                  <a:srgbClr val="444A54"/>
+                </a:solidFill>
+                <a:latin typeface="Aptos Light"/>
+              </a:rPr>
+              <a:t>tiempo</a:t>
+            </a:r>
+            <a:r>
+              <a:rPr sz="1600" dirty="0">
+                <a:solidFill>
+                  <a:srgbClr val="444A54"/>
+                </a:solidFill>
+                <a:latin typeface="Aptos Light"/>
+              </a:rPr>
+              <a:t>.</a:t>
+            </a:r>
+            <a:endParaRPr lang="es-ES" sz="1600" dirty="0">
+              <a:solidFill>
+                <a:srgbClr val="444A54"/>
+              </a:solidFill>
+              <a:latin typeface="Aptos Light"/>
+            </a:endParaRPr>
+          </a:p>
+          <a:p>
+            <a:pPr algn="just">
+              <a:spcAft>
+                <a:spcPts val="600"/>
+              </a:spcAft>
+            </a:pPr>
+            <a:r>
+              <a:rPr sz="1600" dirty="0">
+                <a:solidFill>
+                  <a:srgbClr val="444A54"/>
+                </a:solidFill>
+                <a:latin typeface="Aptos Light"/>
+              </a:rPr>
+              <a:t> </a:t>
+            </a:r>
+            <a:r>
+              <a:rPr sz="1600" dirty="0" err="1">
+                <a:solidFill>
+                  <a:srgbClr val="444A54"/>
+                </a:solidFill>
+                <a:latin typeface="Aptos Light"/>
+              </a:rPr>
+              <a:t>Aplica</a:t>
+            </a:r>
+            <a:r>
+              <a:rPr sz="1600" dirty="0">
+                <a:solidFill>
+                  <a:srgbClr val="444A54"/>
+                </a:solidFill>
+                <a:latin typeface="Aptos Light"/>
+              </a:rPr>
+              <a:t> a fines </a:t>
+            </a:r>
+            <a:r>
+              <a:rPr sz="1600" dirty="0" err="1">
+                <a:solidFill>
+                  <a:srgbClr val="444A54"/>
+                </a:solidFill>
+                <a:latin typeface="Aptos Light"/>
+              </a:rPr>
+              <a:t>pedagógicos</a:t>
+            </a:r>
+            <a:r>
+              <a:rPr sz="1600" dirty="0">
+                <a:solidFill>
+                  <a:srgbClr val="444A54"/>
+                </a:solidFill>
+                <a:latin typeface="Aptos Light"/>
+              </a:rPr>
+              <a:t> o de </a:t>
+            </a:r>
+            <a:r>
+              <a:rPr sz="1600" dirty="0" err="1">
+                <a:solidFill>
+                  <a:srgbClr val="444A54"/>
+                </a:solidFill>
+                <a:latin typeface="Aptos Light"/>
+              </a:rPr>
+              <a:t>estudio</a:t>
+            </a:r>
+            <a:r>
+              <a:rPr lang="es-ES" sz="1600" dirty="0">
+                <a:solidFill>
+                  <a:srgbClr val="444A54"/>
+                </a:solidFill>
+                <a:latin typeface="Aptos Light"/>
+              </a:rPr>
+              <a:t>.</a:t>
+            </a:r>
+            <a:endParaRPr sz="1600" dirty="0">
+              <a:solidFill>
+                <a:srgbClr val="444A54"/>
+              </a:solidFill>
+              <a:latin typeface="Aptos Light"/>
+            </a:endParaRPr>
+          </a:p>
+        </p:txBody>
+      </p:sp>
+      <p:graphicFrame>
+        <p:nvGraphicFramePr>
+          <p:cNvPr id="6" name="Table 5"/>
+          <p:cNvGraphicFramePr>
+            <a:graphicFrameLocks noGrp="1"/>
+          </p:cNvGraphicFramePr>
+          <p:nvPr>
+            <p:extLst>
+              <p:ext uri="{D42A27DB-BD31-4B8C-83A1-F6EECF244321}">
+                <p14:modId xmlns:p14="http://schemas.microsoft.com/office/powerpoint/2010/main" val="4178896021"/>
+              </p:ext>
+            </p:extLst>
+          </p:nvPr>
+        </p:nvGraphicFramePr>
+        <p:xfrm>
+          <a:off x="640080" y="2261920"/>
+          <a:ext cx="11064240" cy="2255520"/>
+        </p:xfrm>
+        <a:graphic>
+          <a:graphicData uri="http://schemas.openxmlformats.org/drawingml/2006/table">
+            <a:tbl>
+              <a:tblPr firstRow="1" bandRow="1">
+                <a:tableStyleId>{5C22544A-7EE6-4342-B048-85BDC9FD1C3A}</a:tableStyleId>
+              </a:tblPr>
+              <a:tblGrid>
+                <a:gridCol w="4206240">
+                  <a:extLst>
+                    <a:ext uri="{9D8B030D-6E8A-4147-A177-3AD203B41FA5}">
+                      <a16:colId xmlns:a16="http://schemas.microsoft.com/office/drawing/2014/main" val="20000"/>
+                    </a:ext>
+                  </a:extLst>
+                </a:gridCol>
+                <a:gridCol w="6858000">
+                  <a:extLst>
+                    <a:ext uri="{9D8B030D-6E8A-4147-A177-3AD203B41FA5}">
+                      <a16:colId xmlns:a16="http://schemas.microsoft.com/office/drawing/2014/main" val="20001"/>
+                    </a:ext>
+                  </a:extLst>
+                </a:gridCol>
+              </a:tblGrid>
+              <a:tr h="365760">
+                <a:tc>
+                  <a:txBody>
+                    <a:bodyPr/>
+                    <a:lstStyle/>
+                    <a:p>
+                      <a:pPr marL="0" algn="ctr" defTabSz="457200" rtl="0" eaLnBrk="1" latinLnBrk="0" hangingPunct="1"/>
+                      <a:r>
+                        <a:rPr sz="1600" b="1" kern="1200" dirty="0">
+                          <a:solidFill>
+                            <a:srgbClr val="FFFFFF"/>
+                          </a:solidFill>
+                          <a:latin typeface="Aptos Light" panose="020B0004020202020204" pitchFamily="34" charset="0"/>
+                          <a:ea typeface="+mn-ea"/>
+                          <a:cs typeface="+mn-cs"/>
+                        </a:rPr>
+                        <a:t>Dominio </a:t>
+                      </a:r>
+                      <a:r>
+                        <a:rPr sz="1600" b="1" kern="1200" dirty="0" err="1">
+                          <a:solidFill>
+                            <a:srgbClr val="FFFFFF"/>
+                          </a:solidFill>
+                          <a:latin typeface="Aptos Light" panose="020B0004020202020204" pitchFamily="34" charset="0"/>
+                          <a:ea typeface="+mn-ea"/>
+                          <a:cs typeface="+mn-cs"/>
+                        </a:rPr>
+                        <a:t>pedagógico</a:t>
+                      </a:r>
+                      <a:r>
+                        <a:rPr sz="1600" b="1" kern="1200" dirty="0">
+                          <a:solidFill>
+                            <a:srgbClr val="FFFFFF"/>
+                          </a:solidFill>
+                          <a:latin typeface="Aptos Light" panose="020B0004020202020204" pitchFamily="34" charset="0"/>
+                          <a:ea typeface="+mn-ea"/>
+                          <a:cs typeface="+mn-cs"/>
+                        </a:rPr>
+                        <a:t> / </a:t>
+                      </a:r>
+                      <a:r>
+                        <a:rPr sz="1600" b="1" kern="1200" dirty="0" err="1">
+                          <a:solidFill>
+                            <a:srgbClr val="FFFFFF"/>
+                          </a:solidFill>
+                          <a:latin typeface="Aptos Light" panose="020B0004020202020204" pitchFamily="34" charset="0"/>
+                          <a:ea typeface="+mn-ea"/>
+                          <a:cs typeface="+mn-cs"/>
+                        </a:rPr>
+                        <a:t>estudio</a:t>
+                      </a:r>
+                      <a:endParaRPr sz="1600" b="1" kern="1200" dirty="0">
+                        <a:solidFill>
+                          <a:srgbClr val="FFFFFF"/>
+                        </a:solidFill>
+                        <a:latin typeface="Aptos Light" panose="020B0004020202020204" pitchFamily="34" charset="0"/>
+                        <a:ea typeface="+mn-ea"/>
+                        <a:cs typeface="+mn-cs"/>
+                      </a:endParaRPr>
+                    </a:p>
+                  </a:txBody>
+                  <a:tcPr>
+                    <a:lnR w="12700" cap="flat" cmpd="sng" algn="ctr">
+                      <a:solidFill>
+                        <a:schemeClr val="tx1"/>
+                      </a:solidFill>
+                      <a:prstDash val="solid"/>
+                      <a:round/>
+                      <a:headEnd type="none" w="med" len="med"/>
+                      <a:tailEnd type="none" w="med" len="med"/>
+                    </a:lnR>
+                    <a:lnB w="12700" cap="flat" cmpd="sng" algn="ctr">
+                      <a:solidFill>
+                        <a:schemeClr val="tx1"/>
+                      </a:solidFill>
+                      <a:prstDash val="solid"/>
+                      <a:round/>
+                      <a:headEnd type="none" w="med" len="med"/>
+                      <a:tailEnd type="none" w="med" len="med"/>
+                    </a:lnB>
+                    <a:solidFill>
+                      <a:schemeClr val="tx2"/>
+                    </a:solidFill>
+                  </a:tcPr>
+                </a:tc>
+                <a:tc>
+                  <a:txBody>
+                    <a:bodyPr/>
+                    <a:lstStyle/>
+                    <a:p>
+                      <a:pPr marL="0" algn="ctr" defTabSz="457200" rtl="0" eaLnBrk="1" latinLnBrk="0" hangingPunct="1"/>
+                      <a:r>
+                        <a:rPr lang="es-ES" sz="1600" b="1" kern="1200" dirty="0">
+                          <a:solidFill>
+                            <a:srgbClr val="FFFFFF"/>
+                          </a:solidFill>
+                          <a:latin typeface="Aptos Light" panose="020B0004020202020204" pitchFamily="34" charset="0"/>
+                          <a:ea typeface="+mn-ea"/>
+                          <a:cs typeface="+mn-cs"/>
+                        </a:rPr>
+                        <a:t>¿</a:t>
+                      </a:r>
+                      <a:r>
+                        <a:rPr sz="1600" b="1" kern="1200" dirty="0" err="1">
+                          <a:solidFill>
+                            <a:srgbClr val="FFFFFF"/>
+                          </a:solidFill>
+                          <a:latin typeface="Aptos Light" panose="020B0004020202020204" pitchFamily="34" charset="0"/>
+                          <a:ea typeface="+mn-ea"/>
+                          <a:cs typeface="+mn-cs"/>
+                        </a:rPr>
+                        <a:t>Qué</a:t>
+                      </a:r>
+                      <a:r>
+                        <a:rPr sz="1600" b="1" kern="1200" dirty="0">
+                          <a:solidFill>
+                            <a:srgbClr val="FFFFFF"/>
+                          </a:solidFill>
+                          <a:latin typeface="Aptos Light" panose="020B0004020202020204" pitchFamily="34" charset="0"/>
+                          <a:ea typeface="+mn-ea"/>
+                          <a:cs typeface="+mn-cs"/>
+                        </a:rPr>
+                        <a:t> se </a:t>
+                      </a:r>
+                      <a:r>
+                        <a:rPr sz="1600" b="1" kern="1200" dirty="0" err="1">
+                          <a:solidFill>
+                            <a:srgbClr val="FFFFFF"/>
+                          </a:solidFill>
+                          <a:latin typeface="Aptos Light" panose="020B0004020202020204" pitchFamily="34" charset="0"/>
+                          <a:ea typeface="+mn-ea"/>
+                          <a:cs typeface="+mn-cs"/>
+                        </a:rPr>
+                        <a:t>sigue</a:t>
+                      </a:r>
+                      <a:r>
+                        <a:rPr lang="es-ES" sz="1600" b="1" kern="1200" dirty="0">
+                          <a:solidFill>
+                            <a:srgbClr val="FFFFFF"/>
+                          </a:solidFill>
+                          <a:latin typeface="Aptos Light" panose="020B0004020202020204" pitchFamily="34" charset="0"/>
+                          <a:ea typeface="+mn-ea"/>
+                          <a:cs typeface="+mn-cs"/>
+                        </a:rPr>
+                        <a:t>?</a:t>
+                      </a:r>
+                      <a:endParaRPr sz="1600" b="1" kern="1200" dirty="0">
+                        <a:solidFill>
+                          <a:srgbClr val="FFFFFF"/>
+                        </a:solidFill>
+                        <a:latin typeface="Aptos Light" panose="020B0004020202020204" pitchFamily="34" charset="0"/>
+                        <a:ea typeface="+mn-ea"/>
+                        <a:cs typeface="+mn-cs"/>
+                      </a:endParaRPr>
+                    </a:p>
+                  </a:txBody>
+                  <a:tcPr>
+                    <a:lnL w="12700" cap="flat" cmpd="sng" algn="ctr">
+                      <a:solidFill>
+                        <a:schemeClr val="tx1"/>
+                      </a:solidFill>
+                      <a:prstDash val="solid"/>
+                      <a:round/>
+                      <a:headEnd type="none" w="med" len="med"/>
+                      <a:tailEnd type="none" w="med" len="med"/>
+                    </a:lnL>
+                    <a:lnB w="12700" cap="flat" cmpd="sng" algn="ctr">
+                      <a:solidFill>
+                        <a:schemeClr val="tx1"/>
+                      </a:solidFill>
+                      <a:prstDash val="solid"/>
+                      <a:round/>
+                      <a:headEnd type="none" w="med" len="med"/>
+                      <a:tailEnd type="none" w="med" len="med"/>
+                    </a:lnB>
+                    <a:solidFill>
+                      <a:schemeClr val="tx2"/>
+                    </a:solidFill>
+                  </a:tcPr>
+                </a:tc>
+                <a:extLst>
+                  <a:ext uri="{0D108BD9-81ED-4DB2-BD59-A6C34878D82A}">
+                    <a16:rowId xmlns:a16="http://schemas.microsoft.com/office/drawing/2014/main" val="10000"/>
+                  </a:ext>
+                </a:extLst>
+              </a:tr>
+              <a:tr h="365760">
+                <a:tc>
+                  <a:txBody>
+                    <a:bodyPr/>
+                    <a:lstStyle/>
+                    <a:p>
+                      <a:pPr algn="ctr"/>
+                      <a:r>
+                        <a:rPr sz="1600" b="0" kern="1200">
+                          <a:solidFill>
+                            <a:schemeClr val="tx1"/>
+                          </a:solidFill>
+                          <a:latin typeface="Aptos Light" panose="020B0004020202020204" pitchFamily="34" charset="0"/>
+                          <a:ea typeface="+mn-ea"/>
+                          <a:cs typeface="+mn-cs"/>
+                        </a:rPr>
+                        <a:t>Lectura</a:t>
+                      </a:r>
+                    </a:p>
+                  </a:txBody>
+                  <a:tcPr>
+                    <a:lnR w="12700" cap="flat" cmpd="sng" algn="ctr">
+                      <a:solidFill>
+                        <a:schemeClr val="tx1"/>
+                      </a:solidFill>
+                      <a:prstDash val="solid"/>
+                      <a:round/>
+                      <a:headEnd type="none" w="med" len="med"/>
+                      <a:tailEnd type="none" w="med" len="med"/>
+                    </a:lnR>
+                    <a:lnT w="12700" cap="flat" cmpd="sng" algn="ctr">
+                      <a:solidFill>
+                        <a:schemeClr val="tx1"/>
+                      </a:solidFill>
+                      <a:prstDash val="solid"/>
+                      <a:round/>
+                      <a:headEnd type="none" w="med" len="med"/>
+                      <a:tailEnd type="none" w="med" len="med"/>
+                    </a:lnT>
+                    <a:lnB w="12700" cap="flat" cmpd="sng" algn="ctr">
+                      <a:solidFill>
+                        <a:schemeClr val="tx1"/>
+                      </a:solidFill>
+                      <a:prstDash val="solid"/>
+                      <a:round/>
+                      <a:headEnd type="none" w="med" len="med"/>
+                      <a:tailEnd type="none" w="med" len="med"/>
+                    </a:lnB>
+                    <a:solidFill>
+                      <a:schemeClr val="bg1"/>
+                    </a:solidFill>
+                  </a:tcPr>
+                </a:tc>
+                <a:tc>
+                  <a:txBody>
+                    <a:bodyPr/>
+                    <a:lstStyle/>
+                    <a:p>
+                      <a:pPr algn="ctr"/>
+                      <a:r>
+                        <a:rPr sz="1600" b="0" kern="1200" dirty="0">
+                          <a:solidFill>
+                            <a:schemeClr val="tx1"/>
+                          </a:solidFill>
+                          <a:latin typeface="Aptos Light" panose="020B0004020202020204" pitchFamily="34" charset="0"/>
+                          <a:ea typeface="+mn-ea"/>
+                          <a:cs typeface="+mn-cs"/>
+                        </a:rPr>
+                        <a:t>Progreso </a:t>
+                      </a:r>
+                      <a:r>
+                        <a:rPr lang="es-ES" sz="1600" b="0" kern="1200" dirty="0">
+                          <a:solidFill>
+                            <a:schemeClr val="tx1"/>
+                          </a:solidFill>
+                          <a:latin typeface="Aptos Light" panose="020B0004020202020204" pitchFamily="34" charset="0"/>
+                          <a:ea typeface="+mn-ea"/>
+                          <a:cs typeface="+mn-cs"/>
+                        </a:rPr>
+                        <a:t>técnicas </a:t>
+                      </a:r>
+                      <a:r>
+                        <a:rPr sz="1600" b="0" kern="1200" dirty="0">
+                          <a:solidFill>
+                            <a:schemeClr val="tx1"/>
+                          </a:solidFill>
+                          <a:latin typeface="Aptos Light" panose="020B0004020202020204" pitchFamily="34" charset="0"/>
+                          <a:ea typeface="+mn-ea"/>
+                          <a:cs typeface="+mn-cs"/>
+                        </a:rPr>
+                        <a:t>de </a:t>
+                      </a:r>
+                      <a:r>
+                        <a:rPr sz="1600" b="0" kern="1200" dirty="0" err="1">
+                          <a:solidFill>
+                            <a:schemeClr val="tx1"/>
+                          </a:solidFill>
+                          <a:latin typeface="Aptos Light" panose="020B0004020202020204" pitchFamily="34" charset="0"/>
+                          <a:ea typeface="+mn-ea"/>
+                          <a:cs typeface="+mn-cs"/>
+                        </a:rPr>
+                        <a:t>lectura</a:t>
+                      </a:r>
+                      <a:r>
+                        <a:rPr sz="1600" b="0" kern="1200" dirty="0">
+                          <a:solidFill>
+                            <a:schemeClr val="tx1"/>
+                          </a:solidFill>
+                          <a:latin typeface="Aptos Light" panose="020B0004020202020204" pitchFamily="34" charset="0"/>
+                          <a:ea typeface="+mn-ea"/>
+                          <a:cs typeface="+mn-cs"/>
+                        </a:rPr>
+                        <a:t> </a:t>
+                      </a:r>
+                      <a:r>
+                        <a:rPr sz="1600" b="0" kern="1200" dirty="0" err="1">
+                          <a:solidFill>
+                            <a:schemeClr val="tx1"/>
+                          </a:solidFill>
+                          <a:latin typeface="Aptos Light" panose="020B0004020202020204" pitchFamily="34" charset="0"/>
+                          <a:ea typeface="+mn-ea"/>
+                          <a:cs typeface="+mn-cs"/>
+                        </a:rPr>
+                        <a:t>en</a:t>
+                      </a:r>
+                      <a:r>
+                        <a:rPr sz="1600" b="0" kern="1200" dirty="0">
+                          <a:solidFill>
+                            <a:schemeClr val="tx1"/>
+                          </a:solidFill>
+                          <a:latin typeface="Aptos Light" panose="020B0004020202020204" pitchFamily="34" charset="0"/>
+                          <a:ea typeface="+mn-ea"/>
+                          <a:cs typeface="+mn-cs"/>
+                        </a:rPr>
+                        <a:t> el </a:t>
+                      </a:r>
+                      <a:r>
+                        <a:rPr sz="1600" b="0" kern="1200" dirty="0" err="1">
+                          <a:solidFill>
+                            <a:schemeClr val="tx1"/>
+                          </a:solidFill>
+                          <a:latin typeface="Aptos Light" panose="020B0004020202020204" pitchFamily="34" charset="0"/>
+                          <a:ea typeface="+mn-ea"/>
+                          <a:cs typeface="+mn-cs"/>
+                        </a:rPr>
+                        <a:t>tiempo</a:t>
+                      </a:r>
+                      <a:r>
+                        <a:rPr sz="1600" b="0" kern="1200" dirty="0">
+                          <a:solidFill>
+                            <a:schemeClr val="tx1"/>
+                          </a:solidFill>
+                          <a:latin typeface="Aptos Light" panose="020B0004020202020204" pitchFamily="34" charset="0"/>
+                          <a:ea typeface="+mn-ea"/>
+                          <a:cs typeface="+mn-cs"/>
+                        </a:rPr>
+                        <a:t>.</a:t>
+                      </a:r>
+                    </a:p>
+                  </a:txBody>
+                  <a:tcPr>
+                    <a:lnL w="12700" cap="flat" cmpd="sng" algn="ctr">
+                      <a:solidFill>
+                        <a:schemeClr val="tx1"/>
+                      </a:solidFill>
+                      <a:prstDash val="solid"/>
+                      <a:round/>
+                      <a:headEnd type="none" w="med" len="med"/>
+                      <a:tailEnd type="none" w="med" len="med"/>
+                    </a:lnL>
+                    <a:lnT w="12700" cap="flat" cmpd="sng" algn="ctr">
+                      <a:solidFill>
+                        <a:schemeClr val="tx1"/>
+                      </a:solidFill>
+                      <a:prstDash val="solid"/>
+                      <a:round/>
+                      <a:headEnd type="none" w="med" len="med"/>
+                      <a:tailEnd type="none" w="med" len="med"/>
+                    </a:lnT>
+                    <a:lnB w="12700" cap="flat" cmpd="sng" algn="ctr">
+                      <a:solidFill>
+                        <a:schemeClr val="tx1"/>
+                      </a:solidFill>
+                      <a:prstDash val="solid"/>
+                      <a:round/>
+                      <a:headEnd type="none" w="med" len="med"/>
+                      <a:tailEnd type="none" w="med" len="med"/>
+                    </a:lnB>
+                    <a:solidFill>
+                      <a:schemeClr val="bg1"/>
+                    </a:solidFill>
+                  </a:tcPr>
+                </a:tc>
+                <a:extLst>
+                  <a:ext uri="{0D108BD9-81ED-4DB2-BD59-A6C34878D82A}">
+                    <a16:rowId xmlns:a16="http://schemas.microsoft.com/office/drawing/2014/main" val="10001"/>
+                  </a:ext>
+                </a:extLst>
+              </a:tr>
+              <a:tr h="365760">
+                <a:tc>
+                  <a:txBody>
+                    <a:bodyPr/>
+                    <a:lstStyle/>
+                    <a:p>
+                      <a:pPr algn="ctr"/>
+                      <a:r>
+                        <a:rPr sz="1600" b="0" kern="1200">
+                          <a:solidFill>
+                            <a:schemeClr val="tx1"/>
+                          </a:solidFill>
+                          <a:latin typeface="Aptos Light" panose="020B0004020202020204" pitchFamily="34" charset="0"/>
+                          <a:ea typeface="+mn-ea"/>
+                          <a:cs typeface="+mn-cs"/>
+                        </a:rPr>
+                        <a:t>Escritura</a:t>
+                      </a:r>
+                    </a:p>
+                  </a:txBody>
+                  <a:tcPr>
+                    <a:lnR w="12700" cap="flat" cmpd="sng" algn="ctr">
+                      <a:solidFill>
+                        <a:schemeClr val="tx1"/>
+                      </a:solidFill>
+                      <a:prstDash val="solid"/>
+                      <a:round/>
+                      <a:headEnd type="none" w="med" len="med"/>
+                      <a:tailEnd type="none" w="med" len="med"/>
+                    </a:lnR>
+                    <a:lnT w="12700" cap="flat" cmpd="sng" algn="ctr">
+                      <a:solidFill>
+                        <a:schemeClr val="tx1"/>
+                      </a:solidFill>
+                      <a:prstDash val="solid"/>
+                      <a:round/>
+                      <a:headEnd type="none" w="med" len="med"/>
+                      <a:tailEnd type="none" w="med" len="med"/>
+                    </a:lnT>
+                    <a:lnB w="12700" cap="flat" cmpd="sng" algn="ctr">
+                      <a:solidFill>
+                        <a:schemeClr val="tx1"/>
+                      </a:solidFill>
+                      <a:prstDash val="solid"/>
+                      <a:round/>
+                      <a:headEnd type="none" w="med" len="med"/>
+                      <a:tailEnd type="none" w="med" len="med"/>
+                    </a:lnB>
+                    <a:solidFill>
+                      <a:schemeClr val="bg1"/>
+                    </a:solidFill>
+                  </a:tcPr>
+                </a:tc>
+                <a:tc>
+                  <a:txBody>
+                    <a:bodyPr/>
+                    <a:lstStyle/>
+                    <a:p>
+                      <a:pPr algn="ctr"/>
+                      <a:r>
+                        <a:rPr sz="1600" b="0" kern="1200" dirty="0">
+                          <a:solidFill>
+                            <a:schemeClr val="tx1"/>
+                          </a:solidFill>
+                          <a:latin typeface="Aptos Light" panose="020B0004020202020204" pitchFamily="34" charset="0"/>
+                          <a:ea typeface="+mn-ea"/>
+                          <a:cs typeface="+mn-cs"/>
+                        </a:rPr>
+                        <a:t>Progreso </a:t>
+                      </a:r>
+                      <a:r>
+                        <a:rPr lang="es-ES" sz="1600" b="0" kern="1200" dirty="0">
+                          <a:solidFill>
+                            <a:schemeClr val="tx1"/>
+                          </a:solidFill>
+                          <a:latin typeface="Aptos Light" panose="020B0004020202020204" pitchFamily="34" charset="0"/>
+                          <a:ea typeface="+mn-ea"/>
+                          <a:cs typeface="+mn-cs"/>
+                        </a:rPr>
+                        <a:t>en técnicas </a:t>
+                      </a:r>
+                      <a:r>
+                        <a:rPr sz="1600" b="0" kern="1200" dirty="0">
+                          <a:solidFill>
+                            <a:schemeClr val="tx1"/>
+                          </a:solidFill>
+                          <a:latin typeface="Aptos Light" panose="020B0004020202020204" pitchFamily="34" charset="0"/>
+                          <a:ea typeface="+mn-ea"/>
+                          <a:cs typeface="+mn-cs"/>
+                        </a:rPr>
+                        <a:t>de </a:t>
+                      </a:r>
+                      <a:r>
+                        <a:rPr sz="1600" b="0" kern="1200" dirty="0" err="1">
+                          <a:solidFill>
+                            <a:schemeClr val="tx1"/>
+                          </a:solidFill>
+                          <a:latin typeface="Aptos Light" panose="020B0004020202020204" pitchFamily="34" charset="0"/>
+                          <a:ea typeface="+mn-ea"/>
+                          <a:cs typeface="+mn-cs"/>
+                        </a:rPr>
+                        <a:t>escritura</a:t>
+                      </a:r>
+                      <a:r>
+                        <a:rPr lang="es-ES" sz="1600" b="0" kern="1200" dirty="0">
+                          <a:solidFill>
+                            <a:schemeClr val="tx1"/>
+                          </a:solidFill>
+                          <a:latin typeface="Aptos Light" panose="020B0004020202020204" pitchFamily="34" charset="0"/>
+                          <a:ea typeface="+mn-ea"/>
+                          <a:cs typeface="+mn-cs"/>
+                        </a:rPr>
+                        <a:t> y </a:t>
+                      </a:r>
+                      <a:r>
+                        <a:rPr lang="es-ES" sz="1600" b="0" kern="1200" dirty="0" err="1">
+                          <a:solidFill>
+                            <a:schemeClr val="tx1"/>
+                          </a:solidFill>
+                          <a:latin typeface="Aptos Light" panose="020B0004020202020204" pitchFamily="34" charset="0"/>
+                          <a:ea typeface="+mn-ea"/>
+                          <a:cs typeface="+mn-cs"/>
+                        </a:rPr>
+                        <a:t>expresion</a:t>
+                      </a:r>
+                      <a:r>
+                        <a:rPr sz="1600" b="0" kern="1200" dirty="0">
+                          <a:solidFill>
+                            <a:schemeClr val="tx1"/>
+                          </a:solidFill>
+                          <a:latin typeface="Aptos Light" panose="020B0004020202020204" pitchFamily="34" charset="0"/>
+                          <a:ea typeface="+mn-ea"/>
+                          <a:cs typeface="+mn-cs"/>
+                        </a:rPr>
+                        <a:t>.</a:t>
+                      </a:r>
+                    </a:p>
+                  </a:txBody>
+                  <a:tcPr>
+                    <a:lnL w="12700" cap="flat" cmpd="sng" algn="ctr">
+                      <a:solidFill>
+                        <a:schemeClr val="tx1"/>
+                      </a:solidFill>
+                      <a:prstDash val="solid"/>
+                      <a:round/>
+                      <a:headEnd type="none" w="med" len="med"/>
+                      <a:tailEnd type="none" w="med" len="med"/>
+                    </a:lnL>
+                    <a:lnT w="12700" cap="flat" cmpd="sng" algn="ctr">
+                      <a:solidFill>
+                        <a:schemeClr val="tx1"/>
+                      </a:solidFill>
+                      <a:prstDash val="solid"/>
+                      <a:round/>
+                      <a:headEnd type="none" w="med" len="med"/>
+                      <a:tailEnd type="none" w="med" len="med"/>
+                    </a:lnT>
+                    <a:lnB w="12700" cap="flat" cmpd="sng" algn="ctr">
+                      <a:solidFill>
+                        <a:schemeClr val="tx1"/>
+                      </a:solidFill>
+                      <a:prstDash val="solid"/>
+                      <a:round/>
+                      <a:headEnd type="none" w="med" len="med"/>
+                      <a:tailEnd type="none" w="med" len="med"/>
+                    </a:lnB>
+                    <a:solidFill>
+                      <a:schemeClr val="bg1"/>
+                    </a:solidFill>
+                  </a:tcPr>
+                </a:tc>
+                <a:extLst>
+                  <a:ext uri="{0D108BD9-81ED-4DB2-BD59-A6C34878D82A}">
+                    <a16:rowId xmlns:a16="http://schemas.microsoft.com/office/drawing/2014/main" val="10002"/>
+                  </a:ext>
+                </a:extLst>
+              </a:tr>
+              <a:tr h="365760">
+                <a:tc>
+                  <a:txBody>
+                    <a:bodyPr/>
+                    <a:lstStyle/>
+                    <a:p>
+                      <a:pPr algn="ctr"/>
+                      <a:r>
+                        <a:rPr sz="1600" b="0" kern="1200">
+                          <a:solidFill>
+                            <a:schemeClr val="tx1"/>
+                          </a:solidFill>
+                          <a:latin typeface="Aptos Light" panose="020B0004020202020204" pitchFamily="34" charset="0"/>
+                          <a:ea typeface="+mn-ea"/>
+                          <a:cs typeface="+mn-cs"/>
+                        </a:rPr>
+                        <a:t>Exposición oral</a:t>
+                      </a:r>
+                    </a:p>
+                  </a:txBody>
+                  <a:tcPr>
+                    <a:lnR w="12700" cap="flat" cmpd="sng" algn="ctr">
+                      <a:solidFill>
+                        <a:schemeClr val="tx1"/>
+                      </a:solidFill>
+                      <a:prstDash val="solid"/>
+                      <a:round/>
+                      <a:headEnd type="none" w="med" len="med"/>
+                      <a:tailEnd type="none" w="med" len="med"/>
+                    </a:lnR>
+                    <a:lnT w="12700" cap="flat" cmpd="sng" algn="ctr">
+                      <a:solidFill>
+                        <a:schemeClr val="tx1"/>
+                      </a:solidFill>
+                      <a:prstDash val="solid"/>
+                      <a:round/>
+                      <a:headEnd type="none" w="med" len="med"/>
+                      <a:tailEnd type="none" w="med" len="med"/>
+                    </a:lnT>
+                    <a:lnB w="12700" cap="flat" cmpd="sng" algn="ctr">
+                      <a:solidFill>
+                        <a:schemeClr val="tx1"/>
+                      </a:solidFill>
+                      <a:prstDash val="solid"/>
+                      <a:round/>
+                      <a:headEnd type="none" w="med" len="med"/>
+                      <a:tailEnd type="none" w="med" len="med"/>
+                    </a:lnB>
+                    <a:solidFill>
+                      <a:schemeClr val="bg1"/>
+                    </a:solidFill>
+                  </a:tcPr>
+                </a:tc>
+                <a:tc>
+                  <a:txBody>
+                    <a:bodyPr/>
+                    <a:lstStyle/>
+                    <a:p>
+                      <a:pPr algn="ctr"/>
+                      <a:r>
+                        <a:rPr sz="1600" b="0" kern="1200" dirty="0" err="1">
+                          <a:solidFill>
+                            <a:schemeClr val="tx1"/>
+                          </a:solidFill>
+                          <a:latin typeface="Aptos Light" panose="020B0004020202020204" pitchFamily="34" charset="0"/>
+                          <a:ea typeface="+mn-ea"/>
+                          <a:cs typeface="+mn-cs"/>
+                        </a:rPr>
+                        <a:t>Evaluación</a:t>
+                      </a:r>
+                      <a:r>
+                        <a:rPr sz="1600" b="0" kern="1200" dirty="0">
+                          <a:solidFill>
+                            <a:schemeClr val="tx1"/>
+                          </a:solidFill>
+                          <a:latin typeface="Aptos Light" panose="020B0004020202020204" pitchFamily="34" charset="0"/>
+                          <a:ea typeface="+mn-ea"/>
+                          <a:cs typeface="+mn-cs"/>
+                        </a:rPr>
+                        <a:t> de </a:t>
+                      </a:r>
+                      <a:r>
+                        <a:rPr sz="1600" b="0" kern="1200" dirty="0" err="1">
+                          <a:solidFill>
+                            <a:schemeClr val="tx1"/>
+                          </a:solidFill>
+                          <a:latin typeface="Aptos Light" panose="020B0004020202020204" pitchFamily="34" charset="0"/>
+                          <a:ea typeface="+mn-ea"/>
+                          <a:cs typeface="+mn-cs"/>
+                        </a:rPr>
+                        <a:t>exposiciones</a:t>
+                      </a:r>
+                      <a:r>
+                        <a:rPr lang="es-ES" sz="1600" b="0" kern="1200" dirty="0">
+                          <a:solidFill>
+                            <a:schemeClr val="tx1"/>
+                          </a:solidFill>
+                          <a:latin typeface="Aptos Light" panose="020B0004020202020204" pitchFamily="34" charset="0"/>
+                          <a:ea typeface="+mn-ea"/>
+                          <a:cs typeface="+mn-cs"/>
+                        </a:rPr>
+                        <a:t> </a:t>
+                      </a:r>
+                    </a:p>
+                    <a:p>
+                      <a:pPr algn="ctr"/>
+                      <a:r>
+                        <a:rPr lang="es-ES" sz="1600" b="0" kern="1200" dirty="0">
+                          <a:solidFill>
+                            <a:schemeClr val="tx1"/>
+                          </a:solidFill>
+                          <a:latin typeface="Aptos Light" panose="020B0004020202020204" pitchFamily="34" charset="0"/>
+                          <a:ea typeface="+mn-ea"/>
+                          <a:cs typeface="+mn-cs"/>
+                        </a:rPr>
+                        <a:t>(lenguaje corporal, no verbal…)</a:t>
+                      </a:r>
+                      <a:endParaRPr sz="1600" b="0" kern="1200" dirty="0">
+                        <a:solidFill>
+                          <a:schemeClr val="tx1"/>
+                        </a:solidFill>
+                        <a:latin typeface="Aptos Light" panose="020B0004020202020204" pitchFamily="34" charset="0"/>
+                        <a:ea typeface="+mn-ea"/>
+                        <a:cs typeface="+mn-cs"/>
+                      </a:endParaRPr>
+                    </a:p>
+                  </a:txBody>
+                  <a:tcPr>
+                    <a:lnL w="12700" cap="flat" cmpd="sng" algn="ctr">
+                      <a:solidFill>
+                        <a:schemeClr val="tx1"/>
+                      </a:solidFill>
+                      <a:prstDash val="solid"/>
+                      <a:round/>
+                      <a:headEnd type="none" w="med" len="med"/>
+                      <a:tailEnd type="none" w="med" len="med"/>
+                    </a:lnL>
+                    <a:lnT w="12700" cap="flat" cmpd="sng" algn="ctr">
+                      <a:solidFill>
+                        <a:schemeClr val="tx1"/>
+                      </a:solidFill>
+                      <a:prstDash val="solid"/>
+                      <a:round/>
+                      <a:headEnd type="none" w="med" len="med"/>
+                      <a:tailEnd type="none" w="med" len="med"/>
+                    </a:lnT>
+                    <a:lnB w="12700" cap="flat" cmpd="sng" algn="ctr">
+                      <a:solidFill>
+                        <a:schemeClr val="tx1"/>
+                      </a:solidFill>
+                      <a:prstDash val="solid"/>
+                      <a:round/>
+                      <a:headEnd type="none" w="med" len="med"/>
+                      <a:tailEnd type="none" w="med" len="med"/>
+                    </a:lnB>
+                    <a:solidFill>
+                      <a:schemeClr val="bg1"/>
+                    </a:solidFill>
+                  </a:tcPr>
+                </a:tc>
+                <a:extLst>
+                  <a:ext uri="{0D108BD9-81ED-4DB2-BD59-A6C34878D82A}">
+                    <a16:rowId xmlns:a16="http://schemas.microsoft.com/office/drawing/2014/main" val="10003"/>
+                  </a:ext>
+                </a:extLst>
+              </a:tr>
+              <a:tr h="365760">
+                <a:tc>
+                  <a:txBody>
+                    <a:bodyPr/>
+                    <a:lstStyle/>
+                    <a:p>
+                      <a:pPr algn="ctr"/>
+                      <a:r>
+                        <a:rPr sz="1600" b="0" kern="1200" dirty="0" err="1">
+                          <a:solidFill>
+                            <a:schemeClr val="tx1"/>
+                          </a:solidFill>
+                          <a:latin typeface="Aptos Light" panose="020B0004020202020204" pitchFamily="34" charset="0"/>
+                          <a:ea typeface="+mn-ea"/>
+                          <a:cs typeface="+mn-cs"/>
+                        </a:rPr>
+                        <a:t>Interpretación</a:t>
+                      </a:r>
+                      <a:r>
+                        <a:rPr sz="1600" b="0" kern="1200" dirty="0">
+                          <a:solidFill>
+                            <a:schemeClr val="tx1"/>
+                          </a:solidFill>
+                          <a:latin typeface="Aptos Light" panose="020B0004020202020204" pitchFamily="34" charset="0"/>
+                          <a:ea typeface="+mn-ea"/>
+                          <a:cs typeface="+mn-cs"/>
+                        </a:rPr>
+                        <a:t> musical</a:t>
+                      </a:r>
+                    </a:p>
+                  </a:txBody>
+                  <a:tcPr>
+                    <a:lnR w="12700" cap="flat" cmpd="sng" algn="ctr">
+                      <a:solidFill>
+                        <a:schemeClr val="tx1"/>
+                      </a:solidFill>
+                      <a:prstDash val="solid"/>
+                      <a:round/>
+                      <a:headEnd type="none" w="med" len="med"/>
+                      <a:tailEnd type="none" w="med" len="med"/>
+                    </a:lnR>
+                    <a:lnT w="12700" cap="flat" cmpd="sng" algn="ctr">
+                      <a:solidFill>
+                        <a:schemeClr val="tx1"/>
+                      </a:solidFill>
+                      <a:prstDash val="solid"/>
+                      <a:round/>
+                      <a:headEnd type="none" w="med" len="med"/>
+                      <a:tailEnd type="none" w="med" len="med"/>
+                    </a:lnT>
+                    <a:solidFill>
+                      <a:schemeClr val="bg1"/>
+                    </a:solidFill>
+                  </a:tcPr>
+                </a:tc>
+                <a:tc>
+                  <a:txBody>
+                    <a:bodyPr/>
+                    <a:lstStyle/>
+                    <a:p>
+                      <a:pPr algn="ctr"/>
+                      <a:r>
+                        <a:rPr lang="es-ES" sz="1600" b="0" kern="1200" dirty="0" err="1">
+                          <a:solidFill>
+                            <a:schemeClr val="tx1"/>
+                          </a:solidFill>
+                          <a:latin typeface="Aptos Light" panose="020B0004020202020204" pitchFamily="34" charset="0"/>
+                          <a:ea typeface="+mn-ea"/>
+                          <a:cs typeface="+mn-cs"/>
+                        </a:rPr>
+                        <a:t>Evaluacion</a:t>
+                      </a:r>
+                      <a:r>
+                        <a:rPr lang="es-ES" sz="1600" b="0" kern="1200" dirty="0">
+                          <a:solidFill>
+                            <a:schemeClr val="tx1"/>
+                          </a:solidFill>
+                          <a:latin typeface="Aptos Light" panose="020B0004020202020204" pitchFamily="34" charset="0"/>
+                          <a:ea typeface="+mn-ea"/>
+                          <a:cs typeface="+mn-cs"/>
+                        </a:rPr>
+                        <a:t> de técnicas de interpretación. </a:t>
+                      </a:r>
+                    </a:p>
+                    <a:p>
+                      <a:pPr algn="ctr"/>
+                      <a:r>
+                        <a:rPr lang="es-ES" sz="1600" b="0" kern="1200" dirty="0">
+                          <a:solidFill>
+                            <a:schemeClr val="tx1"/>
+                          </a:solidFill>
+                          <a:latin typeface="Aptos Light" panose="020B0004020202020204" pitchFamily="34" charset="0"/>
+                          <a:ea typeface="+mn-ea"/>
+                          <a:cs typeface="+mn-cs"/>
+                        </a:rPr>
+                        <a:t>Corrección de ritmo, </a:t>
+                      </a:r>
+                      <a:r>
+                        <a:rPr lang="es-ES" sz="1600" b="0" kern="1200" dirty="0" err="1">
+                          <a:solidFill>
+                            <a:schemeClr val="tx1"/>
+                          </a:solidFill>
+                          <a:latin typeface="Aptos Light" panose="020B0004020202020204" pitchFamily="34" charset="0"/>
+                          <a:ea typeface="+mn-ea"/>
+                          <a:cs typeface="+mn-cs"/>
+                        </a:rPr>
+                        <a:t>entoncacion</a:t>
+                      </a:r>
+                      <a:r>
+                        <a:rPr lang="es-ES" sz="1600" b="0" kern="1200" dirty="0">
+                          <a:solidFill>
+                            <a:schemeClr val="tx1"/>
+                          </a:solidFill>
+                          <a:latin typeface="Aptos Light" panose="020B0004020202020204" pitchFamily="34" charset="0"/>
+                          <a:ea typeface="+mn-ea"/>
+                          <a:cs typeface="+mn-cs"/>
+                        </a:rPr>
+                        <a:t>…</a:t>
+                      </a:r>
+                      <a:endParaRPr sz="1600" b="0" kern="1200" dirty="0">
+                        <a:solidFill>
+                          <a:schemeClr val="tx1"/>
+                        </a:solidFill>
+                        <a:latin typeface="Aptos Light" panose="020B0004020202020204" pitchFamily="34" charset="0"/>
+                        <a:ea typeface="+mn-ea"/>
+                        <a:cs typeface="+mn-cs"/>
+                      </a:endParaRPr>
+                    </a:p>
+                  </a:txBody>
+                  <a:tcPr>
+                    <a:lnL w="12700" cap="flat" cmpd="sng" algn="ctr">
+                      <a:solidFill>
+                        <a:schemeClr val="tx1"/>
+                      </a:solidFill>
+                      <a:prstDash val="solid"/>
+                      <a:round/>
+                      <a:headEnd type="none" w="med" len="med"/>
+                      <a:tailEnd type="none" w="med" len="med"/>
+                    </a:lnL>
+                    <a:lnT w="12700" cap="flat" cmpd="sng" algn="ctr">
+                      <a:solidFill>
+                        <a:schemeClr val="tx1"/>
+                      </a:solidFill>
+                      <a:prstDash val="solid"/>
+                      <a:round/>
+                      <a:headEnd type="none" w="med" len="med"/>
+                      <a:tailEnd type="none" w="med" len="med"/>
+                    </a:lnT>
+                    <a:solidFill>
+                      <a:schemeClr val="bg1"/>
+                    </a:solidFill>
+                  </a:tcPr>
+                </a:tc>
+                <a:extLst>
+                  <a:ext uri="{0D108BD9-81ED-4DB2-BD59-A6C34878D82A}">
+                    <a16:rowId xmlns:a16="http://schemas.microsoft.com/office/drawing/2014/main" val="10004"/>
+                  </a:ext>
+                </a:extLst>
+              </a:tr>
+            </a:tbl>
+          </a:graphicData>
+        </a:graphic>
+      </p:graphicFrame>
+      <p:sp>
+        <p:nvSpPr>
+          <p:cNvPr id="7" name="Rounded Rectangle 6"/>
+          <p:cNvSpPr/>
+          <p:nvPr/>
+        </p:nvSpPr>
+        <p:spPr>
+          <a:xfrm>
+            <a:off x="640080" y="4714738"/>
+            <a:ext cx="11064240" cy="1828800"/>
+          </a:xfrm>
+          <a:prstGeom prst="roundRect">
+            <a:avLst/>
+          </a:prstGeom>
+          <a:solidFill>
+            <a:srgbClr val="FFF6E0"/>
+          </a:solidFill>
+          <a:ln w="15875">
+            <a:solidFill>
+              <a:srgbClr val="B57A00"/>
+            </a:solidFill>
+          </a:ln>
+          <a:effectLst/>
+        </p:spPr>
+        <p:style>
+          <a:lnRef idx="1">
+            <a:schemeClr val="accent1"/>
+          </a:lnRef>
+          <a:fillRef idx="3">
+            <a:schemeClr val="accent1"/>
+          </a:fillRef>
+          <a:effectRef idx="2">
+            <a:schemeClr val="accent1"/>
+          </a:effectRef>
+          <a:fontRef idx="minor">
+            <a:schemeClr val="lt1"/>
+          </a:fontRef>
+        </p:style>
+        <p:txBody>
+          <a:bodyPr wrap="square" lIns="182880" tIns="109728" rtlCol="0" anchor="ctr"/>
+          <a:lstStyle/>
+          <a:p>
+            <a:pPr algn="ctr"/>
+            <a:endParaRPr lang="es-ES" sz="2400" b="1" dirty="0">
+              <a:solidFill>
+                <a:srgbClr val="B57A00"/>
+              </a:solidFill>
+              <a:latin typeface="Aptos"/>
+            </a:endParaRPr>
+          </a:p>
+          <a:p>
+            <a:pPr algn="ctr"/>
+            <a:r>
+              <a:rPr sz="2400" b="1" dirty="0">
+                <a:solidFill>
+                  <a:srgbClr val="B57A00"/>
+                </a:solidFill>
+                <a:latin typeface="Aptos"/>
+              </a:rPr>
+              <a:t>El </a:t>
+            </a:r>
+            <a:r>
+              <a:rPr lang="es-ES" sz="2400" b="1" dirty="0">
+                <a:solidFill>
+                  <a:srgbClr val="B57A00"/>
+                </a:solidFill>
+                <a:latin typeface="Aptos"/>
+              </a:rPr>
+              <a:t>patrón</a:t>
+            </a:r>
+            <a:r>
+              <a:rPr sz="2400" b="1" dirty="0">
+                <a:solidFill>
+                  <a:srgbClr val="B57A00"/>
+                </a:solidFill>
+                <a:latin typeface="Aptos"/>
+              </a:rPr>
+              <a:t> se </a:t>
+            </a:r>
+            <a:r>
+              <a:rPr sz="2400" b="1" dirty="0" err="1">
+                <a:solidFill>
+                  <a:srgbClr val="B57A00"/>
+                </a:solidFill>
+                <a:latin typeface="Aptos"/>
+              </a:rPr>
+              <a:t>repite</a:t>
+            </a:r>
+            <a:endParaRPr lang="es-ES" sz="2400" b="1" dirty="0">
+              <a:solidFill>
+                <a:srgbClr val="B57A00"/>
+              </a:solidFill>
+              <a:latin typeface="Aptos"/>
+            </a:endParaRPr>
+          </a:p>
+          <a:p>
+            <a:pPr algn="ctr"/>
+            <a:endParaRPr sz="2400" b="1" dirty="0">
+              <a:solidFill>
+                <a:srgbClr val="B57A00"/>
+              </a:solidFill>
+              <a:latin typeface="Aptos"/>
+            </a:endParaRPr>
+          </a:p>
+          <a:p>
+            <a:pPr algn="ctr"/>
+            <a:r>
+              <a:rPr lang="es-ES" dirty="0">
+                <a:solidFill>
+                  <a:srgbClr val="444A54"/>
+                </a:solidFill>
+                <a:latin typeface="Aptos Light" panose="020B0004020202020204" pitchFamily="34" charset="0"/>
+              </a:rPr>
+              <a:t>G</a:t>
+            </a:r>
+            <a:r>
+              <a:rPr dirty="0" err="1">
+                <a:solidFill>
+                  <a:srgbClr val="444A54"/>
+                </a:solidFill>
+                <a:latin typeface="Aptos Light" panose="020B0004020202020204" pitchFamily="34" charset="0"/>
+              </a:rPr>
+              <a:t>rabar</a:t>
+            </a:r>
+            <a:r>
+              <a:rPr dirty="0">
+                <a:solidFill>
+                  <a:srgbClr val="444A54"/>
+                </a:solidFill>
+                <a:latin typeface="Aptos Light" panose="020B0004020202020204" pitchFamily="34" charset="0"/>
+              </a:rPr>
+              <a:t> → </a:t>
+            </a:r>
+            <a:r>
+              <a:rPr lang="es-ES" dirty="0">
+                <a:solidFill>
+                  <a:srgbClr val="444A54"/>
+                </a:solidFill>
+                <a:latin typeface="Aptos Light" panose="020B0004020202020204" pitchFamily="34" charset="0"/>
+              </a:rPr>
+              <a:t>Extraer</a:t>
+            </a:r>
+            <a:r>
+              <a:rPr dirty="0">
+                <a:solidFill>
+                  <a:srgbClr val="444A54"/>
+                </a:solidFill>
+                <a:latin typeface="Aptos Light" panose="020B0004020202020204" pitchFamily="34" charset="0"/>
+              </a:rPr>
+              <a:t> </a:t>
+            </a:r>
+            <a:r>
+              <a:rPr dirty="0" err="1">
+                <a:solidFill>
+                  <a:srgbClr val="444A54"/>
+                </a:solidFill>
+                <a:latin typeface="Aptos Light" panose="020B0004020202020204" pitchFamily="34" charset="0"/>
+              </a:rPr>
+              <a:t>métricas</a:t>
+            </a:r>
+            <a:r>
+              <a:rPr dirty="0">
+                <a:solidFill>
+                  <a:srgbClr val="444A54"/>
+                </a:solidFill>
+                <a:latin typeface="Aptos Light" panose="020B0004020202020204" pitchFamily="34" charset="0"/>
+              </a:rPr>
+              <a:t> → </a:t>
+            </a:r>
+            <a:r>
+              <a:rPr lang="es-ES" dirty="0">
+                <a:solidFill>
+                  <a:srgbClr val="444A54"/>
+                </a:solidFill>
+                <a:latin typeface="Aptos Light" panose="020B0004020202020204" pitchFamily="34" charset="0"/>
+              </a:rPr>
+              <a:t>C</a:t>
+            </a:r>
+            <a:r>
+              <a:rPr dirty="0" err="1">
+                <a:solidFill>
+                  <a:srgbClr val="444A54"/>
+                </a:solidFill>
+                <a:latin typeface="Aptos Light" panose="020B0004020202020204" pitchFamily="34" charset="0"/>
+              </a:rPr>
+              <a:t>omparar</a:t>
+            </a:r>
+            <a:r>
+              <a:rPr dirty="0">
+                <a:solidFill>
+                  <a:srgbClr val="444A54"/>
+                </a:solidFill>
+                <a:latin typeface="Aptos Light" panose="020B0004020202020204" pitchFamily="34" charset="0"/>
+              </a:rPr>
+              <a:t> con </a:t>
+            </a:r>
+            <a:r>
+              <a:rPr dirty="0" err="1">
+                <a:solidFill>
+                  <a:srgbClr val="444A54"/>
+                </a:solidFill>
+                <a:latin typeface="Aptos Light" panose="020B0004020202020204" pitchFamily="34" charset="0"/>
+              </a:rPr>
+              <a:t>una</a:t>
+            </a:r>
+            <a:r>
+              <a:rPr dirty="0">
+                <a:solidFill>
+                  <a:srgbClr val="444A54"/>
+                </a:solidFill>
+                <a:latin typeface="Aptos Light" panose="020B0004020202020204" pitchFamily="34" charset="0"/>
+              </a:rPr>
+              <a:t> </a:t>
+            </a:r>
+            <a:r>
+              <a:rPr lang="es-ES" dirty="0">
+                <a:solidFill>
+                  <a:srgbClr val="444A54"/>
+                </a:solidFill>
+                <a:latin typeface="Aptos Light" panose="020B0004020202020204" pitchFamily="34" charset="0"/>
+              </a:rPr>
+              <a:t>pauta</a:t>
+            </a:r>
+            <a:r>
+              <a:rPr dirty="0">
+                <a:solidFill>
+                  <a:srgbClr val="444A54"/>
+                </a:solidFill>
+                <a:latin typeface="Aptos Light" panose="020B0004020202020204" pitchFamily="34" charset="0"/>
+              </a:rPr>
+              <a:t> → </a:t>
+            </a:r>
+            <a:r>
+              <a:rPr lang="es-ES" dirty="0">
+                <a:solidFill>
+                  <a:srgbClr val="444A54"/>
+                </a:solidFill>
+                <a:latin typeface="Aptos Light" panose="020B0004020202020204" pitchFamily="34" charset="0"/>
+              </a:rPr>
+              <a:t>V</a:t>
+            </a:r>
+            <a:r>
+              <a:rPr dirty="0" err="1">
+                <a:solidFill>
+                  <a:srgbClr val="444A54"/>
+                </a:solidFill>
+                <a:latin typeface="Aptos Light" panose="020B0004020202020204" pitchFamily="34" charset="0"/>
+              </a:rPr>
+              <a:t>isualizar</a:t>
+            </a:r>
+            <a:r>
+              <a:rPr dirty="0">
+                <a:solidFill>
+                  <a:srgbClr val="444A54"/>
+                </a:solidFill>
+                <a:latin typeface="Aptos Light" panose="020B0004020202020204" pitchFamily="34" charset="0"/>
+              </a:rPr>
+              <a:t> el </a:t>
+            </a:r>
+            <a:r>
+              <a:rPr dirty="0" err="1">
+                <a:solidFill>
+                  <a:srgbClr val="444A54"/>
+                </a:solidFill>
+                <a:latin typeface="Aptos Light" panose="020B0004020202020204" pitchFamily="34" charset="0"/>
+              </a:rPr>
+              <a:t>progreso</a:t>
+            </a:r>
+            <a:r>
+              <a:rPr dirty="0">
+                <a:solidFill>
+                  <a:srgbClr val="444A54"/>
+                </a:solidFill>
+                <a:latin typeface="Aptos Light" panose="020B0004020202020204" pitchFamily="34" charset="0"/>
+              </a:rPr>
+              <a:t>.</a:t>
+            </a:r>
+            <a:endParaRPr lang="es-ES" dirty="0">
+              <a:solidFill>
+                <a:srgbClr val="444A54"/>
+              </a:solidFill>
+              <a:latin typeface="Aptos Light" panose="020B0004020202020204" pitchFamily="34" charset="0"/>
+            </a:endParaRPr>
+          </a:p>
+          <a:p>
+            <a:pPr algn="ctr"/>
+            <a:endParaRPr lang="es-ES" dirty="0">
+              <a:solidFill>
+                <a:srgbClr val="444A54"/>
+              </a:solidFill>
+              <a:latin typeface="Aptos Light" panose="020B0004020202020204" pitchFamily="34" charset="0"/>
+            </a:endParaRPr>
+          </a:p>
+          <a:p>
+            <a:pPr algn="ctr"/>
+            <a:r>
+              <a:rPr dirty="0">
+                <a:solidFill>
+                  <a:srgbClr val="444A54"/>
+                </a:solidFill>
+                <a:latin typeface="Aptos Light" panose="020B0004020202020204" pitchFamily="34" charset="0"/>
+              </a:rPr>
+              <a:t>Cambia el </a:t>
+            </a:r>
+            <a:r>
+              <a:rPr dirty="0" err="1">
+                <a:solidFill>
+                  <a:srgbClr val="444A54"/>
+                </a:solidFill>
+                <a:latin typeface="Aptos Light" panose="020B0004020202020204" pitchFamily="34" charset="0"/>
+              </a:rPr>
+              <a:t>dominio</a:t>
+            </a:r>
+            <a:r>
+              <a:rPr dirty="0">
+                <a:solidFill>
+                  <a:srgbClr val="444A54"/>
+                </a:solidFill>
+                <a:latin typeface="Aptos Light" panose="020B0004020202020204" pitchFamily="34" charset="0"/>
+              </a:rPr>
+              <a:t>, no la </a:t>
+            </a:r>
+            <a:r>
+              <a:rPr dirty="0" err="1">
+                <a:solidFill>
+                  <a:srgbClr val="444A54"/>
+                </a:solidFill>
+                <a:latin typeface="Aptos Light" panose="020B0004020202020204" pitchFamily="34" charset="0"/>
+              </a:rPr>
+              <a:t>arquitectura</a:t>
+            </a:r>
+            <a:r>
+              <a:rPr dirty="0">
+                <a:solidFill>
+                  <a:srgbClr val="444A54"/>
+                </a:solidFill>
+                <a:latin typeface="Aptos Light" panose="020B0004020202020204" pitchFamily="34" charset="0"/>
+              </a:rPr>
+              <a:t>.</a:t>
+            </a:r>
+            <a:endParaRPr lang="es-ES" dirty="0">
+              <a:solidFill>
+                <a:srgbClr val="444A54"/>
+              </a:solidFill>
+              <a:latin typeface="Aptos Light" panose="020B0004020202020204" pitchFamily="34" charset="0"/>
+            </a:endParaRPr>
+          </a:p>
+          <a:p>
+            <a:pPr algn="ctr"/>
+            <a:endParaRPr sz="1600" dirty="0">
+              <a:solidFill>
+                <a:srgbClr val="444A54"/>
+              </a:solidFill>
+              <a:latin typeface="Aptos Light" panose="020B0004020202020204" pitchFamily="34" charset="0"/>
+            </a:endParaRPr>
+          </a:p>
+        </p:txBody>
+      </p:sp>
+    </p:spTree>
+  </p:cSld>
+  <p:clrMapOvr>
+    <a:masterClrMapping/>
+  </p:clrMapOvr>
+</p:sld>
+</file>
+
+<file path=ppt/slides/slide13.xml><?xml version="1.0" encoding="utf-8"?>
+<p:sld xmlns:a="http://schemas.openxmlformats.org/drawingml/2006/main" xmlns:r="http://schemas.openxmlformats.org/officeDocument/2006/relationships" xmlns:p="http://schemas.openxmlformats.org/presentationml/2006/main">
+  <p:cSld>
+    <p:bg>
+      <p:bgPr>
+        <a:solidFill>
+          <a:srgbClr val="FFFFFF"/>
+        </a:solidFill>
+        <a:effectLst/>
+      </p:bgPr>
+    </p:bg>
+    <p:spTree>
+      <p:nvGrpSpPr>
+        <p:cNvPr id="1" name=""/>
+        <p:cNvGrpSpPr/>
+        <p:nvPr/>
+      </p:nvGrpSpPr>
+      <p:grpSpPr>
+        <a:xfrm>
+          <a:off x="0" y="0"/>
+          <a:ext cx="0" cy="0"/>
+          <a:chOff x="0" y="0"/>
+          <a:chExt cx="0" cy="0"/>
+        </a:xfrm>
+      </p:grpSpPr>
+      <p:sp>
+        <p:nvSpPr>
+          <p:cNvPr id="2" name="Rectangle 1"/>
+          <p:cNvSpPr/>
+          <p:nvPr/>
+        </p:nvSpPr>
+        <p:spPr>
+          <a:xfrm>
+            <a:off x="0" y="0"/>
+            <a:ext cx="12191695" cy="1051560"/>
+          </a:xfrm>
+          <a:prstGeom prst="rect">
+            <a:avLst/>
+          </a:prstGeom>
+          <a:solidFill>
+            <a:srgbClr val="1F3864"/>
+          </a:solidFill>
+          <a:ln>
+            <a:noFill/>
+          </a:ln>
+          <a:effectLst/>
+        </p:spPr>
+        <p:style>
+          <a:lnRef idx="1">
+            <a:schemeClr val="accent1"/>
+          </a:lnRef>
+          <a:fillRef idx="3">
+            <a:schemeClr val="accent1"/>
+          </a:fillRef>
+          <a:effectRef idx="2">
+            <a:schemeClr val="accent1"/>
+          </a:effectRef>
+          <a:fontRef idx="minor">
+            <a:schemeClr val="lt1"/>
+          </a:fontRef>
+        </p:style>
+        <p:txBody>
+          <a:bodyPr rtlCol="0" anchor="ctr"/>
+          <a:lstStyle/>
+          <a:p>
+            <a:pPr algn="ctr"/>
+            <a:endParaRPr/>
+          </a:p>
+        </p:txBody>
+      </p:sp>
+      <p:sp>
+        <p:nvSpPr>
+          <p:cNvPr id="3" name="Rectangle 2"/>
+          <p:cNvSpPr/>
+          <p:nvPr/>
+        </p:nvSpPr>
+        <p:spPr>
+          <a:xfrm>
+            <a:off x="457200" y="256032"/>
+            <a:ext cx="548640" cy="548640"/>
+          </a:xfrm>
+          <a:prstGeom prst="rect">
+            <a:avLst/>
+          </a:prstGeom>
+          <a:solidFill>
+            <a:srgbClr val="0E8A7E"/>
+          </a:solidFill>
+          <a:ln>
+            <a:noFill/>
+          </a:ln>
+          <a:effectLst/>
+        </p:spPr>
+        <p:style>
+          <a:lnRef idx="1">
+            <a:schemeClr val="accent1"/>
+          </a:lnRef>
+          <a:fillRef idx="3">
+            <a:schemeClr val="accent1"/>
+          </a:fillRef>
+          <a:effectRef idx="2">
+            <a:schemeClr val="accent1"/>
+          </a:effectRef>
+          <a:fontRef idx="minor">
+            <a:schemeClr val="lt1"/>
+          </a:fontRef>
+        </p:style>
+        <p:txBody>
+          <a:bodyPr wrap="square" rtlCol="0" anchor="ctr"/>
+          <a:lstStyle/>
+          <a:p>
+            <a:pPr algn="ctr"/>
+            <a:r>
+              <a:rPr sz="2200" b="1">
+                <a:solidFill>
+                  <a:srgbClr val="FFFFFF"/>
+                </a:solidFill>
+                <a:latin typeface="Calibri"/>
+              </a:rPr>
+              <a:t>A</a:t>
+            </a:r>
+          </a:p>
+        </p:txBody>
+      </p:sp>
+      <p:sp>
+        <p:nvSpPr>
+          <p:cNvPr id="4" name="TextBox 3"/>
+          <p:cNvSpPr txBox="1"/>
+          <p:nvPr/>
+        </p:nvSpPr>
+        <p:spPr>
+          <a:xfrm>
+            <a:off x="1188720" y="314462"/>
+            <a:ext cx="10515600" cy="523220"/>
+          </a:xfrm>
+          <a:prstGeom prst="rect">
+            <a:avLst/>
+          </a:prstGeom>
+          <a:noFill/>
+        </p:spPr>
+        <p:txBody>
+          <a:bodyPr wrap="square" anchor="ctr">
+            <a:spAutoFit/>
+          </a:bodyPr>
+          <a:lstStyle/>
+          <a:p>
+            <a:pPr algn="l">
+              <a:spcAft>
+                <a:spcPts val="600"/>
+              </a:spcAft>
+            </a:pPr>
+            <a:r>
               <a:rPr sz="2800" b="1" dirty="0">
                 <a:solidFill>
                   <a:srgbClr val="FFFFFF"/>
@@ -8035,7 +10551,7 @@
           <p:nvPr>
             <p:extLst>
               <p:ext uri="{D42A27DB-BD31-4B8C-83A1-F6EECF244321}">
-                <p14:modId xmlns:p14="http://schemas.microsoft.com/office/powerpoint/2010/main" val="3988771794"/>
+                <p14:modId xmlns:p14="http://schemas.microsoft.com/office/powerpoint/2010/main" val="612535443"/>
               </p:ext>
             </p:extLst>
           </p:nvPr>
@@ -8256,6 +10772,17 @@
                         <a:t>Diseñada</a:t>
                       </a:r>
                       <a:r>
+                        <a:rPr lang="es-ES" sz="1600" b="0" kern="1200" dirty="0">
+                          <a:solidFill>
+                            <a:schemeClr val="tx1"/>
+                          </a:solidFill>
+                          <a:latin typeface="Aptos Light" panose="020B0004020202020204" pitchFamily="34" charset="0"/>
+                          <a:ea typeface="+mn-ea"/>
+                          <a:cs typeface="+mn-cs"/>
+                        </a:rPr>
+                        <a:t> y armada</a:t>
+                      </a:r>
+                      <a:r>
                         <a:rPr sz="1600" b="0" kern="1200" dirty="0">
                           <a:solidFill>
                             <a:schemeClr val="tx1"/>
@@ -8264,7 +10791,7 @@
                           <a:ea typeface="+mn-ea"/>
                           <a:cs typeface="+mn-cs"/>
                         </a:rPr>
-                        <a:t>, no </a:t>
+                        <a:t>. </a:t>
                       </a:r>
                       <a:r>
                         <a:rPr sz="1600" b="0" kern="1200" dirty="0" err="1">
@@ -8275,7 +10802,7 @@
                           <a:ea typeface="+mn-ea"/>
                           <a:cs typeface="+mn-cs"/>
                         </a:rPr>
-                        <a:t>conectada</a:t>
+                        <a:t>Tabla</a:t>
                       </a:r>
                       <a:r>
                         <a:rPr sz="1600" b="0" kern="1200" dirty="0">
@@ -8286,7 +10813,7 @@
                           <a:ea typeface="+mn-ea"/>
                           <a:cs typeface="+mn-cs"/>
                         </a:rPr>
-                        <a:t>. </a:t>
+                        <a:t> </a:t>
                       </a:r>
                       <a:r>
                         <a:rPr sz="1600" b="0" kern="1200" dirty="0" err="1">
@@ -8297,7 +10824,7 @@
                           <a:ea typeface="+mn-ea"/>
                           <a:cs typeface="+mn-cs"/>
                         </a:rPr>
-                        <a:t>Tabla</a:t>
+                        <a:t>ai_insight</a:t>
                       </a:r>
                       <a:r>
                         <a:rPr sz="1600" b="0" kern="1200" dirty="0">
@@ -8308,6 +10835,28 @@
                           <a:ea typeface="+mn-ea"/>
                           <a:cs typeface="+mn-cs"/>
                         </a:rPr>
+                        <a:t> + </a:t>
+                      </a:r>
+                      <a:r>
+                        <a:rPr sz="1600" b="0" kern="1200" dirty="0" err="1">
+                          <a:solidFill>
+                            <a:schemeClr val="tx1"/>
+                          </a:solidFill>
+                          <a:latin typeface="Aptos Light" panose="020B0004020202020204" pitchFamily="34" charset="0"/>
+                          <a:ea typeface="+mn-ea"/>
+                          <a:cs typeface="+mn-cs"/>
+                        </a:rPr>
+                        <a:t>frontera</a:t>
+                      </a:r>
+                      <a:r>
+                        <a:rPr sz="1600" b="0" kern="1200" dirty="0">
+                          <a:solidFill>
+                            <a:schemeClr val="tx1"/>
+                          </a:solidFill>
+                          <a:latin typeface="Aptos Light" panose="020B0004020202020204" pitchFamily="34" charset="0"/>
+                          <a:ea typeface="+mn-ea"/>
+                          <a:cs typeface="+mn-cs"/>
+                        </a:rPr>
                         <a:t> </a:t>
                       </a:r>
                       <a:r>
@@ -8319,7 +10868,7 @@
                           <a:ea typeface="+mn-ea"/>
                           <a:cs typeface="+mn-cs"/>
                         </a:rPr>
-                        <a:t>ai_insight</a:t>
+                        <a:t>v_ai_payload</a:t>
                       </a:r>
                       <a:r>
                         <a:rPr sz="1600" b="0" kern="1200" dirty="0">
@@ -8330,7 +10879,7 @@
                           <a:ea typeface="+mn-ea"/>
                           <a:cs typeface="+mn-cs"/>
                         </a:rPr>
-                        <a:t> + </a:t>
+                        <a:t> </a:t>
                       </a:r>
                       <a:r>
                         <a:rPr sz="1600" b="0" kern="1200" dirty="0" err="1">
@@ -8341,7 +10890,7 @@
                           <a:ea typeface="+mn-ea"/>
                           <a:cs typeface="+mn-cs"/>
                         </a:rPr>
-                        <a:t>frontera</a:t>
+                        <a:t>listas</a:t>
                       </a:r>
                       <a:r>
                         <a:rPr sz="1600" b="0" kern="1200" dirty="0">
@@ -8352,18 +10901,40 @@
                           <a:ea typeface="+mn-ea"/>
                           <a:cs typeface="+mn-cs"/>
                         </a:rPr>
+                        <a:t>; </a:t>
+                      </a:r>
+                      <a:r>
+                        <a:rPr sz="1600" b="0" kern="1200" dirty="0" err="1">
+                          <a:solidFill>
+                            <a:schemeClr val="tx1"/>
+                          </a:solidFill>
+                          <a:latin typeface="Aptos Light" panose="020B0004020202020204" pitchFamily="34" charset="0"/>
+                          <a:ea typeface="+mn-ea"/>
+                          <a:cs typeface="+mn-cs"/>
+                        </a:rPr>
+                        <a:t>falta</a:t>
+                      </a:r>
+                      <a:r>
+                        <a:rPr sz="1600" b="0" kern="1200" dirty="0">
+                          <a:solidFill>
+                            <a:schemeClr val="tx1"/>
+                          </a:solidFill>
+                          <a:latin typeface="Aptos Light" panose="020B0004020202020204" pitchFamily="34" charset="0"/>
+                          <a:ea typeface="+mn-ea"/>
+                          <a:cs typeface="+mn-cs"/>
+                        </a:rPr>
                         <a:t> </a:t>
                       </a:r>
                       <a:r>
-                        <a:rPr sz="1600" b="0" kern="1200" dirty="0" err="1">
-                          <a:solidFill>
-                            <a:schemeClr val="tx1"/>
-                          </a:solidFill>
-                          <a:latin typeface="Aptos Light" panose="020B0004020202020204" pitchFamily="34" charset="0"/>
-                          <a:ea typeface="+mn-ea"/>
-                          <a:cs typeface="+mn-cs"/>
-                        </a:rPr>
-                        <a:t>v_ai_payload</a:t>
+                        <a:rPr lang="es-ES" sz="1600" b="0" kern="1200" dirty="0">
+                          <a:solidFill>
+                            <a:schemeClr val="tx1"/>
+                          </a:solidFill>
+                          <a:latin typeface="Aptos Light" panose="020B0004020202020204" pitchFamily="34" charset="0"/>
+                          <a:ea typeface="+mn-ea"/>
+                          <a:cs typeface="+mn-cs"/>
+                        </a:rPr>
+                        <a:t>conectar con servicio LLM</a:t>
                       </a:r>
                       <a:r>
                         <a:rPr sz="1600" b="0" kern="1200" dirty="0">
@@ -8374,95 +10945,7 @@
                           <a:ea typeface="+mn-ea"/>
                           <a:cs typeface="+mn-cs"/>
                         </a:rPr>
-                        <a:t> </a:t>
-                      </a:r>
-                      <a:r>
-                        <a:rPr sz="1600" b="0" kern="1200" dirty="0" err="1">
-                          <a:solidFill>
-                            <a:schemeClr val="tx1"/>
-                          </a:solidFill>
-                          <a:latin typeface="Aptos Light" panose="020B0004020202020204" pitchFamily="34" charset="0"/>
-                          <a:ea typeface="+mn-ea"/>
-                          <a:cs typeface="+mn-cs"/>
-                        </a:rPr>
-                        <a:t>listas</a:t>
-                      </a:r>
-                      <a:r>
-                        <a:rPr sz="1600" b="0" kern="1200" dirty="0">
-                          <a:solidFill>
-                            <a:schemeClr val="tx1"/>
-                          </a:solidFill>
-                          <a:latin typeface="Aptos Light" panose="020B0004020202020204" pitchFamily="34" charset="0"/>
-                          <a:ea typeface="+mn-ea"/>
-                          <a:cs typeface="+mn-cs"/>
-                        </a:rPr>
-                        <a:t>; </a:t>
-                      </a:r>
-                      <a:r>
-                        <a:rPr sz="1600" b="0" kern="1200" dirty="0" err="1">
-                          <a:solidFill>
-                            <a:schemeClr val="tx1"/>
-                          </a:solidFill>
-                          <a:latin typeface="Aptos Light" panose="020B0004020202020204" pitchFamily="34" charset="0"/>
-                          <a:ea typeface="+mn-ea"/>
-                          <a:cs typeface="+mn-cs"/>
-                        </a:rPr>
-                        <a:t>falta</a:t>
-                      </a:r>
-                      <a:r>
-                        <a:rPr sz="1600" b="0" kern="1200" dirty="0">
-                          <a:solidFill>
-                            <a:schemeClr val="tx1"/>
-                          </a:solidFill>
-                          <a:latin typeface="Aptos Light" panose="020B0004020202020204" pitchFamily="34" charset="0"/>
-                          <a:ea typeface="+mn-ea"/>
-                          <a:cs typeface="+mn-cs"/>
-                        </a:rPr>
-                        <a:t> el </a:t>
-                      </a:r>
-                      <a:r>
-                        <a:rPr sz="1600" b="0" kern="1200" dirty="0" err="1">
-                          <a:solidFill>
-                            <a:schemeClr val="tx1"/>
-                          </a:solidFill>
-                          <a:latin typeface="Aptos Light" panose="020B0004020202020204" pitchFamily="34" charset="0"/>
-                          <a:ea typeface="+mn-ea"/>
-                          <a:cs typeface="+mn-cs"/>
-                        </a:rPr>
-                        <a:t>servicio</a:t>
-                      </a:r>
-                      <a:r>
-                        <a:rPr sz="1600" b="0" kern="1200" dirty="0">
-                          <a:solidFill>
-                            <a:schemeClr val="tx1"/>
-                          </a:solidFill>
-                          <a:latin typeface="Aptos Light" panose="020B0004020202020204" pitchFamily="34" charset="0"/>
-                          <a:ea typeface="+mn-ea"/>
-                          <a:cs typeface="+mn-cs"/>
-                        </a:rPr>
-                        <a:t> </a:t>
-                      </a:r>
-                      <a:r>
-                        <a:rPr sz="1600" b="0" kern="1200" dirty="0" err="1">
-                          <a:solidFill>
-                            <a:schemeClr val="tx1"/>
-                          </a:solidFill>
-                          <a:latin typeface="Aptos Light" panose="020B0004020202020204" pitchFamily="34" charset="0"/>
-                          <a:ea typeface="+mn-ea"/>
-                          <a:cs typeface="+mn-cs"/>
-                        </a:rPr>
-                        <a:t>que</a:t>
-                      </a:r>
-                      <a:r>
-                        <a:rPr sz="1600" b="0" kern="1200" dirty="0">
-                          <a:solidFill>
-                            <a:schemeClr val="tx1"/>
-                          </a:solidFill>
-                          <a:latin typeface="Aptos Light" panose="020B0004020202020204" pitchFamily="34" charset="0"/>
-                          <a:ea typeface="+mn-ea"/>
-                          <a:cs typeface="+mn-cs"/>
-                        </a:rPr>
-                        <a:t> llama al LLM.</a:t>
+                        <a:t>.</a:t>
                       </a:r>
                     </a:p>
                   </a:txBody>
@@ -9373,6 +11856,1149 @@
         </p:txBody>
       </p:sp>
     </p:spTree>
+  </p:cSld>
+  <p:clrMapOvr>
+    <a:masterClrMapping/>
+  </p:clrMapOvr>
+</p:sld>
+</file>
+
+<file path=ppt/slides/slide14.xml><?xml version="1.0" encoding="utf-8"?>
+<p:sld xmlns:a="http://schemas.openxmlformats.org/drawingml/2006/main" xmlns:r="http://schemas.openxmlformats.org/officeDocument/2006/relationships" xmlns:p="http://schemas.openxmlformats.org/presentationml/2006/main">
+  <p:cSld>
+    <p:spTree>
+      <p:nvGrpSpPr>
+        <p:cNvPr id="1" name="">
+          <a:extLst>
+            <a:ext uri="{FF2B5EF4-FFF2-40B4-BE49-F238E27FC236}">
+              <a16:creationId xmlns:a16="http://schemas.microsoft.com/office/drawing/2014/main" id="{CA03719D-1903-B461-641F-F705BE2CA0EC}"/>
+            </a:ext>
+          </a:extLst>
+        </p:cNvPr>
+        <p:cNvGrpSpPr/>
+        <p:nvPr/>
+      </p:nvGrpSpPr>
+      <p:grpSpPr>
+        <a:xfrm>
+          <a:off x="0" y="0"/>
+          <a:ext cx="0" cy="0"/>
+          <a:chOff x="0" y="0"/>
+          <a:chExt cx="0" cy="0"/>
+        </a:xfrm>
+      </p:grpSpPr>
+      <p:sp>
+        <p:nvSpPr>
+          <p:cNvPr id="2" name="Rectangle 1">
+            <a:extLst>
+              <a:ext uri="{FF2B5EF4-FFF2-40B4-BE49-F238E27FC236}">
+                <a16:creationId xmlns:a16="http://schemas.microsoft.com/office/drawing/2014/main" id="{B3840BF6-1CD6-E1D4-406D-BA55E4BBC6A7}"/>
+              </a:ext>
+            </a:extLst>
+          </p:cNvPr>
+          <p:cNvSpPr/>
+          <p:nvPr/>
+        </p:nvSpPr>
+        <p:spPr>
+          <a:xfrm>
+            <a:off x="0" y="0"/>
+            <a:ext cx="12191695" cy="1051560"/>
+          </a:xfrm>
+          <a:prstGeom prst="rect">
+            <a:avLst/>
+          </a:prstGeom>
+          <a:solidFill>
+            <a:srgbClr val="1F3864"/>
+          </a:solidFill>
+          <a:ln>
+            <a:noFill/>
+          </a:ln>
+          <a:effectLst/>
+        </p:spPr>
+        <p:style>
+          <a:lnRef idx="1">
+            <a:schemeClr val="accent1"/>
+          </a:lnRef>
+          <a:fillRef idx="3">
+            <a:schemeClr val="accent1"/>
+          </a:fillRef>
+          <a:effectRef idx="2">
+            <a:schemeClr val="accent1"/>
+          </a:effectRef>
+          <a:fontRef idx="minor">
+            <a:schemeClr val="lt1"/>
+          </a:fontRef>
+        </p:style>
+        <p:txBody>
+          <a:bodyPr rtlCol="0" anchor="ctr"/>
+          <a:lstStyle/>
+          <a:p>
+            <a:pPr algn="ctr"/>
+            <a:endParaRPr/>
+          </a:p>
+        </p:txBody>
+      </p:sp>
+      <p:sp>
+        <p:nvSpPr>
+          <p:cNvPr id="3" name="Rectangle 2">
+            <a:extLst>
+              <a:ext uri="{FF2B5EF4-FFF2-40B4-BE49-F238E27FC236}">
+                <a16:creationId xmlns:a16="http://schemas.microsoft.com/office/drawing/2014/main" id="{2BE34667-B032-DEAA-2DE1-594B0A3EC0AD}"/>
+              </a:ext>
+            </a:extLst>
+          </p:cNvPr>
+          <p:cNvSpPr/>
+          <p:nvPr/>
+        </p:nvSpPr>
+        <p:spPr>
+          <a:xfrm>
+            <a:off x="457200" y="256032"/>
+            <a:ext cx="548640" cy="548640"/>
+          </a:xfrm>
+          <a:prstGeom prst="rect">
+            <a:avLst/>
+          </a:prstGeom>
+          <a:solidFill>
+            <a:srgbClr val="0E8A7E"/>
+          </a:solidFill>
+          <a:ln>
+            <a:noFill/>
+          </a:ln>
+          <a:effectLst/>
+        </p:spPr>
+        <p:style>
+          <a:lnRef idx="1">
+            <a:schemeClr val="accent1"/>
+          </a:lnRef>
+          <a:fillRef idx="3">
+            <a:schemeClr val="accent1"/>
+          </a:fillRef>
+          <a:effectRef idx="2">
+            <a:schemeClr val="accent1"/>
+          </a:effectRef>
+          <a:fontRef idx="minor">
+            <a:schemeClr val="lt1"/>
+          </a:fontRef>
+        </p:style>
+        <p:txBody>
+          <a:bodyPr wrap="square" rtlCol="0" anchor="ctr"/>
+          <a:lstStyle/>
+          <a:p>
+            <a:pPr algn="ctr"/>
+            <a:r>
+              <a:rPr sz="2200" b="1">
+                <a:solidFill>
+                  <a:srgbClr val="FFFFFF"/>
+                </a:solidFill>
+                <a:latin typeface="Calibri"/>
+              </a:rPr>
+              <a:t>A</a:t>
+            </a:r>
+          </a:p>
+        </p:txBody>
+      </p:sp>
+      <p:sp>
+        <p:nvSpPr>
+          <p:cNvPr id="4" name="TextBox 3">
+            <a:extLst>
+              <a:ext uri="{FF2B5EF4-FFF2-40B4-BE49-F238E27FC236}">
+                <a16:creationId xmlns:a16="http://schemas.microsoft.com/office/drawing/2014/main" id="{4401DAB9-797A-6B47-602D-9820A0C793E8}"/>
+              </a:ext>
+            </a:extLst>
+          </p:cNvPr>
+          <p:cNvSpPr txBox="1"/>
+          <p:nvPr/>
+        </p:nvSpPr>
+        <p:spPr>
+          <a:xfrm>
+            <a:off x="1188720" y="314462"/>
+            <a:ext cx="10515600" cy="523220"/>
+          </a:xfrm>
+          <a:prstGeom prst="rect">
+            <a:avLst/>
+          </a:prstGeom>
+          <a:noFill/>
+        </p:spPr>
+        <p:txBody>
+          <a:bodyPr wrap="square" anchor="ctr">
+            <a:spAutoFit/>
+          </a:bodyPr>
+          <a:lstStyle/>
+          <a:p>
+            <a:pPr algn="l">
+              <a:spcAft>
+                <a:spcPts val="600"/>
+              </a:spcAft>
+            </a:pPr>
+            <a:r>
+              <a:rPr sz="2800" b="1" dirty="0">
+                <a:solidFill>
+                  <a:srgbClr val="FFFFFF"/>
+                </a:solidFill>
+                <a:latin typeface="Aptos Light" panose="020B0004020202020204" pitchFamily="34" charset="0"/>
+              </a:rPr>
+              <a:t>Anexo</a:t>
+            </a:r>
+          </a:p>
+        </p:txBody>
+      </p:sp>
+      <p:sp>
+        <p:nvSpPr>
+          <p:cNvPr id="9" name="Rounded Rectangle 6">
+            <a:extLst>
+              <a:ext uri="{FF2B5EF4-FFF2-40B4-BE49-F238E27FC236}">
+                <a16:creationId xmlns:a16="http://schemas.microsoft.com/office/drawing/2014/main" id="{7D68716D-B61C-BDBF-7875-3C766D6CC8C8}"/>
+              </a:ext>
+            </a:extLst>
+          </p:cNvPr>
+          <p:cNvSpPr/>
+          <p:nvPr/>
+        </p:nvSpPr>
+        <p:spPr>
+          <a:xfrm>
+            <a:off x="411480" y="1222408"/>
+            <a:ext cx="11247120" cy="4155941"/>
+          </a:xfrm>
+          <a:prstGeom prst="roundRect">
+            <a:avLst/>
+          </a:prstGeom>
+          <a:solidFill>
+            <a:srgbClr val="FFF6E0"/>
+          </a:solidFill>
+          <a:ln w="15875">
+            <a:solidFill>
+              <a:srgbClr val="B57A00"/>
+            </a:solidFill>
+          </a:ln>
+          <a:effectLst/>
+        </p:spPr>
+        <p:style>
+          <a:lnRef idx="1">
+            <a:schemeClr val="accent1"/>
+          </a:lnRef>
+          <a:fillRef idx="3">
+            <a:schemeClr val="accent1"/>
+          </a:fillRef>
+          <a:effectRef idx="2">
+            <a:schemeClr val="accent1"/>
+          </a:effectRef>
+          <a:fontRef idx="minor">
+            <a:schemeClr val="lt1"/>
+          </a:fontRef>
+        </p:style>
+        <p:txBody>
+          <a:bodyPr wrap="square" lIns="182880" tIns="109728" rtlCol="0" anchor="ctr"/>
+          <a:lstStyle/>
+          <a:p>
+            <a:pPr algn="ctr"/>
+            <a:r>
+              <a:rPr sz="2400" b="1" dirty="0">
+                <a:solidFill>
+                  <a:srgbClr val="B57A00"/>
+                </a:solidFill>
+                <a:latin typeface="Aptos"/>
+              </a:rPr>
+              <a:t>MVP vs. </a:t>
+            </a:r>
+            <a:r>
+              <a:rPr sz="2400" b="1" dirty="0" err="1">
+                <a:solidFill>
+                  <a:srgbClr val="B57A00"/>
+                </a:solidFill>
+                <a:latin typeface="Aptos"/>
+              </a:rPr>
+              <a:t>arquitectura</a:t>
+            </a:r>
+            <a:r>
+              <a:rPr sz="2400" b="1" dirty="0">
+                <a:solidFill>
+                  <a:srgbClr val="B57A00"/>
+                </a:solidFill>
+                <a:latin typeface="Aptos"/>
+              </a:rPr>
+              <a:t> </a:t>
+            </a:r>
+            <a:r>
+              <a:rPr sz="2400" b="1" dirty="0" err="1">
+                <a:solidFill>
+                  <a:srgbClr val="B57A00"/>
+                </a:solidFill>
+                <a:latin typeface="Aptos"/>
+              </a:rPr>
+              <a:t>objetivo</a:t>
+            </a:r>
+            <a:r>
+              <a:rPr sz="2400" b="1" dirty="0">
+                <a:solidFill>
+                  <a:srgbClr val="B57A00"/>
+                </a:solidFill>
+                <a:latin typeface="Aptos"/>
+              </a:rPr>
+              <a:t> (</a:t>
+            </a:r>
+            <a:r>
+              <a:rPr sz="2400" b="1" dirty="0" err="1">
+                <a:solidFill>
+                  <a:srgbClr val="B57A00"/>
+                </a:solidFill>
+                <a:latin typeface="Aptos"/>
+              </a:rPr>
+              <a:t>resiliencia</a:t>
+            </a:r>
+            <a:r>
+              <a:rPr sz="2400" b="1" dirty="0">
+                <a:solidFill>
+                  <a:srgbClr val="B57A00"/>
+                </a:solidFill>
+                <a:latin typeface="Aptos"/>
+              </a:rPr>
+              <a:t> y </a:t>
+            </a:r>
+            <a:r>
+              <a:rPr sz="2400" b="1" dirty="0" err="1">
+                <a:solidFill>
+                  <a:srgbClr val="B57A00"/>
+                </a:solidFill>
+                <a:latin typeface="Aptos"/>
+              </a:rPr>
+              <a:t>escalabilidad</a:t>
+            </a:r>
+            <a:r>
+              <a:rPr sz="2400" b="1" dirty="0">
+                <a:solidFill>
+                  <a:srgbClr val="B57A00"/>
+                </a:solidFill>
+                <a:latin typeface="Aptos"/>
+              </a:rPr>
+              <a:t>)</a:t>
+            </a:r>
+            <a:endParaRPr lang="es-ES" sz="2400" b="1" dirty="0">
+              <a:solidFill>
+                <a:srgbClr val="B57A00"/>
+              </a:solidFill>
+              <a:latin typeface="Aptos"/>
+            </a:endParaRPr>
+          </a:p>
+          <a:p>
+            <a:pPr algn="ctr"/>
+            <a:endParaRPr sz="2400" b="1" dirty="0">
+              <a:solidFill>
+                <a:srgbClr val="B57A00"/>
+              </a:solidFill>
+              <a:latin typeface="Aptos"/>
+            </a:endParaRPr>
+          </a:p>
+          <a:p>
+            <a:r>
+              <a:rPr lang="es-ES" sz="1600" b="1" dirty="0">
+                <a:solidFill>
+                  <a:schemeClr val="accent6">
+                    <a:lumMod val="50000"/>
+                  </a:schemeClr>
+                </a:solidFill>
+                <a:latin typeface="Aptos Light" panose="020B0004020202020204" pitchFamily="34" charset="0"/>
+              </a:rPr>
+              <a:t>MVP</a:t>
+            </a:r>
+            <a:r>
+              <a:rPr sz="1600" dirty="0">
+                <a:solidFill>
+                  <a:srgbClr val="444A54"/>
+                </a:solidFill>
+                <a:latin typeface="Aptos Light" panose="020B0004020202020204" pitchFamily="34" charset="0"/>
+              </a:rPr>
+              <a:t>: </a:t>
+            </a:r>
+            <a:r>
+              <a:rPr sz="1600" dirty="0" err="1">
+                <a:solidFill>
+                  <a:srgbClr val="444A54"/>
+                </a:solidFill>
+                <a:latin typeface="Aptos Light" panose="020B0004020202020204" pitchFamily="34" charset="0"/>
+              </a:rPr>
+              <a:t>todo</a:t>
+            </a:r>
+            <a:r>
+              <a:rPr sz="1600" dirty="0">
+                <a:solidFill>
+                  <a:srgbClr val="444A54"/>
+                </a:solidFill>
+                <a:latin typeface="Aptos Light" panose="020B0004020202020204" pitchFamily="34" charset="0"/>
+              </a:rPr>
+              <a:t> </a:t>
+            </a:r>
+            <a:r>
+              <a:rPr sz="1600" dirty="0" err="1">
+                <a:solidFill>
+                  <a:srgbClr val="444A54"/>
+                </a:solidFill>
+                <a:latin typeface="Aptos Light" panose="020B0004020202020204" pitchFamily="34" charset="0"/>
+              </a:rPr>
+              <a:t>autohospedado</a:t>
+            </a:r>
+            <a:r>
+              <a:rPr sz="1600" dirty="0">
+                <a:solidFill>
+                  <a:srgbClr val="444A54"/>
+                </a:solidFill>
+                <a:latin typeface="Aptos Light" panose="020B0004020202020204" pitchFamily="34" charset="0"/>
+              </a:rPr>
+              <a:t> </a:t>
+            </a:r>
+            <a:r>
+              <a:rPr sz="1600" dirty="0" err="1">
+                <a:solidFill>
+                  <a:srgbClr val="444A54"/>
+                </a:solidFill>
+                <a:latin typeface="Aptos Light" panose="020B0004020202020204" pitchFamily="34" charset="0"/>
+              </a:rPr>
+              <a:t>tras</a:t>
+            </a:r>
+            <a:r>
+              <a:rPr sz="1600" dirty="0">
+                <a:solidFill>
+                  <a:srgbClr val="444A54"/>
+                </a:solidFill>
+                <a:latin typeface="Aptos Light" panose="020B0004020202020204" pitchFamily="34" charset="0"/>
+              </a:rPr>
+              <a:t> un nginx</a:t>
+            </a:r>
+            <a:r>
+              <a:rPr lang="es-ES" sz="1600" dirty="0">
+                <a:solidFill>
+                  <a:srgbClr val="444A54"/>
+                </a:solidFill>
+                <a:latin typeface="Aptos Light" panose="020B0004020202020204" pitchFamily="34" charset="0"/>
+              </a:rPr>
+              <a:t> y una red privada</a:t>
+            </a:r>
+            <a:r>
+              <a:rPr sz="1600" dirty="0">
+                <a:solidFill>
+                  <a:srgbClr val="444A54"/>
+                </a:solidFill>
+                <a:latin typeface="Aptos Light" panose="020B0004020202020204" pitchFamily="34" charset="0"/>
+              </a:rPr>
+              <a:t>, </a:t>
+            </a:r>
+            <a:r>
+              <a:rPr sz="1600" dirty="0" err="1">
+                <a:solidFill>
+                  <a:srgbClr val="444A54"/>
+                </a:solidFill>
+                <a:latin typeface="Aptos Light" panose="020B0004020202020204" pitchFamily="34" charset="0"/>
+              </a:rPr>
+              <a:t>en</a:t>
+            </a:r>
+            <a:r>
+              <a:rPr sz="1600" dirty="0">
+                <a:solidFill>
+                  <a:srgbClr val="444A54"/>
+                </a:solidFill>
+                <a:latin typeface="Aptos Light" panose="020B0004020202020204" pitchFamily="34" charset="0"/>
+              </a:rPr>
+              <a:t> </a:t>
+            </a:r>
+            <a:r>
+              <a:rPr lang="es-ES" sz="1600" dirty="0">
+                <a:solidFill>
+                  <a:srgbClr val="444A54"/>
+                </a:solidFill>
+                <a:latin typeface="Aptos Light" panose="020B0004020202020204" pitchFamily="34" charset="0"/>
+              </a:rPr>
+              <a:t>DOS </a:t>
+            </a:r>
+            <a:r>
+              <a:rPr sz="1600" dirty="0" err="1">
+                <a:solidFill>
+                  <a:srgbClr val="444A54"/>
+                </a:solidFill>
+                <a:latin typeface="Aptos Light" panose="020B0004020202020204" pitchFamily="34" charset="0"/>
+              </a:rPr>
+              <a:t>nodo</a:t>
+            </a:r>
+            <a:r>
+              <a:rPr lang="es-ES" sz="1600" dirty="0">
+                <a:solidFill>
+                  <a:srgbClr val="444A54"/>
+                </a:solidFill>
+                <a:latin typeface="Aptos Light" panose="020B0004020202020204" pitchFamily="34" charset="0"/>
+              </a:rPr>
+              <a:t>s</a:t>
+            </a:r>
+            <a:r>
+              <a:rPr sz="1600" dirty="0">
+                <a:solidFill>
+                  <a:srgbClr val="444A54"/>
+                </a:solidFill>
+                <a:latin typeface="Aptos Light" panose="020B0004020202020204" pitchFamily="34" charset="0"/>
+              </a:rPr>
+              <a:t>.</a:t>
+            </a:r>
+            <a:endParaRPr lang="es-ES" sz="1600" dirty="0">
+              <a:solidFill>
+                <a:srgbClr val="444A54"/>
+              </a:solidFill>
+              <a:latin typeface="Aptos Light" panose="020B0004020202020204" pitchFamily="34" charset="0"/>
+            </a:endParaRPr>
+          </a:p>
+          <a:p>
+            <a:endParaRPr lang="es-ES" sz="1600" dirty="0">
+              <a:solidFill>
+                <a:srgbClr val="444A54"/>
+              </a:solidFill>
+              <a:latin typeface="Aptos Light" panose="020B0004020202020204" pitchFamily="34" charset="0"/>
+            </a:endParaRPr>
+          </a:p>
+          <a:p>
+            <a:endParaRPr lang="es-ES" sz="1600" dirty="0">
+              <a:solidFill>
+                <a:srgbClr val="444A54"/>
+              </a:solidFill>
+              <a:latin typeface="Aptos Light" panose="020B0004020202020204" pitchFamily="34" charset="0"/>
+            </a:endParaRPr>
+          </a:p>
+          <a:p>
+            <a:r>
+              <a:rPr lang="es-ES" sz="1600" b="1" dirty="0">
+                <a:solidFill>
+                  <a:schemeClr val="accent6">
+                    <a:lumMod val="50000"/>
+                  </a:schemeClr>
+                </a:solidFill>
+                <a:latin typeface="Aptos Light" panose="020B0004020202020204" pitchFamily="34" charset="0"/>
+              </a:rPr>
+              <a:t>Arquitectura o</a:t>
+            </a:r>
+            <a:r>
+              <a:rPr sz="1600" b="1" dirty="0" err="1">
+                <a:solidFill>
+                  <a:schemeClr val="accent6">
+                    <a:lumMod val="50000"/>
+                  </a:schemeClr>
+                </a:solidFill>
+                <a:latin typeface="Aptos Light" panose="020B0004020202020204" pitchFamily="34" charset="0"/>
+              </a:rPr>
+              <a:t>bjetivo</a:t>
+            </a:r>
+            <a:r>
+              <a:rPr sz="1600" dirty="0">
+                <a:solidFill>
+                  <a:srgbClr val="444A54"/>
+                </a:solidFill>
+                <a:latin typeface="Aptos Light" panose="020B0004020202020204" pitchFamily="34" charset="0"/>
+              </a:rPr>
+              <a:t>:
+• S3 → </a:t>
+            </a:r>
+            <a:r>
+              <a:rPr sz="1600" dirty="0" err="1">
+                <a:solidFill>
+                  <a:srgbClr val="444A54"/>
+                </a:solidFill>
+                <a:latin typeface="Aptos Light" panose="020B0004020202020204" pitchFamily="34" charset="0"/>
+              </a:rPr>
+              <a:t>almacenamiento</a:t>
+            </a:r>
+            <a:r>
+              <a:rPr sz="1600" dirty="0">
+                <a:solidFill>
+                  <a:srgbClr val="444A54"/>
+                </a:solidFill>
+                <a:latin typeface="Aptos Light" panose="020B0004020202020204" pitchFamily="34" charset="0"/>
+              </a:rPr>
+              <a:t> </a:t>
+            </a:r>
+            <a:r>
+              <a:rPr sz="1600" dirty="0" err="1">
+                <a:solidFill>
+                  <a:srgbClr val="444A54"/>
+                </a:solidFill>
+                <a:latin typeface="Aptos Light" panose="020B0004020202020204" pitchFamily="34" charset="0"/>
+              </a:rPr>
+              <a:t>gestionado</a:t>
+            </a:r>
+            <a:r>
+              <a:rPr sz="1600" dirty="0">
+                <a:solidFill>
+                  <a:srgbClr val="444A54"/>
+                </a:solidFill>
+                <a:latin typeface="Aptos Light" panose="020B0004020202020204" pitchFamily="34" charset="0"/>
+              </a:rPr>
+              <a:t> </a:t>
+            </a:r>
+            <a:r>
+              <a:rPr sz="1600" dirty="0" err="1">
+                <a:solidFill>
+                  <a:srgbClr val="444A54"/>
+                </a:solidFill>
+                <a:latin typeface="Aptos Light" panose="020B0004020202020204" pitchFamily="34" charset="0"/>
+              </a:rPr>
+              <a:t>externo</a:t>
+            </a:r>
+            <a:r>
+              <a:rPr sz="1600" dirty="0">
+                <a:solidFill>
+                  <a:srgbClr val="444A54"/>
+                </a:solidFill>
+                <a:latin typeface="Aptos Light" panose="020B0004020202020204" pitchFamily="34" charset="0"/>
+              </a:rPr>
+              <a:t>.
+• Postgres → </a:t>
+            </a:r>
+            <a:r>
+              <a:rPr sz="1600" dirty="0" err="1">
+                <a:solidFill>
+                  <a:srgbClr val="444A54"/>
+                </a:solidFill>
+                <a:latin typeface="Aptos Light" panose="020B0004020202020204" pitchFamily="34" charset="0"/>
+              </a:rPr>
+              <a:t>servicio</a:t>
+            </a:r>
+            <a:r>
+              <a:rPr sz="1600" dirty="0">
+                <a:solidFill>
+                  <a:srgbClr val="444A54"/>
+                </a:solidFill>
+                <a:latin typeface="Aptos Light" panose="020B0004020202020204" pitchFamily="34" charset="0"/>
+              </a:rPr>
+              <a:t> </a:t>
+            </a:r>
+            <a:r>
+              <a:rPr sz="1600" dirty="0" err="1">
+                <a:solidFill>
+                  <a:srgbClr val="444A54"/>
+                </a:solidFill>
+                <a:latin typeface="Aptos Light" panose="020B0004020202020204" pitchFamily="34" charset="0"/>
+              </a:rPr>
+              <a:t>gestionado</a:t>
+            </a:r>
+            <a:r>
+              <a:rPr sz="1600" dirty="0">
+                <a:solidFill>
+                  <a:srgbClr val="444A54"/>
+                </a:solidFill>
+                <a:latin typeface="Aptos Light" panose="020B0004020202020204" pitchFamily="34" charset="0"/>
+              </a:rPr>
+              <a:t> con </a:t>
+            </a:r>
+            <a:r>
+              <a:rPr sz="1600" dirty="0" err="1">
+                <a:solidFill>
+                  <a:srgbClr val="444A54"/>
+                </a:solidFill>
+                <a:latin typeface="Aptos Light" panose="020B0004020202020204" pitchFamily="34" charset="0"/>
+              </a:rPr>
+              <a:t>réplicas</a:t>
+            </a:r>
+            <a:r>
+              <a:rPr sz="1600" dirty="0">
+                <a:solidFill>
+                  <a:srgbClr val="444A54"/>
+                </a:solidFill>
+                <a:latin typeface="Aptos Light" panose="020B0004020202020204" pitchFamily="34" charset="0"/>
+              </a:rPr>
+              <a:t> y backups.
+• UI-BFF → </a:t>
+            </a:r>
+            <a:r>
+              <a:rPr sz="1600" dirty="0" err="1">
+                <a:solidFill>
+                  <a:srgbClr val="444A54"/>
+                </a:solidFill>
+                <a:latin typeface="Aptos Light" panose="020B0004020202020204" pitchFamily="34" charset="0"/>
+              </a:rPr>
+              <a:t>varias</a:t>
+            </a:r>
+            <a:r>
+              <a:rPr sz="1600" dirty="0">
+                <a:solidFill>
+                  <a:srgbClr val="444A54"/>
+                </a:solidFill>
+                <a:latin typeface="Aptos Light" panose="020B0004020202020204" pitchFamily="34" charset="0"/>
+              </a:rPr>
+              <a:t> </a:t>
+            </a:r>
+            <a:r>
+              <a:rPr sz="1600" dirty="0" err="1">
+                <a:solidFill>
+                  <a:srgbClr val="444A54"/>
+                </a:solidFill>
+                <a:latin typeface="Aptos Light" panose="020B0004020202020204" pitchFamily="34" charset="0"/>
+              </a:rPr>
+              <a:t>instancias</a:t>
+            </a:r>
+            <a:r>
+              <a:rPr sz="1600" dirty="0">
+                <a:solidFill>
+                  <a:srgbClr val="444A54"/>
+                </a:solidFill>
+                <a:latin typeface="Aptos Light" panose="020B0004020202020204" pitchFamily="34" charset="0"/>
+              </a:rPr>
+              <a:t> </a:t>
+            </a:r>
+            <a:r>
+              <a:rPr sz="1600" dirty="0" err="1">
+                <a:solidFill>
+                  <a:srgbClr val="444A54"/>
+                </a:solidFill>
+                <a:latin typeface="Aptos Light" panose="020B0004020202020204" pitchFamily="34" charset="0"/>
+              </a:rPr>
+              <a:t>tras</a:t>
+            </a:r>
+            <a:r>
+              <a:rPr sz="1600" dirty="0">
+                <a:solidFill>
+                  <a:srgbClr val="444A54"/>
+                </a:solidFill>
+                <a:latin typeface="Aptos Light" panose="020B0004020202020204" pitchFamily="34" charset="0"/>
+              </a:rPr>
+              <a:t> </a:t>
+            </a:r>
+            <a:r>
+              <a:rPr sz="1600" dirty="0" err="1">
+                <a:solidFill>
+                  <a:srgbClr val="444A54"/>
+                </a:solidFill>
+                <a:latin typeface="Aptos Light" panose="020B0004020202020204" pitchFamily="34" charset="0"/>
+              </a:rPr>
+              <a:t>balanceador</a:t>
+            </a:r>
+            <a:r>
+              <a:rPr sz="1600" dirty="0">
+                <a:solidFill>
+                  <a:srgbClr val="444A54"/>
+                </a:solidFill>
+                <a:latin typeface="Aptos Light" panose="020B0004020202020204" pitchFamily="34" charset="0"/>
+              </a:rPr>
+              <a:t> (</a:t>
+            </a:r>
+            <a:r>
+              <a:rPr sz="1600" dirty="0" err="1">
+                <a:solidFill>
+                  <a:srgbClr val="444A54"/>
+                </a:solidFill>
+                <a:latin typeface="Aptos Light" panose="020B0004020202020204" pitchFamily="34" charset="0"/>
+              </a:rPr>
+              <a:t>escala</a:t>
+            </a:r>
+            <a:r>
+              <a:rPr sz="1600" dirty="0">
+                <a:solidFill>
+                  <a:srgbClr val="444A54"/>
+                </a:solidFill>
+                <a:latin typeface="Aptos Light" panose="020B0004020202020204" pitchFamily="34" charset="0"/>
+              </a:rPr>
+              <a:t> horizontal).
+• Worker → </a:t>
+            </a:r>
+            <a:r>
+              <a:rPr sz="1600" dirty="0" err="1">
+                <a:solidFill>
+                  <a:srgbClr val="444A54"/>
+                </a:solidFill>
+                <a:latin typeface="Aptos Light" panose="020B0004020202020204" pitchFamily="34" charset="0"/>
+              </a:rPr>
+              <a:t>autoescalable</a:t>
+            </a:r>
+            <a:r>
+              <a:rPr sz="1600" dirty="0">
+                <a:solidFill>
+                  <a:srgbClr val="444A54"/>
+                </a:solidFill>
+                <a:latin typeface="Aptos Light" panose="020B0004020202020204" pitchFamily="34" charset="0"/>
+              </a:rPr>
+              <a:t> </a:t>
+            </a:r>
+            <a:r>
+              <a:rPr sz="1600" dirty="0" err="1">
+                <a:solidFill>
+                  <a:srgbClr val="444A54"/>
+                </a:solidFill>
+                <a:latin typeface="Aptos Light" panose="020B0004020202020204" pitchFamily="34" charset="0"/>
+              </a:rPr>
+              <a:t>según</a:t>
+            </a:r>
+            <a:r>
+              <a:rPr sz="1600" dirty="0">
+                <a:solidFill>
+                  <a:srgbClr val="444A54"/>
+                </a:solidFill>
+                <a:latin typeface="Aptos Light" panose="020B0004020202020204" pitchFamily="34" charset="0"/>
+              </a:rPr>
+              <a:t> la cola de </a:t>
+            </a:r>
+            <a:r>
+              <a:rPr sz="1600" dirty="0" err="1">
+                <a:solidFill>
+                  <a:srgbClr val="444A54"/>
+                </a:solidFill>
+                <a:latin typeface="Aptos Light" panose="020B0004020202020204" pitchFamily="34" charset="0"/>
+              </a:rPr>
+              <a:t>análisis</a:t>
+            </a:r>
+            <a:r>
+              <a:rPr sz="1600" dirty="0">
+                <a:solidFill>
+                  <a:srgbClr val="444A54"/>
+                </a:solidFill>
+                <a:latin typeface="Aptos Light" panose="020B0004020202020204" pitchFamily="34" charset="0"/>
+              </a:rPr>
+              <a:t>.
+• </a:t>
+            </a:r>
+            <a:r>
+              <a:rPr sz="1600" dirty="0" err="1">
+                <a:solidFill>
+                  <a:srgbClr val="444A54"/>
+                </a:solidFill>
+                <a:latin typeface="Aptos Light" panose="020B0004020202020204" pitchFamily="34" charset="0"/>
+              </a:rPr>
+              <a:t>Keycloak</a:t>
+            </a:r>
+            <a:r>
+              <a:rPr sz="1600" dirty="0">
+                <a:solidFill>
+                  <a:srgbClr val="444A54"/>
+                </a:solidFill>
+                <a:latin typeface="Aptos Light" panose="020B0004020202020204" pitchFamily="34" charset="0"/>
+              </a:rPr>
+              <a:t> → </a:t>
+            </a:r>
+            <a:r>
+              <a:rPr sz="1600" dirty="0" err="1">
+                <a:solidFill>
+                  <a:srgbClr val="444A54"/>
+                </a:solidFill>
+                <a:latin typeface="Aptos Light" panose="020B0004020202020204" pitchFamily="34" charset="0"/>
+              </a:rPr>
+              <a:t>alta</a:t>
+            </a:r>
+            <a:r>
+              <a:rPr sz="1600" dirty="0">
+                <a:solidFill>
+                  <a:srgbClr val="444A54"/>
+                </a:solidFill>
+                <a:latin typeface="Aptos Light" panose="020B0004020202020204" pitchFamily="34" charset="0"/>
+              </a:rPr>
+              <a:t> </a:t>
+            </a:r>
+            <a:r>
+              <a:rPr sz="1600" dirty="0" err="1">
+                <a:solidFill>
+                  <a:srgbClr val="444A54"/>
+                </a:solidFill>
+                <a:latin typeface="Aptos Light" panose="020B0004020202020204" pitchFamily="34" charset="0"/>
+              </a:rPr>
+              <a:t>disponibilidad</a:t>
+            </a:r>
+            <a:r>
+              <a:rPr sz="1600" dirty="0">
+                <a:solidFill>
+                  <a:srgbClr val="444A54"/>
+                </a:solidFill>
+                <a:latin typeface="Aptos Light" panose="020B0004020202020204" pitchFamily="34" charset="0"/>
+              </a:rPr>
+              <a:t> / IdP </a:t>
+            </a:r>
+            <a:r>
+              <a:rPr sz="1600" dirty="0" err="1">
+                <a:solidFill>
+                  <a:srgbClr val="444A54"/>
+                </a:solidFill>
+                <a:latin typeface="Aptos Light" panose="020B0004020202020204" pitchFamily="34" charset="0"/>
+              </a:rPr>
+              <a:t>gestionado</a:t>
+            </a:r>
+            <a:r>
+              <a:rPr sz="1600" dirty="0">
+                <a:solidFill>
+                  <a:srgbClr val="444A54"/>
+                </a:solidFill>
+                <a:latin typeface="Aptos Light" panose="020B0004020202020204" pitchFamily="34" charset="0"/>
+              </a:rPr>
+              <a:t> (</a:t>
+            </a:r>
+            <a:r>
+              <a:rPr sz="1600" dirty="0" err="1">
+                <a:solidFill>
+                  <a:srgbClr val="444A54"/>
+                </a:solidFill>
+                <a:latin typeface="Aptos Light" panose="020B0004020202020204" pitchFamily="34" charset="0"/>
+              </a:rPr>
+              <a:t>su</a:t>
+            </a:r>
+            <a:r>
+              <a:rPr sz="1600" dirty="0">
+                <a:solidFill>
+                  <a:srgbClr val="444A54"/>
+                </a:solidFill>
+                <a:latin typeface="Aptos Light" panose="020B0004020202020204" pitchFamily="34" charset="0"/>
+              </a:rPr>
+              <a:t> </a:t>
+            </a:r>
+            <a:r>
+              <a:rPr sz="1600" dirty="0" err="1">
+                <a:solidFill>
+                  <a:srgbClr val="444A54"/>
+                </a:solidFill>
+                <a:latin typeface="Aptos Light" panose="020B0004020202020204" pitchFamily="34" charset="0"/>
+              </a:rPr>
+              <a:t>caída</a:t>
+            </a:r>
+            <a:r>
+              <a:rPr sz="1600" dirty="0">
+                <a:solidFill>
+                  <a:srgbClr val="444A54"/>
+                </a:solidFill>
+                <a:latin typeface="Aptos Light" panose="020B0004020202020204" pitchFamily="34" charset="0"/>
+              </a:rPr>
+              <a:t> </a:t>
+            </a:r>
+            <a:r>
+              <a:rPr sz="1600" dirty="0" err="1">
+                <a:solidFill>
+                  <a:srgbClr val="444A54"/>
+                </a:solidFill>
+                <a:latin typeface="Aptos Light" panose="020B0004020202020204" pitchFamily="34" charset="0"/>
+              </a:rPr>
+              <a:t>bloquea</a:t>
+            </a:r>
+            <a:r>
+              <a:rPr sz="1600" dirty="0">
+                <a:solidFill>
+                  <a:srgbClr val="444A54"/>
+                </a:solidFill>
+                <a:latin typeface="Aptos Light" panose="020B0004020202020204" pitchFamily="34" charset="0"/>
+              </a:rPr>
+              <a:t> el </a:t>
+            </a:r>
+            <a:r>
+              <a:rPr sz="1600" dirty="0" err="1">
+                <a:solidFill>
+                  <a:srgbClr val="444A54"/>
+                </a:solidFill>
+                <a:latin typeface="Aptos Light" panose="020B0004020202020204" pitchFamily="34" charset="0"/>
+              </a:rPr>
+              <a:t>acceso</a:t>
+            </a:r>
+            <a:r>
+              <a:rPr sz="1600" dirty="0">
+                <a:solidFill>
+                  <a:srgbClr val="444A54"/>
+                </a:solidFill>
+                <a:latin typeface="Aptos Light" panose="020B0004020202020204" pitchFamily="34" charset="0"/>
+              </a:rPr>
+              <a:t>).</a:t>
+            </a:r>
+            <a:endParaRPr lang="es-ES" sz="1600" dirty="0">
+              <a:solidFill>
+                <a:srgbClr val="444A54"/>
+              </a:solidFill>
+              <a:latin typeface="Aptos Light" panose="020B0004020202020204" pitchFamily="34" charset="0"/>
+            </a:endParaRPr>
+          </a:p>
+          <a:p>
+            <a:r>
+              <a:rPr sz="1600" dirty="0">
+                <a:solidFill>
+                  <a:srgbClr val="444A54"/>
+                </a:solidFill>
+                <a:latin typeface="Aptos Light" panose="020B0004020202020204" pitchFamily="34" charset="0"/>
+              </a:rPr>
+              <a:t>
+</a:t>
+            </a:r>
+            <a:r>
+              <a:rPr lang="es-ES" sz="1600" dirty="0">
+                <a:solidFill>
+                  <a:srgbClr val="444A54"/>
+                </a:solidFill>
+                <a:latin typeface="Aptos Light" panose="020B0004020202020204" pitchFamily="34" charset="0"/>
+              </a:rPr>
+              <a:t>E</a:t>
+            </a:r>
+            <a:r>
+              <a:rPr sz="1600" dirty="0">
+                <a:solidFill>
+                  <a:srgbClr val="444A54"/>
+                </a:solidFill>
+                <a:latin typeface="Aptos Light" panose="020B0004020202020204" pitchFamily="34" charset="0"/>
+              </a:rPr>
+              <a:t>l nginx</a:t>
+            </a:r>
+            <a:r>
+              <a:rPr lang="es-ES" sz="1600" dirty="0">
+                <a:solidFill>
+                  <a:srgbClr val="444A54"/>
+                </a:solidFill>
+                <a:latin typeface="Aptos Light" panose="020B0004020202020204" pitchFamily="34" charset="0"/>
+              </a:rPr>
+              <a:t> y el host son</a:t>
+            </a:r>
+            <a:r>
+              <a:rPr sz="1600" dirty="0">
+                <a:solidFill>
+                  <a:srgbClr val="444A54"/>
+                </a:solidFill>
+                <a:latin typeface="Aptos Light" panose="020B0004020202020204" pitchFamily="34" charset="0"/>
+              </a:rPr>
+              <a:t> </a:t>
+            </a:r>
+            <a:r>
+              <a:rPr lang="es-ES" sz="1600" dirty="0">
+                <a:solidFill>
+                  <a:srgbClr val="444A54"/>
+                </a:solidFill>
+                <a:latin typeface="Aptos Light" panose="020B0004020202020204" pitchFamily="34" charset="0"/>
+              </a:rPr>
+              <a:t>h</a:t>
+            </a:r>
+            <a:r>
+              <a:rPr sz="1600" dirty="0">
+                <a:solidFill>
+                  <a:srgbClr val="444A54"/>
+                </a:solidFill>
+                <a:latin typeface="Aptos Light" panose="020B0004020202020204" pitchFamily="34" charset="0"/>
+              </a:rPr>
+              <a:t>oy </a:t>
+            </a:r>
+            <a:r>
+              <a:rPr lang="es-ES" sz="1600" b="1" dirty="0">
+                <a:solidFill>
+                  <a:schemeClr val="accent6">
+                    <a:lumMod val="50000"/>
+                  </a:schemeClr>
+                </a:solidFill>
+                <a:latin typeface="Aptos Light" panose="020B0004020202020204" pitchFamily="34" charset="0"/>
+              </a:rPr>
+              <a:t>únicos puntos de fallo</a:t>
+            </a:r>
+            <a:r>
+              <a:rPr sz="1600" dirty="0">
+                <a:solidFill>
+                  <a:srgbClr val="444A54"/>
+                </a:solidFill>
+                <a:latin typeface="Aptos Light" panose="020B0004020202020204" pitchFamily="34" charset="0"/>
+              </a:rPr>
+              <a:t>. Pasar de </a:t>
+            </a:r>
+            <a:r>
+              <a:rPr lang="es-ES" sz="1600" dirty="0">
+                <a:solidFill>
+                  <a:srgbClr val="444A54"/>
+                </a:solidFill>
+                <a:latin typeface="Aptos Light" panose="020B0004020202020204" pitchFamily="34" charset="0"/>
+              </a:rPr>
+              <a:t>de </a:t>
+            </a:r>
+            <a:r>
+              <a:rPr sz="1600" dirty="0" err="1">
+                <a:solidFill>
+                  <a:srgbClr val="444A54"/>
+                </a:solidFill>
+                <a:latin typeface="Aptos Light" panose="020B0004020202020204" pitchFamily="34" charset="0"/>
+              </a:rPr>
+              <a:t>nodo</a:t>
+            </a:r>
+            <a:r>
+              <a:rPr lang="es-ES" sz="1600" dirty="0">
+                <a:solidFill>
+                  <a:srgbClr val="444A54"/>
+                </a:solidFill>
+                <a:latin typeface="Aptos Light" panose="020B0004020202020204" pitchFamily="34" charset="0"/>
+              </a:rPr>
+              <a:t>s</a:t>
+            </a:r>
+            <a:r>
+              <a:rPr sz="1600" dirty="0">
+                <a:solidFill>
+                  <a:srgbClr val="444A54"/>
+                </a:solidFill>
+                <a:latin typeface="Aptos Light" panose="020B0004020202020204" pitchFamily="34" charset="0"/>
+              </a:rPr>
+              <a:t> a </a:t>
+            </a:r>
+            <a:r>
+              <a:rPr sz="1600" dirty="0" err="1">
+                <a:solidFill>
+                  <a:srgbClr val="444A54"/>
+                </a:solidFill>
+                <a:latin typeface="Aptos Light" panose="020B0004020202020204" pitchFamily="34" charset="0"/>
+              </a:rPr>
+              <a:t>componentes</a:t>
+            </a:r>
+            <a:r>
+              <a:rPr sz="1600" dirty="0">
+                <a:solidFill>
+                  <a:srgbClr val="444A54"/>
+                </a:solidFill>
+                <a:latin typeface="Aptos Light" panose="020B0004020202020204" pitchFamily="34" charset="0"/>
+              </a:rPr>
+              <a:t> </a:t>
+            </a:r>
+            <a:r>
+              <a:rPr sz="1600" dirty="0" err="1">
+                <a:solidFill>
+                  <a:srgbClr val="444A54"/>
+                </a:solidFill>
+                <a:latin typeface="Aptos Light" panose="020B0004020202020204" pitchFamily="34" charset="0"/>
+              </a:rPr>
+              <a:t>distribuidos</a:t>
+            </a:r>
+            <a:r>
+              <a:rPr sz="1600" dirty="0">
+                <a:solidFill>
+                  <a:srgbClr val="444A54"/>
+                </a:solidFill>
+                <a:latin typeface="Aptos Light" panose="020B0004020202020204" pitchFamily="34" charset="0"/>
+              </a:rPr>
+              <a:t> con </a:t>
+            </a:r>
+            <a:r>
+              <a:rPr sz="1600" dirty="0" err="1">
+                <a:solidFill>
+                  <a:srgbClr val="444A54"/>
+                </a:solidFill>
+                <a:latin typeface="Aptos Light" panose="020B0004020202020204" pitchFamily="34" charset="0"/>
+              </a:rPr>
+              <a:t>redundancia</a:t>
+            </a:r>
+            <a:r>
+              <a:rPr sz="1600" dirty="0">
+                <a:solidFill>
+                  <a:srgbClr val="444A54"/>
+                </a:solidFill>
+                <a:latin typeface="Aptos Light" panose="020B0004020202020204" pitchFamily="34" charset="0"/>
+              </a:rPr>
+              <a:t> y </a:t>
+            </a:r>
+            <a:r>
+              <a:rPr sz="1600" dirty="0" err="1">
+                <a:solidFill>
+                  <a:srgbClr val="444A54"/>
+                </a:solidFill>
+                <a:latin typeface="Aptos Light" panose="020B0004020202020204" pitchFamily="34" charset="0"/>
+              </a:rPr>
+              <a:t>balanceo</a:t>
+            </a:r>
+            <a:r>
+              <a:rPr sz="1600" dirty="0">
+                <a:solidFill>
+                  <a:srgbClr val="444A54"/>
+                </a:solidFill>
+                <a:latin typeface="Aptos Light" panose="020B0004020202020204" pitchFamily="34" charset="0"/>
+              </a:rPr>
+              <a:t>.</a:t>
+            </a:r>
+          </a:p>
+        </p:txBody>
+      </p:sp>
+    </p:spTree>
+    <p:extLst>
+      <p:ext uri="{BB962C8B-B14F-4D97-AF65-F5344CB8AC3E}">
+        <p14:creationId xmlns:p14="http://schemas.microsoft.com/office/powerpoint/2010/main" val="409472612"/>
+      </p:ext>
+    </p:extLst>
   </p:cSld>
   <p:clrMapOvr>
     <a:masterClrMapping/>
@@ -17328,7 +20954,7 @@
           <p:nvPr>
             <p:extLst>
               <p:ext uri="{D42A27DB-BD31-4B8C-83A1-F6EECF244321}">
-                <p14:modId xmlns:p14="http://schemas.microsoft.com/office/powerpoint/2010/main" val="2783012334"/>
+                <p14:modId xmlns:p14="http://schemas.microsoft.com/office/powerpoint/2010/main" val="1777185844"/>
               </p:ext>
             </p:extLst>
           </p:nvPr>
@@ -18725,6 +22351,15 @@
                       <a:headEnd type="none" w="med" len="med"/>
                       <a:tailEnd type="none" w="med" len="med"/>
                     </a:lnT>
+                    <a:lnB w="12700" cap="flat" cmpd="sng" algn="ctr">
+                      <a:solidFill>
+                        <a:schemeClr val="tx1"/>
+                      </a:solidFill>
+                      <a:prstDash val="solid"/>
+                      <a:round/>
+                      <a:headEnd type="none" w="med" len="med"/>
+                      <a:tailEnd type="none" w="med" len="med"/>
+                    </a:lnB>
                     <a:solidFill>
                       <a:schemeClr val="bg1"/>
                     </a:solidFill>
@@ -18845,6 +22480,15 @@
                       <a:headEnd type="none" w="med" len="med"/>
                       <a:tailEnd type="none" w="med" len="med"/>
                     </a:lnT>
+                    <a:lnB w="12700" cap="flat" cmpd="sng" algn="ctr">
+                      <a:solidFill>
+                        <a:schemeClr val="tx1"/>
+                      </a:solidFill>
+                      <a:prstDash val="solid"/>
+                      <a:round/>
+                      <a:headEnd type="none" w="med" len="med"/>
+                      <a:tailEnd type="none" w="med" len="med"/>
+                    </a:lnB>
                     <a:solidFill>
                       <a:schemeClr val="bg1"/>
                     </a:solidFill>
@@ -19045,14 +22689,14 @@
           <p:nvPr>
             <p:extLst>
               <p:ext uri="{D42A27DB-BD31-4B8C-83A1-F6EECF244321}">
-                <p14:modId xmlns:p14="http://schemas.microsoft.com/office/powerpoint/2010/main" val="3921054368"/>
+                <p14:modId xmlns:p14="http://schemas.microsoft.com/office/powerpoint/2010/main" val="1837407077"/>
               </p:ext>
             </p:extLst>
           </p:nvPr>
         </p:nvGraphicFramePr>
         <p:xfrm>
           <a:off x="457200" y="1170428"/>
-          <a:ext cx="5577840" cy="1097280"/>
+          <a:ext cx="5577840" cy="1280160"/>
         </p:xfrm>
         <a:graphic>
           <a:graphicData uri="http://schemas.openxmlformats.org/drawingml/2006/table">
@@ -19473,7 +23117,29 @@
                           <a:ea typeface="+mn-ea"/>
                           <a:cs typeface="+mn-cs"/>
                         </a:rPr>
-                        <a:t>, solo Europa)</a:t>
+                        <a:t>, </a:t>
+                      </a:r>
+                      <a:r>
+                        <a:rPr lang="es-ES" sz="1500" kern="1200" dirty="0">
+                          <a:solidFill>
+                            <a:srgbClr val="444A54"/>
+                          </a:solidFill>
+                          <a:latin typeface="Aptos Light" panose="020B0004020202020204" pitchFamily="34" charset="0"/>
+                          <a:ea typeface="+mn-ea"/>
+                          <a:cs typeface="+mn-cs"/>
+                        </a:rPr>
+                        <a:t>Hetzner Núremberg, sólo Europa por GDPR</a:t>
+                      </a:r>
+                      <a:r>
+                        <a:rPr sz="1500" kern="1200" dirty="0">
+                          <a:solidFill>
+                            <a:srgbClr val="444A54"/>
+                          </a:solidFill>
+                          <a:latin typeface="Aptos Light" panose="020B0004020202020204" pitchFamily="34" charset="0"/>
+                          <a:ea typeface="+mn-ea"/>
+                          <a:cs typeface="+mn-cs"/>
+                        </a:rPr>
+                        <a:t>)</a:t>
                       </a:r>
                     </a:p>
                   </a:txBody>
@@ -19531,992 +23197,6 @@
           </a:graphicData>
         </a:graphic>
       </p:graphicFrame>
-      <p:sp>
-        <p:nvSpPr>
-          <p:cNvPr id="6" name="Rectangle 5"/>
-          <p:cNvSpPr/>
-          <p:nvPr/>
-        </p:nvSpPr>
-        <p:spPr>
-          <a:xfrm>
-            <a:off x="6400800" y="1147424"/>
-            <a:ext cx="5303520" cy="2442497"/>
-          </a:xfrm>
-          <a:prstGeom prst="rect">
-            <a:avLst/>
-          </a:prstGeom>
-          <a:solidFill>
-            <a:srgbClr val="1B1F27"/>
-          </a:solidFill>
-          <a:ln>
-            <a:noFill/>
-          </a:ln>
-          <a:effectLst>
-            <a:outerShdw blurRad="50800" dist="38100" dir="2700000" algn="tl" rotWithShape="0">
-              <a:prstClr val="black">
-                <a:alpha val="40000"/>
-              </a:prstClr>
-            </a:outerShdw>
-          </a:effectLst>
-        </p:spPr>
-        <p:style>
-          <a:lnRef idx="1">
-            <a:schemeClr val="accent1"/>
-          </a:lnRef>
-          <a:fillRef idx="3">
-            <a:schemeClr val="accent1"/>
-          </a:fillRef>
-          <a:effectRef idx="2">
-            <a:schemeClr val="accent1"/>
-          </a:effectRef>
-          <a:fontRef idx="minor">
-            <a:schemeClr val="lt1"/>
-          </a:fontRef>
-        </p:style>
-        <p:txBody>
-          <a:bodyPr wrap="square" lIns="182880" tIns="109728" rtlCol="0" anchor="ctr"/>
-          <a:lstStyle/>
-          <a:p>
-            <a:pPr algn="ctr"/>
-            <a:endParaRPr sz="1200" dirty="0">
-              <a:solidFill>
-                <a:srgbClr val="D6E2F0"/>
-              </a:solidFill>
-              <a:latin typeface="Consolas"/>
-            </a:endParaRPr>
-          </a:p>
-        </p:txBody>
-      </p:sp>
-      <p:sp>
-        <p:nvSpPr>
-          <p:cNvPr id="7" name="Rounded Rectangle 6"/>
-          <p:cNvSpPr/>
-          <p:nvPr/>
-        </p:nvSpPr>
-        <p:spPr>
-          <a:xfrm>
-            <a:off x="457200" y="3698467"/>
-            <a:ext cx="11247120" cy="3056295"/>
-          </a:xfrm>
-          <a:prstGeom prst="roundRect">
-            <a:avLst/>
-          </a:prstGeom>
-          <a:solidFill>
-            <a:srgbClr val="FFF6E0"/>
-          </a:solidFill>
-          <a:ln w="15875">
-            <a:solidFill>
-              <a:srgbClr val="B57A00"/>
-            </a:solidFill>
-          </a:ln>
-          <a:effectLst/>
-        </p:spPr>
-        <p:style>
-          <a:lnRef idx="1">
-            <a:schemeClr val="accent1"/>
-          </a:lnRef>
-          <a:fillRef idx="3">
-            <a:schemeClr val="accent1"/>
-          </a:fillRef>
-          <a:effectRef idx="2">
-            <a:schemeClr val="accent1"/>
-          </a:effectRef>
-          <a:fontRef idx="minor">
-            <a:schemeClr val="lt1"/>
-          </a:fontRef>
-        </p:style>
-        <p:txBody>
-          <a:bodyPr wrap="square" lIns="182880" tIns="109728" rtlCol="0" anchor="ctr"/>
-          <a:lstStyle/>
-          <a:p>
-            <a:pPr algn="ctr"/>
-            <a:r>
-              <a:rPr sz="2400" b="1" dirty="0">
-                <a:solidFill>
-                  <a:srgbClr val="B57A00"/>
-                </a:solidFill>
-                <a:latin typeface="Aptos"/>
-              </a:rPr>
-              <a:t>MVP vs. </a:t>
-            </a:r>
-            <a:r>
-              <a:rPr sz="2400" b="1" dirty="0" err="1">
-                <a:solidFill>
-                  <a:srgbClr val="B57A00"/>
-                </a:solidFill>
-                <a:latin typeface="Aptos"/>
-              </a:rPr>
-              <a:t>arquitectura</a:t>
-            </a:r>
-            <a:r>
-              <a:rPr sz="2400" b="1" dirty="0">
-                <a:solidFill>
-                  <a:srgbClr val="B57A00"/>
-                </a:solidFill>
-                <a:latin typeface="Aptos"/>
-              </a:rPr>
-              <a:t> </a:t>
-            </a:r>
-            <a:r>
-              <a:rPr sz="2400" b="1" dirty="0" err="1">
-                <a:solidFill>
-                  <a:srgbClr val="B57A00"/>
-                </a:solidFill>
-                <a:latin typeface="Aptos"/>
-              </a:rPr>
-              <a:t>objetivo</a:t>
-            </a:r>
-            <a:r>
-              <a:rPr sz="2400" b="1" dirty="0">
-                <a:solidFill>
-                  <a:srgbClr val="B57A00"/>
-                </a:solidFill>
-                <a:latin typeface="Aptos"/>
-              </a:rPr>
-              <a:t> (</a:t>
-            </a:r>
-            <a:r>
-              <a:rPr sz="2400" b="1" dirty="0" err="1">
-                <a:solidFill>
-                  <a:srgbClr val="B57A00"/>
-                </a:solidFill>
-                <a:latin typeface="Aptos"/>
-              </a:rPr>
-              <a:t>resiliencia</a:t>
-            </a:r>
-            <a:r>
-              <a:rPr sz="2400" b="1" dirty="0">
-                <a:solidFill>
-                  <a:srgbClr val="B57A00"/>
-                </a:solidFill>
-                <a:latin typeface="Aptos"/>
-              </a:rPr>
-              <a:t> y </a:t>
-            </a:r>
-            <a:r>
-              <a:rPr sz="2400" b="1" dirty="0" err="1">
-                <a:solidFill>
-                  <a:srgbClr val="B57A00"/>
-                </a:solidFill>
-                <a:latin typeface="Aptos"/>
-              </a:rPr>
-              <a:t>escalabilidad</a:t>
-            </a:r>
-            <a:r>
-              <a:rPr sz="2400" b="1" dirty="0">
-                <a:solidFill>
-                  <a:srgbClr val="B57A00"/>
-                </a:solidFill>
-                <a:latin typeface="Aptos"/>
-              </a:rPr>
-              <a:t>)</a:t>
-            </a:r>
-            <a:endParaRPr lang="es-ES" sz="2400" b="1" dirty="0">
-              <a:solidFill>
-                <a:srgbClr val="B57A00"/>
-              </a:solidFill>
-              <a:latin typeface="Aptos"/>
-            </a:endParaRPr>
-          </a:p>
-          <a:p>
-            <a:pPr algn="ctr"/>
-            <a:endParaRPr sz="2400" b="1" dirty="0">
-              <a:solidFill>
-                <a:srgbClr val="B57A00"/>
-              </a:solidFill>
-              <a:latin typeface="Aptos"/>
-            </a:endParaRPr>
-          </a:p>
-          <a:p>
-            <a:r>
-              <a:rPr lang="es-ES" sz="1600" b="1" dirty="0">
-                <a:solidFill>
-                  <a:schemeClr val="accent6">
-                    <a:lumMod val="50000"/>
-                  </a:schemeClr>
-                </a:solidFill>
-                <a:latin typeface="Aptos Light" panose="020B0004020202020204" pitchFamily="34" charset="0"/>
-              </a:rPr>
-              <a:t>MVP</a:t>
-            </a:r>
-            <a:r>
-              <a:rPr sz="1600" dirty="0">
-                <a:solidFill>
-                  <a:srgbClr val="444A54"/>
-                </a:solidFill>
-                <a:latin typeface="Aptos Light" panose="020B0004020202020204" pitchFamily="34" charset="0"/>
-              </a:rPr>
-              <a:t>: </a:t>
-            </a:r>
-            <a:r>
-              <a:rPr sz="1600" dirty="0" err="1">
-                <a:solidFill>
-                  <a:srgbClr val="444A54"/>
-                </a:solidFill>
-                <a:latin typeface="Aptos Light" panose="020B0004020202020204" pitchFamily="34" charset="0"/>
-              </a:rPr>
-              <a:t>todo</a:t>
-            </a:r>
-            <a:r>
-              <a:rPr sz="1600" dirty="0">
-                <a:solidFill>
-                  <a:srgbClr val="444A54"/>
-                </a:solidFill>
-                <a:latin typeface="Aptos Light" panose="020B0004020202020204" pitchFamily="34" charset="0"/>
-              </a:rPr>
-              <a:t> </a:t>
-            </a:r>
-            <a:r>
-              <a:rPr sz="1600" dirty="0" err="1">
-                <a:solidFill>
-                  <a:srgbClr val="444A54"/>
-                </a:solidFill>
-                <a:latin typeface="Aptos Light" panose="020B0004020202020204" pitchFamily="34" charset="0"/>
-              </a:rPr>
-              <a:t>autohospedado</a:t>
-            </a:r>
-            <a:r>
-              <a:rPr sz="1600" dirty="0">
-                <a:solidFill>
-                  <a:srgbClr val="444A54"/>
-                </a:solidFill>
-                <a:latin typeface="Aptos Light" panose="020B0004020202020204" pitchFamily="34" charset="0"/>
-              </a:rPr>
-              <a:t> </a:t>
-            </a:r>
-            <a:r>
-              <a:rPr sz="1600" dirty="0" err="1">
-                <a:solidFill>
-                  <a:srgbClr val="444A54"/>
-                </a:solidFill>
-                <a:latin typeface="Aptos Light" panose="020B0004020202020204" pitchFamily="34" charset="0"/>
-              </a:rPr>
-              <a:t>tras</a:t>
-            </a:r>
-            <a:r>
-              <a:rPr sz="1600" dirty="0">
-                <a:solidFill>
-                  <a:srgbClr val="444A54"/>
-                </a:solidFill>
-                <a:latin typeface="Aptos Light" panose="020B0004020202020204" pitchFamily="34" charset="0"/>
-              </a:rPr>
-              <a:t> un nginx</a:t>
-            </a:r>
-            <a:r>
-              <a:rPr lang="es-ES" sz="1600" dirty="0">
-                <a:solidFill>
-                  <a:srgbClr val="444A54"/>
-                </a:solidFill>
-                <a:latin typeface="Aptos Light" panose="020B0004020202020204" pitchFamily="34" charset="0"/>
-              </a:rPr>
-              <a:t> y una red privada</a:t>
-            </a:r>
-            <a:r>
-              <a:rPr sz="1600" dirty="0">
-                <a:solidFill>
-                  <a:srgbClr val="444A54"/>
-                </a:solidFill>
-                <a:latin typeface="Aptos Light" panose="020B0004020202020204" pitchFamily="34" charset="0"/>
-              </a:rPr>
-              <a:t>, </a:t>
-            </a:r>
-            <a:r>
-              <a:rPr sz="1600" dirty="0" err="1">
-                <a:solidFill>
-                  <a:srgbClr val="444A54"/>
-                </a:solidFill>
-                <a:latin typeface="Aptos Light" panose="020B0004020202020204" pitchFamily="34" charset="0"/>
-              </a:rPr>
-              <a:t>en</a:t>
-            </a:r>
-            <a:r>
-              <a:rPr sz="1600" dirty="0">
-                <a:solidFill>
-                  <a:srgbClr val="444A54"/>
-                </a:solidFill>
-                <a:latin typeface="Aptos Light" panose="020B0004020202020204" pitchFamily="34" charset="0"/>
-              </a:rPr>
-              <a:t> </a:t>
-            </a:r>
-            <a:r>
-              <a:rPr lang="es-ES" sz="1600" dirty="0">
-                <a:solidFill>
-                  <a:srgbClr val="444A54"/>
-                </a:solidFill>
-                <a:latin typeface="Aptos Light" panose="020B0004020202020204" pitchFamily="34" charset="0"/>
-              </a:rPr>
-              <a:t>DOS </a:t>
-            </a:r>
-            <a:r>
-              <a:rPr sz="1600" dirty="0" err="1">
-                <a:solidFill>
-                  <a:srgbClr val="444A54"/>
-                </a:solidFill>
-                <a:latin typeface="Aptos Light" panose="020B0004020202020204" pitchFamily="34" charset="0"/>
-              </a:rPr>
-              <a:t>nodo</a:t>
-            </a:r>
-            <a:r>
-              <a:rPr lang="es-ES" sz="1600" dirty="0">
-                <a:solidFill>
-                  <a:srgbClr val="444A54"/>
-                </a:solidFill>
-                <a:latin typeface="Aptos Light" panose="020B0004020202020204" pitchFamily="34" charset="0"/>
-              </a:rPr>
-              <a:t>s</a:t>
-            </a:r>
-            <a:r>
-              <a:rPr sz="1600" dirty="0">
-                <a:solidFill>
-                  <a:srgbClr val="444A54"/>
-                </a:solidFill>
-                <a:latin typeface="Aptos Light" panose="020B0004020202020204" pitchFamily="34" charset="0"/>
-              </a:rPr>
-              <a:t>.</a:t>
-            </a:r>
-            <a:endParaRPr lang="es-ES" sz="1600" dirty="0">
-              <a:solidFill>
-                <a:srgbClr val="444A54"/>
-              </a:solidFill>
-              <a:latin typeface="Aptos Light" panose="020B0004020202020204" pitchFamily="34" charset="0"/>
-            </a:endParaRPr>
-          </a:p>
-          <a:p>
-            <a:r>
-              <a:rPr lang="es-ES" sz="1600" b="1" dirty="0">
-                <a:solidFill>
-                  <a:schemeClr val="accent6">
-                    <a:lumMod val="50000"/>
-                  </a:schemeClr>
-                </a:solidFill>
-                <a:latin typeface="Aptos Light" panose="020B0004020202020204" pitchFamily="34" charset="0"/>
-              </a:rPr>
-              <a:t>Arquitectura o</a:t>
-            </a:r>
-            <a:r>
-              <a:rPr sz="1600" b="1" dirty="0" err="1">
-                <a:solidFill>
-                  <a:schemeClr val="accent6">
-                    <a:lumMod val="50000"/>
-                  </a:schemeClr>
-                </a:solidFill>
-                <a:latin typeface="Aptos Light" panose="020B0004020202020204" pitchFamily="34" charset="0"/>
-              </a:rPr>
-              <a:t>bjetivo</a:t>
-            </a:r>
-            <a:r>
-              <a:rPr sz="1600" dirty="0">
-                <a:solidFill>
-                  <a:srgbClr val="444A54"/>
-                </a:solidFill>
-                <a:latin typeface="Aptos Light" panose="020B0004020202020204" pitchFamily="34" charset="0"/>
-              </a:rPr>
-              <a:t>:
-• S3 → </a:t>
-            </a:r>
-            <a:r>
-              <a:rPr sz="1600" dirty="0" err="1">
-                <a:solidFill>
-                  <a:srgbClr val="444A54"/>
-                </a:solidFill>
-                <a:latin typeface="Aptos Light" panose="020B0004020202020204" pitchFamily="34" charset="0"/>
-              </a:rPr>
-              <a:t>almacenamiento</a:t>
-            </a:r>
-            <a:r>
-              <a:rPr sz="1600" dirty="0">
-                <a:solidFill>
-                  <a:srgbClr val="444A54"/>
-                </a:solidFill>
-                <a:latin typeface="Aptos Light" panose="020B0004020202020204" pitchFamily="34" charset="0"/>
-              </a:rPr>
-              <a:t> </a:t>
-            </a:r>
-            <a:r>
-              <a:rPr sz="1600" dirty="0" err="1">
-                <a:solidFill>
-                  <a:srgbClr val="444A54"/>
-                </a:solidFill>
-                <a:latin typeface="Aptos Light" panose="020B0004020202020204" pitchFamily="34" charset="0"/>
-              </a:rPr>
-              <a:t>gestionado</a:t>
-            </a:r>
-            <a:r>
-              <a:rPr sz="1600" dirty="0">
-                <a:solidFill>
-                  <a:srgbClr val="444A54"/>
-                </a:solidFill>
-                <a:latin typeface="Aptos Light" panose="020B0004020202020204" pitchFamily="34" charset="0"/>
-              </a:rPr>
-              <a:t> </a:t>
-            </a:r>
-            <a:r>
-              <a:rPr sz="1600" dirty="0" err="1">
-                <a:solidFill>
-                  <a:srgbClr val="444A54"/>
-                </a:solidFill>
-                <a:latin typeface="Aptos Light" panose="020B0004020202020204" pitchFamily="34" charset="0"/>
-              </a:rPr>
-              <a:t>externo</a:t>
-            </a:r>
-            <a:r>
-              <a:rPr sz="1600" dirty="0">
-                <a:solidFill>
-                  <a:srgbClr val="444A54"/>
-                </a:solidFill>
-                <a:latin typeface="Aptos Light" panose="020B0004020202020204" pitchFamily="34" charset="0"/>
-              </a:rPr>
-              <a:t>.
-• Postgres → </a:t>
-            </a:r>
-            <a:r>
-              <a:rPr sz="1600" dirty="0" err="1">
-                <a:solidFill>
-                  <a:srgbClr val="444A54"/>
-                </a:solidFill>
-                <a:latin typeface="Aptos Light" panose="020B0004020202020204" pitchFamily="34" charset="0"/>
-              </a:rPr>
-              <a:t>servicio</a:t>
-            </a:r>
-            <a:r>
-              <a:rPr sz="1600" dirty="0">
-                <a:solidFill>
-                  <a:srgbClr val="444A54"/>
-                </a:solidFill>
-                <a:latin typeface="Aptos Light" panose="020B0004020202020204" pitchFamily="34" charset="0"/>
-              </a:rPr>
-              <a:t> </a:t>
-            </a:r>
-            <a:r>
-              <a:rPr sz="1600" dirty="0" err="1">
-                <a:solidFill>
-                  <a:srgbClr val="444A54"/>
-                </a:solidFill>
-                <a:latin typeface="Aptos Light" panose="020B0004020202020204" pitchFamily="34" charset="0"/>
-              </a:rPr>
-              <a:t>gestionado</a:t>
-            </a:r>
-            <a:r>
-              <a:rPr sz="1600" dirty="0">
-                <a:solidFill>
-                  <a:srgbClr val="444A54"/>
-                </a:solidFill>
-                <a:latin typeface="Aptos Light" panose="020B0004020202020204" pitchFamily="34" charset="0"/>
-              </a:rPr>
-              <a:t> con </a:t>
-            </a:r>
-            <a:r>
-              <a:rPr sz="1600" dirty="0" err="1">
-                <a:solidFill>
-                  <a:srgbClr val="444A54"/>
-                </a:solidFill>
-                <a:latin typeface="Aptos Light" panose="020B0004020202020204" pitchFamily="34" charset="0"/>
-              </a:rPr>
-              <a:t>réplicas</a:t>
-            </a:r>
-            <a:r>
-              <a:rPr sz="1600" dirty="0">
-                <a:solidFill>
-                  <a:srgbClr val="444A54"/>
-                </a:solidFill>
-                <a:latin typeface="Aptos Light" panose="020B0004020202020204" pitchFamily="34" charset="0"/>
-              </a:rPr>
-              <a:t> y backups.
-• UI-BFF → </a:t>
-            </a:r>
-            <a:r>
-              <a:rPr sz="1600" dirty="0" err="1">
-                <a:solidFill>
-                  <a:srgbClr val="444A54"/>
-                </a:solidFill>
-                <a:latin typeface="Aptos Light" panose="020B0004020202020204" pitchFamily="34" charset="0"/>
-              </a:rPr>
-              <a:t>varias</a:t>
-            </a:r>
-            <a:r>
-              <a:rPr sz="1600" dirty="0">
-                <a:solidFill>
-                  <a:srgbClr val="444A54"/>
-                </a:solidFill>
-                <a:latin typeface="Aptos Light" panose="020B0004020202020204" pitchFamily="34" charset="0"/>
-              </a:rPr>
-              <a:t> </a:t>
-            </a:r>
-            <a:r>
-              <a:rPr sz="1600" dirty="0" err="1">
-                <a:solidFill>
-                  <a:srgbClr val="444A54"/>
-                </a:solidFill>
-                <a:latin typeface="Aptos Light" panose="020B0004020202020204" pitchFamily="34" charset="0"/>
-              </a:rPr>
-              <a:t>instancias</a:t>
-            </a:r>
-            <a:r>
-              <a:rPr sz="1600" dirty="0">
-                <a:solidFill>
-                  <a:srgbClr val="444A54"/>
-                </a:solidFill>
-                <a:latin typeface="Aptos Light" panose="020B0004020202020204" pitchFamily="34" charset="0"/>
-              </a:rPr>
-              <a:t> </a:t>
-            </a:r>
-            <a:r>
-              <a:rPr sz="1600" dirty="0" err="1">
-                <a:solidFill>
-                  <a:srgbClr val="444A54"/>
-                </a:solidFill>
-                <a:latin typeface="Aptos Light" panose="020B0004020202020204" pitchFamily="34" charset="0"/>
-              </a:rPr>
-              <a:t>tras</a:t>
-            </a:r>
-            <a:r>
-              <a:rPr sz="1600" dirty="0">
-                <a:solidFill>
-                  <a:srgbClr val="444A54"/>
-                </a:solidFill>
-                <a:latin typeface="Aptos Light" panose="020B0004020202020204" pitchFamily="34" charset="0"/>
-              </a:rPr>
-              <a:t> </a:t>
-            </a:r>
-            <a:r>
-              <a:rPr sz="1600" dirty="0" err="1">
-                <a:solidFill>
-                  <a:srgbClr val="444A54"/>
-                </a:solidFill>
-                <a:latin typeface="Aptos Light" panose="020B0004020202020204" pitchFamily="34" charset="0"/>
-              </a:rPr>
-              <a:t>balanceador</a:t>
-            </a:r>
-            <a:r>
-              <a:rPr sz="1600" dirty="0">
-                <a:solidFill>
-                  <a:srgbClr val="444A54"/>
-                </a:solidFill>
-                <a:latin typeface="Aptos Light" panose="020B0004020202020204" pitchFamily="34" charset="0"/>
-              </a:rPr>
-              <a:t> (</a:t>
-            </a:r>
-            <a:r>
-              <a:rPr sz="1600" dirty="0" err="1">
-                <a:solidFill>
-                  <a:srgbClr val="444A54"/>
-                </a:solidFill>
-                <a:latin typeface="Aptos Light" panose="020B0004020202020204" pitchFamily="34" charset="0"/>
-              </a:rPr>
-              <a:t>escala</a:t>
-            </a:r>
-            <a:r>
-              <a:rPr sz="1600" dirty="0">
-                <a:solidFill>
-                  <a:srgbClr val="444A54"/>
-                </a:solidFill>
-                <a:latin typeface="Aptos Light" panose="020B0004020202020204" pitchFamily="34" charset="0"/>
-              </a:rPr>
-              <a:t> horizontal).
-• Worker → </a:t>
-            </a:r>
-            <a:r>
-              <a:rPr sz="1600" dirty="0" err="1">
-                <a:solidFill>
-                  <a:srgbClr val="444A54"/>
-                </a:solidFill>
-                <a:latin typeface="Aptos Light" panose="020B0004020202020204" pitchFamily="34" charset="0"/>
-              </a:rPr>
-              <a:t>autoescalable</a:t>
-            </a:r>
-            <a:r>
-              <a:rPr sz="1600" dirty="0">
-                <a:solidFill>
-                  <a:srgbClr val="444A54"/>
-                </a:solidFill>
-                <a:latin typeface="Aptos Light" panose="020B0004020202020204" pitchFamily="34" charset="0"/>
-              </a:rPr>
-              <a:t> </a:t>
-            </a:r>
-            <a:r>
-              <a:rPr sz="1600" dirty="0" err="1">
-                <a:solidFill>
-                  <a:srgbClr val="444A54"/>
-                </a:solidFill>
-                <a:latin typeface="Aptos Light" panose="020B0004020202020204" pitchFamily="34" charset="0"/>
-              </a:rPr>
-              <a:t>según</a:t>
-            </a:r>
-            <a:r>
-              <a:rPr sz="1600" dirty="0">
-                <a:solidFill>
-                  <a:srgbClr val="444A54"/>
-                </a:solidFill>
-                <a:latin typeface="Aptos Light" panose="020B0004020202020204" pitchFamily="34" charset="0"/>
-              </a:rPr>
-              <a:t> la cola de </a:t>
-            </a:r>
-            <a:r>
-              <a:rPr sz="1600" dirty="0" err="1">
-                <a:solidFill>
-                  <a:srgbClr val="444A54"/>
-                </a:solidFill>
-                <a:latin typeface="Aptos Light" panose="020B0004020202020204" pitchFamily="34" charset="0"/>
-              </a:rPr>
-              <a:t>análisis</a:t>
-            </a:r>
-            <a:r>
-              <a:rPr sz="1600" dirty="0">
-                <a:solidFill>
-                  <a:srgbClr val="444A54"/>
-                </a:solidFill>
-                <a:latin typeface="Aptos Light" panose="020B0004020202020204" pitchFamily="34" charset="0"/>
-              </a:rPr>
-              <a:t>.
-• </a:t>
-            </a:r>
-            <a:r>
-              <a:rPr sz="1600" dirty="0" err="1">
-                <a:solidFill>
-                  <a:srgbClr val="444A54"/>
-                </a:solidFill>
-                <a:latin typeface="Aptos Light" panose="020B0004020202020204" pitchFamily="34" charset="0"/>
-              </a:rPr>
-              <a:t>Keycloak</a:t>
-            </a:r>
-            <a:r>
-              <a:rPr sz="1600" dirty="0">
-                <a:solidFill>
-                  <a:srgbClr val="444A54"/>
-                </a:solidFill>
-                <a:latin typeface="Aptos Light" panose="020B0004020202020204" pitchFamily="34" charset="0"/>
-              </a:rPr>
-              <a:t> → </a:t>
-            </a:r>
-            <a:r>
-              <a:rPr sz="1600" dirty="0" err="1">
-                <a:solidFill>
-                  <a:srgbClr val="444A54"/>
-                </a:solidFill>
-                <a:latin typeface="Aptos Light" panose="020B0004020202020204" pitchFamily="34" charset="0"/>
-              </a:rPr>
-              <a:t>alta</a:t>
-            </a:r>
-            <a:r>
-              <a:rPr sz="1600" dirty="0">
-                <a:solidFill>
-                  <a:srgbClr val="444A54"/>
-                </a:solidFill>
-                <a:latin typeface="Aptos Light" panose="020B0004020202020204" pitchFamily="34" charset="0"/>
-              </a:rPr>
-              <a:t> </a:t>
-            </a:r>
-            <a:r>
-              <a:rPr sz="1600" dirty="0" err="1">
-                <a:solidFill>
-                  <a:srgbClr val="444A54"/>
-                </a:solidFill>
-                <a:latin typeface="Aptos Light" panose="020B0004020202020204" pitchFamily="34" charset="0"/>
-              </a:rPr>
-              <a:t>disponibilidad</a:t>
-            </a:r>
-            <a:r>
-              <a:rPr sz="1600" dirty="0">
-                <a:solidFill>
-                  <a:srgbClr val="444A54"/>
-                </a:solidFill>
-                <a:latin typeface="Aptos Light" panose="020B0004020202020204" pitchFamily="34" charset="0"/>
-              </a:rPr>
-              <a:t> / IdP </a:t>
-            </a:r>
-            <a:r>
-              <a:rPr sz="1600" dirty="0" err="1">
-                <a:solidFill>
-                  <a:srgbClr val="444A54"/>
-                </a:solidFill>
-                <a:latin typeface="Aptos Light" panose="020B0004020202020204" pitchFamily="34" charset="0"/>
-              </a:rPr>
-              <a:t>gestionado</a:t>
-            </a:r>
-            <a:r>
-              <a:rPr sz="1600" dirty="0">
-                <a:solidFill>
-                  <a:srgbClr val="444A54"/>
-                </a:solidFill>
-                <a:latin typeface="Aptos Light" panose="020B0004020202020204" pitchFamily="34" charset="0"/>
-              </a:rPr>
-              <a:t> (</a:t>
-            </a:r>
-            <a:r>
-              <a:rPr sz="1600" dirty="0" err="1">
-                <a:solidFill>
-                  <a:srgbClr val="444A54"/>
-                </a:solidFill>
-                <a:latin typeface="Aptos Light" panose="020B0004020202020204" pitchFamily="34" charset="0"/>
-              </a:rPr>
-              <a:t>su</a:t>
-            </a:r>
-            <a:r>
-              <a:rPr sz="1600" dirty="0">
-                <a:solidFill>
-                  <a:srgbClr val="444A54"/>
-                </a:solidFill>
-                <a:latin typeface="Aptos Light" panose="020B0004020202020204" pitchFamily="34" charset="0"/>
-              </a:rPr>
-              <a:t> </a:t>
-            </a:r>
-            <a:r>
-              <a:rPr sz="1600" dirty="0" err="1">
-                <a:solidFill>
-                  <a:srgbClr val="444A54"/>
-                </a:solidFill>
-                <a:latin typeface="Aptos Light" panose="020B0004020202020204" pitchFamily="34" charset="0"/>
-              </a:rPr>
-              <a:t>caída</a:t>
-            </a:r>
-            <a:r>
-              <a:rPr sz="1600" dirty="0">
-                <a:solidFill>
-                  <a:srgbClr val="444A54"/>
-                </a:solidFill>
-                <a:latin typeface="Aptos Light" panose="020B0004020202020204" pitchFamily="34" charset="0"/>
-              </a:rPr>
-              <a:t> </a:t>
-            </a:r>
-            <a:r>
-              <a:rPr sz="1600" dirty="0" err="1">
-                <a:solidFill>
-                  <a:srgbClr val="444A54"/>
-                </a:solidFill>
-                <a:latin typeface="Aptos Light" panose="020B0004020202020204" pitchFamily="34" charset="0"/>
-              </a:rPr>
-              <a:t>bloquea</a:t>
-            </a:r>
-            <a:r>
-              <a:rPr sz="1600" dirty="0">
-                <a:solidFill>
-                  <a:srgbClr val="444A54"/>
-                </a:solidFill>
-                <a:latin typeface="Aptos Light" panose="020B0004020202020204" pitchFamily="34" charset="0"/>
-              </a:rPr>
-              <a:t> el </a:t>
-            </a:r>
-            <a:r>
-              <a:rPr sz="1600" dirty="0" err="1">
-                <a:solidFill>
-                  <a:srgbClr val="444A54"/>
-                </a:solidFill>
-                <a:latin typeface="Aptos Light" panose="020B0004020202020204" pitchFamily="34" charset="0"/>
-              </a:rPr>
-              <a:t>acceso</a:t>
-            </a:r>
-            <a:r>
-              <a:rPr sz="1600" dirty="0">
-                <a:solidFill>
-                  <a:srgbClr val="444A54"/>
-                </a:solidFill>
-                <a:latin typeface="Aptos Light" panose="020B0004020202020204" pitchFamily="34" charset="0"/>
-              </a:rPr>
-              <a:t>).</a:t>
-            </a:r>
-            <a:endParaRPr lang="es-ES" sz="1600" dirty="0">
-              <a:solidFill>
-                <a:srgbClr val="444A54"/>
-              </a:solidFill>
-              <a:latin typeface="Aptos Light" panose="020B0004020202020204" pitchFamily="34" charset="0"/>
-            </a:endParaRPr>
-          </a:p>
-          <a:p>
-            <a:r>
-              <a:rPr sz="1600" dirty="0">
-                <a:solidFill>
-                  <a:srgbClr val="444A54"/>
-                </a:solidFill>
-                <a:latin typeface="Aptos Light" panose="020B0004020202020204" pitchFamily="34" charset="0"/>
-              </a:rPr>
-              <a:t>
-</a:t>
-            </a:r>
-            <a:r>
-              <a:rPr lang="es-ES" sz="1600" dirty="0">
-                <a:solidFill>
-                  <a:srgbClr val="444A54"/>
-                </a:solidFill>
-                <a:latin typeface="Aptos Light" panose="020B0004020202020204" pitchFamily="34" charset="0"/>
-              </a:rPr>
-              <a:t>E</a:t>
-            </a:r>
-            <a:r>
-              <a:rPr sz="1600" dirty="0">
-                <a:solidFill>
-                  <a:srgbClr val="444A54"/>
-                </a:solidFill>
-                <a:latin typeface="Aptos Light" panose="020B0004020202020204" pitchFamily="34" charset="0"/>
-              </a:rPr>
-              <a:t>l nginx</a:t>
-            </a:r>
-            <a:r>
-              <a:rPr lang="es-ES" sz="1600" dirty="0">
-                <a:solidFill>
-                  <a:srgbClr val="444A54"/>
-                </a:solidFill>
-                <a:latin typeface="Aptos Light" panose="020B0004020202020204" pitchFamily="34" charset="0"/>
-              </a:rPr>
-              <a:t> y el host son</a:t>
-            </a:r>
-            <a:r>
-              <a:rPr sz="1600" dirty="0">
-                <a:solidFill>
-                  <a:srgbClr val="444A54"/>
-                </a:solidFill>
-                <a:latin typeface="Aptos Light" panose="020B0004020202020204" pitchFamily="34" charset="0"/>
-              </a:rPr>
-              <a:t> </a:t>
-            </a:r>
-            <a:r>
-              <a:rPr lang="es-ES" sz="1600" dirty="0">
-                <a:solidFill>
-                  <a:srgbClr val="444A54"/>
-                </a:solidFill>
-                <a:latin typeface="Aptos Light" panose="020B0004020202020204" pitchFamily="34" charset="0"/>
-              </a:rPr>
-              <a:t>h</a:t>
-            </a:r>
-            <a:r>
-              <a:rPr sz="1600" dirty="0">
-                <a:solidFill>
-                  <a:srgbClr val="444A54"/>
-                </a:solidFill>
-                <a:latin typeface="Aptos Light" panose="020B0004020202020204" pitchFamily="34" charset="0"/>
-              </a:rPr>
-              <a:t>oy </a:t>
-            </a:r>
-            <a:r>
-              <a:rPr lang="es-ES" sz="1600" b="1" dirty="0">
-                <a:solidFill>
-                  <a:schemeClr val="accent6">
-                    <a:lumMod val="50000"/>
-                  </a:schemeClr>
-                </a:solidFill>
-                <a:latin typeface="Aptos Light" panose="020B0004020202020204" pitchFamily="34" charset="0"/>
-              </a:rPr>
-              <a:t>únicos puntos de fallo</a:t>
-            </a:r>
-            <a:r>
-              <a:rPr sz="1600" dirty="0">
-                <a:solidFill>
-                  <a:srgbClr val="444A54"/>
-                </a:solidFill>
-                <a:latin typeface="Aptos Light" panose="020B0004020202020204" pitchFamily="34" charset="0"/>
-              </a:rPr>
-              <a:t>. Pasar de </a:t>
-            </a:r>
-            <a:r>
-              <a:rPr lang="es-ES" sz="1600" dirty="0">
-                <a:solidFill>
-                  <a:srgbClr val="444A54"/>
-                </a:solidFill>
-                <a:latin typeface="Aptos Light" panose="020B0004020202020204" pitchFamily="34" charset="0"/>
-              </a:rPr>
-              <a:t>de </a:t>
-            </a:r>
-            <a:r>
-              <a:rPr sz="1600" dirty="0" err="1">
-                <a:solidFill>
-                  <a:srgbClr val="444A54"/>
-                </a:solidFill>
-                <a:latin typeface="Aptos Light" panose="020B0004020202020204" pitchFamily="34" charset="0"/>
-              </a:rPr>
-              <a:t>nodo</a:t>
-            </a:r>
-            <a:r>
-              <a:rPr lang="es-ES" sz="1600" dirty="0">
-                <a:solidFill>
-                  <a:srgbClr val="444A54"/>
-                </a:solidFill>
-                <a:latin typeface="Aptos Light" panose="020B0004020202020204" pitchFamily="34" charset="0"/>
-              </a:rPr>
-              <a:t>s</a:t>
-            </a:r>
-            <a:r>
-              <a:rPr sz="1600" dirty="0">
-                <a:solidFill>
-                  <a:srgbClr val="444A54"/>
-                </a:solidFill>
-                <a:latin typeface="Aptos Light" panose="020B0004020202020204" pitchFamily="34" charset="0"/>
-              </a:rPr>
-              <a:t> a </a:t>
-            </a:r>
-            <a:r>
-              <a:rPr sz="1600" dirty="0" err="1">
-                <a:solidFill>
-                  <a:srgbClr val="444A54"/>
-                </a:solidFill>
-                <a:latin typeface="Aptos Light" panose="020B0004020202020204" pitchFamily="34" charset="0"/>
-              </a:rPr>
-              <a:t>componentes</a:t>
-            </a:r>
-            <a:r>
-              <a:rPr sz="1600" dirty="0">
-                <a:solidFill>
-                  <a:srgbClr val="444A54"/>
-                </a:solidFill>
-                <a:latin typeface="Aptos Light" panose="020B0004020202020204" pitchFamily="34" charset="0"/>
-              </a:rPr>
-              <a:t> </a:t>
-            </a:r>
-            <a:r>
-              <a:rPr sz="1600" dirty="0" err="1">
-                <a:solidFill>
-                  <a:srgbClr val="444A54"/>
-                </a:solidFill>
-                <a:latin typeface="Aptos Light" panose="020B0004020202020204" pitchFamily="34" charset="0"/>
-              </a:rPr>
-              <a:t>distribuidos</a:t>
-            </a:r>
-            <a:r>
-              <a:rPr sz="1600" dirty="0">
-                <a:solidFill>
-                  <a:srgbClr val="444A54"/>
-                </a:solidFill>
-                <a:latin typeface="Aptos Light" panose="020B0004020202020204" pitchFamily="34" charset="0"/>
-              </a:rPr>
-              <a:t> con </a:t>
-            </a:r>
-            <a:r>
-              <a:rPr sz="1600" dirty="0" err="1">
-                <a:solidFill>
-                  <a:srgbClr val="444A54"/>
-                </a:solidFill>
-                <a:latin typeface="Aptos Light" panose="020B0004020202020204" pitchFamily="34" charset="0"/>
-              </a:rPr>
-              <a:t>redundancia</a:t>
-            </a:r>
-            <a:r>
-              <a:rPr sz="1600" dirty="0">
-                <a:solidFill>
-                  <a:srgbClr val="444A54"/>
-                </a:solidFill>
-                <a:latin typeface="Aptos Light" panose="020B0004020202020204" pitchFamily="34" charset="0"/>
-              </a:rPr>
-              <a:t> y </a:t>
-            </a:r>
-            <a:r>
-              <a:rPr sz="1600" dirty="0" err="1">
-                <a:solidFill>
-                  <a:srgbClr val="444A54"/>
-                </a:solidFill>
-                <a:latin typeface="Aptos Light" panose="020B0004020202020204" pitchFamily="34" charset="0"/>
-              </a:rPr>
-              <a:t>balanceo</a:t>
-            </a:r>
-            <a:r>
-              <a:rPr sz="1600" dirty="0">
-                <a:solidFill>
-                  <a:srgbClr val="444A54"/>
-                </a:solidFill>
-                <a:latin typeface="Aptos Light" panose="020B0004020202020204" pitchFamily="34" charset="0"/>
-              </a:rPr>
-              <a:t>.</a:t>
-            </a:r>
-          </a:p>
-        </p:txBody>
-      </p:sp>
       <p:pic>
         <p:nvPicPr>
           <p:cNvPr id="9" name="Imagen 8">
@@ -20539,14 +23219,722 @@
         </p:blipFill>
         <p:spPr>
           <a:xfrm>
-            <a:off x="7848139" y="1234440"/>
-            <a:ext cx="2744153" cy="2259617"/>
+            <a:off x="7082734" y="1170428"/>
+            <a:ext cx="3716811" cy="3060533"/>
           </a:xfrm>
           <a:prstGeom prst="rect">
             <a:avLst/>
           </a:prstGeom>
         </p:spPr>
       </p:pic>
+      <p:graphicFrame>
+        <p:nvGraphicFramePr>
+          <p:cNvPr id="12" name="Table 5">
+            <a:extLst>
+              <a:ext uri="{FF2B5EF4-FFF2-40B4-BE49-F238E27FC236}">
+                <a16:creationId xmlns:a16="http://schemas.microsoft.com/office/drawing/2014/main" id="{E4880AD3-C5F5-5AAB-AB06-7FF93ADE3871}"/>
+              </a:ext>
+            </a:extLst>
+          </p:cNvPr>
+          <p:cNvGraphicFramePr>
+            <a:graphicFrameLocks noGrp="1"/>
+          </p:cNvGraphicFramePr>
+          <p:nvPr>
+            <p:extLst>
+              <p:ext uri="{D42A27DB-BD31-4B8C-83A1-F6EECF244321}">
+                <p14:modId xmlns:p14="http://schemas.microsoft.com/office/powerpoint/2010/main" val="1197153778"/>
+              </p:ext>
+            </p:extLst>
+          </p:nvPr>
+        </p:nvGraphicFramePr>
+        <p:xfrm>
+          <a:off x="446777" y="4427624"/>
+          <a:ext cx="11247120" cy="2178446"/>
+        </p:xfrm>
+        <a:graphic>
+          <a:graphicData uri="http://schemas.openxmlformats.org/drawingml/2006/table">
+            <a:tbl>
+              <a:tblPr firstRow="1" bandRow="1">
+                <a:tableStyleId>{5C22544A-7EE6-4342-B048-85BDC9FD1C3A}</a:tableStyleId>
+              </a:tblPr>
+              <a:tblGrid>
+                <a:gridCol w="4206240">
+                  <a:extLst>
+                    <a:ext uri="{9D8B030D-6E8A-4147-A177-3AD203B41FA5}">
+                      <a16:colId xmlns:a16="http://schemas.microsoft.com/office/drawing/2014/main" val="20000"/>
+                    </a:ext>
+                  </a:extLst>
+                </a:gridCol>
+                <a:gridCol w="7040880">
+                  <a:extLst>
+                    <a:ext uri="{9D8B030D-6E8A-4147-A177-3AD203B41FA5}">
+                      <a16:colId xmlns:a16="http://schemas.microsoft.com/office/drawing/2014/main" val="20001"/>
+                    </a:ext>
+                  </a:extLst>
+                </a:gridCol>
+              </a:tblGrid>
+              <a:tr h="282733">
+                <a:tc>
+                  <a:txBody>
+                    <a:bodyPr/>
+                    <a:lstStyle/>
+                    <a:p>
+                      <a:pPr marL="0" algn="ctr" defTabSz="457200" rtl="0" eaLnBrk="1" latinLnBrk="0" hangingPunct="1"/>
+                      <a:r>
+                        <a:rPr lang="es-ES" sz="1600" b="1" kern="1200" dirty="0">
+                          <a:solidFill>
+                            <a:srgbClr val="FFFFFF"/>
+                          </a:solidFill>
+                          <a:latin typeface="Aptos Light" panose="020B0004020202020204" pitchFamily="34" charset="0"/>
+                          <a:ea typeface="+mn-ea"/>
+                          <a:cs typeface="+mn-cs"/>
+                        </a:rPr>
+                        <a:t>Control</a:t>
+                      </a:r>
+                      <a:endParaRPr sz="1600" b="1" kern="1200" dirty="0">
+                        <a:solidFill>
+                          <a:srgbClr val="FFFFFF"/>
+                        </a:solidFill>
+                        <a:latin typeface="Aptos Light" panose="020B0004020202020204" pitchFamily="34" charset="0"/>
+                        <a:ea typeface="+mn-ea"/>
+                        <a:cs typeface="+mn-cs"/>
+                      </a:endParaRPr>
+                    </a:p>
+                  </a:txBody>
+                  <a:tcPr>
+                    <a:lnR w="12700" cap="flat" cmpd="sng" algn="ctr">
+                      <a:solidFill>
+                        <a:schemeClr val="tx1"/>
+                      </a:solidFill>
+                      <a:prstDash val="solid"/>
+                      <a:round/>
+                      <a:headEnd type="none" w="med" len="med"/>
+                      <a:tailEnd type="none" w="med" len="med"/>
+                    </a:lnR>
+                    <a:lnB w="12700" cap="flat" cmpd="sng" algn="ctr">
+                      <a:solidFill>
+                        <a:schemeClr val="tx1"/>
+                      </a:solidFill>
+                      <a:prstDash val="solid"/>
+                      <a:round/>
+                      <a:headEnd type="none" w="med" len="med"/>
+                      <a:tailEnd type="none" w="med" len="med"/>
+                    </a:lnB>
+                    <a:solidFill>
+                      <a:schemeClr val="tx2"/>
+                    </a:solidFill>
+                  </a:tcPr>
+                </a:tc>
+                <a:tc>
+                  <a:txBody>
+                    <a:bodyPr/>
+                    <a:lstStyle/>
+                    <a:p>
+                      <a:pPr marL="0" algn="ctr" defTabSz="457200" rtl="0" eaLnBrk="1" latinLnBrk="0" hangingPunct="1"/>
+                      <a:r>
+                        <a:rPr lang="es-ES" sz="1600" b="1" kern="1200" dirty="0">
+                          <a:solidFill>
+                            <a:srgbClr val="FFFFFF"/>
+                          </a:solidFill>
+                          <a:latin typeface="Aptos Light" panose="020B0004020202020204" pitchFamily="34" charset="0"/>
+                          <a:ea typeface="+mn-ea"/>
+                          <a:cs typeface="+mn-cs"/>
+                        </a:rPr>
+                        <a:t>¿</a:t>
+                      </a:r>
+                      <a:r>
+                        <a:rPr sz="1600" b="1" kern="1200" dirty="0" err="1">
+                          <a:solidFill>
+                            <a:srgbClr val="FFFFFF"/>
+                          </a:solidFill>
+                          <a:latin typeface="Aptos Light" panose="020B0004020202020204" pitchFamily="34" charset="0"/>
+                          <a:ea typeface="+mn-ea"/>
+                          <a:cs typeface="+mn-cs"/>
+                        </a:rPr>
+                        <a:t>Cómo</a:t>
+                      </a:r>
+                      <a:r>
+                        <a:rPr sz="1600" b="1" kern="1200" dirty="0">
+                          <a:solidFill>
+                            <a:srgbClr val="FFFFFF"/>
+                          </a:solidFill>
+                          <a:latin typeface="Aptos Light" panose="020B0004020202020204" pitchFamily="34" charset="0"/>
+                          <a:ea typeface="+mn-ea"/>
+                          <a:cs typeface="+mn-cs"/>
+                        </a:rPr>
+                        <a:t> se ha </a:t>
+                      </a:r>
+                      <a:r>
+                        <a:rPr sz="1600" b="1" kern="1200" dirty="0" err="1">
+                          <a:solidFill>
+                            <a:srgbClr val="FFFFFF"/>
+                          </a:solidFill>
+                          <a:latin typeface="Aptos Light" panose="020B0004020202020204" pitchFamily="34" charset="0"/>
+                          <a:ea typeface="+mn-ea"/>
+                          <a:cs typeface="+mn-cs"/>
+                        </a:rPr>
+                        <a:t>implementado</a:t>
+                      </a:r>
+                      <a:r>
+                        <a:rPr lang="es-ES" sz="1600" b="1" kern="1200" dirty="0">
+                          <a:solidFill>
+                            <a:srgbClr val="FFFFFF"/>
+                          </a:solidFill>
+                          <a:latin typeface="Aptos Light" panose="020B0004020202020204" pitchFamily="34" charset="0"/>
+                          <a:ea typeface="+mn-ea"/>
+                          <a:cs typeface="+mn-cs"/>
+                        </a:rPr>
+                        <a:t>?</a:t>
+                      </a:r>
+                      <a:endParaRPr sz="1600" b="1" kern="1200" dirty="0">
+                        <a:solidFill>
+                          <a:srgbClr val="FFFFFF"/>
+                        </a:solidFill>
+                        <a:latin typeface="Aptos Light" panose="020B0004020202020204" pitchFamily="34" charset="0"/>
+                        <a:ea typeface="+mn-ea"/>
+                        <a:cs typeface="+mn-cs"/>
+                      </a:endParaRPr>
+                    </a:p>
+                  </a:txBody>
+                  <a:tcPr>
+                    <a:lnL w="12700" cap="flat" cmpd="sng" algn="ctr">
+                      <a:solidFill>
+                        <a:schemeClr val="tx1"/>
+                      </a:solidFill>
+                      <a:prstDash val="solid"/>
+                      <a:round/>
+                      <a:headEnd type="none" w="med" len="med"/>
+                      <a:tailEnd type="none" w="med" len="med"/>
+                    </a:lnL>
+                    <a:lnB w="12700" cap="flat" cmpd="sng" algn="ctr">
+                      <a:solidFill>
+                        <a:schemeClr val="tx1"/>
+                      </a:solidFill>
+                      <a:prstDash val="solid"/>
+                      <a:round/>
+                      <a:headEnd type="none" w="med" len="med"/>
+                      <a:tailEnd type="none" w="med" len="med"/>
+                    </a:lnB>
+                    <a:solidFill>
+                      <a:schemeClr val="tx2"/>
+                    </a:solidFill>
+                  </a:tcPr>
+                </a:tc>
+                <a:extLst>
+                  <a:ext uri="{0D108BD9-81ED-4DB2-BD59-A6C34878D82A}">
+                    <a16:rowId xmlns:a16="http://schemas.microsoft.com/office/drawing/2014/main" val="10000"/>
+                  </a:ext>
+                </a:extLst>
+              </a:tr>
+              <a:tr h="462654">
+                <a:tc>
+                  <a:txBody>
+                    <a:bodyPr/>
+                    <a:lstStyle/>
+                    <a:p>
+                      <a:pPr marL="0" algn="ctr" defTabSz="457200" rtl="0" eaLnBrk="1" latinLnBrk="0" hangingPunct="1"/>
+                      <a:r>
+                        <a:rPr lang="es-ES" sz="1500" kern="1200" dirty="0">
+                          <a:solidFill>
+                            <a:srgbClr val="444A54"/>
+                          </a:solidFill>
+                          <a:latin typeface="Aptos Light" panose="020B0004020202020204" pitchFamily="34" charset="0"/>
+                          <a:ea typeface="+mn-ea"/>
+                          <a:cs typeface="+mn-cs"/>
+                        </a:rPr>
+                        <a:t>Defensa en profundidad</a:t>
+                      </a:r>
+                      <a:endParaRPr sz="1500" kern="1200" dirty="0">
+                        <a:solidFill>
+                          <a:srgbClr val="444A54"/>
+                        </a:solidFill>
+                        <a:latin typeface="Aptos Light" panose="020B0004020202020204" pitchFamily="34" charset="0"/>
+                        <a:ea typeface="+mn-ea"/>
+                        <a:cs typeface="+mn-cs"/>
+                      </a:endParaRPr>
+                    </a:p>
+                  </a:txBody>
+                  <a:tcPr>
+                    <a:lnR w="12700" cap="flat" cmpd="sng" algn="ctr">
+                      <a:solidFill>
+                        <a:schemeClr val="tx1"/>
+                      </a:solidFill>
+                      <a:prstDash val="solid"/>
+                      <a:round/>
+                      <a:headEnd type="none" w="med" len="med"/>
+                      <a:tailEnd type="none" w="med" len="med"/>
+                    </a:lnR>
+                    <a:lnT w="12700" cap="flat" cmpd="sng" algn="ctr">
+                      <a:solidFill>
+                        <a:schemeClr val="tx1"/>
+                      </a:solidFill>
+                      <a:prstDash val="solid"/>
+                      <a:round/>
+                      <a:headEnd type="none" w="med" len="med"/>
+                      <a:tailEnd type="none" w="med" len="med"/>
+                    </a:lnT>
+                    <a:lnB w="12700" cap="flat" cmpd="sng" algn="ctr">
+                      <a:solidFill>
+                        <a:schemeClr val="tx1"/>
+                      </a:solidFill>
+                      <a:prstDash val="solid"/>
+                      <a:round/>
+                      <a:headEnd type="none" w="med" len="med"/>
+                      <a:tailEnd type="none" w="med" len="med"/>
+                    </a:lnB>
+                    <a:solidFill>
+                      <a:schemeClr val="bg1"/>
+                    </a:solidFill>
+                  </a:tcPr>
+                </a:tc>
+                <a:tc>
+                  <a:txBody>
+                    <a:bodyPr/>
+                    <a:lstStyle/>
+                    <a:p>
+                      <a:pPr marL="0" algn="just" defTabSz="457200" rtl="0" eaLnBrk="1" latinLnBrk="0" hangingPunct="1"/>
+                      <a:r>
+                        <a:rPr lang="es-ES" sz="1500" kern="1200" dirty="0">
+                          <a:solidFill>
+                            <a:srgbClr val="444A54"/>
+                          </a:solidFill>
+                          <a:latin typeface="Aptos Light" panose="020B0004020202020204" pitchFamily="34" charset="0"/>
+                          <a:ea typeface="+mn-ea"/>
+                          <a:cs typeface="+mn-cs"/>
+                        </a:rPr>
+                        <a:t>Sin IP pública y además firewall: 8000/8080/9000 sólo desde 10.0.1.10/32. </a:t>
+                      </a:r>
+                    </a:p>
+                    <a:p>
+                      <a:pPr marL="0" algn="just" defTabSz="457200" rtl="0" eaLnBrk="1" latinLnBrk="0" hangingPunct="1"/>
+                      <a:r>
+                        <a:rPr lang="es-ES" sz="1500" kern="1200" dirty="0">
+                          <a:solidFill>
+                            <a:srgbClr val="444A54"/>
+                          </a:solidFill>
+                          <a:latin typeface="Aptos Light" panose="020B0004020202020204" pitchFamily="34" charset="0"/>
+                          <a:ea typeface="+mn-ea"/>
+                          <a:cs typeface="+mn-cs"/>
+                        </a:rPr>
+                        <a:t>Las dos capas deben fallar a la vez.</a:t>
+                      </a:r>
+                      <a:endParaRPr sz="1500" kern="1200" dirty="0">
+                        <a:solidFill>
+                          <a:srgbClr val="444A54"/>
+                        </a:solidFill>
+                        <a:latin typeface="Aptos Light" panose="020B0004020202020204" pitchFamily="34" charset="0"/>
+                        <a:ea typeface="+mn-ea"/>
+                        <a:cs typeface="+mn-cs"/>
+                      </a:endParaRPr>
+                    </a:p>
+                  </a:txBody>
+                  <a:tcPr>
+                    <a:lnL w="12700" cap="flat" cmpd="sng" algn="ctr">
+                      <a:solidFill>
+                        <a:schemeClr val="tx1"/>
+                      </a:solidFill>
+                      <a:prstDash val="solid"/>
+                      <a:round/>
+                      <a:headEnd type="none" w="med" len="med"/>
+                      <a:tailEnd type="none" w="med" len="med"/>
+                    </a:lnL>
+                    <a:lnT w="12700" cap="flat" cmpd="sng" algn="ctr">
+                      <a:solidFill>
+                        <a:schemeClr val="tx1"/>
+                      </a:solidFill>
+                      <a:prstDash val="solid"/>
+                      <a:round/>
+                      <a:headEnd type="none" w="med" len="med"/>
+                      <a:tailEnd type="none" w="med" len="med"/>
+                    </a:lnT>
+                    <a:lnB w="12700" cap="flat" cmpd="sng" algn="ctr">
+                      <a:solidFill>
+                        <a:schemeClr val="tx1"/>
+                      </a:solidFill>
+                      <a:prstDash val="solid"/>
+                      <a:round/>
+                      <a:headEnd type="none" w="med" len="med"/>
+                      <a:tailEnd type="none" w="med" len="med"/>
+                    </a:lnB>
+                    <a:solidFill>
+                      <a:schemeClr val="bg1"/>
+                    </a:solidFill>
+                  </a:tcPr>
+                </a:tc>
+                <a:extLst>
+                  <a:ext uri="{0D108BD9-81ED-4DB2-BD59-A6C34878D82A}">
+                    <a16:rowId xmlns:a16="http://schemas.microsoft.com/office/drawing/2014/main" val="10001"/>
+                  </a:ext>
+                </a:extLst>
+              </a:tr>
+              <a:tr h="462654">
+                <a:tc>
+                  <a:txBody>
+                    <a:bodyPr/>
+                    <a:lstStyle/>
+                    <a:p>
+                      <a:pPr marL="0" algn="ctr" defTabSz="457200" rtl="0" eaLnBrk="1" latinLnBrk="0" hangingPunct="1"/>
+                      <a:r>
+                        <a:rPr lang="es-ES" sz="1500" kern="1200" dirty="0">
+                          <a:solidFill>
+                            <a:srgbClr val="444A54"/>
+                          </a:solidFill>
+                          <a:latin typeface="Aptos Light" panose="020B0004020202020204" pitchFamily="34" charset="0"/>
+                          <a:ea typeface="+mn-ea"/>
+                          <a:cs typeface="+mn-cs"/>
+                        </a:rPr>
+                        <a:t>Secretos</a:t>
+                      </a:r>
+                      <a:endParaRPr sz="1500" kern="1200" dirty="0">
+                        <a:solidFill>
+                          <a:srgbClr val="444A54"/>
+                        </a:solidFill>
+                        <a:latin typeface="Aptos Light" panose="020B0004020202020204" pitchFamily="34" charset="0"/>
+                        <a:ea typeface="+mn-ea"/>
+                        <a:cs typeface="+mn-cs"/>
+                      </a:endParaRPr>
+                    </a:p>
+                  </a:txBody>
+                  <a:tcPr>
+                    <a:lnR w="12700" cap="flat" cmpd="sng" algn="ctr">
+                      <a:solidFill>
+                        <a:schemeClr val="tx1"/>
+                      </a:solidFill>
+                      <a:prstDash val="solid"/>
+                      <a:round/>
+                      <a:headEnd type="none" w="med" len="med"/>
+                      <a:tailEnd type="none" w="med" len="med"/>
+                    </a:lnR>
+                    <a:lnT w="12700" cap="flat" cmpd="sng" algn="ctr">
+                      <a:solidFill>
+                        <a:schemeClr val="tx1"/>
+                      </a:solidFill>
+                      <a:prstDash val="solid"/>
+                      <a:round/>
+                      <a:headEnd type="none" w="med" len="med"/>
+                      <a:tailEnd type="none" w="med" len="med"/>
+                    </a:lnT>
+                    <a:lnB w="12700" cap="flat" cmpd="sng" algn="ctr">
+                      <a:solidFill>
+                        <a:schemeClr val="tx1"/>
+                      </a:solidFill>
+                      <a:prstDash val="solid"/>
+                      <a:round/>
+                      <a:headEnd type="none" w="med" len="med"/>
+                      <a:tailEnd type="none" w="med" len="med"/>
+                    </a:lnB>
+                    <a:solidFill>
+                      <a:schemeClr val="bg1"/>
+                    </a:solidFill>
+                  </a:tcPr>
+                </a:tc>
+                <a:tc>
+                  <a:txBody>
+                    <a:bodyPr/>
+                    <a:lstStyle/>
+                    <a:p>
+                      <a:pPr marL="0" algn="just" defTabSz="457200" rtl="0" eaLnBrk="1" latinLnBrk="0" hangingPunct="1"/>
+                      <a:r>
+                        <a:rPr lang="es-ES" sz="1500" kern="1200" dirty="0">
+                          <a:solidFill>
+                            <a:srgbClr val="444A54"/>
+                          </a:solidFill>
+                          <a:latin typeface="Aptos Light" panose="020B0004020202020204" pitchFamily="34" charset="0"/>
+                          <a:ea typeface="+mn-ea"/>
+                          <a:cs typeface="+mn-cs"/>
+                        </a:rPr>
+                        <a:t>19 credenciales (incl. </a:t>
+                      </a:r>
+                      <a:r>
+                        <a:rPr lang="es-ES" sz="1500" kern="1200" dirty="0" err="1">
+                          <a:solidFill>
+                            <a:srgbClr val="444A54"/>
+                          </a:solidFill>
+                          <a:latin typeface="Aptos Light" panose="020B0004020202020204" pitchFamily="34" charset="0"/>
+                          <a:ea typeface="+mn-ea"/>
+                          <a:cs typeface="+mn-cs"/>
+                        </a:rPr>
+                        <a:t>passphrase</a:t>
+                      </a:r>
+                      <a:r>
+                        <a:rPr lang="es-ES" sz="1500" kern="1200" dirty="0">
+                          <a:solidFill>
+                            <a:srgbClr val="444A54"/>
+                          </a:solidFill>
+                          <a:latin typeface="Aptos Light" panose="020B0004020202020204" pitchFamily="34" charset="0"/>
+                          <a:ea typeface="+mn-ea"/>
+                          <a:cs typeface="+mn-cs"/>
+                        </a:rPr>
+                        <a:t> LUKS) cifradas con SOPS/</a:t>
+                      </a:r>
+                      <a:r>
+                        <a:rPr lang="es-ES" sz="1500" kern="1200" dirty="0" err="1">
+                          <a:solidFill>
+                            <a:srgbClr val="444A54"/>
+                          </a:solidFill>
+                          <a:latin typeface="Aptos Light" panose="020B0004020202020204" pitchFamily="34" charset="0"/>
+                          <a:ea typeface="+mn-ea"/>
+                          <a:cs typeface="+mn-cs"/>
+                        </a:rPr>
+                        <a:t>age</a:t>
+                      </a:r>
+                      <a:r>
+                        <a:rPr lang="es-ES" sz="1500" kern="1200" dirty="0">
+                          <a:solidFill>
+                            <a:srgbClr val="444A54"/>
+                          </a:solidFill>
+                          <a:latin typeface="Aptos Light" panose="020B0004020202020204" pitchFamily="34" charset="0"/>
+                          <a:ea typeface="+mn-ea"/>
+                          <a:cs typeface="+mn-cs"/>
+                        </a:rPr>
+                        <a:t>. Se descifran en RAM, nunca a disco.</a:t>
+                      </a:r>
+                      <a:endParaRPr sz="1500" kern="1200" dirty="0">
+                        <a:solidFill>
+                          <a:srgbClr val="444A54"/>
+                        </a:solidFill>
+                        <a:latin typeface="Aptos Light" panose="020B0004020202020204" pitchFamily="34" charset="0"/>
+                        <a:ea typeface="+mn-ea"/>
+                        <a:cs typeface="+mn-cs"/>
+                      </a:endParaRPr>
+                    </a:p>
+                  </a:txBody>
+                  <a:tcPr>
+                    <a:lnL w="12700" cap="flat" cmpd="sng" algn="ctr">
+                      <a:solidFill>
+                        <a:schemeClr val="tx1"/>
+                      </a:solidFill>
+                      <a:prstDash val="solid"/>
+                      <a:round/>
+                      <a:headEnd type="none" w="med" len="med"/>
+                      <a:tailEnd type="none" w="med" len="med"/>
+                    </a:lnL>
+                    <a:lnT w="12700" cap="flat" cmpd="sng" algn="ctr">
+                      <a:solidFill>
+                        <a:schemeClr val="tx1"/>
+                      </a:solidFill>
+                      <a:prstDash val="solid"/>
+                      <a:round/>
+                      <a:headEnd type="none" w="med" len="med"/>
+                      <a:tailEnd type="none" w="med" len="med"/>
+                    </a:lnT>
+                    <a:lnB w="12700" cap="flat" cmpd="sng" algn="ctr">
+                      <a:solidFill>
+                        <a:schemeClr val="tx1"/>
+                      </a:solidFill>
+                      <a:prstDash val="solid"/>
+                      <a:round/>
+                      <a:headEnd type="none" w="med" len="med"/>
+                      <a:tailEnd type="none" w="med" len="med"/>
+                    </a:lnB>
+                    <a:solidFill>
+                      <a:schemeClr val="bg1"/>
+                    </a:solidFill>
+                  </a:tcPr>
+                </a:tc>
+                <a:extLst>
+                  <a:ext uri="{0D108BD9-81ED-4DB2-BD59-A6C34878D82A}">
+                    <a16:rowId xmlns:a16="http://schemas.microsoft.com/office/drawing/2014/main" val="10002"/>
+                  </a:ext>
+                </a:extLst>
+              </a:tr>
+              <a:tr h="745886">
+                <a:tc>
+                  <a:txBody>
+                    <a:bodyPr/>
+                    <a:lstStyle/>
+                    <a:p>
+                      <a:pPr marL="0" algn="ctr" defTabSz="457200" rtl="0" eaLnBrk="1" latinLnBrk="0" hangingPunct="1"/>
+                      <a:r>
+                        <a:rPr lang="es-ES" sz="1500" kern="1200" dirty="0">
+                          <a:solidFill>
+                            <a:srgbClr val="444A54"/>
+                          </a:solidFill>
+                          <a:latin typeface="Aptos Light" panose="020B0004020202020204" pitchFamily="34" charset="0"/>
+                          <a:ea typeface="+mn-ea"/>
+                          <a:cs typeface="+mn-cs"/>
+                        </a:rPr>
+                        <a:t>Tres capas </a:t>
+                      </a:r>
+                      <a:r>
+                        <a:rPr lang="es-ES" sz="1500" kern="1200" dirty="0" err="1">
+                          <a:solidFill>
+                            <a:srgbClr val="444A54"/>
+                          </a:solidFill>
+                          <a:latin typeface="Aptos Light" panose="020B0004020202020204" pitchFamily="34" charset="0"/>
+                          <a:ea typeface="+mn-ea"/>
+                          <a:cs typeface="+mn-cs"/>
+                        </a:rPr>
+                        <a:t>Terraform</a:t>
+                      </a:r>
+                      <a:endParaRPr sz="1500" kern="1200" dirty="0">
+                        <a:solidFill>
+                          <a:srgbClr val="444A54"/>
+                        </a:solidFill>
+                        <a:latin typeface="Aptos Light" panose="020B0004020202020204" pitchFamily="34" charset="0"/>
+                        <a:ea typeface="+mn-ea"/>
+                        <a:cs typeface="+mn-cs"/>
+                      </a:endParaRPr>
+                    </a:p>
+                  </a:txBody>
+                  <a:tcPr>
+                    <a:lnR w="12700" cap="flat" cmpd="sng" algn="ctr">
+                      <a:solidFill>
+                        <a:schemeClr val="tx1"/>
+                      </a:solidFill>
+                      <a:prstDash val="solid"/>
+                      <a:round/>
+                      <a:headEnd type="none" w="med" len="med"/>
+                      <a:tailEnd type="none" w="med" len="med"/>
+                    </a:lnR>
+                    <a:lnT w="12700" cap="flat" cmpd="sng" algn="ctr">
+                      <a:solidFill>
+                        <a:schemeClr val="tx1"/>
+                      </a:solidFill>
+                      <a:prstDash val="solid"/>
+                      <a:round/>
+                      <a:headEnd type="none" w="med" len="med"/>
+                      <a:tailEnd type="none" w="med" len="med"/>
+                    </a:lnT>
+                    <a:lnB w="12700" cap="flat" cmpd="sng" algn="ctr">
+                      <a:solidFill>
+                        <a:schemeClr val="tx1"/>
+                      </a:solidFill>
+                      <a:prstDash val="solid"/>
+                      <a:round/>
+                      <a:headEnd type="none" w="med" len="med"/>
+                      <a:tailEnd type="none" w="med" len="med"/>
+                    </a:lnB>
+                    <a:solidFill>
+                      <a:schemeClr val="bg1"/>
+                    </a:solidFill>
+                  </a:tcPr>
+                </a:tc>
+                <a:tc>
+                  <a:txBody>
+                    <a:bodyPr/>
+                    <a:lstStyle/>
+                    <a:p>
+                      <a:pPr marL="0" algn="just" defTabSz="457200" rtl="0" eaLnBrk="1" latinLnBrk="0" hangingPunct="1"/>
+                      <a:r>
+                        <a:rPr lang="es-ES" sz="1500" kern="1200" dirty="0" err="1">
+                          <a:solidFill>
+                            <a:srgbClr val="444A54"/>
+                          </a:solidFill>
+                          <a:latin typeface="Aptos Light" panose="020B0004020202020204" pitchFamily="34" charset="0"/>
+                          <a:ea typeface="+mn-ea"/>
+                          <a:cs typeface="+mn-cs"/>
+                        </a:rPr>
+                        <a:t>persistent</a:t>
+                      </a:r>
+                      <a:r>
+                        <a:rPr lang="es-ES" sz="1500" kern="1200" dirty="0">
+                          <a:solidFill>
+                            <a:srgbClr val="444A54"/>
+                          </a:solidFill>
+                          <a:latin typeface="Aptos Light" panose="020B0004020202020204" pitchFamily="34" charset="0"/>
+                          <a:ea typeface="+mn-ea"/>
+                          <a:cs typeface="+mn-cs"/>
+                        </a:rPr>
+                        <a:t> (datos, IP) · </a:t>
+                      </a:r>
+                      <a:r>
+                        <a:rPr lang="es-ES" sz="1500" kern="1200" dirty="0" err="1">
+                          <a:solidFill>
+                            <a:srgbClr val="444A54"/>
+                          </a:solidFill>
+                          <a:latin typeface="Aptos Light" panose="020B0004020202020204" pitchFamily="34" charset="0"/>
+                          <a:ea typeface="+mn-ea"/>
+                          <a:cs typeface="+mn-cs"/>
+                        </a:rPr>
+                        <a:t>edge</a:t>
+                      </a:r>
+                      <a:r>
+                        <a:rPr lang="es-ES" sz="1500" kern="1200" dirty="0">
+                          <a:solidFill>
+                            <a:srgbClr val="444A54"/>
+                          </a:solidFill>
+                          <a:latin typeface="Aptos Light" panose="020B0004020202020204" pitchFamily="34" charset="0"/>
+                          <a:ea typeface="+mn-ea"/>
+                          <a:cs typeface="+mn-cs"/>
+                        </a:rPr>
+                        <a:t> (siempre activa) · </a:t>
+                      </a:r>
+                      <a:r>
+                        <a:rPr lang="es-ES" sz="1500" kern="1200" dirty="0" err="1">
+                          <a:solidFill>
+                            <a:srgbClr val="444A54"/>
+                          </a:solidFill>
+                          <a:latin typeface="Aptos Light" panose="020B0004020202020204" pitchFamily="34" charset="0"/>
+                          <a:ea typeface="+mn-ea"/>
+                          <a:cs typeface="+mn-cs"/>
+                        </a:rPr>
+                        <a:t>stack</a:t>
+                      </a:r>
+                      <a:r>
+                        <a:rPr lang="es-ES" sz="1500" kern="1200" dirty="0">
+                          <a:solidFill>
+                            <a:srgbClr val="444A54"/>
+                          </a:solidFill>
+                          <a:latin typeface="Aptos Light" panose="020B0004020202020204" pitchFamily="34" charset="0"/>
+                          <a:ea typeface="+mn-ea"/>
+                          <a:cs typeface="+mn-cs"/>
+                        </a:rPr>
+                        <a:t> (efímera). Destruir la aplicación sin perder los datos.</a:t>
+                      </a:r>
+                      <a:endParaRPr sz="1500" kern="1200" dirty="0">
+                        <a:solidFill>
+                          <a:srgbClr val="444A54"/>
+                        </a:solidFill>
+                        <a:latin typeface="Aptos Light" panose="020B0004020202020204" pitchFamily="34" charset="0"/>
+                        <a:ea typeface="+mn-ea"/>
+                        <a:cs typeface="+mn-cs"/>
+                      </a:endParaRPr>
+                    </a:p>
+                  </a:txBody>
+                  <a:tcPr>
+                    <a:lnL w="12700" cap="flat" cmpd="sng" algn="ctr">
+                      <a:solidFill>
+                        <a:schemeClr val="tx1"/>
+                      </a:solidFill>
+                      <a:prstDash val="solid"/>
+                      <a:round/>
+                      <a:headEnd type="none" w="med" len="med"/>
+                      <a:tailEnd type="none" w="med" len="med"/>
+                    </a:lnL>
+                    <a:lnT w="12700" cap="flat" cmpd="sng" algn="ctr">
+                      <a:solidFill>
+                        <a:schemeClr val="tx1"/>
+                      </a:solidFill>
+                      <a:prstDash val="solid"/>
+                      <a:round/>
+                      <a:headEnd type="none" w="med" len="med"/>
+                      <a:tailEnd type="none" w="med" len="med"/>
+                    </a:lnT>
+                    <a:lnB w="12700" cap="flat" cmpd="sng" algn="ctr">
+                      <a:solidFill>
+                        <a:schemeClr val="tx1"/>
+                      </a:solidFill>
+                      <a:prstDash val="solid"/>
+                      <a:round/>
+                      <a:headEnd type="none" w="med" len="med"/>
+                      <a:tailEnd type="none" w="med" len="med"/>
+                    </a:lnB>
+                    <a:solidFill>
+                      <a:schemeClr val="bg1"/>
+                    </a:solidFill>
+                  </a:tcPr>
+                </a:tc>
+                <a:extLst>
+                  <a:ext uri="{0D108BD9-81ED-4DB2-BD59-A6C34878D82A}">
+                    <a16:rowId xmlns:a16="http://schemas.microsoft.com/office/drawing/2014/main" val="10003"/>
+                  </a:ext>
+                </a:extLst>
+              </a:tr>
+            </a:tbl>
+          </a:graphicData>
+        </a:graphic>
+      </p:graphicFrame>
     </p:spTree>
   </p:cSld>
   <p:clrMapOvr>

--- a/doc/memoria_proyecto/Memoria_Proyecto.pptx
+++ b/doc/memoria_proyecto/Memoria_Proyecto.pptx
@@ -5,7 +5,7 @@
     <p:sldMasterId id="2147483648" r:id="rId1"/>
   </p:sldMasterIdLst>
   <p:notesMasterIdLst>
-    <p:notesMasterId r:id="rId16"/>
+    <p:notesMasterId r:id="rId17"/>
   </p:notesMasterIdLst>
   <p:sldIdLst>
     <p:sldId id="256" r:id="rId2"/>
@@ -22,6 +22,7 @@
     <p:sldId id="264" r:id="rId13"/>
     <p:sldId id="265" r:id="rId14"/>
     <p:sldId id="269" r:id="rId15"/>
+    <p:sldId id="270" r:id="rId16"/>
   </p:sldIdLst>
   <p:sldSz cx="12192000" cy="6858000"/>
   <p:notesSz cx="6858000" cy="9144000"/>
@@ -221,7 +222,7 @@
           <a:p>
             <a:fld id="{44C7761D-94E6-4E59-97F6-B29C25850D68}" type="datetimeFigureOut">
               <a:rPr lang="es-ES" smtClean="0"/>
-              <a:t>16/07/2026</a:t>
+              <a:t>18/07/2026</a:t>
             </a:fld>
             <a:endParaRPr lang="es-ES"/>
           </a:p>
@@ -1051,7 +1052,7 @@
           <a:p>
             <a:fld id="{5BCAD085-E8A6-8845-BD4E-CB4CCA059FC4}" type="datetimeFigureOut">
               <a:rPr lang="en-US" smtClean="0"/>
-              <a:t>7/16/2026</a:t>
+              <a:t>7/18/2026</a:t>
             </a:fld>
             <a:endParaRPr lang="en-US"/>
           </a:p>
@@ -1219,7 +1220,7 @@
           <a:p>
             <a:fld id="{5BCAD085-E8A6-8845-BD4E-CB4CCA059FC4}" type="datetimeFigureOut">
               <a:rPr lang="en-US" smtClean="0"/>
-              <a:t>7/16/2026</a:t>
+              <a:t>7/18/2026</a:t>
             </a:fld>
             <a:endParaRPr lang="en-US"/>
           </a:p>
@@ -1397,7 +1398,7 @@
           <a:p>
             <a:fld id="{5BCAD085-E8A6-8845-BD4E-CB4CCA059FC4}" type="datetimeFigureOut">
               <a:rPr lang="en-US" smtClean="0"/>
-              <a:t>7/16/2026</a:t>
+              <a:t>7/18/2026</a:t>
             </a:fld>
             <a:endParaRPr lang="en-US"/>
           </a:p>
@@ -1565,7 +1566,7 @@
           <a:p>
             <a:fld id="{5BCAD085-E8A6-8845-BD4E-CB4CCA059FC4}" type="datetimeFigureOut">
               <a:rPr lang="en-US" smtClean="0"/>
-              <a:t>7/16/2026</a:t>
+              <a:t>7/18/2026</a:t>
             </a:fld>
             <a:endParaRPr lang="en-US"/>
           </a:p>
@@ -1810,7 +1811,7 @@
           <a:p>
             <a:fld id="{5BCAD085-E8A6-8845-BD4E-CB4CCA059FC4}" type="datetimeFigureOut">
               <a:rPr lang="en-US" smtClean="0"/>
-              <a:t>7/16/2026</a:t>
+              <a:t>7/18/2026</a:t>
             </a:fld>
             <a:endParaRPr lang="en-US"/>
           </a:p>
@@ -2095,7 +2096,7 @@
           <a:p>
             <a:fld id="{5BCAD085-E8A6-8845-BD4E-CB4CCA059FC4}" type="datetimeFigureOut">
               <a:rPr lang="en-US" smtClean="0"/>
-              <a:t>7/16/2026</a:t>
+              <a:t>7/18/2026</a:t>
             </a:fld>
             <a:endParaRPr lang="en-US"/>
           </a:p>
@@ -2514,7 +2515,7 @@
           <a:p>
             <a:fld id="{5BCAD085-E8A6-8845-BD4E-CB4CCA059FC4}" type="datetimeFigureOut">
               <a:rPr lang="en-US" smtClean="0"/>
-              <a:t>7/16/2026</a:t>
+              <a:t>7/18/2026</a:t>
             </a:fld>
             <a:endParaRPr lang="en-US"/>
           </a:p>
@@ -2631,7 +2632,7 @@
           <a:p>
             <a:fld id="{5BCAD085-E8A6-8845-BD4E-CB4CCA059FC4}" type="datetimeFigureOut">
               <a:rPr lang="en-US" smtClean="0"/>
-              <a:t>7/16/2026</a:t>
+              <a:t>7/18/2026</a:t>
             </a:fld>
             <a:endParaRPr lang="en-US"/>
           </a:p>
@@ -2726,7 +2727,7 @@
           <a:p>
             <a:fld id="{5BCAD085-E8A6-8845-BD4E-CB4CCA059FC4}" type="datetimeFigureOut">
               <a:rPr lang="en-US" smtClean="0"/>
-              <a:t>7/16/2026</a:t>
+              <a:t>7/18/2026</a:t>
             </a:fld>
             <a:endParaRPr lang="en-US"/>
           </a:p>
@@ -3001,7 +3002,7 @@
           <a:p>
             <a:fld id="{5BCAD085-E8A6-8845-BD4E-CB4CCA059FC4}" type="datetimeFigureOut">
               <a:rPr lang="en-US" smtClean="0"/>
-              <a:t>7/16/2026</a:t>
+              <a:t>7/18/2026</a:t>
             </a:fld>
             <a:endParaRPr lang="en-US"/>
           </a:p>
@@ -3253,7 +3254,7 @@
           <a:p>
             <a:fld id="{5BCAD085-E8A6-8845-BD4E-CB4CCA059FC4}" type="datetimeFigureOut">
               <a:rPr lang="en-US" smtClean="0"/>
-              <a:t>7/16/2026</a:t>
+              <a:t>7/18/2026</a:t>
             </a:fld>
             <a:endParaRPr lang="en-US"/>
           </a:p>
@@ -3464,7 +3465,7 @@
           <a:p>
             <a:fld id="{5BCAD085-E8A6-8845-BD4E-CB4CCA059FC4}" type="datetimeFigureOut">
               <a:rPr lang="en-US" smtClean="0"/>
-              <a:t>7/16/2026</a:t>
+              <a:t>7/18/2026</a:t>
             </a:fld>
             <a:endParaRPr lang="en-US"/>
           </a:p>
@@ -4043,7 +4044,7 @@
                 </a:solidFill>
                 <a:latin typeface="Aptos"/>
               </a:rPr>
-              <a:t>Julio 2026 – Jose A Pelaez Calderon</a:t>
+              <a:t>Julio 2026 – Jose A Pelaez</a:t>
             </a:r>
             <a:endParaRPr sz="1400" b="0" dirty="0">
               <a:solidFill>
@@ -12997,6 +12998,346 @@
     <p:extLst>
       <p:ext uri="{BB962C8B-B14F-4D97-AF65-F5344CB8AC3E}">
         <p14:creationId xmlns:p14="http://schemas.microsoft.com/office/powerpoint/2010/main" val="409472612"/>
+      </p:ext>
+    </p:extLst>
+  </p:cSld>
+  <p:clrMapOvr>
+    <a:masterClrMapping/>
+  </p:clrMapOvr>
+</p:sld>
+</file>
+
+<file path=ppt/slides/slide15.xml><?xml version="1.0" encoding="utf-8"?>
+<p:sld xmlns:a="http://schemas.openxmlformats.org/drawingml/2006/main" xmlns:r="http://schemas.openxmlformats.org/officeDocument/2006/relationships" xmlns:p="http://schemas.openxmlformats.org/presentationml/2006/main">
+  <p:cSld>
+    <p:spTree>
+      <p:nvGrpSpPr>
+        <p:cNvPr id="1" name="">
+          <a:extLst>
+            <a:ext uri="{FF2B5EF4-FFF2-40B4-BE49-F238E27FC236}">
+              <a16:creationId xmlns:a16="http://schemas.microsoft.com/office/drawing/2014/main" id="{D5471D48-6190-D278-E872-1FE8D896AA11}"/>
+            </a:ext>
+          </a:extLst>
+        </p:cNvPr>
+        <p:cNvGrpSpPr/>
+        <p:nvPr/>
+      </p:nvGrpSpPr>
+      <p:grpSpPr>
+        <a:xfrm>
+          <a:off x="0" y="0"/>
+          <a:ext cx="0" cy="0"/>
+          <a:chOff x="0" y="0"/>
+          <a:chExt cx="0" cy="0"/>
+        </a:xfrm>
+      </p:grpSpPr>
+      <p:sp>
+        <p:nvSpPr>
+          <p:cNvPr id="2" name="Rectangle 1">
+            <a:extLst>
+              <a:ext uri="{FF2B5EF4-FFF2-40B4-BE49-F238E27FC236}">
+                <a16:creationId xmlns:a16="http://schemas.microsoft.com/office/drawing/2014/main" id="{763C6703-FA45-555B-9944-F05E230BF63A}"/>
+              </a:ext>
+            </a:extLst>
+          </p:cNvPr>
+          <p:cNvSpPr/>
+          <p:nvPr/>
+        </p:nvSpPr>
+        <p:spPr>
+          <a:xfrm>
+            <a:off x="0" y="5120640"/>
+            <a:ext cx="12191695" cy="1737360"/>
+          </a:xfrm>
+          <a:prstGeom prst="rect">
+            <a:avLst/>
+          </a:prstGeom>
+          <a:solidFill>
+            <a:srgbClr val="0E8A7E"/>
+          </a:solidFill>
+          <a:ln>
+            <a:noFill/>
+          </a:ln>
+          <a:effectLst/>
+        </p:spPr>
+        <p:style>
+          <a:lnRef idx="1">
+            <a:schemeClr val="accent1"/>
+          </a:lnRef>
+          <a:fillRef idx="3">
+            <a:schemeClr val="accent1"/>
+          </a:fillRef>
+          <a:effectRef idx="2">
+            <a:schemeClr val="accent1"/>
+          </a:effectRef>
+          <a:fontRef idx="minor">
+            <a:schemeClr val="lt1"/>
+          </a:fontRef>
+        </p:style>
+        <p:txBody>
+          <a:bodyPr rtlCol="0" anchor="ctr"/>
+          <a:lstStyle/>
+          <a:p>
+            <a:pPr algn="ctr"/>
+            <a:endParaRPr/>
+          </a:p>
+        </p:txBody>
+      </p:sp>
+      <p:sp>
+        <p:nvSpPr>
+          <p:cNvPr id="3" name="TextBox 2">
+            <a:extLst>
+              <a:ext uri="{FF2B5EF4-FFF2-40B4-BE49-F238E27FC236}">
+                <a16:creationId xmlns:a16="http://schemas.microsoft.com/office/drawing/2014/main" id="{31D4CC62-6182-DB91-7BBE-5C28FFFA571D}"/>
+              </a:ext>
+            </a:extLst>
+          </p:cNvPr>
+          <p:cNvSpPr txBox="1"/>
+          <p:nvPr/>
+        </p:nvSpPr>
+        <p:spPr>
+          <a:xfrm>
+            <a:off x="2032328" y="1352639"/>
+            <a:ext cx="10515600" cy="769441"/>
+          </a:xfrm>
+          <a:prstGeom prst="rect">
+            <a:avLst/>
+          </a:prstGeom>
+          <a:noFill/>
+        </p:spPr>
+        <p:txBody>
+          <a:bodyPr wrap="square" anchor="t">
+            <a:spAutoFit/>
+          </a:bodyPr>
+          <a:lstStyle/>
+          <a:p>
+            <a:pPr algn="l">
+              <a:spcAft>
+                <a:spcPts val="600"/>
+              </a:spcAft>
+            </a:pPr>
+            <a:r>
+              <a:rPr lang="es-ES" sz="4400" b="1" dirty="0">
+                <a:latin typeface="Aptos"/>
+              </a:rPr>
+              <a:t>GRACIAS POR LA ATENCION</a:t>
+            </a:r>
+            <a:endParaRPr sz="4400" b="1" dirty="0">
+              <a:latin typeface="Aptos"/>
+            </a:endParaRPr>
+          </a:p>
+        </p:txBody>
+      </p:sp>
+      <p:sp>
+        <p:nvSpPr>
+          <p:cNvPr id="4" name="TextBox 3">
+            <a:extLst>
+              <a:ext uri="{FF2B5EF4-FFF2-40B4-BE49-F238E27FC236}">
+                <a16:creationId xmlns:a16="http://schemas.microsoft.com/office/drawing/2014/main" id="{8F268D50-E4D0-0102-C9B1-A4B3B4DE5AB6}"/>
+              </a:ext>
+            </a:extLst>
+          </p:cNvPr>
+          <p:cNvSpPr txBox="1"/>
+          <p:nvPr/>
+        </p:nvSpPr>
+        <p:spPr>
+          <a:xfrm>
+            <a:off x="361798" y="5389155"/>
+            <a:ext cx="10058400" cy="1200329"/>
+          </a:xfrm>
+          <a:prstGeom prst="rect">
+            <a:avLst/>
+          </a:prstGeom>
+          <a:noFill/>
+        </p:spPr>
+        <p:txBody>
+          <a:bodyPr wrap="square" anchor="t">
+            <a:spAutoFit/>
+          </a:bodyPr>
+          <a:lstStyle/>
+          <a:p>
+            <a:pPr algn="l">
+              <a:spcAft>
+                <a:spcPts val="600"/>
+              </a:spcAft>
+            </a:pPr>
+            <a:r>
+              <a:rPr lang="es-ES" sz="2400" dirty="0">
+                <a:solidFill>
+                  <a:srgbClr val="B9CFE8"/>
+                </a:solidFill>
+                <a:latin typeface="Aptos"/>
+              </a:rPr>
+              <a:t>Master de Desarrollo con IA – Big School</a:t>
+            </a:r>
+          </a:p>
+          <a:p>
+            <a:pPr algn="l">
+              <a:spcAft>
+                <a:spcPts val="600"/>
+              </a:spcAft>
+            </a:pPr>
+            <a:r>
+              <a:rPr lang="es-ES" sz="2400" b="0" dirty="0">
+                <a:solidFill>
+                  <a:srgbClr val="B9CFE8"/>
+                </a:solidFill>
+                <a:latin typeface="Aptos"/>
+              </a:rPr>
+              <a:t>Memoria del Proyecto Final de Master</a:t>
+            </a:r>
+          </a:p>
+          <a:p>
+            <a:pPr algn="l">
+              <a:spcAft>
+                <a:spcPts val="600"/>
+              </a:spcAft>
+            </a:pPr>
+            <a:r>
+              <a:rPr lang="es-ES" sz="1400" dirty="0">
+                <a:solidFill>
+                  <a:srgbClr val="B9CFE8"/>
+                </a:solidFill>
+                <a:latin typeface="Aptos"/>
+              </a:rPr>
+              <a:t>Julio 2026 – Jose A Pelaez</a:t>
+            </a:r>
+            <a:endParaRPr sz="1400" b="0" dirty="0">
+              <a:solidFill>
+                <a:srgbClr val="B9CFE8"/>
+              </a:solidFill>
+              <a:latin typeface="Aptos"/>
+            </a:endParaRPr>
+          </a:p>
+        </p:txBody>
+      </p:sp>
+      <p:sp>
+        <p:nvSpPr>
+          <p:cNvPr id="6" name="TextBox 3">
+            <a:extLst>
+              <a:ext uri="{FF2B5EF4-FFF2-40B4-BE49-F238E27FC236}">
+                <a16:creationId xmlns:a16="http://schemas.microsoft.com/office/drawing/2014/main" id="{755976B6-1A7B-153F-F89E-A847BE37311B}"/>
+              </a:ext>
+            </a:extLst>
+          </p:cNvPr>
+          <p:cNvSpPr txBox="1"/>
+          <p:nvPr/>
+        </p:nvSpPr>
+        <p:spPr>
+          <a:xfrm>
+            <a:off x="361798" y="3058536"/>
+            <a:ext cx="10058400" cy="2062103"/>
+          </a:xfrm>
+          <a:prstGeom prst="rect">
+            <a:avLst/>
+          </a:prstGeom>
+          <a:noFill/>
+        </p:spPr>
+        <p:txBody>
+          <a:bodyPr wrap="square" anchor="t">
+            <a:spAutoFit/>
+          </a:bodyPr>
+          <a:lstStyle/>
+          <a:p>
+            <a:pPr algn="l">
+              <a:spcAft>
+                <a:spcPts val="600"/>
+              </a:spcAft>
+            </a:pPr>
+            <a:r>
+              <a:rPr lang="es-ES" b="0" dirty="0">
+                <a:latin typeface="Aptos"/>
+              </a:rPr>
+              <a:t>Agradecimientos:</a:t>
+            </a:r>
+            <a:br>
+              <a:rPr lang="es-ES" b="0" dirty="0">
+                <a:latin typeface="Aptos"/>
+              </a:rPr>
+            </a:br>
+            <a:endParaRPr lang="es-ES" b="0" dirty="0">
+              <a:latin typeface="Aptos"/>
+            </a:endParaRPr>
+          </a:p>
+          <a:p>
+            <a:pPr algn="l">
+              <a:spcAft>
+                <a:spcPts val="600"/>
+              </a:spcAft>
+            </a:pPr>
+            <a:r>
+              <a:rPr lang="es-ES" dirty="0">
+                <a:latin typeface="Aptos"/>
+              </a:rPr>
+              <a:t>Francisco Pelaez (Paciente)</a:t>
+            </a:r>
+          </a:p>
+          <a:p>
+            <a:pPr>
+              <a:spcAft>
+                <a:spcPts val="600"/>
+              </a:spcAft>
+            </a:pPr>
+            <a:r>
+              <a:rPr lang="es-ES" dirty="0">
+                <a:latin typeface="Aptos"/>
+              </a:rPr>
+              <a:t>Remedios Calderon (Terapeuta)</a:t>
+            </a:r>
+          </a:p>
+          <a:p>
+            <a:pPr>
+              <a:spcAft>
+                <a:spcPts val="600"/>
+              </a:spcAft>
+            </a:pPr>
+            <a:r>
+              <a:rPr lang="es-ES" dirty="0">
+                <a:latin typeface="Aptos"/>
+              </a:rPr>
+              <a:t>Ana </a:t>
+            </a:r>
+            <a:r>
+              <a:rPr lang="es-ES" dirty="0" err="1">
+                <a:latin typeface="Aptos"/>
+              </a:rPr>
+              <a:t>Mª</a:t>
+            </a:r>
+            <a:r>
+              <a:rPr lang="es-ES" dirty="0">
+                <a:latin typeface="Aptos"/>
+              </a:rPr>
+              <a:t> </a:t>
+            </a:r>
+            <a:r>
+              <a:rPr lang="es-ES" dirty="0" err="1">
+                <a:latin typeface="Aptos"/>
+              </a:rPr>
+              <a:t>Lopez</a:t>
+            </a:r>
+            <a:r>
+              <a:rPr lang="es-ES" dirty="0">
+                <a:latin typeface="Aptos"/>
+              </a:rPr>
+              <a:t> (Idea original)</a:t>
+            </a:r>
+          </a:p>
+          <a:p>
+            <a:pPr marL="285750" indent="-285750">
+              <a:spcAft>
+                <a:spcPts val="600"/>
+              </a:spcAft>
+              <a:buFont typeface="Arial" panose="020B0604020202020204" pitchFamily="34" charset="0"/>
+              <a:buChar char="•"/>
+            </a:pPr>
+            <a:endParaRPr lang="es-ES" b="0" dirty="0">
+              <a:latin typeface="Aptos"/>
+            </a:endParaRPr>
+          </a:p>
+        </p:txBody>
+      </p:sp>
+    </p:spTree>
+    <p:extLst>
+      <p:ext uri="{BB962C8B-B14F-4D97-AF65-F5344CB8AC3E}">
+        <p14:creationId xmlns:p14="http://schemas.microsoft.com/office/powerpoint/2010/main" val="3806256655"/>
       </p:ext>
     </p:extLst>
   </p:cSld>

--- a/doc/memoria_proyecto/Memoria_Proyecto.pptx
+++ b/doc/memoria_proyecto/Memoria_Proyecto.pptx
@@ -10552,14 +10552,14 @@
           <p:nvPr>
             <p:extLst>
               <p:ext uri="{D42A27DB-BD31-4B8C-83A1-F6EECF244321}">
-                <p14:modId xmlns:p14="http://schemas.microsoft.com/office/powerpoint/2010/main" val="612535443"/>
+                <p14:modId xmlns:p14="http://schemas.microsoft.com/office/powerpoint/2010/main" val="2820240101"/>
               </p:ext>
             </p:extLst>
           </p:nvPr>
         </p:nvGraphicFramePr>
         <p:xfrm>
           <a:off x="472287" y="2256656"/>
-          <a:ext cx="11247120" cy="2468880"/>
+          <a:ext cx="11247120" cy="2834640"/>
         </p:xfrm>
         <a:graphic>
           <a:graphicData uri="http://schemas.openxmlformats.org/drawingml/2006/table">
@@ -11241,6 +11241,15 @@
                       <a:headEnd type="none" w="med" len="med"/>
                       <a:tailEnd type="none" w="med" len="med"/>
                     </a:lnT>
+                    <a:lnB w="12700" cap="flat" cmpd="sng" algn="ctr">
+                      <a:solidFill>
+                        <a:schemeClr val="tx1"/>
+                      </a:solidFill>
+                      <a:prstDash val="solid"/>
+                      <a:round/>
+                      <a:headEnd type="none" w="med" len="med"/>
+                      <a:tailEnd type="none" w="med" len="med"/>
+                    </a:lnB>
                     <a:solidFill>
                       <a:schemeClr val="bg1"/>
                     </a:solidFill>
@@ -11471,6 +11480,15 @@
                       <a:headEnd type="none" w="med" len="med"/>
                       <a:tailEnd type="none" w="med" len="med"/>
                     </a:lnT>
+                    <a:lnB w="12700" cap="flat" cmpd="sng" algn="ctr">
+                      <a:solidFill>
+                        <a:schemeClr val="tx1"/>
+                      </a:solidFill>
+                      <a:prstDash val="solid"/>
+                      <a:round/>
+                      <a:headEnd type="none" w="med" len="med"/>
+                      <a:tailEnd type="none" w="med" len="med"/>
+                    </a:lnB>
                     <a:solidFill>
                       <a:schemeClr val="bg1"/>
                     </a:solidFill>
@@ -11479,6 +11497,126 @@
                 <a:extLst>
                   <a:ext uri="{0D108BD9-81ED-4DB2-BD59-A6C34878D82A}">
                     <a16:rowId xmlns:a16="http://schemas.microsoft.com/office/drawing/2014/main" val="10004"/>
+                  </a:ext>
+                </a:extLst>
+              </a:tr>
+              <a:tr h="365760">
+                <a:tc>
+                  <a:txBody>
+                    <a:bodyPr/>
+                    <a:lstStyle/>
+                    <a:p>
+                      <a:pPr marL="0" algn="ctr" defTabSz="457200" rtl="0" eaLnBrk="1" latinLnBrk="0" hangingPunct="1"/>
+                      <a:r>
+                        <a:rPr lang="es-ES" sz="1600" b="0" kern="1200" dirty="0">
+                          <a:solidFill>
+                            <a:schemeClr val="tx1"/>
+                          </a:solidFill>
+                          <a:latin typeface="Aptos Light" panose="020B0004020202020204" pitchFamily="34" charset="0"/>
+                          <a:ea typeface="+mn-ea"/>
+                          <a:cs typeface="+mn-cs"/>
+                        </a:rPr>
+                        <a:t>Consentimiento firmado</a:t>
+                      </a:r>
+                      <a:endParaRPr sz="1600" b="0" kern="1200" dirty="0">
+                        <a:solidFill>
+                          <a:schemeClr val="tx1"/>
+                        </a:solidFill>
+                        <a:latin typeface="Aptos Light" panose="020B0004020202020204" pitchFamily="34" charset="0"/>
+                        <a:ea typeface="+mn-ea"/>
+                        <a:cs typeface="+mn-cs"/>
+                      </a:endParaRPr>
+                    </a:p>
+                  </a:txBody>
+                  <a:tcPr>
+                    <a:lnR w="12700" cap="flat" cmpd="sng" algn="ctr">
+                      <a:solidFill>
+                        <a:schemeClr val="tx1"/>
+                      </a:solidFill>
+                      <a:prstDash val="solid"/>
+                      <a:round/>
+                      <a:headEnd type="none" w="med" len="med"/>
+                      <a:tailEnd type="none" w="med" len="med"/>
+                    </a:lnR>
+                    <a:lnT w="12700" cap="flat" cmpd="sng" algn="ctr">
+                      <a:solidFill>
+                        <a:schemeClr val="tx1"/>
+                      </a:solidFill>
+                      <a:prstDash val="solid"/>
+                      <a:round/>
+                      <a:headEnd type="none" w="med" len="med"/>
+                      <a:tailEnd type="none" w="med" len="med"/>
+                    </a:lnT>
+                    <a:solidFill>
+                      <a:schemeClr val="bg1"/>
+                    </a:solidFill>
+                  </a:tcPr>
+                </a:tc>
+                <a:tc>
+                  <a:txBody>
+                    <a:bodyPr/>
+                    <a:lstStyle/>
+                    <a:p>
+                      <a:pPr marL="0" algn="ctr" defTabSz="457200" rtl="0" eaLnBrk="1" latinLnBrk="0" hangingPunct="1"/>
+                      <a:r>
+                        <a:rPr lang="es-ES" sz="1600" b="0" kern="1200" dirty="0">
+                          <a:solidFill>
+                            <a:schemeClr val="tx1"/>
+                          </a:solidFill>
+                          <a:latin typeface="Aptos Light" panose="020B0004020202020204" pitchFamily="34" charset="0"/>
+                          <a:ea typeface="+mn-ea"/>
+                          <a:cs typeface="+mn-cs"/>
+                        </a:rPr>
+                        <a:t>Consentimiento registrado, no firmado con </a:t>
+                      </a:r>
+                      <a:r>
+                        <a:rPr lang="es-ES" sz="1600" b="0" kern="1200">
+                          <a:solidFill>
+                            <a:schemeClr val="tx1"/>
+                          </a:solidFill>
+                          <a:latin typeface="Aptos Light" panose="020B0004020202020204" pitchFamily="34" charset="0"/>
+                          <a:ea typeface="+mn-ea"/>
+                          <a:cs typeface="+mn-cs"/>
+                        </a:rPr>
+                        <a:t>firma digital (CERES,…)</a:t>
+                      </a:r>
+                      <a:endParaRPr sz="1600" b="0" kern="1200" dirty="0">
+                        <a:solidFill>
+                          <a:schemeClr val="tx1"/>
+                        </a:solidFill>
+                        <a:latin typeface="Aptos Light" panose="020B0004020202020204" pitchFamily="34" charset="0"/>
+                        <a:ea typeface="+mn-ea"/>
+                        <a:cs typeface="+mn-cs"/>
+                      </a:endParaRPr>
+                    </a:p>
+                  </a:txBody>
+                  <a:tcPr>
+                    <a:lnL w="12700" cap="flat" cmpd="sng" algn="ctr">
+                      <a:solidFill>
+                        <a:schemeClr val="tx1"/>
+                      </a:solidFill>
+                      <a:prstDash val="solid"/>
+                      <a:round/>
+                      <a:headEnd type="none" w="med" len="med"/>
+                      <a:tailEnd type="none" w="med" len="med"/>
+                    </a:lnL>
+                    <a:lnT w="12700" cap="flat" cmpd="sng" algn="ctr">
+                      <a:solidFill>
+                        <a:schemeClr val="tx1"/>
+                      </a:solidFill>
+                      <a:prstDash val="solid"/>
+                      <a:round/>
+                      <a:headEnd type="none" w="med" len="med"/>
+                      <a:tailEnd type="none" w="med" len="med"/>
+                    </a:lnT>
+                    <a:solidFill>
+                      <a:schemeClr val="bg1"/>
+                    </a:solidFill>
+                  </a:tcPr>
+                </a:tc>
+                <a:extLst>
+                  <a:ext uri="{0D108BD9-81ED-4DB2-BD59-A6C34878D82A}">
+                    <a16:rowId xmlns:a16="http://schemas.microsoft.com/office/drawing/2014/main" val="2851869677"/>
                   </a:ext>
                 </a:extLst>
               </a:tr>
@@ -11494,7 +11632,7 @@
         </p:nvSpPr>
         <p:spPr>
           <a:xfrm>
-            <a:off x="457200" y="5126974"/>
+            <a:off x="457200" y="5333446"/>
             <a:ext cx="11247120" cy="1416564"/>
           </a:xfrm>
           <a:prstGeom prst="roundRect">

--- a/doc/memoria_proyecto/Memoria_Proyecto.pptx
+++ b/doc/memoria_proyecto/Memoria_Proyecto.pptx
@@ -222,7 +222,7 @@
           <a:p>
             <a:fld id="{44C7761D-94E6-4E59-97F6-B29C25850D68}" type="datetimeFigureOut">
               <a:rPr lang="es-ES" smtClean="0"/>
-              <a:t>18/07/2026</a:t>
+              <a:t>19/07/2026</a:t>
             </a:fld>
             <a:endParaRPr lang="es-ES"/>
           </a:p>
@@ -1052,7 +1052,7 @@
           <a:p>
             <a:fld id="{5BCAD085-E8A6-8845-BD4E-CB4CCA059FC4}" type="datetimeFigureOut">
               <a:rPr lang="en-US" smtClean="0"/>
-              <a:t>7/18/2026</a:t>
+              <a:t>7/19/2026</a:t>
             </a:fld>
             <a:endParaRPr lang="en-US"/>
           </a:p>
@@ -1220,7 +1220,7 @@
           <a:p>
             <a:fld id="{5BCAD085-E8A6-8845-BD4E-CB4CCA059FC4}" type="datetimeFigureOut">
               <a:rPr lang="en-US" smtClean="0"/>
-              <a:t>7/18/2026</a:t>
+              <a:t>7/19/2026</a:t>
             </a:fld>
             <a:endParaRPr lang="en-US"/>
           </a:p>
@@ -1398,7 +1398,7 @@
           <a:p>
             <a:fld id="{5BCAD085-E8A6-8845-BD4E-CB4CCA059FC4}" type="datetimeFigureOut">
               <a:rPr lang="en-US" smtClean="0"/>
-              <a:t>7/18/2026</a:t>
+              <a:t>7/19/2026</a:t>
             </a:fld>
             <a:endParaRPr lang="en-US"/>
           </a:p>
@@ -1566,7 +1566,7 @@
           <a:p>
             <a:fld id="{5BCAD085-E8A6-8845-BD4E-CB4CCA059FC4}" type="datetimeFigureOut">
               <a:rPr lang="en-US" smtClean="0"/>
-              <a:t>7/18/2026</a:t>
+              <a:t>7/19/2026</a:t>
             </a:fld>
             <a:endParaRPr lang="en-US"/>
           </a:p>
@@ -1811,7 +1811,7 @@
           <a:p>
             <a:fld id="{5BCAD085-E8A6-8845-BD4E-CB4CCA059FC4}" type="datetimeFigureOut">
               <a:rPr lang="en-US" smtClean="0"/>
-              <a:t>7/18/2026</a:t>
+              <a:t>7/19/2026</a:t>
             </a:fld>
             <a:endParaRPr lang="en-US"/>
           </a:p>
@@ -2096,7 +2096,7 @@
           <a:p>
             <a:fld id="{5BCAD085-E8A6-8845-BD4E-CB4CCA059FC4}" type="datetimeFigureOut">
               <a:rPr lang="en-US" smtClean="0"/>
-              <a:t>7/18/2026</a:t>
+              <a:t>7/19/2026</a:t>
             </a:fld>
             <a:endParaRPr lang="en-US"/>
           </a:p>
@@ -2515,7 +2515,7 @@
           <a:p>
             <a:fld id="{5BCAD085-E8A6-8845-BD4E-CB4CCA059FC4}" type="datetimeFigureOut">
               <a:rPr lang="en-US" smtClean="0"/>
-              <a:t>7/18/2026</a:t>
+              <a:t>7/19/2026</a:t>
             </a:fld>
             <a:endParaRPr lang="en-US"/>
           </a:p>
@@ -2632,7 +2632,7 @@
           <a:p>
             <a:fld id="{5BCAD085-E8A6-8845-BD4E-CB4CCA059FC4}" type="datetimeFigureOut">
               <a:rPr lang="en-US" smtClean="0"/>
-              <a:t>7/18/2026</a:t>
+              <a:t>7/19/2026</a:t>
             </a:fld>
             <a:endParaRPr lang="en-US"/>
           </a:p>
@@ -2727,7 +2727,7 @@
           <a:p>
             <a:fld id="{5BCAD085-E8A6-8845-BD4E-CB4CCA059FC4}" type="datetimeFigureOut">
               <a:rPr lang="en-US" smtClean="0"/>
-              <a:t>7/18/2026</a:t>
+              <a:t>7/19/2026</a:t>
             </a:fld>
             <a:endParaRPr lang="en-US"/>
           </a:p>
@@ -3002,7 +3002,7 @@
           <a:p>
             <a:fld id="{5BCAD085-E8A6-8845-BD4E-CB4CCA059FC4}" type="datetimeFigureOut">
               <a:rPr lang="en-US" smtClean="0"/>
-              <a:t>7/18/2026</a:t>
+              <a:t>7/19/2026</a:t>
             </a:fld>
             <a:endParaRPr lang="en-US"/>
           </a:p>
@@ -3254,7 +3254,7 @@
           <a:p>
             <a:fld id="{5BCAD085-E8A6-8845-BD4E-CB4CCA059FC4}" type="datetimeFigureOut">
               <a:rPr lang="en-US" smtClean="0"/>
-              <a:t>7/18/2026</a:t>
+              <a:t>7/19/2026</a:t>
             </a:fld>
             <a:endParaRPr lang="en-US"/>
           </a:p>
@@ -3465,7 +3465,7 @@
           <a:p>
             <a:fld id="{5BCAD085-E8A6-8845-BD4E-CB4CCA059FC4}" type="datetimeFigureOut">
               <a:rPr lang="en-US" smtClean="0"/>
-              <a:t>7/18/2026</a:t>
+              <a:t>7/19/2026</a:t>
             </a:fld>
             <a:endParaRPr lang="en-US"/>
           </a:p>
@@ -4894,7 +4894,7 @@
                 </a:solidFill>
                 <a:latin typeface="Aptos Light"/>
               </a:rPr>
-              <a:t>Auditoria: se han realizado 2 auditorias de código cubriendo OWASP-10 y aspectos de arquitectura</a:t>
+              <a:t>Auditoria: se han realizado 2 auditorias de código (+1 de infraestructura) cubriendo OWASP-10 y aspectos de arquitectura</a:t>
             </a:r>
             <a:endParaRPr sz="1600" dirty="0">
               <a:solidFill>

--- a/doc/memoria_proyecto/Memoria_Proyecto.pptx
+++ b/doc/memoria_proyecto/Memoria_Proyecto.pptx
@@ -13662,7 +13662,7 @@
         <p:spPr>
           <a:xfrm>
             <a:off x="548640" y="1371600"/>
-            <a:ext cx="11064240" cy="2200602"/>
+            <a:ext cx="11064240" cy="2523768"/>
           </a:xfrm>
           <a:prstGeom prst="rect">
             <a:avLst/>
@@ -13674,6 +13674,28 @@
             <a:spAutoFit/>
           </a:bodyPr>
           <a:lstStyle/>
+          <a:p>
+            <a:pPr algn="ctr">
+              <a:spcAft>
+                <a:spcPts val="600"/>
+              </a:spcAft>
+            </a:pPr>
+            <a:r>
+              <a:rPr lang="es-ES" sz="1600">
+                <a:solidFill>
+                  <a:srgbClr val="444A54"/>
+                </a:solidFill>
+                <a:latin typeface="Aptos Light"/>
+              </a:rPr>
+              <a:t>https://ftm-followup-checkup.duckdns.org/</a:t>
+            </a:r>
+            <a:endParaRPr lang="es-ES" sz="1600" dirty="0">
+              <a:solidFill>
+                <a:srgbClr val="444A54"/>
+              </a:solidFill>
+              <a:latin typeface="Aptos Light"/>
+            </a:endParaRPr>
+          </a:p>
           <a:p>
             <a:pPr algn="just">
               <a:spcAft>
